--- a/documentation/mytunes presentation.pptx
+++ b/documentation/mytunes presentation.pptx
@@ -2,10 +2,15 @@
 <file path=ppt/presentation.xml><?xml version="1.0" encoding="utf-8"?>
 <p:presentation xmlns:a="http://schemas.openxmlformats.org/drawingml/2006/main" xmlns:r="http://schemas.openxmlformats.org/officeDocument/2006/relationships" xmlns:p="http://schemas.openxmlformats.org/presentationml/2006/main" saveSubsetFonts="1">
   <p:sldMasterIdLst>
-    <p:sldMasterId id="2147483709" r:id="rId1"/>
+    <p:sldMasterId id="2147483773" r:id="rId1"/>
   </p:sldMasterIdLst>
   <p:sldIdLst>
     <p:sldId id="256" r:id="rId2"/>
+    <p:sldId id="257" r:id="rId3"/>
+    <p:sldId id="258" r:id="rId4"/>
+    <p:sldId id="549" r:id="rId5"/>
+    <p:sldId id="259" r:id="rId6"/>
+    <p:sldId id="550" r:id="rId7"/>
   </p:sldIdLst>
   <p:sldSz cx="12192000" cy="6858000"/>
   <p:notesSz cx="6858000" cy="9144000"/>
@@ -104,6 +109,11 @@
       </a:defRPr>
     </a:lvl9pPr>
   </p:defaultTextStyle>
+  <p:extLst>
+    <p:ext uri="{EFAFB233-063F-42B5-8137-9DF3F51BA10A}">
+      <p15:sldGuideLst xmlns:p15="http://schemas.microsoft.com/office/powerpoint/2012/main"/>
+    </p:ext>
+  </p:extLst>
 </p:presentation>
 </file>
 
@@ -129,7 +139,7 @@
           <p:cNvPr id="2" name="Title 1">
             <a:extLst>
               <a:ext uri="{FF2B5EF4-FFF2-40B4-BE49-F238E27FC236}">
-                <a16:creationId xmlns:a16="http://schemas.microsoft.com/office/drawing/2014/main" id="{898DE6C8-AB1D-4204-BC9C-3366B0BF0435}"/>
+                <a16:creationId xmlns:a16="http://schemas.microsoft.com/office/drawing/2014/main" id="{B345610A-17B4-4656-93CF-E1D9982860F7}"/>
               </a:ext>
             </a:extLst>
           </p:cNvPr>
@@ -142,8 +152,8 @@
         </p:nvSpPr>
         <p:spPr>
           <a:xfrm>
-            <a:off x="704088" y="889820"/>
-            <a:ext cx="9989574" cy="3598606"/>
+            <a:off x="640080" y="1371599"/>
+            <a:ext cx="6675120" cy="2951825"/>
           </a:xfrm>
         </p:spPr>
         <p:txBody>
@@ -169,7 +179,7 @@
           <p:cNvPr id="3" name="Subtitle 2">
             <a:extLst>
               <a:ext uri="{FF2B5EF4-FFF2-40B4-BE49-F238E27FC236}">
-                <a16:creationId xmlns:a16="http://schemas.microsoft.com/office/drawing/2014/main" id="{7A7B9009-EE50-4EE5-B6EB-CD6EC83D3FA3}"/>
+                <a16:creationId xmlns:a16="http://schemas.microsoft.com/office/drawing/2014/main" id="{A451C80B-DFD6-415B-BA5B-E56E510CD12B}"/>
               </a:ext>
             </a:extLst>
           </p:cNvPr>
@@ -182,8 +192,8 @@
         </p:nvSpPr>
         <p:spPr>
           <a:xfrm>
-            <a:off x="704088" y="4488426"/>
-            <a:ext cx="6991776" cy="1302774"/>
+            <a:off x="640080" y="4584879"/>
+            <a:ext cx="6675120" cy="1287887"/>
           </a:xfrm>
         </p:spPr>
         <p:txBody>
@@ -192,8 +202,11 @@
           </a:bodyPr>
           <a:lstStyle>
             <a:lvl1pPr marL="0" indent="0" algn="l">
+              <a:lnSpc>
+                <a:spcPct val="130000"/>
+              </a:lnSpc>
               <a:buNone/>
-              <a:defRPr sz="2000"/>
+              <a:defRPr sz="1800" b="1" cap="all" spc="300" baseline="0"/>
             </a:lvl1pPr>
             <a:lvl2pPr marL="457200" indent="0" algn="ctr">
               <a:buNone/>
@@ -242,7 +255,7 @@
           <p:cNvPr id="4" name="Date Placeholder 3">
             <a:extLst>
               <a:ext uri="{FF2B5EF4-FFF2-40B4-BE49-F238E27FC236}">
-                <a16:creationId xmlns:a16="http://schemas.microsoft.com/office/drawing/2014/main" id="{99C8667E-058A-436F-B8EA-5B3A99D43D09}"/>
+                <a16:creationId xmlns:a16="http://schemas.microsoft.com/office/drawing/2014/main" id="{67A2065B-06FF-4991-9F8A-4BE25457B479}"/>
               </a:ext>
             </a:extLst>
           </p:cNvPr>
@@ -258,9 +271,9 @@
           <a:bodyPr/>
           <a:lstStyle/>
           <a:p>
-            <a:fld id="{D1D1EADE-8E88-4C7C-8AC5-FB148DE4940E}" type="datetime1">
+            <a:fld id="{6444479B-705B-4489-957E-7E8A228BDFA0}" type="datetime1">
               <a:rPr lang="en-US" smtClean="0"/>
-              <a:t>11/16/2025</a:t>
+              <a:t>11/22/2025</a:t>
             </a:fld>
             <a:endParaRPr lang="en-US"/>
           </a:p>
@@ -271,7 +284,7 @@
           <p:cNvPr id="5" name="Footer Placeholder 4">
             <a:extLst>
               <a:ext uri="{FF2B5EF4-FFF2-40B4-BE49-F238E27FC236}">
-                <a16:creationId xmlns:a16="http://schemas.microsoft.com/office/drawing/2014/main" id="{52680305-1AD7-482D-BFFD-6CDB83AB39A4}"/>
+                <a16:creationId xmlns:a16="http://schemas.microsoft.com/office/drawing/2014/main" id="{B20DF2FA-C604-45D8-A633-11D3742EC141}"/>
               </a:ext>
             </a:extLst>
           </p:cNvPr>
@@ -296,7 +309,7 @@
           <p:cNvPr id="6" name="Slide Number Placeholder 5">
             <a:extLst>
               <a:ext uri="{FF2B5EF4-FFF2-40B4-BE49-F238E27FC236}">
-                <a16:creationId xmlns:a16="http://schemas.microsoft.com/office/drawing/2014/main" id="{BE5762A1-52E9-402D-B65E-DF193E44CE83}"/>
+                <a16:creationId xmlns:a16="http://schemas.microsoft.com/office/drawing/2014/main" id="{02EE5DA9-2D04-4850-AB9F-BD353816504A}"/>
               </a:ext>
             </a:extLst>
           </p:cNvPr>
@@ -312,7 +325,7 @@
           <a:bodyPr/>
           <a:lstStyle/>
           <a:p>
-            <a:fld id="{87E7843D-FF13-4365-9478-9625B70A2705}" type="slidenum">
+            <a:fld id="{70C12960-6E85-460F-B6E3-5B82CB31AF3D}" type="slidenum">
               <a:rPr lang="en-US" smtClean="0"/>
               <a:t>‹#›</a:t>
             </a:fld>
@@ -323,7 +336,7 @@
     </p:spTree>
     <p:extLst>
       <p:ext uri="{BB962C8B-B14F-4D97-AF65-F5344CB8AC3E}">
-        <p14:creationId xmlns:p14="http://schemas.microsoft.com/office/powerpoint/2010/main" val="1089359236"/>
+        <p14:creationId xmlns:p14="http://schemas.microsoft.com/office/powerpoint/2010/main" val="130156621"/>
       </p:ext>
     </p:extLst>
   </p:cSld>
@@ -355,7 +368,7 @@
           <p:cNvPr id="2" name="Title 1">
             <a:extLst>
               <a:ext uri="{FF2B5EF4-FFF2-40B4-BE49-F238E27FC236}">
-                <a16:creationId xmlns:a16="http://schemas.microsoft.com/office/drawing/2014/main" id="{7D6359C1-C098-4BF4-A55D-782F4E606B8A}"/>
+                <a16:creationId xmlns:a16="http://schemas.microsoft.com/office/drawing/2014/main" id="{495E4BB7-3F30-4C31-9BB2-8EC24FC0A1D6}"/>
               </a:ext>
             </a:extLst>
           </p:cNvPr>
@@ -384,7 +397,7 @@
           <p:cNvPr id="3" name="Vertical Text Placeholder 2">
             <a:extLst>
               <a:ext uri="{FF2B5EF4-FFF2-40B4-BE49-F238E27FC236}">
-                <a16:creationId xmlns:a16="http://schemas.microsoft.com/office/drawing/2014/main" id="{3D343C7E-1E8B-4D38-9B81-1AA2A8978EDE}"/>
+                <a16:creationId xmlns:a16="http://schemas.microsoft.com/office/drawing/2014/main" id="{1ECF4134-70F5-4EE6-88BE-49D129630CDF}"/>
               </a:ext>
             </a:extLst>
           </p:cNvPr>
@@ -442,7 +455,7 @@
           <p:cNvPr id="4" name="Date Placeholder 3">
             <a:extLst>
               <a:ext uri="{FF2B5EF4-FFF2-40B4-BE49-F238E27FC236}">
-                <a16:creationId xmlns:a16="http://schemas.microsoft.com/office/drawing/2014/main" id="{C8A70B00-53AE-4D3F-91BE-A8D789ED9864}"/>
+                <a16:creationId xmlns:a16="http://schemas.microsoft.com/office/drawing/2014/main" id="{C19EABC7-C044-44DE-B303-55A0581DA1E8}"/>
               </a:ext>
             </a:extLst>
           </p:cNvPr>
@@ -458,9 +471,9 @@
           <a:bodyPr/>
           <a:lstStyle/>
           <a:p>
-            <a:fld id="{EC3C8B9C-477D-492A-96AD-1FC2CC997A73}" type="datetime1">
+            <a:fld id="{C07B66AD-7C08-490A-ADA4-B47E10FB2407}" type="datetime1">
               <a:rPr lang="en-US" smtClean="0"/>
-              <a:t>11/16/2025</a:t>
+              <a:t>11/22/2025</a:t>
             </a:fld>
             <a:endParaRPr lang="en-US"/>
           </a:p>
@@ -471,7 +484,7 @@
           <p:cNvPr id="5" name="Footer Placeholder 4">
             <a:extLst>
               <a:ext uri="{FF2B5EF4-FFF2-40B4-BE49-F238E27FC236}">
-                <a16:creationId xmlns:a16="http://schemas.microsoft.com/office/drawing/2014/main" id="{06647FC7-8124-4F70-A849-B6BCC5189CC3}"/>
+                <a16:creationId xmlns:a16="http://schemas.microsoft.com/office/drawing/2014/main" id="{4D4A63E1-5BC5-402E-9916-BAB84BCF0BB2}"/>
               </a:ext>
             </a:extLst>
           </p:cNvPr>
@@ -496,7 +509,7 @@
           <p:cNvPr id="6" name="Slide Number Placeholder 5">
             <a:extLst>
               <a:ext uri="{FF2B5EF4-FFF2-40B4-BE49-F238E27FC236}">
-                <a16:creationId xmlns:a16="http://schemas.microsoft.com/office/drawing/2014/main" id="{B47CEBE4-50DC-47DB-B699-CCC024336C9F}"/>
+                <a16:creationId xmlns:a16="http://schemas.microsoft.com/office/drawing/2014/main" id="{0A2EF915-AF64-4ECC-8B1A-B7E6A89B7917}"/>
               </a:ext>
             </a:extLst>
           </p:cNvPr>
@@ -512,7 +525,7 @@
           <a:bodyPr/>
           <a:lstStyle/>
           <a:p>
-            <a:fld id="{87E7843D-FF13-4365-9478-9625B70A2705}" type="slidenum">
+            <a:fld id="{70C12960-6E85-460F-B6E3-5B82CB31AF3D}" type="slidenum">
               <a:rPr lang="en-US" smtClean="0"/>
               <a:t>‹#›</a:t>
             </a:fld>
@@ -523,7 +536,7 @@
     </p:spTree>
     <p:extLst>
       <p:ext uri="{BB962C8B-B14F-4D97-AF65-F5344CB8AC3E}">
-        <p14:creationId xmlns:p14="http://schemas.microsoft.com/office/powerpoint/2010/main" val="162094708"/>
+        <p14:creationId xmlns:p14="http://schemas.microsoft.com/office/powerpoint/2010/main" val="827583262"/>
       </p:ext>
     </p:extLst>
   </p:cSld>
@@ -550,12 +563,61 @@
           <a:chExt cx="0" cy="0"/>
         </a:xfrm>
       </p:grpSpPr>
+      <p:sp useBgFill="1">
+        <p:nvSpPr>
+          <p:cNvPr id="10" name="Rectangle 9">
+            <a:extLst>
+              <a:ext uri="{FF2B5EF4-FFF2-40B4-BE49-F238E27FC236}">
+                <a16:creationId xmlns:a16="http://schemas.microsoft.com/office/drawing/2014/main" id="{31CB3635-47E1-90D8-B693-DA85A66B3831}"/>
+              </a:ext>
+            </a:extLst>
+          </p:cNvPr>
+          <p:cNvSpPr/>
+          <p:nvPr/>
+        </p:nvSpPr>
+        <p:spPr>
+          <a:xfrm>
+            <a:off x="0" y="0"/>
+            <a:ext cx="12192000" cy="6858000"/>
+          </a:xfrm>
+          <a:prstGeom prst="rect">
+            <a:avLst/>
+          </a:prstGeom>
+          <a:ln>
+            <a:noFill/>
+          </a:ln>
+        </p:spPr>
+        <p:style>
+          <a:lnRef idx="2">
+            <a:schemeClr val="accent1">
+              <a:shade val="15000"/>
+            </a:schemeClr>
+          </a:lnRef>
+          <a:fillRef idx="1">
+            <a:schemeClr val="accent1"/>
+          </a:fillRef>
+          <a:effectRef idx="0">
+            <a:schemeClr val="accent1"/>
+          </a:effectRef>
+          <a:fontRef idx="minor">
+            <a:schemeClr val="lt1"/>
+          </a:fontRef>
+        </p:style>
+        <p:txBody>
+          <a:bodyPr rtlCol="0" anchor="ctr"/>
+          <a:lstStyle/>
+          <a:p>
+            <a:pPr algn="ctr"/>
+            <a:endParaRPr lang="en-US"/>
+          </a:p>
+        </p:txBody>
+      </p:sp>
       <p:sp>
         <p:nvSpPr>
           <p:cNvPr id="2" name="Vertical Title 1">
             <a:extLst>
               <a:ext uri="{FF2B5EF4-FFF2-40B4-BE49-F238E27FC236}">
-                <a16:creationId xmlns:a16="http://schemas.microsoft.com/office/drawing/2014/main" id="{4B418279-D3B8-4C6A-AB74-9DE377771270}"/>
+                <a16:creationId xmlns:a16="http://schemas.microsoft.com/office/drawing/2014/main" id="{6EB09414-2AA1-4D8E-A00A-C092FBC92D91}"/>
               </a:ext>
             </a:extLst>
           </p:cNvPr>
@@ -568,8 +630,8 @@
         </p:nvSpPr>
         <p:spPr>
           <a:xfrm>
-            <a:off x="9242322" y="997974"/>
-            <a:ext cx="2349043" cy="4984956"/>
+            <a:off x="9209219" y="640079"/>
+            <a:ext cx="1811773" cy="5536884"/>
           </a:xfrm>
         </p:spPr>
         <p:txBody>
@@ -589,7 +651,7 @@
           <p:cNvPr id="3" name="Vertical Text Placeholder 2">
             <a:extLst>
               <a:ext uri="{FF2B5EF4-FFF2-40B4-BE49-F238E27FC236}">
-                <a16:creationId xmlns:a16="http://schemas.microsoft.com/office/drawing/2014/main" id="{E28F733C-9309-4197-BACA-207CDC8935C9}"/>
+                <a16:creationId xmlns:a16="http://schemas.microsoft.com/office/drawing/2014/main" id="{D42C3A78-37C5-46D0-9DF4-CB78AF883C2C}"/>
               </a:ext>
             </a:extLst>
           </p:cNvPr>
@@ -602,8 +664,8 @@
         </p:nvSpPr>
         <p:spPr>
           <a:xfrm>
-            <a:off x="768927" y="997973"/>
-            <a:ext cx="8473395" cy="4984956"/>
+            <a:off x="640080" y="640080"/>
+            <a:ext cx="8412422" cy="5536884"/>
           </a:xfrm>
         </p:spPr>
         <p:txBody>
@@ -652,7 +714,7 @@
           <p:cNvPr id="4" name="Date Placeholder 3">
             <a:extLst>
               <a:ext uri="{FF2B5EF4-FFF2-40B4-BE49-F238E27FC236}">
-                <a16:creationId xmlns:a16="http://schemas.microsoft.com/office/drawing/2014/main" id="{56ACD4D0-5BE6-412D-B08B-5DFFD593513E}"/>
+                <a16:creationId xmlns:a16="http://schemas.microsoft.com/office/drawing/2014/main" id="{49D8705E-925D-4F57-8268-107CE3CF4C45}"/>
               </a:ext>
             </a:extLst>
           </p:cNvPr>
@@ -668,9 +730,9 @@
           <a:bodyPr/>
           <a:lstStyle/>
           <a:p>
-            <a:fld id="{42D3AED5-E26D-4E29-B1B3-7847B6779594}" type="datetime1">
+            <a:fld id="{05B95027-4255-49E7-9841-CD21BCC99996}" type="datetime1">
               <a:rPr lang="en-US" smtClean="0"/>
-              <a:t>11/16/2025</a:t>
+              <a:t>11/22/2025</a:t>
             </a:fld>
             <a:endParaRPr lang="en-US"/>
           </a:p>
@@ -681,7 +743,7 @@
           <p:cNvPr id="5" name="Footer Placeholder 4">
             <a:extLst>
               <a:ext uri="{FF2B5EF4-FFF2-40B4-BE49-F238E27FC236}">
-                <a16:creationId xmlns:a16="http://schemas.microsoft.com/office/drawing/2014/main" id="{55021651-B786-4A39-A10F-F5231D0A2C5E}"/>
+                <a16:creationId xmlns:a16="http://schemas.microsoft.com/office/drawing/2014/main" id="{50FE207E-070D-4EC8-A44C-21F1815FDAAC}"/>
               </a:ext>
             </a:extLst>
           </p:cNvPr>
@@ -706,7 +768,7 @@
           <p:cNvPr id="6" name="Slide Number Placeholder 5">
             <a:extLst>
               <a:ext uri="{FF2B5EF4-FFF2-40B4-BE49-F238E27FC236}">
-                <a16:creationId xmlns:a16="http://schemas.microsoft.com/office/drawing/2014/main" id="{74504D2D-9379-40DE-9F45-3004BE54F16B}"/>
+                <a16:creationId xmlns:a16="http://schemas.microsoft.com/office/drawing/2014/main" id="{715D01D1-C266-4161-A820-C084B980131C}"/>
               </a:ext>
             </a:extLst>
           </p:cNvPr>
@@ -722,7 +784,7 @@
           <a:bodyPr/>
           <a:lstStyle/>
           <a:p>
-            <a:fld id="{87E7843D-FF13-4365-9478-9625B70A2705}" type="slidenum">
+            <a:fld id="{70C12960-6E85-460F-B6E3-5B82CB31AF3D}" type="slidenum">
               <a:rPr lang="en-US" smtClean="0"/>
               <a:t>‹#›</a:t>
             </a:fld>
@@ -730,10 +792,52 @@
           </a:p>
         </p:txBody>
       </p:sp>
+      <p:cxnSp>
+        <p:nvCxnSpPr>
+          <p:cNvPr id="7" name="Straight Connector 6">
+            <a:extLst>
+              <a:ext uri="{FF2B5EF4-FFF2-40B4-BE49-F238E27FC236}">
+                <a16:creationId xmlns:a16="http://schemas.microsoft.com/office/drawing/2014/main" id="{3230604F-219C-2DEE-830E-27274CC2FE19}"/>
+              </a:ext>
+              <a:ext uri="{C183D7F6-B498-43B3-948B-1728B52AA6E4}">
+                <adec:decorative xmlns:adec="http://schemas.microsoft.com/office/drawing/2017/decorative" val="1"/>
+              </a:ext>
+            </a:extLst>
+          </p:cNvPr>
+          <p:cNvCxnSpPr>
+            <a:cxnSpLocks/>
+          </p:cNvCxnSpPr>
+          <p:nvPr/>
+        </p:nvCxnSpPr>
+        <p:spPr>
+          <a:xfrm rot="5400000">
+            <a:off x="10872154" y="1192438"/>
+            <a:ext cx="978862" cy="0"/>
+          </a:xfrm>
+          <a:prstGeom prst="line">
+            <a:avLst/>
+          </a:prstGeom>
+          <a:ln w="76200"/>
+        </p:spPr>
+        <p:style>
+          <a:lnRef idx="1">
+            <a:schemeClr val="accent1"/>
+          </a:lnRef>
+          <a:fillRef idx="0">
+            <a:schemeClr val="accent1"/>
+          </a:fillRef>
+          <a:effectRef idx="0">
+            <a:schemeClr val="accent1"/>
+          </a:effectRef>
+          <a:fontRef idx="minor">
+            <a:schemeClr val="tx1"/>
+          </a:fontRef>
+        </p:style>
+      </p:cxnSp>
     </p:spTree>
     <p:extLst>
       <p:ext uri="{BB962C8B-B14F-4D97-AF65-F5344CB8AC3E}">
-        <p14:creationId xmlns:p14="http://schemas.microsoft.com/office/powerpoint/2010/main" val="3459231466"/>
+        <p14:creationId xmlns:p14="http://schemas.microsoft.com/office/powerpoint/2010/main" val="1631258261"/>
       </p:ext>
     </p:extLst>
   </p:cSld>
@@ -765,7 +869,7 @@
           <p:cNvPr id="2" name="Title 1">
             <a:extLst>
               <a:ext uri="{FF2B5EF4-FFF2-40B4-BE49-F238E27FC236}">
-                <a16:creationId xmlns:a16="http://schemas.microsoft.com/office/drawing/2014/main" id="{5A987CA6-BFD9-4CB1-8892-F6B062E82445}"/>
+                <a16:creationId xmlns:a16="http://schemas.microsoft.com/office/drawing/2014/main" id="{1E08B246-6A68-46BE-9DBD-614FA8CF4E26}"/>
               </a:ext>
             </a:extLst>
           </p:cNvPr>
@@ -776,16 +880,20 @@
             <p:ph type="title"/>
           </p:nvPr>
         </p:nvSpPr>
-        <p:spPr/>
+        <p:spPr>
+          <a:xfrm>
+            <a:off x="1959329" y="1300226"/>
+            <a:ext cx="7087135" cy="711454"/>
+          </a:xfrm>
+        </p:spPr>
         <p:txBody>
           <a:bodyPr/>
           <a:lstStyle/>
           <a:p>
             <a:r>
-              <a:rPr lang="en-US"/>
+              <a:rPr lang="en-US" dirty="0"/>
               <a:t>Click to edit Master title style</a:t>
             </a:r>
-            <a:endParaRPr lang="en-US" dirty="0"/>
           </a:p>
         </p:txBody>
       </p:sp>
@@ -794,7 +902,7 @@
           <p:cNvPr id="3" name="Content Placeholder 2">
             <a:extLst>
               <a:ext uri="{FF2B5EF4-FFF2-40B4-BE49-F238E27FC236}">
-                <a16:creationId xmlns:a16="http://schemas.microsoft.com/office/drawing/2014/main" id="{E0CDA8C3-9C0C-4E52-9A62-E4DB159E6B0E}"/>
+                <a16:creationId xmlns:a16="http://schemas.microsoft.com/office/drawing/2014/main" id="{03E47706-8D18-4093-A7C1-F30D7543CEDE}"/>
               </a:ext>
             </a:extLst>
           </p:cNvPr>
@@ -843,7 +951,6 @@
               <a:rPr lang="en-US"/>
               <a:t>Fifth level</a:t>
             </a:r>
-            <a:endParaRPr lang="en-US" dirty="0"/>
           </a:p>
         </p:txBody>
       </p:sp>
@@ -852,7 +959,7 @@
           <p:cNvPr id="4" name="Date Placeholder 3">
             <a:extLst>
               <a:ext uri="{FF2B5EF4-FFF2-40B4-BE49-F238E27FC236}">
-                <a16:creationId xmlns:a16="http://schemas.microsoft.com/office/drawing/2014/main" id="{7CC3EC35-E02F-41FF-9232-F90692A902FC}"/>
+                <a16:creationId xmlns:a16="http://schemas.microsoft.com/office/drawing/2014/main" id="{3EC7C8FC-AAEA-4AB6-9DB5-2503F58F0E69}"/>
               </a:ext>
             </a:extLst>
           </p:cNvPr>
@@ -868,9 +975,9 @@
           <a:bodyPr/>
           <a:lstStyle/>
           <a:p>
-            <a:fld id="{157B6794-849E-4626-908B-D15793550EFB}" type="datetime1">
+            <a:fld id="{9F89F774-3FA6-43B8-9241-99959C8FD463}" type="datetime1">
               <a:rPr lang="en-US" smtClean="0"/>
-              <a:t>11/16/2025</a:t>
+              <a:t>11/22/2025</a:t>
             </a:fld>
             <a:endParaRPr lang="en-US"/>
           </a:p>
@@ -881,7 +988,7 @@
           <p:cNvPr id="5" name="Footer Placeholder 4">
             <a:extLst>
               <a:ext uri="{FF2B5EF4-FFF2-40B4-BE49-F238E27FC236}">
-                <a16:creationId xmlns:a16="http://schemas.microsoft.com/office/drawing/2014/main" id="{39D13D38-5DF1-443B-8A12-71E834FDC6A1}"/>
+                <a16:creationId xmlns:a16="http://schemas.microsoft.com/office/drawing/2014/main" id="{E8B1616B-3F08-4869-A522-773C38940F66}"/>
               </a:ext>
             </a:extLst>
           </p:cNvPr>
@@ -906,7 +1013,7 @@
           <p:cNvPr id="6" name="Slide Number Placeholder 5">
             <a:extLst>
               <a:ext uri="{FF2B5EF4-FFF2-40B4-BE49-F238E27FC236}">
-                <a16:creationId xmlns:a16="http://schemas.microsoft.com/office/drawing/2014/main" id="{F25E644A-4A37-4757-9809-5B035E2874E6}"/>
+                <a16:creationId xmlns:a16="http://schemas.microsoft.com/office/drawing/2014/main" id="{3E030CE6-9124-4B3A-A912-AE16B5C34003}"/>
               </a:ext>
             </a:extLst>
           </p:cNvPr>
@@ -922,7 +1029,7 @@
           <a:bodyPr/>
           <a:lstStyle/>
           <a:p>
-            <a:fld id="{87E7843D-FF13-4365-9478-9625B70A2705}" type="slidenum">
+            <a:fld id="{70C12960-6E85-460F-B6E3-5B82CB31AF3D}" type="slidenum">
               <a:rPr lang="en-US" smtClean="0"/>
               <a:t>‹#›</a:t>
             </a:fld>
@@ -933,7 +1040,7 @@
     </p:spTree>
     <p:extLst>
       <p:ext uri="{BB962C8B-B14F-4D97-AF65-F5344CB8AC3E}">
-        <p14:creationId xmlns:p14="http://schemas.microsoft.com/office/powerpoint/2010/main" val="2521005915"/>
+        <p14:creationId xmlns:p14="http://schemas.microsoft.com/office/powerpoint/2010/main" val="3799979689"/>
       </p:ext>
     </p:extLst>
   </p:cSld>
@@ -960,12 +1067,61 @@
           <a:chExt cx="0" cy="0"/>
         </a:xfrm>
       </p:grpSpPr>
+      <p:sp useBgFill="1">
+        <p:nvSpPr>
+          <p:cNvPr id="8" name="Rectangle 7">
+            <a:extLst>
+              <a:ext uri="{FF2B5EF4-FFF2-40B4-BE49-F238E27FC236}">
+                <a16:creationId xmlns:a16="http://schemas.microsoft.com/office/drawing/2014/main" id="{71BB59B6-79B9-97F5-AC3B-DF65899D39D8}"/>
+              </a:ext>
+            </a:extLst>
+          </p:cNvPr>
+          <p:cNvSpPr/>
+          <p:nvPr/>
+        </p:nvSpPr>
+        <p:spPr>
+          <a:xfrm>
+            <a:off x="0" y="0"/>
+            <a:ext cx="12192000" cy="6858000"/>
+          </a:xfrm>
+          <a:prstGeom prst="rect">
+            <a:avLst/>
+          </a:prstGeom>
+          <a:ln>
+            <a:noFill/>
+          </a:ln>
+        </p:spPr>
+        <p:style>
+          <a:lnRef idx="2">
+            <a:schemeClr val="accent1">
+              <a:shade val="15000"/>
+            </a:schemeClr>
+          </a:lnRef>
+          <a:fillRef idx="1">
+            <a:schemeClr val="accent1"/>
+          </a:fillRef>
+          <a:effectRef idx="0">
+            <a:schemeClr val="accent1"/>
+          </a:effectRef>
+          <a:fontRef idx="minor">
+            <a:schemeClr val="lt1"/>
+          </a:fontRef>
+        </p:style>
+        <p:txBody>
+          <a:bodyPr rtlCol="0" anchor="ctr"/>
+          <a:lstStyle/>
+          <a:p>
+            <a:pPr algn="ctr"/>
+            <a:endParaRPr lang="en-US"/>
+          </a:p>
+        </p:txBody>
+      </p:sp>
       <p:sp>
         <p:nvSpPr>
           <p:cNvPr id="2" name="Title 1">
             <a:extLst>
               <a:ext uri="{FF2B5EF4-FFF2-40B4-BE49-F238E27FC236}">
-                <a16:creationId xmlns:a16="http://schemas.microsoft.com/office/drawing/2014/main" id="{70E6578B-CD85-4BF1-A729-E8E8079B595F}"/>
+                <a16:creationId xmlns:a16="http://schemas.microsoft.com/office/drawing/2014/main" id="{16C78885-57B2-4930-BD7D-CBF916EDF1C6}"/>
               </a:ext>
             </a:extLst>
           </p:cNvPr>
@@ -978,15 +1134,17 @@
         </p:nvSpPr>
         <p:spPr>
           <a:xfrm>
-            <a:off x="715383" y="1709738"/>
-            <a:ext cx="10632067" cy="2852737"/>
+            <a:off x="640080" y="1291366"/>
+            <a:ext cx="9214884" cy="3159974"/>
           </a:xfrm>
         </p:spPr>
         <p:txBody>
-          <a:bodyPr anchor="b"/>
+          <a:bodyPr anchor="b">
+            <a:normAutofit/>
+          </a:bodyPr>
           <a:lstStyle>
             <a:lvl1pPr>
-              <a:defRPr sz="6000"/>
+              <a:defRPr sz="5400"/>
             </a:lvl1pPr>
           </a:lstStyle>
           <a:p>
@@ -1003,7 +1161,7 @@
           <p:cNvPr id="3" name="Text Placeholder 2">
             <a:extLst>
               <a:ext uri="{FF2B5EF4-FFF2-40B4-BE49-F238E27FC236}">
-                <a16:creationId xmlns:a16="http://schemas.microsoft.com/office/drawing/2014/main" id="{A58448C1-C13F-4826-8347-EEB00A6643D6}"/>
+                <a16:creationId xmlns:a16="http://schemas.microsoft.com/office/drawing/2014/main" id="{9BE495E4-2F8B-4CC7-88AC-A312067E60D2}"/>
               </a:ext>
             </a:extLst>
           </p:cNvPr>
@@ -1016,20 +1174,20 @@
         </p:nvSpPr>
         <p:spPr>
           <a:xfrm>
-            <a:off x="715383" y="4589463"/>
-            <a:ext cx="10632067" cy="1500187"/>
+            <a:off x="640080" y="5018567"/>
+            <a:ext cx="7907079" cy="1073889"/>
           </a:xfrm>
         </p:spPr>
         <p:txBody>
-          <a:bodyPr/>
+          <a:bodyPr>
+            <a:normAutofit/>
+          </a:bodyPr>
           <a:lstStyle>
             <a:lvl1pPr marL="0" indent="0">
               <a:buNone/>
-              <a:defRPr sz="2400">
+              <a:defRPr sz="2000">
                 <a:solidFill>
-                  <a:schemeClr val="tx1">
-                    <a:tint val="75000"/>
-                  </a:schemeClr>
+                  <a:schemeClr val="tx1"/>
                 </a:solidFill>
               </a:defRPr>
             </a:lvl1pPr>
@@ -1128,7 +1286,7 @@
           <p:cNvPr id="4" name="Date Placeholder 3">
             <a:extLst>
               <a:ext uri="{FF2B5EF4-FFF2-40B4-BE49-F238E27FC236}">
-                <a16:creationId xmlns:a16="http://schemas.microsoft.com/office/drawing/2014/main" id="{5806546A-957F-4C4D-9744-1177AD258E10}"/>
+                <a16:creationId xmlns:a16="http://schemas.microsoft.com/office/drawing/2014/main" id="{F8585CC9-BAD3-4807-90BB-97DA2D6A6BE2}"/>
               </a:ext>
             </a:extLst>
           </p:cNvPr>
@@ -1144,9 +1302,9 @@
           <a:bodyPr/>
           <a:lstStyle/>
           <a:p>
-            <a:fld id="{63DB64E7-5594-42A3-ADBF-E95A7ACEAD64}" type="datetime1">
+            <a:fld id="{F9504452-5DCC-4FE2-A5C9-8A5EF6714D65}" type="datetime1">
               <a:rPr lang="en-US" smtClean="0"/>
-              <a:t>11/16/2025</a:t>
+              <a:t>11/22/2025</a:t>
             </a:fld>
             <a:endParaRPr lang="en-US"/>
           </a:p>
@@ -1157,7 +1315,7 @@
           <p:cNvPr id="5" name="Footer Placeholder 4">
             <a:extLst>
               <a:ext uri="{FF2B5EF4-FFF2-40B4-BE49-F238E27FC236}">
-                <a16:creationId xmlns:a16="http://schemas.microsoft.com/office/drawing/2014/main" id="{B1DB149C-CC63-4E3A-A83D-EF637EB51979}"/>
+                <a16:creationId xmlns:a16="http://schemas.microsoft.com/office/drawing/2014/main" id="{5F108CEF-165F-4D7E-9666-5CD0156B497C}"/>
               </a:ext>
             </a:extLst>
           </p:cNvPr>
@@ -1182,7 +1340,7 @@
           <p:cNvPr id="6" name="Slide Number Placeholder 5">
             <a:extLst>
               <a:ext uri="{FF2B5EF4-FFF2-40B4-BE49-F238E27FC236}">
-                <a16:creationId xmlns:a16="http://schemas.microsoft.com/office/drawing/2014/main" id="{EDB94775-7982-41EC-B584-D51224D38F77}"/>
+                <a16:creationId xmlns:a16="http://schemas.microsoft.com/office/drawing/2014/main" id="{FE0EBC3D-3277-4D34-9F67-71040C21E3B3}"/>
               </a:ext>
             </a:extLst>
           </p:cNvPr>
@@ -1198,7 +1356,7 @@
           <a:bodyPr/>
           <a:lstStyle/>
           <a:p>
-            <a:fld id="{87E7843D-FF13-4365-9478-9625B70A2705}" type="slidenum">
+            <a:fld id="{70C12960-6E85-460F-B6E3-5B82CB31AF3D}" type="slidenum">
               <a:rPr lang="en-US" smtClean="0"/>
               <a:t>‹#›</a:t>
             </a:fld>
@@ -1206,10 +1364,52 @@
           </a:p>
         </p:txBody>
       </p:sp>
+      <p:cxnSp>
+        <p:nvCxnSpPr>
+          <p:cNvPr id="7" name="Straight Connector 6">
+            <a:extLst>
+              <a:ext uri="{FF2B5EF4-FFF2-40B4-BE49-F238E27FC236}">
+                <a16:creationId xmlns:a16="http://schemas.microsoft.com/office/drawing/2014/main" id="{FF05EAE5-4812-F718-6D75-9627884180BF}"/>
+              </a:ext>
+              <a:ext uri="{C183D7F6-B498-43B3-948B-1728B52AA6E4}">
+                <adec:decorative xmlns:adec="http://schemas.microsoft.com/office/drawing/2017/decorative" val="1"/>
+              </a:ext>
+            </a:extLst>
+          </p:cNvPr>
+          <p:cNvCxnSpPr>
+            <a:cxnSpLocks/>
+          </p:cNvCxnSpPr>
+          <p:nvPr/>
+        </p:nvCxnSpPr>
+        <p:spPr>
+          <a:xfrm>
+            <a:off x="716281" y="4715234"/>
+            <a:ext cx="978862" cy="0"/>
+          </a:xfrm>
+          <a:prstGeom prst="line">
+            <a:avLst/>
+          </a:prstGeom>
+          <a:ln w="76200"/>
+        </p:spPr>
+        <p:style>
+          <a:lnRef idx="1">
+            <a:schemeClr val="accent1"/>
+          </a:lnRef>
+          <a:fillRef idx="0">
+            <a:schemeClr val="accent1"/>
+          </a:fillRef>
+          <a:effectRef idx="0">
+            <a:schemeClr val="accent1"/>
+          </a:effectRef>
+          <a:fontRef idx="minor">
+            <a:schemeClr val="tx1"/>
+          </a:fontRef>
+        </p:style>
+      </p:cxnSp>
     </p:spTree>
     <p:extLst>
       <p:ext uri="{BB962C8B-B14F-4D97-AF65-F5344CB8AC3E}">
-        <p14:creationId xmlns:p14="http://schemas.microsoft.com/office/powerpoint/2010/main" val="3173278454"/>
+        <p14:creationId xmlns:p14="http://schemas.microsoft.com/office/powerpoint/2010/main" val="4163440621"/>
       </p:ext>
     </p:extLst>
   </p:cSld>
@@ -1241,7 +1441,7 @@
           <p:cNvPr id="2" name="Title 1">
             <a:extLst>
               <a:ext uri="{FF2B5EF4-FFF2-40B4-BE49-F238E27FC236}">
-                <a16:creationId xmlns:a16="http://schemas.microsoft.com/office/drawing/2014/main" id="{88CE4BD8-507D-48E4-A624-F16A741C3609}"/>
+                <a16:creationId xmlns:a16="http://schemas.microsoft.com/office/drawing/2014/main" id="{CDB477A4-4D01-45B6-9563-0BF13BA72F7C}"/>
               </a:ext>
             </a:extLst>
           </p:cNvPr>
@@ -1252,12 +1452,7 @@
             <p:ph type="title"/>
           </p:nvPr>
         </p:nvSpPr>
-        <p:spPr>
-          <a:xfrm>
-            <a:off x="700635" y="914400"/>
-            <a:ext cx="10691265" cy="1307592"/>
-          </a:xfrm>
-        </p:spPr>
+        <p:spPr/>
         <p:txBody>
           <a:bodyPr/>
           <a:lstStyle/>
@@ -1275,7 +1470,7 @@
           <p:cNvPr id="3" name="Content Placeholder 2">
             <a:extLst>
               <a:ext uri="{FF2B5EF4-FFF2-40B4-BE49-F238E27FC236}">
-                <a16:creationId xmlns:a16="http://schemas.microsoft.com/office/drawing/2014/main" id="{810A07E4-3A39-457C-A059-7DFB6039D947}"/>
+                <a16:creationId xmlns:a16="http://schemas.microsoft.com/office/drawing/2014/main" id="{2EE17E00-96AC-45F0-82B2-9F601E9B93C2}"/>
               </a:ext>
             </a:extLst>
           </p:cNvPr>
@@ -1288,8 +1483,8 @@
         </p:nvSpPr>
         <p:spPr>
           <a:xfrm>
-            <a:off x="704088" y="2221992"/>
-            <a:ext cx="5212080" cy="3739896"/>
+            <a:off x="640080" y="2633472"/>
+            <a:ext cx="5212080" cy="3566160"/>
           </a:xfrm>
         </p:spPr>
         <p:txBody>
@@ -1338,7 +1533,7 @@
           <p:cNvPr id="4" name="Content Placeholder 3">
             <a:extLst>
               <a:ext uri="{FF2B5EF4-FFF2-40B4-BE49-F238E27FC236}">
-                <a16:creationId xmlns:a16="http://schemas.microsoft.com/office/drawing/2014/main" id="{7B141E17-47CE-4A78-B0FA-0E9786DA67C5}"/>
+                <a16:creationId xmlns:a16="http://schemas.microsoft.com/office/drawing/2014/main" id="{72BA30CD-95C0-427B-A571-A7D8A53278F4}"/>
               </a:ext>
             </a:extLst>
           </p:cNvPr>
@@ -1351,8 +1546,8 @@
         </p:nvSpPr>
         <p:spPr>
           <a:xfrm>
-            <a:off x="6181344" y="2221992"/>
-            <a:ext cx="5212080" cy="3739896"/>
+            <a:off x="6318928" y="2633472"/>
+            <a:ext cx="5212080" cy="3566160"/>
           </a:xfrm>
         </p:spPr>
         <p:txBody>
@@ -1401,7 +1596,7 @@
           <p:cNvPr id="5" name="Date Placeholder 4">
             <a:extLst>
               <a:ext uri="{FF2B5EF4-FFF2-40B4-BE49-F238E27FC236}">
-                <a16:creationId xmlns:a16="http://schemas.microsoft.com/office/drawing/2014/main" id="{89F02C13-D3ED-4044-9716-F29D79A184C9}"/>
+                <a16:creationId xmlns:a16="http://schemas.microsoft.com/office/drawing/2014/main" id="{86F67CAC-53E4-44AF-BEAC-8FFB96F05A86}"/>
               </a:ext>
             </a:extLst>
           </p:cNvPr>
@@ -1417,9 +1612,9 @@
           <a:bodyPr/>
           <a:lstStyle/>
           <a:p>
-            <a:fld id="{18462B0B-D248-4FFB-8695-AD7FA4B1284A}" type="datetime1">
+            <a:fld id="{E579ABC2-0180-4F3A-A895-A85BC724D472}" type="datetime1">
               <a:rPr lang="en-US" smtClean="0"/>
-              <a:t>11/16/2025</a:t>
+              <a:t>11/22/2025</a:t>
             </a:fld>
             <a:endParaRPr lang="en-US"/>
           </a:p>
@@ -1430,7 +1625,7 @@
           <p:cNvPr id="6" name="Footer Placeholder 5">
             <a:extLst>
               <a:ext uri="{FF2B5EF4-FFF2-40B4-BE49-F238E27FC236}">
-                <a16:creationId xmlns:a16="http://schemas.microsoft.com/office/drawing/2014/main" id="{8AF334AD-FB29-4355-B5CF-85E61B4F3409}"/>
+                <a16:creationId xmlns:a16="http://schemas.microsoft.com/office/drawing/2014/main" id="{083D9F3A-E7F0-45E7-AFA8-0D4A669EC16C}"/>
               </a:ext>
             </a:extLst>
           </p:cNvPr>
@@ -1455,7 +1650,7 @@
           <p:cNvPr id="7" name="Slide Number Placeholder 6">
             <a:extLst>
               <a:ext uri="{FF2B5EF4-FFF2-40B4-BE49-F238E27FC236}">
-                <a16:creationId xmlns:a16="http://schemas.microsoft.com/office/drawing/2014/main" id="{BA5AA154-790C-4774-9C21-8C543E733F26}"/>
+                <a16:creationId xmlns:a16="http://schemas.microsoft.com/office/drawing/2014/main" id="{3C5F008B-58BB-45FF-923F-5909DAB49D34}"/>
               </a:ext>
             </a:extLst>
           </p:cNvPr>
@@ -1471,7 +1666,7 @@
           <a:bodyPr/>
           <a:lstStyle/>
           <a:p>
-            <a:fld id="{87E7843D-FF13-4365-9478-9625B70A2705}" type="slidenum">
+            <a:fld id="{70C12960-6E85-460F-B6E3-5B82CB31AF3D}" type="slidenum">
               <a:rPr lang="en-US" smtClean="0"/>
               <a:t>‹#›</a:t>
             </a:fld>
@@ -1482,7 +1677,7 @@
     </p:spTree>
     <p:extLst>
       <p:ext uri="{BB962C8B-B14F-4D97-AF65-F5344CB8AC3E}">
-        <p14:creationId xmlns:p14="http://schemas.microsoft.com/office/powerpoint/2010/main" val="3420090985"/>
+        <p14:creationId xmlns:p14="http://schemas.microsoft.com/office/powerpoint/2010/main" val="1362833644"/>
       </p:ext>
     </p:extLst>
   </p:cSld>
@@ -1514,7 +1709,7 @@
           <p:cNvPr id="2" name="Title 1">
             <a:extLst>
               <a:ext uri="{FF2B5EF4-FFF2-40B4-BE49-F238E27FC236}">
-                <a16:creationId xmlns:a16="http://schemas.microsoft.com/office/drawing/2014/main" id="{9E07DD35-7673-4F88-86B0-634883B5E345}"/>
+                <a16:creationId xmlns:a16="http://schemas.microsoft.com/office/drawing/2014/main" id="{EA97B549-9E51-42E0-992A-73E775957773}"/>
               </a:ext>
             </a:extLst>
           </p:cNvPr>
@@ -1527,8 +1722,8 @@
         </p:nvSpPr>
         <p:spPr>
           <a:xfrm>
-            <a:off x="704087" y="929147"/>
-            <a:ext cx="10689336" cy="798451"/>
+            <a:off x="640079" y="1371599"/>
+            <a:ext cx="10890929" cy="939753"/>
           </a:xfrm>
         </p:spPr>
         <p:txBody>
@@ -1548,7 +1743,7 @@
           <p:cNvPr id="3" name="Text Placeholder 2">
             <a:extLst>
               <a:ext uri="{FF2B5EF4-FFF2-40B4-BE49-F238E27FC236}">
-                <a16:creationId xmlns:a16="http://schemas.microsoft.com/office/drawing/2014/main" id="{5EC820D7-3E0B-47C6-A583-C4C839C5AF03}"/>
+                <a16:creationId xmlns:a16="http://schemas.microsoft.com/office/drawing/2014/main" id="{C81A5FDC-7C4B-45FB-8462-E2CE79919F33}"/>
               </a:ext>
             </a:extLst>
           </p:cNvPr>
@@ -1561,8 +1756,8 @@
         </p:nvSpPr>
         <p:spPr>
           <a:xfrm>
-            <a:off x="704088" y="1756538"/>
-            <a:ext cx="5212080" cy="657225"/>
+            <a:off x="640079" y="2311352"/>
+            <a:ext cx="5212080" cy="695373"/>
           </a:xfrm>
         </p:spPr>
         <p:txBody>
@@ -1572,9 +1767,7 @@
           <a:lstStyle>
             <a:lvl1pPr marL="0" indent="0">
               <a:buNone/>
-              <a:defRPr sz="1600" b="1">
-                <a:latin typeface="+mj-lt"/>
-              </a:defRPr>
+              <a:defRPr sz="1800" b="1" cap="all" spc="300" baseline="0"/>
             </a:lvl1pPr>
             <a:lvl2pPr marL="457200" indent="0">
               <a:buNone/>
@@ -1623,7 +1816,7 @@
           <p:cNvPr id="4" name="Content Placeholder 3">
             <a:extLst>
               <a:ext uri="{FF2B5EF4-FFF2-40B4-BE49-F238E27FC236}">
-                <a16:creationId xmlns:a16="http://schemas.microsoft.com/office/drawing/2014/main" id="{6A839A7B-97D5-400F-B802-A0FF28FE9F15}"/>
+                <a16:creationId xmlns:a16="http://schemas.microsoft.com/office/drawing/2014/main" id="{CBD8B686-2E92-45B9-A3D7-9DCAA0C50B36}"/>
               </a:ext>
             </a:extLst>
           </p:cNvPr>
@@ -1636,8 +1829,8 @@
         </p:nvSpPr>
         <p:spPr>
           <a:xfrm>
-            <a:off x="704088" y="2442702"/>
-            <a:ext cx="5212080" cy="3519185"/>
+            <a:off x="640079" y="3006725"/>
+            <a:ext cx="5212080" cy="3191256"/>
           </a:xfrm>
         </p:spPr>
         <p:txBody>
@@ -1686,7 +1879,7 @@
           <p:cNvPr id="5" name="Text Placeholder 4">
             <a:extLst>
               <a:ext uri="{FF2B5EF4-FFF2-40B4-BE49-F238E27FC236}">
-                <a16:creationId xmlns:a16="http://schemas.microsoft.com/office/drawing/2014/main" id="{C2E0ECA2-DBF1-4681-9DFA-93AFD1B371DB}"/>
+                <a16:creationId xmlns:a16="http://schemas.microsoft.com/office/drawing/2014/main" id="{86ADB526-4A44-47B6-8D14-93202E590AA7}"/>
               </a:ext>
             </a:extLst>
           </p:cNvPr>
@@ -1699,8 +1892,8 @@
         </p:nvSpPr>
         <p:spPr>
           <a:xfrm>
-            <a:off x="6181344" y="1756538"/>
-            <a:ext cx="5212080" cy="657225"/>
+            <a:off x="6318928" y="2311352"/>
+            <a:ext cx="5212080" cy="695373"/>
           </a:xfrm>
         </p:spPr>
         <p:txBody>
@@ -1710,9 +1903,7 @@
           <a:lstStyle>
             <a:lvl1pPr marL="0" indent="0">
               <a:buNone/>
-              <a:defRPr sz="1600" b="1">
-                <a:latin typeface="+mj-lt"/>
-              </a:defRPr>
+              <a:defRPr sz="1800" b="1" cap="all" spc="300" baseline="0"/>
             </a:lvl1pPr>
             <a:lvl2pPr marL="457200" indent="0">
               <a:buNone/>
@@ -1761,7 +1952,7 @@
           <p:cNvPr id="6" name="Content Placeholder 5">
             <a:extLst>
               <a:ext uri="{FF2B5EF4-FFF2-40B4-BE49-F238E27FC236}">
-                <a16:creationId xmlns:a16="http://schemas.microsoft.com/office/drawing/2014/main" id="{390EBBBB-517F-4ED7-9E51-CF0F7590B4D4}"/>
+                <a16:creationId xmlns:a16="http://schemas.microsoft.com/office/drawing/2014/main" id="{574177CA-5C13-4311-BFD3-B98FBD942DA5}"/>
               </a:ext>
             </a:extLst>
           </p:cNvPr>
@@ -1774,8 +1965,8 @@
         </p:nvSpPr>
         <p:spPr>
           <a:xfrm>
-            <a:off x="6181344" y="2442702"/>
-            <a:ext cx="5212080" cy="3519185"/>
+            <a:off x="6318928" y="3006725"/>
+            <a:ext cx="5212080" cy="3191256"/>
           </a:xfrm>
         </p:spPr>
         <p:txBody>
@@ -1815,7 +2006,6 @@
               <a:rPr lang="en-US"/>
               <a:t>Fifth level</a:t>
             </a:r>
-            <a:endParaRPr lang="en-US" dirty="0"/>
           </a:p>
         </p:txBody>
       </p:sp>
@@ -1824,7 +2014,7 @@
           <p:cNvPr id="7" name="Date Placeholder 6">
             <a:extLst>
               <a:ext uri="{FF2B5EF4-FFF2-40B4-BE49-F238E27FC236}">
-                <a16:creationId xmlns:a16="http://schemas.microsoft.com/office/drawing/2014/main" id="{2511B5C7-1E37-478F-B4B0-C7202FFE41B9}"/>
+                <a16:creationId xmlns:a16="http://schemas.microsoft.com/office/drawing/2014/main" id="{4DEA255A-4CB5-40CA-B756-1AA5E27C20BF}"/>
               </a:ext>
             </a:extLst>
           </p:cNvPr>
@@ -1840,9 +2030,9 @@
           <a:bodyPr/>
           <a:lstStyle/>
           <a:p>
-            <a:fld id="{D0378EFB-9159-4510-B73F-4F0409ADE937}" type="datetime1">
+            <a:fld id="{6AEEA9BA-4E8F-439E-BEA4-91FBA01E3F5F}" type="datetime1">
               <a:rPr lang="en-US" smtClean="0"/>
-              <a:t>11/16/2025</a:t>
+              <a:t>11/22/2025</a:t>
             </a:fld>
             <a:endParaRPr lang="en-US"/>
           </a:p>
@@ -1853,7 +2043,7 @@
           <p:cNvPr id="8" name="Footer Placeholder 7">
             <a:extLst>
               <a:ext uri="{FF2B5EF4-FFF2-40B4-BE49-F238E27FC236}">
-                <a16:creationId xmlns:a16="http://schemas.microsoft.com/office/drawing/2014/main" id="{9153F7EF-507C-4CB3-86C5-8B34FFFC1D86}"/>
+                <a16:creationId xmlns:a16="http://schemas.microsoft.com/office/drawing/2014/main" id="{FF3072C4-10F1-49B8-B0BF-69204EDDCFAE}"/>
               </a:ext>
             </a:extLst>
           </p:cNvPr>
@@ -1878,7 +2068,7 @@
           <p:cNvPr id="9" name="Slide Number Placeholder 8">
             <a:extLst>
               <a:ext uri="{FF2B5EF4-FFF2-40B4-BE49-F238E27FC236}">
-                <a16:creationId xmlns:a16="http://schemas.microsoft.com/office/drawing/2014/main" id="{58E3DEA6-E4EB-4C2A-8B4F-55EC965B6219}"/>
+                <a16:creationId xmlns:a16="http://schemas.microsoft.com/office/drawing/2014/main" id="{4A5ACC97-44C1-4887-909B-E6732D3C1FFE}"/>
               </a:ext>
             </a:extLst>
           </p:cNvPr>
@@ -1894,7 +2084,7 @@
           <a:bodyPr/>
           <a:lstStyle/>
           <a:p>
-            <a:fld id="{87E7843D-FF13-4365-9478-9625B70A2705}" type="slidenum">
+            <a:fld id="{70C12960-6E85-460F-B6E3-5B82CB31AF3D}" type="slidenum">
               <a:rPr lang="en-US" smtClean="0"/>
               <a:t>‹#›</a:t>
             </a:fld>
@@ -1905,7 +2095,7 @@
     </p:spTree>
     <p:extLst>
       <p:ext uri="{BB962C8B-B14F-4D97-AF65-F5344CB8AC3E}">
-        <p14:creationId xmlns:p14="http://schemas.microsoft.com/office/powerpoint/2010/main" val="3775863859"/>
+        <p14:creationId xmlns:p14="http://schemas.microsoft.com/office/powerpoint/2010/main" val="100563696"/>
       </p:ext>
     </p:extLst>
   </p:cSld>
@@ -1937,7 +2127,7 @@
           <p:cNvPr id="2" name="Title 1">
             <a:extLst>
               <a:ext uri="{FF2B5EF4-FFF2-40B4-BE49-F238E27FC236}">
-                <a16:creationId xmlns:a16="http://schemas.microsoft.com/office/drawing/2014/main" id="{38032964-A933-4B98-A141-A4B316DAFA9F}"/>
+                <a16:creationId xmlns:a16="http://schemas.microsoft.com/office/drawing/2014/main" id="{AE27D313-943A-47E0-8A7A-DFFBCC297AB7}"/>
               </a:ext>
             </a:extLst>
           </p:cNvPr>
@@ -1966,7 +2156,7 @@
           <p:cNvPr id="3" name="Date Placeholder 2">
             <a:extLst>
               <a:ext uri="{FF2B5EF4-FFF2-40B4-BE49-F238E27FC236}">
-                <a16:creationId xmlns:a16="http://schemas.microsoft.com/office/drawing/2014/main" id="{5D684C9D-23DA-42B0-9DD3-7592F72E8DC9}"/>
+                <a16:creationId xmlns:a16="http://schemas.microsoft.com/office/drawing/2014/main" id="{23AC25A7-81C8-4AA1-AD9F-C78A451FDE2E}"/>
               </a:ext>
             </a:extLst>
           </p:cNvPr>
@@ -1982,9 +2172,9 @@
           <a:bodyPr/>
           <a:lstStyle/>
           <a:p>
-            <a:fld id="{89BC9412-2452-4BED-A324-9D8C115361AD}" type="datetime1">
+            <a:fld id="{BE15BF18-0007-481C-AA29-413124BC3EE7}" type="datetime1">
               <a:rPr lang="en-US" smtClean="0"/>
-              <a:t>11/16/2025</a:t>
+              <a:t>11/22/2025</a:t>
             </a:fld>
             <a:endParaRPr lang="en-US"/>
           </a:p>
@@ -1995,7 +2185,7 @@
           <p:cNvPr id="4" name="Footer Placeholder 3">
             <a:extLst>
               <a:ext uri="{FF2B5EF4-FFF2-40B4-BE49-F238E27FC236}">
-                <a16:creationId xmlns:a16="http://schemas.microsoft.com/office/drawing/2014/main" id="{68BF8F05-876F-49D8-AE30-5BB2A91ECD59}"/>
+                <a16:creationId xmlns:a16="http://schemas.microsoft.com/office/drawing/2014/main" id="{6EF54740-6022-46B2-9C55-B60E9651684F}"/>
               </a:ext>
             </a:extLst>
           </p:cNvPr>
@@ -2020,7 +2210,7 @@
           <p:cNvPr id="5" name="Slide Number Placeholder 4">
             <a:extLst>
               <a:ext uri="{FF2B5EF4-FFF2-40B4-BE49-F238E27FC236}">
-                <a16:creationId xmlns:a16="http://schemas.microsoft.com/office/drawing/2014/main" id="{153D20DA-9260-4577-BB51-789570A243AF}"/>
+                <a16:creationId xmlns:a16="http://schemas.microsoft.com/office/drawing/2014/main" id="{089497C9-6B5E-46D6-8FE9-0A5E0CF7F95B}"/>
               </a:ext>
             </a:extLst>
           </p:cNvPr>
@@ -2036,7 +2226,7 @@
           <a:bodyPr/>
           <a:lstStyle/>
           <a:p>
-            <a:fld id="{87E7843D-FF13-4365-9478-9625B70A2705}" type="slidenum">
+            <a:fld id="{70C12960-6E85-460F-B6E3-5B82CB31AF3D}" type="slidenum">
               <a:rPr lang="en-US" smtClean="0"/>
               <a:t>‹#›</a:t>
             </a:fld>
@@ -2047,7 +2237,7 @@
     </p:spTree>
     <p:extLst>
       <p:ext uri="{BB962C8B-B14F-4D97-AF65-F5344CB8AC3E}">
-        <p14:creationId xmlns:p14="http://schemas.microsoft.com/office/powerpoint/2010/main" val="608276899"/>
+        <p14:creationId xmlns:p14="http://schemas.microsoft.com/office/powerpoint/2010/main" val="1172117842"/>
       </p:ext>
     </p:extLst>
   </p:cSld>
@@ -2074,12 +2264,61 @@
           <a:chExt cx="0" cy="0"/>
         </a:xfrm>
       </p:grpSpPr>
+      <p:sp useBgFill="1">
+        <p:nvSpPr>
+          <p:cNvPr id="5" name="Rectangle 4">
+            <a:extLst>
+              <a:ext uri="{FF2B5EF4-FFF2-40B4-BE49-F238E27FC236}">
+                <a16:creationId xmlns:a16="http://schemas.microsoft.com/office/drawing/2014/main" id="{149F9F0F-FB8C-5565-247C-BDCC156B5CAF}"/>
+              </a:ext>
+            </a:extLst>
+          </p:cNvPr>
+          <p:cNvSpPr/>
+          <p:nvPr/>
+        </p:nvSpPr>
+        <p:spPr>
+          <a:xfrm>
+            <a:off x="0" y="0"/>
+            <a:ext cx="12192000" cy="6858000"/>
+          </a:xfrm>
+          <a:prstGeom prst="rect">
+            <a:avLst/>
+          </a:prstGeom>
+          <a:ln>
+            <a:noFill/>
+          </a:ln>
+        </p:spPr>
+        <p:style>
+          <a:lnRef idx="2">
+            <a:schemeClr val="accent1">
+              <a:shade val="15000"/>
+            </a:schemeClr>
+          </a:lnRef>
+          <a:fillRef idx="1">
+            <a:schemeClr val="accent1"/>
+          </a:fillRef>
+          <a:effectRef idx="0">
+            <a:schemeClr val="accent1"/>
+          </a:effectRef>
+          <a:fontRef idx="minor">
+            <a:schemeClr val="lt1"/>
+          </a:fontRef>
+        </p:style>
+        <p:txBody>
+          <a:bodyPr rtlCol="0" anchor="ctr"/>
+          <a:lstStyle/>
+          <a:p>
+            <a:pPr algn="ctr"/>
+            <a:endParaRPr lang="en-US"/>
+          </a:p>
+        </p:txBody>
+      </p:sp>
       <p:sp>
         <p:nvSpPr>
           <p:cNvPr id="2" name="Date Placeholder 1">
             <a:extLst>
               <a:ext uri="{FF2B5EF4-FFF2-40B4-BE49-F238E27FC236}">
-                <a16:creationId xmlns:a16="http://schemas.microsoft.com/office/drawing/2014/main" id="{AD2C1F24-E0A1-45A7-8EF5-92CD9799341C}"/>
+                <a16:creationId xmlns:a16="http://schemas.microsoft.com/office/drawing/2014/main" id="{92740D3C-270A-401A-810C-2F86BBBB87D4}"/>
               </a:ext>
             </a:extLst>
           </p:cNvPr>
@@ -2095,9 +2334,9 @@
           <a:bodyPr/>
           <a:lstStyle/>
           <a:p>
-            <a:fld id="{F5318F62-D251-40E8-A23C-F4CFE9FEAB41}" type="datetime1">
+            <a:fld id="{09BE9870-3748-43AD-B547-02A075CB4A1D}" type="datetime1">
               <a:rPr lang="en-US" smtClean="0"/>
-              <a:t>11/16/2025</a:t>
+              <a:t>11/22/2025</a:t>
             </a:fld>
             <a:endParaRPr lang="en-US"/>
           </a:p>
@@ -2108,7 +2347,7 @@
           <p:cNvPr id="3" name="Footer Placeholder 2">
             <a:extLst>
               <a:ext uri="{FF2B5EF4-FFF2-40B4-BE49-F238E27FC236}">
-                <a16:creationId xmlns:a16="http://schemas.microsoft.com/office/drawing/2014/main" id="{3E021C19-210E-46B0-9036-5D8AECC9260C}"/>
+                <a16:creationId xmlns:a16="http://schemas.microsoft.com/office/drawing/2014/main" id="{DDCBE9F8-1765-4F36-A4DE-1DB136025AC9}"/>
               </a:ext>
             </a:extLst>
           </p:cNvPr>
@@ -2133,7 +2372,7 @@
           <p:cNvPr id="4" name="Slide Number Placeholder 3">
             <a:extLst>
               <a:ext uri="{FF2B5EF4-FFF2-40B4-BE49-F238E27FC236}">
-                <a16:creationId xmlns:a16="http://schemas.microsoft.com/office/drawing/2014/main" id="{1A880FEF-487E-44DF-8615-DF2210419602}"/>
+                <a16:creationId xmlns:a16="http://schemas.microsoft.com/office/drawing/2014/main" id="{7790CF9E-A6C6-4873-ADBE-7A2939319E58}"/>
               </a:ext>
             </a:extLst>
           </p:cNvPr>
@@ -2149,7 +2388,7 @@
           <a:bodyPr/>
           <a:lstStyle/>
           <a:p>
-            <a:fld id="{87E7843D-FF13-4365-9478-9625B70A2705}" type="slidenum">
+            <a:fld id="{70C12960-6E85-460F-B6E3-5B82CB31AF3D}" type="slidenum">
               <a:rPr lang="en-US" smtClean="0"/>
               <a:t>‹#›</a:t>
             </a:fld>
@@ -2160,7 +2399,7 @@
     </p:spTree>
     <p:extLst>
       <p:ext uri="{BB962C8B-B14F-4D97-AF65-F5344CB8AC3E}">
-        <p14:creationId xmlns:p14="http://schemas.microsoft.com/office/powerpoint/2010/main" val="581005027"/>
+        <p14:creationId xmlns:p14="http://schemas.microsoft.com/office/powerpoint/2010/main" val="3341718550"/>
       </p:ext>
     </p:extLst>
   </p:cSld>
@@ -2192,7 +2431,7 @@
           <p:cNvPr id="2" name="Title 1">
             <a:extLst>
               <a:ext uri="{FF2B5EF4-FFF2-40B4-BE49-F238E27FC236}">
-                <a16:creationId xmlns:a16="http://schemas.microsoft.com/office/drawing/2014/main" id="{11A568EE-74C8-43A6-90BC-2DDD965CF64A}"/>
+                <a16:creationId xmlns:a16="http://schemas.microsoft.com/office/drawing/2014/main" id="{2F08CDF8-00AD-4441-A6D5-9D7A659EB6C0}"/>
               </a:ext>
             </a:extLst>
           </p:cNvPr>
@@ -2205,15 +2444,17 @@
         </p:nvSpPr>
         <p:spPr>
           <a:xfrm>
-            <a:off x="704088" y="1069848"/>
-            <a:ext cx="4093599" cy="1316736"/>
+            <a:off x="640080" y="1371600"/>
+            <a:ext cx="3859397" cy="1451723"/>
           </a:xfrm>
         </p:spPr>
         <p:txBody>
-          <a:bodyPr anchor="b"/>
+          <a:bodyPr anchor="t">
+            <a:normAutofit/>
+          </a:bodyPr>
           <a:lstStyle>
             <a:lvl1pPr>
-              <a:defRPr sz="3200"/>
+              <a:defRPr sz="3600"/>
             </a:lvl1pPr>
           </a:lstStyle>
           <a:p>
@@ -2230,7 +2471,7 @@
           <p:cNvPr id="3" name="Content Placeholder 2">
             <a:extLst>
               <a:ext uri="{FF2B5EF4-FFF2-40B4-BE49-F238E27FC236}">
-                <a16:creationId xmlns:a16="http://schemas.microsoft.com/office/drawing/2014/main" id="{971C35AC-CAE3-48CF-A3E4-A075C9FDD71B}"/>
+                <a16:creationId xmlns:a16="http://schemas.microsoft.com/office/drawing/2014/main" id="{28C330AF-CB7E-420A-AE8A-E02E90325885}"/>
               </a:ext>
             </a:extLst>
           </p:cNvPr>
@@ -2243,27 +2484,29 @@
         </p:nvSpPr>
         <p:spPr>
           <a:xfrm>
-            <a:off x="5183188" y="1069848"/>
-            <a:ext cx="6172200" cy="4791202"/>
+            <a:off x="4936519" y="1031001"/>
+            <a:ext cx="6594490" cy="5166360"/>
           </a:xfrm>
         </p:spPr>
         <p:txBody>
-          <a:bodyPr/>
+          <a:bodyPr>
+            <a:normAutofit/>
+          </a:bodyPr>
           <a:lstStyle>
             <a:lvl1pPr>
-              <a:defRPr sz="3200"/>
+              <a:defRPr sz="2800"/>
             </a:lvl1pPr>
             <a:lvl2pPr>
-              <a:defRPr sz="2800"/>
+              <a:defRPr sz="2400"/>
             </a:lvl2pPr>
             <a:lvl3pPr>
-              <a:defRPr sz="2400"/>
+              <a:defRPr sz="2000"/>
             </a:lvl3pPr>
             <a:lvl4pPr>
-              <a:defRPr sz="2000"/>
+              <a:defRPr sz="1800"/>
             </a:lvl4pPr>
             <a:lvl5pPr>
-              <a:defRPr sz="2000"/>
+              <a:defRPr sz="1800"/>
             </a:lvl5pPr>
             <a:lvl6pPr>
               <a:defRPr sz="2000"/>
@@ -2321,7 +2564,7 @@
           <p:cNvPr id="4" name="Text Placeholder 3">
             <a:extLst>
               <a:ext uri="{FF2B5EF4-FFF2-40B4-BE49-F238E27FC236}">
-                <a16:creationId xmlns:a16="http://schemas.microsoft.com/office/drawing/2014/main" id="{2D9D03EA-5FAD-4609-A2B8-624E426847E3}"/>
+                <a16:creationId xmlns:a16="http://schemas.microsoft.com/office/drawing/2014/main" id="{F43257AD-2422-4CDA-9C55-700F4B5BF251}"/>
               </a:ext>
             </a:extLst>
           </p:cNvPr>
@@ -2334,8 +2577,8 @@
         </p:nvSpPr>
         <p:spPr>
           <a:xfrm>
-            <a:off x="704088" y="2551176"/>
-            <a:ext cx="4093599" cy="3319272"/>
+            <a:off x="640080" y="2972168"/>
+            <a:ext cx="3859397" cy="3226826"/>
           </a:xfrm>
         </p:spPr>
         <p:txBody>
@@ -2392,7 +2635,7 @@
           <p:cNvPr id="5" name="Date Placeholder 4">
             <a:extLst>
               <a:ext uri="{FF2B5EF4-FFF2-40B4-BE49-F238E27FC236}">
-                <a16:creationId xmlns:a16="http://schemas.microsoft.com/office/drawing/2014/main" id="{0B58D2EA-2191-4216-B64D-067BDFE12375}"/>
+                <a16:creationId xmlns:a16="http://schemas.microsoft.com/office/drawing/2014/main" id="{E51B7454-C1CC-46F2-A6FB-1FE786C48F49}"/>
               </a:ext>
             </a:extLst>
           </p:cNvPr>
@@ -2408,9 +2651,9 @@
           <a:bodyPr/>
           <a:lstStyle/>
           <a:p>
-            <a:fld id="{44F76144-149E-4874-93A5-554A0357CF82}" type="datetime1">
+            <a:fld id="{558E7897-33C5-4F1A-9307-D068E37F3DC7}" type="datetime1">
               <a:rPr lang="en-US" smtClean="0"/>
-              <a:t>11/16/2025</a:t>
+              <a:t>11/22/2025</a:t>
             </a:fld>
             <a:endParaRPr lang="en-US"/>
           </a:p>
@@ -2421,7 +2664,7 @@
           <p:cNvPr id="6" name="Footer Placeholder 5">
             <a:extLst>
               <a:ext uri="{FF2B5EF4-FFF2-40B4-BE49-F238E27FC236}">
-                <a16:creationId xmlns:a16="http://schemas.microsoft.com/office/drawing/2014/main" id="{78042128-DAB4-481C-BEE6-3523E8E88BAD}"/>
+                <a16:creationId xmlns:a16="http://schemas.microsoft.com/office/drawing/2014/main" id="{49077DBE-6CC7-421B-AB5E-341E20BD922B}"/>
               </a:ext>
             </a:extLst>
           </p:cNvPr>
@@ -2446,7 +2689,7 @@
           <p:cNvPr id="7" name="Slide Number Placeholder 6">
             <a:extLst>
               <a:ext uri="{FF2B5EF4-FFF2-40B4-BE49-F238E27FC236}">
-                <a16:creationId xmlns:a16="http://schemas.microsoft.com/office/drawing/2014/main" id="{AE50E382-C500-4A4C-A7C6-43860383AB91}"/>
+                <a16:creationId xmlns:a16="http://schemas.microsoft.com/office/drawing/2014/main" id="{FD6EAB8F-7526-4CDB-B782-FAD8B3E70B0A}"/>
               </a:ext>
             </a:extLst>
           </p:cNvPr>
@@ -2462,7 +2705,7 @@
           <a:bodyPr/>
           <a:lstStyle/>
           <a:p>
-            <a:fld id="{87E7843D-FF13-4365-9478-9625B70A2705}" type="slidenum">
+            <a:fld id="{70C12960-6E85-460F-B6E3-5B82CB31AF3D}" type="slidenum">
               <a:rPr lang="en-US" smtClean="0"/>
               <a:t>‹#›</a:t>
             </a:fld>
@@ -2473,7 +2716,7 @@
     </p:spTree>
     <p:extLst>
       <p:ext uri="{BB962C8B-B14F-4D97-AF65-F5344CB8AC3E}">
-        <p14:creationId xmlns:p14="http://schemas.microsoft.com/office/powerpoint/2010/main" val="1645890579"/>
+        <p14:creationId xmlns:p14="http://schemas.microsoft.com/office/powerpoint/2010/main" val="3372951655"/>
       </p:ext>
     </p:extLst>
   </p:cSld>
@@ -2505,7 +2748,7 @@
           <p:cNvPr id="2" name="Title 1">
             <a:extLst>
               <a:ext uri="{FF2B5EF4-FFF2-40B4-BE49-F238E27FC236}">
-                <a16:creationId xmlns:a16="http://schemas.microsoft.com/office/drawing/2014/main" id="{139FE98B-EACF-4251-A8AF-0D9EDD17C664}"/>
+                <a16:creationId xmlns:a16="http://schemas.microsoft.com/office/drawing/2014/main" id="{1231647F-5A61-44C9-81DC-331C9AE5DDAE}"/>
               </a:ext>
             </a:extLst>
           </p:cNvPr>
@@ -2518,15 +2761,17 @@
         </p:nvSpPr>
         <p:spPr>
           <a:xfrm>
-            <a:off x="704088" y="1066800"/>
-            <a:ext cx="4103431" cy="1317523"/>
+            <a:off x="640080" y="1371600"/>
+            <a:ext cx="3859397" cy="1451723"/>
           </a:xfrm>
         </p:spPr>
         <p:txBody>
-          <a:bodyPr anchor="b"/>
+          <a:bodyPr anchor="t">
+            <a:normAutofit/>
+          </a:bodyPr>
           <a:lstStyle>
             <a:lvl1pPr>
-              <a:defRPr sz="3200"/>
+              <a:defRPr sz="3600"/>
             </a:lvl1pPr>
           </a:lstStyle>
           <a:p>
@@ -2543,7 +2788,7 @@
           <p:cNvPr id="3" name="Picture Placeholder 2">
             <a:extLst>
               <a:ext uri="{FF2B5EF4-FFF2-40B4-BE49-F238E27FC236}">
-                <a16:creationId xmlns:a16="http://schemas.microsoft.com/office/drawing/2014/main" id="{3905F473-761A-4002-AF70-9FF878D0139E}"/>
+                <a16:creationId xmlns:a16="http://schemas.microsoft.com/office/drawing/2014/main" id="{31627A0F-F1B8-49BE-A0FF-7FE16E3BDCC1}"/>
               </a:ext>
             </a:extLst>
           </p:cNvPr>
@@ -2556,8 +2801,8 @@
         </p:nvSpPr>
         <p:spPr>
           <a:xfrm>
-            <a:off x="5183188" y="1066800"/>
-            <a:ext cx="6172200" cy="4794250"/>
+            <a:off x="4937760" y="1033271"/>
+            <a:ext cx="6592824" cy="5166360"/>
           </a:xfrm>
         </p:spPr>
         <p:txBody>
@@ -2614,7 +2859,7 @@
           <p:cNvPr id="4" name="Text Placeholder 3">
             <a:extLst>
               <a:ext uri="{FF2B5EF4-FFF2-40B4-BE49-F238E27FC236}">
-                <a16:creationId xmlns:a16="http://schemas.microsoft.com/office/drawing/2014/main" id="{FA0C2E6A-F834-4540-BB00-E13CB45DC362}"/>
+                <a16:creationId xmlns:a16="http://schemas.microsoft.com/office/drawing/2014/main" id="{C86D1BD6-1519-4431-9FAF-7D4F4129972C}"/>
               </a:ext>
             </a:extLst>
           </p:cNvPr>
@@ -2627,8 +2872,8 @@
         </p:nvSpPr>
         <p:spPr>
           <a:xfrm>
-            <a:off x="704088" y="2552700"/>
-            <a:ext cx="4103431" cy="3316288"/>
+            <a:off x="640080" y="2972167"/>
+            <a:ext cx="3859397" cy="3226825"/>
           </a:xfrm>
         </p:spPr>
         <p:txBody>
@@ -2685,7 +2930,7 @@
           <p:cNvPr id="5" name="Date Placeholder 4">
             <a:extLst>
               <a:ext uri="{FF2B5EF4-FFF2-40B4-BE49-F238E27FC236}">
-                <a16:creationId xmlns:a16="http://schemas.microsoft.com/office/drawing/2014/main" id="{F0C38EAB-AD63-415C-B263-BA1D8FBE3CB0}"/>
+                <a16:creationId xmlns:a16="http://schemas.microsoft.com/office/drawing/2014/main" id="{25A587A0-353B-42C2-BA96-B1ADEDF642BE}"/>
               </a:ext>
             </a:extLst>
           </p:cNvPr>
@@ -2701,9 +2946,9 @@
           <a:bodyPr/>
           <a:lstStyle/>
           <a:p>
-            <a:fld id="{50BA65D8-0540-4835-AE5C-25D29DBA01BE}" type="datetime1">
+            <a:fld id="{82E171BA-CC09-47C8-A6DF-F5C5CB59CEEC}" type="datetime1">
               <a:rPr lang="en-US" smtClean="0"/>
-              <a:t>11/16/2025</a:t>
+              <a:t>11/22/2025</a:t>
             </a:fld>
             <a:endParaRPr lang="en-US"/>
           </a:p>
@@ -2714,7 +2959,7 @@
           <p:cNvPr id="6" name="Footer Placeholder 5">
             <a:extLst>
               <a:ext uri="{FF2B5EF4-FFF2-40B4-BE49-F238E27FC236}">
-                <a16:creationId xmlns:a16="http://schemas.microsoft.com/office/drawing/2014/main" id="{422E5541-B6DE-45E8-BCFE-0DFC4F574079}"/>
+                <a16:creationId xmlns:a16="http://schemas.microsoft.com/office/drawing/2014/main" id="{44D5A88E-3957-4B76-B1BE-4164029217B5}"/>
               </a:ext>
             </a:extLst>
           </p:cNvPr>
@@ -2739,7 +2984,7 @@
           <p:cNvPr id="7" name="Slide Number Placeholder 6">
             <a:extLst>
               <a:ext uri="{FF2B5EF4-FFF2-40B4-BE49-F238E27FC236}">
-                <a16:creationId xmlns:a16="http://schemas.microsoft.com/office/drawing/2014/main" id="{DBB78D45-289B-46AF-8CB9-E6150BEA17ED}"/>
+                <a16:creationId xmlns:a16="http://schemas.microsoft.com/office/drawing/2014/main" id="{A5F7C5FD-E56A-4C66-8F23-087F95A2FD0E}"/>
               </a:ext>
             </a:extLst>
           </p:cNvPr>
@@ -2755,7 +3000,7 @@
           <a:bodyPr/>
           <a:lstStyle/>
           <a:p>
-            <a:fld id="{87E7843D-FF13-4365-9478-9625B70A2705}" type="slidenum">
+            <a:fld id="{70C12960-6E85-460F-B6E3-5B82CB31AF3D}" type="slidenum">
               <a:rPr lang="en-US" smtClean="0"/>
               <a:t>‹#›</a:t>
             </a:fld>
@@ -2766,7 +3011,7 @@
     </p:spTree>
     <p:extLst>
       <p:ext uri="{BB962C8B-B14F-4D97-AF65-F5344CB8AC3E}">
-        <p14:creationId xmlns:p14="http://schemas.microsoft.com/office/powerpoint/2010/main" val="2695289858"/>
+        <p14:creationId xmlns:p14="http://schemas.microsoft.com/office/powerpoint/2010/main" val="3717573980"/>
       </p:ext>
     </p:extLst>
   </p:cSld>
@@ -2798,12 +3043,59 @@
           <a:chExt cx="0" cy="0"/>
         </a:xfrm>
       </p:grpSpPr>
+      <p:pic>
+        <p:nvPicPr>
+          <p:cNvPr id="3074" name="Picture 2">
+            <a:extLst>
+              <a:ext uri="{FF2B5EF4-FFF2-40B4-BE49-F238E27FC236}">
+                <a16:creationId xmlns:a16="http://schemas.microsoft.com/office/drawing/2014/main" id="{3AA8B377-B0E9-849D-95CE-02D0328284EF}"/>
+              </a:ext>
+            </a:extLst>
+          </p:cNvPr>
+          <p:cNvPicPr>
+            <a:picLocks noChangeAspect="1" noChangeArrowheads="1"/>
+          </p:cNvPicPr>
+          <p:nvPr userDrawn="1"/>
+        </p:nvPicPr>
+        <p:blipFill>
+          <a:blip r:embed="rId13">
+            <a:extLst>
+              <a:ext uri="{28A0092B-C50C-407E-A947-70E740481C1C}">
+                <a14:useLocalDpi xmlns:a14="http://schemas.microsoft.com/office/drawing/2010/main" val="0"/>
+              </a:ext>
+            </a:extLst>
+          </a:blip>
+          <a:srcRect/>
+          <a:stretch>
+            <a:fillRect/>
+          </a:stretch>
+        </p:blipFill>
+        <p:spPr bwMode="auto">
+          <a:xfrm rot="5400000">
+            <a:off x="1120774" y="-4422774"/>
+            <a:ext cx="9531351" cy="14516105"/>
+          </a:xfrm>
+          <a:prstGeom prst="rect">
+            <a:avLst/>
+          </a:prstGeom>
+          <a:noFill/>
+          <a:extLst>
+            <a:ext uri="{909E8E84-426E-40DD-AFC4-6F175D3DCCD1}">
+              <a14:hiddenFill xmlns:a14="http://schemas.microsoft.com/office/drawing/2010/main">
+                <a:solidFill>
+                  <a:srgbClr val="FFFFFF"/>
+                </a:solidFill>
+              </a14:hiddenFill>
+            </a:ext>
+          </a:extLst>
+        </p:spPr>
+      </p:pic>
       <p:sp>
         <p:nvSpPr>
           <p:cNvPr id="2" name="Title Placeholder 1">
             <a:extLst>
               <a:ext uri="{FF2B5EF4-FFF2-40B4-BE49-F238E27FC236}">
-                <a16:creationId xmlns:a16="http://schemas.microsoft.com/office/drawing/2014/main" id="{47A362AC-B59F-4AC7-B279-57DDD5336BCA}"/>
+                <a16:creationId xmlns:a16="http://schemas.microsoft.com/office/drawing/2014/main" id="{1AB4E786-7636-4278-8595-D365D28A796A}"/>
               </a:ext>
             </a:extLst>
           </p:cNvPr>
@@ -2816,8 +3108,8 @@
         </p:nvSpPr>
         <p:spPr>
           <a:xfrm>
-            <a:off x="700635" y="914400"/>
-            <a:ext cx="10691265" cy="1307592"/>
+            <a:off x="1831313" y="1022671"/>
+            <a:ext cx="7087135" cy="1097280"/>
           </a:xfrm>
           <a:prstGeom prst="rect">
             <a:avLst/>
@@ -2830,10 +3122,9 @@
           <a:lstStyle/>
           <a:p>
             <a:r>
-              <a:rPr lang="en-US"/>
+              <a:rPr lang="en-US" dirty="0"/>
               <a:t>Click to edit Master title style</a:t>
             </a:r>
-            <a:endParaRPr lang="en-US" dirty="0"/>
           </a:p>
         </p:txBody>
       </p:sp>
@@ -2842,7 +3133,7 @@
           <p:cNvPr id="3" name="Text Placeholder 2">
             <a:extLst>
               <a:ext uri="{FF2B5EF4-FFF2-40B4-BE49-F238E27FC236}">
-                <a16:creationId xmlns:a16="http://schemas.microsoft.com/office/drawing/2014/main" id="{0E6042DB-75BD-4EC1-B6D9-8A72EF940CAA}"/>
+                <a16:creationId xmlns:a16="http://schemas.microsoft.com/office/drawing/2014/main" id="{EA740849-7059-4C70-992B-5304D2EE9BAB}"/>
               </a:ext>
             </a:extLst>
           </p:cNvPr>
@@ -2855,8 +3146,8 @@
         </p:nvSpPr>
         <p:spPr>
           <a:xfrm>
-            <a:off x="700635" y="2221992"/>
-            <a:ext cx="10691265" cy="3739896"/>
+            <a:off x="640080" y="2633472"/>
+            <a:ext cx="10890928" cy="3566160"/>
           </a:xfrm>
           <a:prstGeom prst="rect">
             <a:avLst/>
@@ -2910,7 +3201,7 @@
           <p:cNvPr id="4" name="Date Placeholder 3">
             <a:extLst>
               <a:ext uri="{FF2B5EF4-FFF2-40B4-BE49-F238E27FC236}">
-                <a16:creationId xmlns:a16="http://schemas.microsoft.com/office/drawing/2014/main" id="{21DD1378-7C96-4079-B44C-3D86B4657596}"/>
+                <a16:creationId xmlns:a16="http://schemas.microsoft.com/office/drawing/2014/main" id="{D09FEBF6-CEA6-4332-87B3-697807571C84}"/>
               </a:ext>
             </a:extLst>
           </p:cNvPr>
@@ -2923,8 +3214,8 @@
         </p:nvSpPr>
         <p:spPr>
           <a:xfrm>
-            <a:off x="8369448" y="6356350"/>
-            <a:ext cx="2549564" cy="365125"/>
+            <a:off x="640080" y="6356350"/>
+            <a:ext cx="2743200" cy="365125"/>
           </a:xfrm>
           <a:prstGeom prst="rect">
             <a:avLst/>
@@ -2933,19 +3224,18 @@
         <p:txBody>
           <a:bodyPr vert="horz" lIns="91440" tIns="45720" rIns="91440" bIns="45720" rtlCol="0" anchor="ctr"/>
           <a:lstStyle>
-            <a:lvl1pPr algn="r">
-              <a:defRPr sz="1050">
+            <a:lvl1pPr algn="l">
+              <a:defRPr sz="900" b="1" cap="all" spc="300" baseline="0">
                 <a:solidFill>
                   <a:schemeClr val="tx1"/>
                 </a:solidFill>
-                <a:latin typeface="+mj-lt"/>
               </a:defRPr>
             </a:lvl1pPr>
           </a:lstStyle>
           <a:p>
-            <a:fld id="{E31BA835-12AC-4E8F-955A-EA3F4DE2791F}" type="datetime1">
+            <a:fld id="{7DA38F49-B3E2-4BF0-BEC7-C30D34ABBB8D}" type="datetime1">
               <a:rPr lang="en-US" smtClean="0"/>
-              <a:t>11/16/2025</a:t>
+              <a:t>11/22/2025</a:t>
             </a:fld>
             <a:endParaRPr lang="en-US"/>
           </a:p>
@@ -2956,7 +3246,7 @@
           <p:cNvPr id="5" name="Footer Placeholder 4">
             <a:extLst>
               <a:ext uri="{FF2B5EF4-FFF2-40B4-BE49-F238E27FC236}">
-                <a16:creationId xmlns:a16="http://schemas.microsoft.com/office/drawing/2014/main" id="{D19B6B78-577F-43F5-BAEE-BF72484C9850}"/>
+                <a16:creationId xmlns:a16="http://schemas.microsoft.com/office/drawing/2014/main" id="{BC6BAF94-621C-43E1-BA0C-410A6899031B}"/>
               </a:ext>
             </a:extLst>
           </p:cNvPr>
@@ -2969,8 +3259,8 @@
         </p:nvSpPr>
         <p:spPr>
           <a:xfrm>
-            <a:off x="704088" y="6356350"/>
-            <a:ext cx="4539727" cy="365125"/>
+            <a:off x="6767622" y="6356350"/>
+            <a:ext cx="4040373" cy="365125"/>
           </a:xfrm>
           <a:prstGeom prst="rect">
             <a:avLst/>
@@ -2979,12 +3269,11 @@
         <p:txBody>
           <a:bodyPr vert="horz" lIns="91440" tIns="45720" rIns="91440" bIns="45720" rtlCol="0" anchor="ctr"/>
           <a:lstStyle>
-            <a:lvl1pPr algn="l">
-              <a:defRPr sz="1050">
+            <a:lvl1pPr algn="r">
+              <a:defRPr sz="900" b="1" cap="all" spc="300" baseline="0">
                 <a:solidFill>
                   <a:schemeClr val="tx1"/>
                 </a:solidFill>
-                <a:latin typeface="+mj-lt"/>
               </a:defRPr>
             </a:lvl1pPr>
           </a:lstStyle>
@@ -2998,7 +3287,7 @@
           <p:cNvPr id="6" name="Slide Number Placeholder 5">
             <a:extLst>
               <a:ext uri="{FF2B5EF4-FFF2-40B4-BE49-F238E27FC236}">
-                <a16:creationId xmlns:a16="http://schemas.microsoft.com/office/drawing/2014/main" id="{A8CC75B8-AF8F-4D8A-9B3D-D1951A64BADB}"/>
+                <a16:creationId xmlns:a16="http://schemas.microsoft.com/office/drawing/2014/main" id="{137D19E5-9E16-48C9-AAE2-0C70679A8D7B}"/>
               </a:ext>
             </a:extLst>
           </p:cNvPr>
@@ -3011,8 +3300,8 @@
         </p:nvSpPr>
         <p:spPr>
           <a:xfrm>
-            <a:off x="10919012" y="6356350"/>
-            <a:ext cx="672354" cy="365125"/>
+            <a:off x="10807995" y="6356350"/>
+            <a:ext cx="723014" cy="365125"/>
           </a:xfrm>
           <a:prstGeom prst="rect">
             <a:avLst/>
@@ -3022,7 +3311,7 @@
           <a:bodyPr vert="horz" lIns="91440" tIns="45720" rIns="91440" bIns="45720" rtlCol="0" anchor="ctr"/>
           <a:lstStyle>
             <a:lvl1pPr algn="r">
-              <a:defRPr sz="1800">
+              <a:defRPr sz="900" b="1" cap="all" spc="300" baseline="0">
                 <a:solidFill>
                   <a:schemeClr val="tx1"/>
                 </a:solidFill>
@@ -3030,7 +3319,7 @@
             </a:lvl1pPr>
           </a:lstStyle>
           <a:p>
-            <a:fld id="{87E7843D-FF13-4365-9478-9625B70A2705}" type="slidenum">
+            <a:fld id="{70C12960-6E85-460F-B6E3-5B82CB31AF3D}" type="slidenum">
               <a:rPr lang="en-US" smtClean="0"/>
               <a:t>‹#›</a:t>
             </a:fld>
@@ -3040,10 +3329,13 @@
       </p:sp>
       <p:cxnSp>
         <p:nvCxnSpPr>
-          <p:cNvPr id="7" name="Straight Connector 6">
-            <a:extLst>
-              <a:ext uri="{FF2B5EF4-FFF2-40B4-BE49-F238E27FC236}">
-                <a16:creationId xmlns:a16="http://schemas.microsoft.com/office/drawing/2014/main" id="{F64F9B95-9045-48D2-B9F3-2927E98F54AA}"/>
+          <p:cNvPr id="9" name="Straight Connector 8">
+            <a:extLst>
+              <a:ext uri="{FF2B5EF4-FFF2-40B4-BE49-F238E27FC236}">
+                <a16:creationId xmlns:a16="http://schemas.microsoft.com/office/drawing/2014/main" id="{118E06E4-607B-144B-382B-AD3D06B1EE8C}"/>
+              </a:ext>
+              <a:ext uri="{C183D7F6-B498-43B3-948B-1728B52AA6E4}">
+                <adec:decorative xmlns:adec="http://schemas.microsoft.com/office/drawing/2017/decorative" val="1"/>
               </a:ext>
             </a:extLst>
           </p:cNvPr>
@@ -3054,17 +3346,13 @@
         </p:nvCxnSpPr>
         <p:spPr>
           <a:xfrm>
-            <a:off x="800100" y="723900"/>
-            <a:ext cx="10591800" cy="0"/>
+            <a:off x="713232" y="1031001"/>
+            <a:ext cx="978862" cy="0"/>
           </a:xfrm>
           <a:prstGeom prst="line">
             <a:avLst/>
           </a:prstGeom>
-          <a:ln w="44450">
-            <a:solidFill>
-              <a:schemeClr val="tx1"/>
-            </a:solidFill>
-          </a:ln>
+          <a:ln w="76200"/>
         </p:spPr>
         <p:style>
           <a:lnRef idx="1">
@@ -3081,69 +3369,62 @@
           </a:fontRef>
         </p:style>
       </p:cxnSp>
-      <p:cxnSp>
-        <p:nvCxnSpPr>
-          <p:cNvPr id="8" name="Straight Connector 7">
-            <a:extLst>
-              <a:ext uri="{FF2B5EF4-FFF2-40B4-BE49-F238E27FC236}">
-                <a16:creationId xmlns:a16="http://schemas.microsoft.com/office/drawing/2014/main" id="{085AA86F-6A4D-4BCB-A045-D992CDC2959B}"/>
-              </a:ext>
-            </a:extLst>
-          </p:cNvPr>
-          <p:cNvCxnSpPr>
-            <a:cxnSpLocks/>
-          </p:cNvCxnSpPr>
-          <p:nvPr/>
-        </p:nvCxnSpPr>
+      <p:pic>
+        <p:nvPicPr>
+          <p:cNvPr id="8" name="Ábra 7">
+            <a:extLst>
+              <a:ext uri="{FF2B5EF4-FFF2-40B4-BE49-F238E27FC236}">
+                <a16:creationId xmlns:a16="http://schemas.microsoft.com/office/drawing/2014/main" id="{6CC3765A-F44C-887C-A348-AAB31C7F63CE}"/>
+              </a:ext>
+            </a:extLst>
+          </p:cNvPr>
+          <p:cNvPicPr>
+            <a:picLocks noChangeAspect="1"/>
+          </p:cNvPicPr>
+          <p:nvPr userDrawn="1"/>
+        </p:nvPicPr>
+        <p:blipFill>
+          <a:blip r:embed="rId14">
+            <a:extLst>
+              <a:ext uri="{96DAC541-7B7A-43D3-8B79-37D633B846F1}">
+                <asvg:svgBlip xmlns:asvg="http://schemas.microsoft.com/office/drawing/2016/SVG/main" r:embed="rId15"/>
+              </a:ext>
+            </a:extLst>
+          </a:blip>
+          <a:stretch>
+            <a:fillRect/>
+          </a:stretch>
+        </p:blipFill>
         <p:spPr>
           <a:xfrm>
-            <a:off x="800100" y="6142781"/>
-            <a:ext cx="10591800" cy="0"/>
+            <a:off x="574013" y="1022671"/>
+            <a:ext cx="1257300" cy="1257300"/>
           </a:xfrm>
-          <a:prstGeom prst="line">
+          <a:prstGeom prst="rect">
             <a:avLst/>
           </a:prstGeom>
-          <a:ln w="12700">
-            <a:solidFill>
-              <a:schemeClr val="tx1"/>
-            </a:solidFill>
-          </a:ln>
         </p:spPr>
-        <p:style>
-          <a:lnRef idx="1">
-            <a:schemeClr val="accent1"/>
-          </a:lnRef>
-          <a:fillRef idx="0">
-            <a:schemeClr val="accent1"/>
-          </a:fillRef>
-          <a:effectRef idx="0">
-            <a:schemeClr val="accent1"/>
-          </a:effectRef>
-          <a:fontRef idx="minor">
-            <a:schemeClr val="tx1"/>
-          </a:fontRef>
-        </p:style>
-      </p:cxnSp>
+      </p:pic>
     </p:spTree>
     <p:extLst>
       <p:ext uri="{BB962C8B-B14F-4D97-AF65-F5344CB8AC3E}">
-        <p14:creationId xmlns:p14="http://schemas.microsoft.com/office/powerpoint/2010/main" val="3319579963"/>
+        <p14:creationId xmlns:p14="http://schemas.microsoft.com/office/powerpoint/2010/main" val="2028466019"/>
       </p:ext>
     </p:extLst>
   </p:cSld>
   <p:clrMap bg1="lt1" tx1="dk1" bg2="lt2" tx2="dk2" accent1="accent1" accent2="accent2" accent3="accent3" accent4="accent4" accent5="accent5" accent6="accent6" hlink="hlink" folHlink="folHlink"/>
   <p:sldLayoutIdLst>
-    <p:sldLayoutId id="2147483704" r:id="rId1"/>
-    <p:sldLayoutId id="2147483705" r:id="rId2"/>
-    <p:sldLayoutId id="2147483706" r:id="rId3"/>
-    <p:sldLayoutId id="2147483707" r:id="rId4"/>
-    <p:sldLayoutId id="2147483708" r:id="rId5"/>
-    <p:sldLayoutId id="2147483702" r:id="rId6"/>
-    <p:sldLayoutId id="2147483698" r:id="rId7"/>
-    <p:sldLayoutId id="2147483699" r:id="rId8"/>
-    <p:sldLayoutId id="2147483700" r:id="rId9"/>
-    <p:sldLayoutId id="2147483701" r:id="rId10"/>
-    <p:sldLayoutId id="2147483703" r:id="rId11"/>
+    <p:sldLayoutId id="2147483768" r:id="rId1"/>
+    <p:sldLayoutId id="2147483769" r:id="rId2"/>
+    <p:sldLayoutId id="2147483770" r:id="rId3"/>
+    <p:sldLayoutId id="2147483771" r:id="rId4"/>
+    <p:sldLayoutId id="2147483772" r:id="rId5"/>
+    <p:sldLayoutId id="2147483766" r:id="rId6"/>
+    <p:sldLayoutId id="2147483762" r:id="rId7"/>
+    <p:sldLayoutId id="2147483763" r:id="rId8"/>
+    <p:sldLayoutId id="2147483764" r:id="rId9"/>
+    <p:sldLayoutId id="2147483765" r:id="rId10"/>
+    <p:sldLayoutId id="2147483767" r:id="rId11"/>
   </p:sldLayoutIdLst>
   <p:hf sldNum="0" hdr="0" ftr="0" dt="0"/>
   <p:txStyles>
@@ -3156,7 +3437,7 @@
           <a:spcPct val="0"/>
         </a:spcBef>
         <a:buNone/>
-        <a:defRPr sz="4000" kern="1200" cap="all" spc="30" baseline="0">
+        <a:defRPr sz="4000" b="1" kern="1200">
           <a:solidFill>
             <a:schemeClr val="tx1"/>
           </a:solidFill>
@@ -3169,11 +3450,12 @@
     <p:bodyStyle>
       <a:lvl1pPr marL="228600" indent="-228600" algn="l" defTabSz="914400" rtl="0" eaLnBrk="1" latinLnBrk="0" hangingPunct="1">
         <a:lnSpc>
-          <a:spcPct val="110000"/>
+          <a:spcPct val="120000"/>
         </a:lnSpc>
         <a:spcBef>
           <a:spcPts val="1000"/>
         </a:spcBef>
+        <a:buSzPct val="87000"/>
         <a:buFont typeface="Arial" panose="020B0604020202020204" pitchFamily="34" charset="0"/>
         <a:buChar char="•"/>
         <a:defRPr sz="2000" kern="1200">
@@ -3185,13 +3467,14 @@
           <a:cs typeface="+mn-cs"/>
         </a:defRPr>
       </a:lvl1pPr>
-      <a:lvl2pPr marL="685800" indent="-228600" algn="l" defTabSz="914400" rtl="0" eaLnBrk="1" latinLnBrk="0" hangingPunct="1">
+      <a:lvl2pPr marL="493776" indent="-228600" algn="l" defTabSz="914400" rtl="0" eaLnBrk="1" latinLnBrk="0" hangingPunct="1">
         <a:lnSpc>
-          <a:spcPct val="110000"/>
+          <a:spcPct val="120000"/>
         </a:lnSpc>
         <a:spcBef>
           <a:spcPts val="500"/>
         </a:spcBef>
+        <a:buSzPct val="87000"/>
         <a:buFont typeface="Arial" panose="020B0604020202020204" pitchFamily="34" charset="0"/>
         <a:buChar char="•"/>
         <a:defRPr sz="1800" kern="1200">
@@ -3203,13 +3486,14 @@
           <a:cs typeface="+mn-cs"/>
         </a:defRPr>
       </a:lvl2pPr>
-      <a:lvl3pPr marL="1143000" indent="-228600" algn="l" defTabSz="914400" rtl="0" eaLnBrk="1" latinLnBrk="0" hangingPunct="1">
+      <a:lvl3pPr marL="731520" indent="-228600" algn="l" defTabSz="914400" rtl="0" eaLnBrk="1" latinLnBrk="0" hangingPunct="1">
         <a:lnSpc>
-          <a:spcPct val="110000"/>
+          <a:spcPct val="120000"/>
         </a:lnSpc>
         <a:spcBef>
           <a:spcPts val="500"/>
         </a:spcBef>
+        <a:buSzPct val="87000"/>
         <a:buFont typeface="Arial" panose="020B0604020202020204" pitchFamily="34" charset="0"/>
         <a:buChar char="•"/>
         <a:defRPr sz="1600" kern="1200">
@@ -3221,13 +3505,14 @@
           <a:cs typeface="+mn-cs"/>
         </a:defRPr>
       </a:lvl3pPr>
-      <a:lvl4pPr marL="1600200" indent="-228600" algn="l" defTabSz="914400" rtl="0" eaLnBrk="1" latinLnBrk="0" hangingPunct="1">
+      <a:lvl4pPr marL="1051560" indent="-285750" algn="l" defTabSz="914400" rtl="0" eaLnBrk="1" latinLnBrk="0" hangingPunct="1">
         <a:lnSpc>
-          <a:spcPct val="110000"/>
+          <a:spcPct val="120000"/>
         </a:lnSpc>
         <a:spcBef>
           <a:spcPts val="500"/>
         </a:spcBef>
+        <a:buSzPct val="87000"/>
         <a:buFont typeface="Arial" panose="020B0604020202020204" pitchFamily="34" charset="0"/>
         <a:buChar char="•"/>
         <a:defRPr sz="1400" kern="1200">
@@ -3239,13 +3524,14 @@
           <a:cs typeface="+mn-cs"/>
         </a:defRPr>
       </a:lvl4pPr>
-      <a:lvl5pPr marL="2057400" indent="-228600" algn="l" defTabSz="914400" rtl="0" eaLnBrk="1" latinLnBrk="0" hangingPunct="1">
+      <a:lvl5pPr marL="1298448" indent="-228600" algn="l" defTabSz="914400" rtl="0" eaLnBrk="1" latinLnBrk="0" hangingPunct="1">
         <a:lnSpc>
-          <a:spcPct val="110000"/>
+          <a:spcPct val="120000"/>
         </a:lnSpc>
         <a:spcBef>
           <a:spcPts val="500"/>
         </a:spcBef>
+        <a:buSzPct val="87000"/>
         <a:buFont typeface="Arial" panose="020B0604020202020204" pitchFamily="34" charset="0"/>
         <a:buChar char="•"/>
         <a:defRPr sz="1400" kern="1200">
@@ -3456,10 +3742,10 @@
       </p:grpSpPr>
       <p:sp useBgFill="1">
         <p:nvSpPr>
-          <p:cNvPr id="9" name="Rectangle 8">
-            <a:extLst>
-              <a:ext uri="{FF2B5EF4-FFF2-40B4-BE49-F238E27FC236}">
-                <a16:creationId xmlns:a16="http://schemas.microsoft.com/office/drawing/2014/main" id="{33E93247-6229-44AB-A550-739E971E690B}"/>
+          <p:cNvPr id="1041" name="Rectangle 1040">
+            <a:extLst>
+              <a:ext uri="{FF2B5EF4-FFF2-40B4-BE49-F238E27FC236}">
+                <a16:creationId xmlns:a16="http://schemas.microsoft.com/office/drawing/2014/main" id="{CFD1D2CD-954D-4C4D-B505-05EAD159B230}"/>
               </a:ext>
               <a:ext uri="{C183D7F6-B498-43B3-948B-1728B52AA6E4}">
                 <adec:decorative xmlns:adec="http://schemas.microsoft.com/office/drawing/2017/decorative" val="1"/>
@@ -3548,8 +3834,8 @@
         </p:nvSpPr>
         <p:spPr>
           <a:xfrm>
-            <a:off x="5604552" y="871758"/>
-            <a:ext cx="5825448" cy="3871143"/>
+            <a:off x="640080" y="1371600"/>
+            <a:ext cx="4670661" cy="3030842"/>
           </a:xfrm>
         </p:spPr>
         <p:txBody>
@@ -3559,11 +3845,15 @@
           <a:lstStyle/>
           <a:p>
             <a:r>
-              <a:rPr lang="hu-HU" dirty="0" err="1"/>
+              <a:rPr lang="hu-HU" dirty="0" err="1">
+                <a:latin typeface="Montserrat" panose="00000500000000000000" pitchFamily="2" charset="-18"/>
+              </a:rPr>
               <a:t>MyTunes</a:t>
             </a:r>
             <a:r>
-              <a:rPr lang="hu-HU" dirty="0"/>
+              <a:rPr lang="hu-HU" dirty="0">
+                <a:latin typeface="Montserrat" panose="00000500000000000000" pitchFamily="2" charset="-18"/>
+              </a:rPr>
               <a:t> – zene streaming</a:t>
             </a:r>
           </a:p>
@@ -3587,8 +3877,8 @@
         </p:nvSpPr>
         <p:spPr>
           <a:xfrm>
-            <a:off x="5619964" y="4785543"/>
-            <a:ext cx="5322013" cy="1005657"/>
+            <a:off x="640080" y="4584879"/>
+            <a:ext cx="4670660" cy="1287887"/>
           </a:xfrm>
         </p:spPr>
         <p:txBody>
@@ -3598,49 +3888,20 @@
           <a:lstStyle/>
           <a:p>
             <a:r>
-              <a:rPr lang="hu-HU" dirty="0"/>
+              <a:rPr lang="hu-HU" dirty="0">
+                <a:latin typeface="Montserrat" panose="00000500000000000000" pitchFamily="2" charset="-18"/>
+              </a:rPr>
               <a:t>Készítette: Nagy Ákos és Bernáth Ábel</a:t>
             </a:r>
           </a:p>
         </p:txBody>
       </p:sp>
-      <p:pic>
-        <p:nvPicPr>
-          <p:cNvPr id="4" name="Picture 3" descr="A képen Színesség, Neon, lámpa látható&#10;&#10;Előfordulhat, hogy az AI által létrehozott tartalom helytelen.">
-            <a:extLst>
-              <a:ext uri="{FF2B5EF4-FFF2-40B4-BE49-F238E27FC236}">
-                <a16:creationId xmlns:a16="http://schemas.microsoft.com/office/drawing/2014/main" id="{367CC16F-3CA5-2423-5C8B-4A2213F09CD4}"/>
-              </a:ext>
-            </a:extLst>
-          </p:cNvPr>
-          <p:cNvPicPr>
-            <a:picLocks noChangeAspect="1"/>
-          </p:cNvPicPr>
-          <p:nvPr/>
-        </p:nvPicPr>
-        <p:blipFill>
-          <a:blip r:embed="rId2"/>
-          <a:srcRect l="27712" r="27844"/>
-          <a:stretch>
-            <a:fillRect/>
-          </a:stretch>
-        </p:blipFill>
-        <p:spPr>
-          <a:xfrm>
-            <a:off x="1" y="10"/>
-            <a:ext cx="4876799" cy="6857989"/>
-          </a:xfrm>
-          <a:prstGeom prst="rect">
-            <a:avLst/>
-          </a:prstGeom>
-        </p:spPr>
-      </p:pic>
       <p:cxnSp>
         <p:nvCxnSpPr>
-          <p:cNvPr id="11" name="Straight Connector 10">
-            <a:extLst>
-              <a:ext uri="{FF2B5EF4-FFF2-40B4-BE49-F238E27FC236}">
-                <a16:creationId xmlns:a16="http://schemas.microsoft.com/office/drawing/2014/main" id="{EE2E603F-4A95-4FE8-BB06-211DFD75DBEF}"/>
+          <p:cNvPr id="1043" name="Straight Connector 1042">
+            <a:extLst>
+              <a:ext uri="{FF2B5EF4-FFF2-40B4-BE49-F238E27FC236}">
+                <a16:creationId xmlns:a16="http://schemas.microsoft.com/office/drawing/2014/main" id="{D132AEA7-A24A-45A9-BF8F-D0AFF34DF68C}"/>
               </a:ext>
               <a:ext uri="{C183D7F6-B498-43B3-948B-1728B52AA6E4}">
                 <adec:decorative xmlns:adec="http://schemas.microsoft.com/office/drawing/2017/decorative" val="1"/>
@@ -3660,17 +3921,13 @@
         </p:nvCxnSpPr>
         <p:spPr>
           <a:xfrm>
-            <a:off x="5723776" y="723900"/>
-            <a:ext cx="5706224" cy="0"/>
+            <a:off x="718052" y="1031001"/>
+            <a:ext cx="978862" cy="0"/>
           </a:xfrm>
           <a:prstGeom prst="line">
             <a:avLst/>
           </a:prstGeom>
-          <a:ln w="44450">
-            <a:solidFill>
-              <a:schemeClr val="tx1"/>
-            </a:solidFill>
-          </a:ln>
+          <a:ln w="76200"/>
         </p:spPr>
         <p:style>
           <a:lnRef idx="1">
@@ -3687,58 +3944,89 @@
           </a:fontRef>
         </p:style>
       </p:cxnSp>
-      <p:cxnSp>
-        <p:nvCxnSpPr>
-          <p:cNvPr id="13" name="Straight Connector 12">
-            <a:extLst>
-              <a:ext uri="{FF2B5EF4-FFF2-40B4-BE49-F238E27FC236}">
-                <a16:creationId xmlns:a16="http://schemas.microsoft.com/office/drawing/2014/main" id="{2CF06E40-3ECB-4820-95B5-8A70B07D4B47}"/>
-              </a:ext>
-              <a:ext uri="{C183D7F6-B498-43B3-948B-1728B52AA6E4}">
-                <adec:decorative xmlns:adec="http://schemas.microsoft.com/office/drawing/2017/decorative" val="1"/>
-              </a:ext>
-            </a:extLst>
-          </p:cNvPr>
-          <p:cNvCxnSpPr>
-            <a:cxnSpLocks noGrp="1" noRot="1" noChangeAspect="1" noMove="1" noResize="1" noEditPoints="1" noAdjustHandles="1" noChangeArrowheads="1" noChangeShapeType="1"/>
-          </p:cNvCxnSpPr>
-          <p:nvPr>
-            <p:extLst>
-              <p:ext uri="{386F3935-93C4-4BCD-93E2-E3B085C9AB24}">
-                <p16:designElem xmlns:p16="http://schemas.microsoft.com/office/powerpoint/2015/main" val="1"/>
-              </p:ext>
-            </p:extLst>
-          </p:nvPr>
-        </p:nvCxnSpPr>
+      <p:pic>
+        <p:nvPicPr>
+          <p:cNvPr id="1027" name="Picture 3">
+            <a:extLst>
+              <a:ext uri="{FF2B5EF4-FFF2-40B4-BE49-F238E27FC236}">
+                <a16:creationId xmlns:a16="http://schemas.microsoft.com/office/drawing/2014/main" id="{5854CFBB-69F2-3D8A-87BC-E19F2F1F9301}"/>
+              </a:ext>
+            </a:extLst>
+          </p:cNvPr>
+          <p:cNvPicPr>
+            <a:picLocks noChangeAspect="1" noChangeArrowheads="1"/>
+          </p:cNvPicPr>
+          <p:nvPr/>
+        </p:nvPicPr>
+        <p:blipFill>
+          <a:blip r:embed="rId2">
+            <a:extLst>
+              <a:ext uri="{28A0092B-C50C-407E-A947-70E740481C1C}">
+                <a14:useLocalDpi xmlns:a14="http://schemas.microsoft.com/office/drawing/2010/main" val="0"/>
+              </a:ext>
+            </a:extLst>
+          </a:blip>
+          <a:srcRect t="14530" r="1" b="1"/>
+          <a:stretch>
+            <a:fillRect/>
+          </a:stretch>
+        </p:blipFill>
+        <p:spPr bwMode="auto">
+          <a:xfrm>
+            <a:off x="6515100" y="10"/>
+            <a:ext cx="5676900" cy="6857990"/>
+          </a:xfrm>
+          <a:prstGeom prst="rect">
+            <a:avLst/>
+          </a:prstGeom>
+          <a:noFill/>
+          <a:extLst>
+            <a:ext uri="{909E8E84-426E-40DD-AFC4-6F175D3DCCD1}">
+              <a14:hiddenFill xmlns:a14="http://schemas.microsoft.com/office/drawing/2010/main">
+                <a:solidFill>
+                  <a:srgbClr val="FFFFFF"/>
+                </a:solidFill>
+              </a14:hiddenFill>
+            </a:ext>
+          </a:extLst>
+        </p:spPr>
+      </p:pic>
+      <p:pic>
+        <p:nvPicPr>
+          <p:cNvPr id="7" name="Ábra 6">
+            <a:extLst>
+              <a:ext uri="{FF2B5EF4-FFF2-40B4-BE49-F238E27FC236}">
+                <a16:creationId xmlns:a16="http://schemas.microsoft.com/office/drawing/2014/main" id="{DFFC11B7-F30A-0E62-48E8-932B195E2BC9}"/>
+              </a:ext>
+            </a:extLst>
+          </p:cNvPr>
+          <p:cNvPicPr>
+            <a:picLocks noChangeAspect="1"/>
+          </p:cNvPicPr>
+          <p:nvPr/>
+        </p:nvPicPr>
+        <p:blipFill>
+          <a:blip r:embed="rId3">
+            <a:extLst>
+              <a:ext uri="{96DAC541-7B7A-43D3-8B79-37D633B846F1}">
+                <asvg:svgBlip xmlns:asvg="http://schemas.microsoft.com/office/drawing/2016/SVG/main" r:embed="rId4"/>
+              </a:ext>
+            </a:extLst>
+          </a:blip>
+          <a:stretch>
+            <a:fillRect/>
+          </a:stretch>
+        </p:blipFill>
         <p:spPr>
           <a:xfrm>
-            <a:off x="5723776" y="6134100"/>
-            <a:ext cx="5668124" cy="0"/>
+            <a:off x="7459133" y="742526"/>
+            <a:ext cx="5372947" cy="5372947"/>
           </a:xfrm>
-          <a:prstGeom prst="line">
+          <a:prstGeom prst="rect">
             <a:avLst/>
           </a:prstGeom>
-          <a:ln w="12700">
-            <a:solidFill>
-              <a:schemeClr val="tx1"/>
-            </a:solidFill>
-          </a:ln>
         </p:spPr>
-        <p:style>
-          <a:lnRef idx="1">
-            <a:schemeClr val="accent1"/>
-          </a:lnRef>
-          <a:fillRef idx="0">
-            <a:schemeClr val="accent1"/>
-          </a:fillRef>
-          <a:effectRef idx="0">
-            <a:schemeClr val="accent1"/>
-          </a:effectRef>
-          <a:fontRef idx="minor">
-            <a:schemeClr val="tx1"/>
-          </a:fontRef>
-        </p:style>
-      </p:cxnSp>
+      </p:pic>
     </p:spTree>
     <p:extLst>
       <p:ext uri="{BB962C8B-B14F-4D97-AF65-F5344CB8AC3E}">
@@ -3749,58 +4037,4519 @@
   <p:clrMapOvr>
     <a:masterClrMapping/>
   </p:clrMapOvr>
+  <p:timing>
+    <p:tnLst>
+      <p:par>
+        <p:cTn id="1" dur="indefinite" restart="never" nodeType="tmRoot">
+          <p:childTnLst>
+            <p:seq concurrent="1" nextAc="seek">
+              <p:cTn id="2" dur="indefinite" nodeType="mainSeq">
+                <p:childTnLst>
+                  <p:par>
+                    <p:cTn id="3" fill="hold">
+                      <p:stCondLst>
+                        <p:cond delay="indefinite"/>
+                        <p:cond evt="onBegin" delay="0">
+                          <p:tn val="2"/>
+                        </p:cond>
+                      </p:stCondLst>
+                      <p:childTnLst>
+                        <p:par>
+                          <p:cTn id="4" fill="hold">
+                            <p:stCondLst>
+                              <p:cond delay="0"/>
+                            </p:stCondLst>
+                            <p:childTnLst>
+                              <p:par>
+                                <p:cTn id="5" presetID="10" presetClass="entr" presetSubtype="0" fill="hold" grpId="0" nodeType="withEffect">
+                                  <p:stCondLst>
+                                    <p:cond delay="1000"/>
+                                  </p:stCondLst>
+                                  <p:iterate>
+                                    <p:tmPct val="10000"/>
+                                  </p:iterate>
+                                  <p:childTnLst>
+                                    <p:set>
+                                      <p:cBhvr>
+                                        <p:cTn id="6" dur="1" fill="hold">
+                                          <p:stCondLst>
+                                            <p:cond delay="0"/>
+                                          </p:stCondLst>
+                                        </p:cTn>
+                                        <p:tgtEl>
+                                          <p:spTgt spid="2"/>
+                                        </p:tgtEl>
+                                        <p:attrNameLst>
+                                          <p:attrName>style.visibility</p:attrName>
+                                        </p:attrNameLst>
+                                      </p:cBhvr>
+                                      <p:to>
+                                        <p:strVal val="visible"/>
+                                      </p:to>
+                                    </p:set>
+                                    <p:animEffect transition="in" filter="fade">
+                                      <p:cBhvr>
+                                        <p:cTn id="7" dur="700"/>
+                                        <p:tgtEl>
+                                          <p:spTgt spid="2"/>
+                                        </p:tgtEl>
+                                      </p:cBhvr>
+                                    </p:animEffect>
+                                  </p:childTnLst>
+                                </p:cTn>
+                              </p:par>
+                              <p:par>
+                                <p:cTn id="8" presetID="10" presetClass="entr" presetSubtype="0" fill="hold" grpId="0" nodeType="withEffect">
+                                  <p:stCondLst>
+                                    <p:cond delay="1500"/>
+                                  </p:stCondLst>
+                                  <p:iterate>
+                                    <p:tmPct val="10000"/>
+                                  </p:iterate>
+                                  <p:childTnLst>
+                                    <p:set>
+                                      <p:cBhvr>
+                                        <p:cTn id="9" dur="1" fill="hold">
+                                          <p:stCondLst>
+                                            <p:cond delay="0"/>
+                                          </p:stCondLst>
+                                        </p:cTn>
+                                        <p:tgtEl>
+                                          <p:spTgt spid="3">
+                                            <p:txEl>
+                                              <p:pRg st="0" end="0"/>
+                                            </p:txEl>
+                                          </p:spTgt>
+                                        </p:tgtEl>
+                                        <p:attrNameLst>
+                                          <p:attrName>style.visibility</p:attrName>
+                                        </p:attrNameLst>
+                                      </p:cBhvr>
+                                      <p:to>
+                                        <p:strVal val="visible"/>
+                                      </p:to>
+                                    </p:set>
+                                    <p:animEffect transition="in" filter="fade">
+                                      <p:cBhvr>
+                                        <p:cTn id="10" dur="700"/>
+                                        <p:tgtEl>
+                                          <p:spTgt spid="3">
+                                            <p:txEl>
+                                              <p:pRg st="0" end="0"/>
+                                            </p:txEl>
+                                          </p:spTgt>
+                                        </p:tgtEl>
+                                      </p:cBhvr>
+                                    </p:animEffect>
+                                  </p:childTnLst>
+                                </p:cTn>
+                              </p:par>
+                            </p:childTnLst>
+                          </p:cTn>
+                        </p:par>
+                      </p:childTnLst>
+                    </p:cTn>
+                  </p:par>
+                </p:childTnLst>
+              </p:cTn>
+              <p:prevCondLst>
+                <p:cond evt="onPrev" delay="0">
+                  <p:tgtEl>
+                    <p:sldTgt/>
+                  </p:tgtEl>
+                </p:cond>
+              </p:prevCondLst>
+              <p:nextCondLst>
+                <p:cond evt="onNext" delay="0">
+                  <p:tgtEl>
+                    <p:sldTgt/>
+                  </p:tgtEl>
+                </p:cond>
+              </p:nextCondLst>
+            </p:seq>
+          </p:childTnLst>
+        </p:cTn>
+      </p:par>
+    </p:tnLst>
+    <p:bldLst>
+      <p:bldP spid="2" grpId="0"/>
+      <p:bldP spid="3" grpId="0" build="p"/>
+    </p:bldLst>
+  </p:timing>
+</p:sld>
+</file>
+
+<file path=ppt/slides/slide2.xml><?xml version="1.0" encoding="utf-8"?>
+<p:sld xmlns:a="http://schemas.openxmlformats.org/drawingml/2006/main" xmlns:r="http://schemas.openxmlformats.org/officeDocument/2006/relationships" xmlns:p="http://schemas.openxmlformats.org/presentationml/2006/main">
+  <p:cSld>
+    <p:spTree>
+      <p:nvGrpSpPr>
+        <p:cNvPr id="1" name=""/>
+        <p:cNvGrpSpPr/>
+        <p:nvPr/>
+      </p:nvGrpSpPr>
+      <p:grpSpPr>
+        <a:xfrm>
+          <a:off x="0" y="0"/>
+          <a:ext cx="0" cy="0"/>
+          <a:chOff x="0" y="0"/>
+          <a:chExt cx="0" cy="0"/>
+        </a:xfrm>
+      </p:grpSpPr>
+      <p:sp>
+        <p:nvSpPr>
+          <p:cNvPr id="2" name="Cím 1">
+            <a:extLst>
+              <a:ext uri="{FF2B5EF4-FFF2-40B4-BE49-F238E27FC236}">
+                <a16:creationId xmlns:a16="http://schemas.microsoft.com/office/drawing/2014/main" id="{20BE8F1F-1719-9771-4F55-6AAE19C28FFC}"/>
+              </a:ext>
+            </a:extLst>
+          </p:cNvPr>
+          <p:cNvSpPr>
+            <a:spLocks noGrp="1"/>
+          </p:cNvSpPr>
+          <p:nvPr>
+            <p:ph type="title"/>
+          </p:nvPr>
+        </p:nvSpPr>
+        <p:spPr/>
+        <p:txBody>
+          <a:bodyPr/>
+          <a:lstStyle/>
+          <a:p>
+            <a:r>
+              <a:rPr lang="hu-HU" dirty="0"/>
+              <a:t>Projekt célja</a:t>
+            </a:r>
+          </a:p>
+        </p:txBody>
+      </p:sp>
+      <p:sp>
+        <p:nvSpPr>
+          <p:cNvPr id="3" name="Tartalom helye 2">
+            <a:extLst>
+              <a:ext uri="{FF2B5EF4-FFF2-40B4-BE49-F238E27FC236}">
+                <a16:creationId xmlns:a16="http://schemas.microsoft.com/office/drawing/2014/main" id="{875D41E2-D23B-D661-B4DB-4D2EC58DF722}"/>
+              </a:ext>
+            </a:extLst>
+          </p:cNvPr>
+          <p:cNvSpPr>
+            <a:spLocks noGrp="1"/>
+          </p:cNvSpPr>
+          <p:nvPr>
+            <p:ph idx="1"/>
+          </p:nvPr>
+        </p:nvSpPr>
+        <p:spPr/>
+        <p:txBody>
+          <a:bodyPr/>
+          <a:lstStyle/>
+          <a:p>
+            <a:r>
+              <a:rPr lang="hu-HU" dirty="0"/>
+              <a:t>Zene streaming alkalmazás létrehozása</a:t>
+            </a:r>
+          </a:p>
+          <a:p>
+            <a:r>
+              <a:rPr lang="hu-HU" dirty="0"/>
+              <a:t>Web, asztali és mobil platformokra</a:t>
+            </a:r>
+          </a:p>
+          <a:p>
+            <a:r>
+              <a:rPr lang="hu-HU" dirty="0"/>
+              <a:t>Ingyenes felhasználói modell</a:t>
+            </a:r>
+          </a:p>
+        </p:txBody>
+      </p:sp>
+    </p:spTree>
+    <p:extLst>
+      <p:ext uri="{BB962C8B-B14F-4D97-AF65-F5344CB8AC3E}">
+        <p14:creationId xmlns:p14="http://schemas.microsoft.com/office/powerpoint/2010/main" val="898914816"/>
+      </p:ext>
+    </p:extLst>
+  </p:cSld>
+  <p:clrMapOvr>
+    <a:masterClrMapping/>
+  </p:clrMapOvr>
+</p:sld>
+</file>
+
+<file path=ppt/slides/slide3.xml><?xml version="1.0" encoding="utf-8"?>
+<p:sld xmlns:a="http://schemas.openxmlformats.org/drawingml/2006/main" xmlns:r="http://schemas.openxmlformats.org/officeDocument/2006/relationships" xmlns:p="http://schemas.openxmlformats.org/presentationml/2006/main">
+  <p:cSld>
+    <p:spTree>
+      <p:nvGrpSpPr>
+        <p:cNvPr id="1" name=""/>
+        <p:cNvGrpSpPr/>
+        <p:nvPr/>
+      </p:nvGrpSpPr>
+      <p:grpSpPr>
+        <a:xfrm>
+          <a:off x="0" y="0"/>
+          <a:ext cx="0" cy="0"/>
+          <a:chOff x="0" y="0"/>
+          <a:chExt cx="0" cy="0"/>
+        </a:xfrm>
+      </p:grpSpPr>
+      <p:sp>
+        <p:nvSpPr>
+          <p:cNvPr id="2" name="Cím 1">
+            <a:extLst>
+              <a:ext uri="{FF2B5EF4-FFF2-40B4-BE49-F238E27FC236}">
+                <a16:creationId xmlns:a16="http://schemas.microsoft.com/office/drawing/2014/main" id="{DFE7E995-28CE-539D-9F15-61D364B198C3}"/>
+              </a:ext>
+            </a:extLst>
+          </p:cNvPr>
+          <p:cNvSpPr>
+            <a:spLocks noGrp="1"/>
+          </p:cNvSpPr>
+          <p:nvPr>
+            <p:ph type="title"/>
+          </p:nvPr>
+        </p:nvSpPr>
+        <p:spPr/>
+        <p:txBody>
+          <a:bodyPr/>
+          <a:lstStyle/>
+          <a:p>
+            <a:r>
+              <a:rPr lang="hu-HU" dirty="0"/>
+              <a:t>Projekt készítői</a:t>
+            </a:r>
+          </a:p>
+        </p:txBody>
+      </p:sp>
+      <p:sp>
+        <p:nvSpPr>
+          <p:cNvPr id="3" name="Tartalom helye 2">
+            <a:extLst>
+              <a:ext uri="{FF2B5EF4-FFF2-40B4-BE49-F238E27FC236}">
+                <a16:creationId xmlns:a16="http://schemas.microsoft.com/office/drawing/2014/main" id="{ED8D0D22-0D25-D8AB-F464-4FF953920BBF}"/>
+              </a:ext>
+            </a:extLst>
+          </p:cNvPr>
+          <p:cNvSpPr>
+            <a:spLocks noGrp="1"/>
+          </p:cNvSpPr>
+          <p:nvPr>
+            <p:ph idx="1"/>
+          </p:nvPr>
+        </p:nvSpPr>
+        <p:spPr>
+          <a:xfrm>
+            <a:off x="640080" y="2633472"/>
+            <a:ext cx="10480827" cy="3566160"/>
+          </a:xfrm>
+        </p:spPr>
+        <p:txBody>
+          <a:bodyPr/>
+          <a:lstStyle/>
+          <a:p>
+            <a:r>
+              <a:rPr lang="hu-HU" dirty="0"/>
+              <a:t>Bernáth Ábel (beosztás, feladatok)</a:t>
+            </a:r>
+          </a:p>
+          <a:p>
+            <a:endParaRPr lang="hu-HU" dirty="0"/>
+          </a:p>
+          <a:p>
+            <a:endParaRPr lang="hu-HU" dirty="0"/>
+          </a:p>
+          <a:p>
+            <a:endParaRPr lang="hu-HU" dirty="0"/>
+          </a:p>
+          <a:p>
+            <a:endParaRPr lang="hu-HU" dirty="0"/>
+          </a:p>
+          <a:p>
+            <a:r>
+              <a:rPr lang="hu-HU" dirty="0"/>
+              <a:t>Nagy Ákos (-”-)</a:t>
+            </a:r>
+          </a:p>
+        </p:txBody>
+      </p:sp>
+      <p:sp>
+        <p:nvSpPr>
+          <p:cNvPr id="7" name="Folyamatábra: Bekötés 6">
+            <a:extLst>
+              <a:ext uri="{FF2B5EF4-FFF2-40B4-BE49-F238E27FC236}">
+                <a16:creationId xmlns:a16="http://schemas.microsoft.com/office/drawing/2014/main" id="{203D621B-A310-AAF6-F1D2-56EE41B1C99B}"/>
+              </a:ext>
+            </a:extLst>
+          </p:cNvPr>
+          <p:cNvSpPr/>
+          <p:nvPr/>
+        </p:nvSpPr>
+        <p:spPr>
+          <a:xfrm>
+            <a:off x="7845509" y="1670262"/>
+            <a:ext cx="2401909" cy="2401909"/>
+          </a:xfrm>
+          <a:prstGeom prst="flowChartConnector">
+            <a:avLst/>
+          </a:prstGeom>
+        </p:spPr>
+        <p:style>
+          <a:lnRef idx="2">
+            <a:schemeClr val="accent1">
+              <a:shade val="15000"/>
+            </a:schemeClr>
+          </a:lnRef>
+          <a:fillRef idx="1">
+            <a:schemeClr val="accent1"/>
+          </a:fillRef>
+          <a:effectRef idx="0">
+            <a:schemeClr val="accent1"/>
+          </a:effectRef>
+          <a:fontRef idx="minor">
+            <a:schemeClr val="lt1"/>
+          </a:fontRef>
+        </p:style>
+        <p:txBody>
+          <a:bodyPr rtlCol="0" anchor="ctr"/>
+          <a:lstStyle/>
+          <a:p>
+            <a:pPr algn="ctr"/>
+            <a:endParaRPr lang="hu-HU"/>
+          </a:p>
+        </p:txBody>
+      </p:sp>
+      <p:sp>
+        <p:nvSpPr>
+          <p:cNvPr id="8" name="Folyamatábra: Bekötés 7">
+            <a:extLst>
+              <a:ext uri="{FF2B5EF4-FFF2-40B4-BE49-F238E27FC236}">
+                <a16:creationId xmlns:a16="http://schemas.microsoft.com/office/drawing/2014/main" id="{711D1612-9D87-B650-718B-4311B016CD26}"/>
+              </a:ext>
+            </a:extLst>
+          </p:cNvPr>
+          <p:cNvSpPr/>
+          <p:nvPr/>
+        </p:nvSpPr>
+        <p:spPr>
+          <a:xfrm>
+            <a:off x="7845509" y="4295406"/>
+            <a:ext cx="2401909" cy="2401909"/>
+          </a:xfrm>
+          <a:prstGeom prst="flowChartConnector">
+            <a:avLst/>
+          </a:prstGeom>
+        </p:spPr>
+        <p:style>
+          <a:lnRef idx="2">
+            <a:schemeClr val="accent1">
+              <a:shade val="15000"/>
+            </a:schemeClr>
+          </a:lnRef>
+          <a:fillRef idx="1">
+            <a:schemeClr val="accent1"/>
+          </a:fillRef>
+          <a:effectRef idx="0">
+            <a:schemeClr val="accent1"/>
+          </a:effectRef>
+          <a:fontRef idx="minor">
+            <a:schemeClr val="lt1"/>
+          </a:fontRef>
+        </p:style>
+        <p:txBody>
+          <a:bodyPr rtlCol="0" anchor="ctr"/>
+          <a:lstStyle/>
+          <a:p>
+            <a:pPr algn="ctr"/>
+            <a:endParaRPr lang="hu-HU"/>
+          </a:p>
+        </p:txBody>
+      </p:sp>
+    </p:spTree>
+    <p:extLst>
+      <p:ext uri="{BB962C8B-B14F-4D97-AF65-F5344CB8AC3E}">
+        <p14:creationId xmlns:p14="http://schemas.microsoft.com/office/powerpoint/2010/main" val="4275573188"/>
+      </p:ext>
+    </p:extLst>
+  </p:cSld>
+  <p:clrMapOvr>
+    <a:masterClrMapping/>
+  </p:clrMapOvr>
+</p:sld>
+</file>
+
+<file path=ppt/slides/slide4.xml><?xml version="1.0" encoding="utf-8"?>
+<p:sld xmlns:a="http://schemas.openxmlformats.org/drawingml/2006/main" xmlns:r="http://schemas.openxmlformats.org/officeDocument/2006/relationships" xmlns:p="http://schemas.openxmlformats.org/presentationml/2006/main">
+  <p:cSld>
+    <p:spTree>
+      <p:nvGrpSpPr>
+        <p:cNvPr id="1" name=""/>
+        <p:cNvGrpSpPr/>
+        <p:nvPr/>
+      </p:nvGrpSpPr>
+      <p:grpSpPr>
+        <a:xfrm>
+          <a:off x="0" y="0"/>
+          <a:ext cx="0" cy="0"/>
+          <a:chOff x="0" y="0"/>
+          <a:chExt cx="0" cy="0"/>
+        </a:xfrm>
+      </p:grpSpPr>
+      <p:sp>
+        <p:nvSpPr>
+          <p:cNvPr id="91" name="TextBox 90">
+            <a:extLst>
+              <a:ext uri="{FF2B5EF4-FFF2-40B4-BE49-F238E27FC236}">
+                <a16:creationId xmlns:a16="http://schemas.microsoft.com/office/drawing/2014/main" id="{900E9161-FC3A-4C7A-BDE0-321383B3F6BF}"/>
+              </a:ext>
+            </a:extLst>
+          </p:cNvPr>
+          <p:cNvSpPr txBox="1"/>
+          <p:nvPr/>
+        </p:nvSpPr>
+        <p:spPr>
+          <a:xfrm>
+            <a:off x="2307054" y="3781981"/>
+            <a:ext cx="3797413" cy="918841"/>
+          </a:xfrm>
+          <a:prstGeom prst="rect">
+            <a:avLst/>
+          </a:prstGeom>
+          <a:noFill/>
+        </p:spPr>
+        <p:txBody>
+          <a:bodyPr wrap="square" rtlCol="0">
+            <a:spAutoFit/>
+          </a:bodyPr>
+          <a:lstStyle/>
+          <a:p>
+            <a:pPr>
+              <a:lnSpc>
+                <a:spcPts val="2200"/>
+              </a:lnSpc>
+            </a:pPr>
+            <a:r>
+              <a:rPr lang="hu-HU" sz="1600" dirty="0">
+                <a:solidFill>
+                  <a:schemeClr val="bg2">
+                    <a:lumMod val="25000"/>
+                  </a:schemeClr>
+                </a:solidFill>
+                <a:latin typeface="Montserrat" panose="02000505000000020004" pitchFamily="2" charset="0"/>
+                <a:cs typeface="Poppins"/>
+                <a:sym typeface="Poppins"/>
+                <a:rtl val="0"/>
+              </a:rPr>
+              <a:t>Számottevő</a:t>
+            </a:r>
+            <a:r>
+              <a:rPr lang="en-US" sz="1600" dirty="0">
+                <a:solidFill>
+                  <a:schemeClr val="bg2">
+                    <a:lumMod val="25000"/>
+                  </a:schemeClr>
+                </a:solidFill>
+                <a:latin typeface="Montserrat" panose="02000505000000020004" pitchFamily="2" charset="0"/>
+                <a:cs typeface="Poppins"/>
+                <a:sym typeface="Poppins"/>
+                <a:rtl val="0"/>
+              </a:rPr>
+              <a:t> </a:t>
+            </a:r>
+            <a:r>
+              <a:rPr lang="en-US" sz="1600" dirty="0" err="1">
+                <a:solidFill>
+                  <a:schemeClr val="bg2">
+                    <a:lumMod val="25000"/>
+                  </a:schemeClr>
+                </a:solidFill>
+                <a:latin typeface="Montserrat" panose="02000505000000020004" pitchFamily="2" charset="0"/>
+                <a:cs typeface="Poppins"/>
+                <a:sym typeface="Poppins"/>
+                <a:rtl val="0"/>
+              </a:rPr>
+              <a:t>tapasztalat</a:t>
+            </a:r>
+            <a:r>
+              <a:rPr lang="hu-HU" sz="1600" dirty="0" err="1">
+                <a:solidFill>
+                  <a:schemeClr val="bg2">
+                    <a:lumMod val="25000"/>
+                  </a:schemeClr>
+                </a:solidFill>
+                <a:latin typeface="Montserrat" panose="02000505000000020004" pitchFamily="2" charset="0"/>
+                <a:cs typeface="Poppins"/>
+                <a:sym typeface="Poppins"/>
+                <a:rtl val="0"/>
+              </a:rPr>
+              <a:t>unk</a:t>
+            </a:r>
+            <a:r>
+              <a:rPr lang="hu-HU" sz="1600" dirty="0">
+                <a:solidFill>
+                  <a:schemeClr val="bg2">
+                    <a:lumMod val="25000"/>
+                  </a:schemeClr>
+                </a:solidFill>
+                <a:latin typeface="Montserrat" panose="02000505000000020004" pitchFamily="2" charset="0"/>
+                <a:cs typeface="Poppins"/>
+                <a:sym typeface="Poppins"/>
+                <a:rtl val="0"/>
+              </a:rPr>
+              <a:t> van</a:t>
+            </a:r>
+            <a:r>
+              <a:rPr lang="en-US" sz="1600" dirty="0">
+                <a:solidFill>
+                  <a:schemeClr val="bg2">
+                    <a:lumMod val="25000"/>
+                  </a:schemeClr>
+                </a:solidFill>
+                <a:latin typeface="Montserrat" panose="02000505000000020004" pitchFamily="2" charset="0"/>
+                <a:cs typeface="Poppins"/>
+                <a:sym typeface="Poppins"/>
+                <a:rtl val="0"/>
+              </a:rPr>
+              <a:t> </a:t>
+            </a:r>
+            <a:r>
+              <a:rPr lang="en-US" sz="1600" dirty="0" err="1">
+                <a:solidFill>
+                  <a:schemeClr val="bg2">
+                    <a:lumMod val="25000"/>
+                  </a:schemeClr>
+                </a:solidFill>
+                <a:latin typeface="Montserrat" panose="02000505000000020004" pitchFamily="2" charset="0"/>
+                <a:cs typeface="Poppins"/>
+                <a:sym typeface="Poppins"/>
+                <a:rtl val="0"/>
+              </a:rPr>
+              <a:t>webes</a:t>
+            </a:r>
+            <a:r>
+              <a:rPr lang="en-US" sz="1600" dirty="0">
+                <a:solidFill>
+                  <a:schemeClr val="bg2">
+                    <a:lumMod val="25000"/>
+                  </a:schemeClr>
+                </a:solidFill>
+                <a:latin typeface="Montserrat" panose="02000505000000020004" pitchFamily="2" charset="0"/>
+                <a:cs typeface="Poppins"/>
+                <a:sym typeface="Poppins"/>
+                <a:rtl val="0"/>
+              </a:rPr>
+              <a:t> </a:t>
+            </a:r>
+            <a:r>
+              <a:rPr lang="en-US" sz="1600" dirty="0" err="1">
+                <a:solidFill>
+                  <a:schemeClr val="bg2">
+                    <a:lumMod val="25000"/>
+                  </a:schemeClr>
+                </a:solidFill>
+                <a:latin typeface="Montserrat" panose="02000505000000020004" pitchFamily="2" charset="0"/>
+                <a:cs typeface="Poppins"/>
+                <a:sym typeface="Poppins"/>
+                <a:rtl val="0"/>
+              </a:rPr>
+              <a:t>és</a:t>
+            </a:r>
+            <a:r>
+              <a:rPr lang="en-US" sz="1600" dirty="0">
+                <a:solidFill>
+                  <a:schemeClr val="bg2">
+                    <a:lumMod val="25000"/>
+                  </a:schemeClr>
+                </a:solidFill>
+                <a:latin typeface="Montserrat" panose="02000505000000020004" pitchFamily="2" charset="0"/>
+                <a:cs typeface="Poppins"/>
+                <a:sym typeface="Poppins"/>
+                <a:rtl val="0"/>
+              </a:rPr>
+              <a:t> </a:t>
+            </a:r>
+            <a:r>
+              <a:rPr lang="en-US" sz="1600" dirty="0" err="1">
+                <a:solidFill>
+                  <a:schemeClr val="bg2">
+                    <a:lumMod val="25000"/>
+                  </a:schemeClr>
+                </a:solidFill>
+                <a:latin typeface="Montserrat" panose="02000505000000020004" pitchFamily="2" charset="0"/>
+                <a:cs typeface="Poppins"/>
+                <a:sym typeface="Poppins"/>
+                <a:rtl val="0"/>
+              </a:rPr>
+              <a:t>asztali</a:t>
+            </a:r>
+            <a:r>
+              <a:rPr lang="en-US" sz="1600" dirty="0">
+                <a:solidFill>
+                  <a:schemeClr val="bg2">
+                    <a:lumMod val="25000"/>
+                  </a:schemeClr>
+                </a:solidFill>
+                <a:latin typeface="Montserrat" panose="02000505000000020004" pitchFamily="2" charset="0"/>
+                <a:cs typeface="Poppins"/>
+                <a:sym typeface="Poppins"/>
+                <a:rtl val="0"/>
+              </a:rPr>
+              <a:t> </a:t>
+            </a:r>
+            <a:r>
+              <a:rPr lang="en-US" sz="1600" dirty="0" err="1">
+                <a:solidFill>
+                  <a:schemeClr val="bg2">
+                    <a:lumMod val="25000"/>
+                  </a:schemeClr>
+                </a:solidFill>
+                <a:latin typeface="Montserrat" panose="02000505000000020004" pitchFamily="2" charset="0"/>
+                <a:cs typeface="Poppins"/>
+                <a:sym typeface="Poppins"/>
+                <a:rtl val="0"/>
+              </a:rPr>
+              <a:t>alkalmazások</a:t>
+            </a:r>
+            <a:r>
+              <a:rPr lang="en-US" sz="1600" dirty="0">
+                <a:solidFill>
+                  <a:schemeClr val="bg2">
+                    <a:lumMod val="25000"/>
+                  </a:schemeClr>
+                </a:solidFill>
+                <a:latin typeface="Montserrat" panose="02000505000000020004" pitchFamily="2" charset="0"/>
+                <a:cs typeface="Poppins"/>
+                <a:sym typeface="Poppins"/>
+                <a:rtl val="0"/>
+              </a:rPr>
+              <a:t> </a:t>
+            </a:r>
+            <a:r>
+              <a:rPr lang="en-US" sz="1600" dirty="0" err="1">
+                <a:solidFill>
+                  <a:schemeClr val="bg2">
+                    <a:lumMod val="25000"/>
+                  </a:schemeClr>
+                </a:solidFill>
+                <a:latin typeface="Montserrat" panose="02000505000000020004" pitchFamily="2" charset="0"/>
+                <a:cs typeface="Poppins"/>
+                <a:sym typeface="Poppins"/>
+                <a:rtl val="0"/>
+              </a:rPr>
+              <a:t>fejlesztésében</a:t>
+            </a:r>
+            <a:r>
+              <a:rPr lang="en-US" sz="1600" dirty="0">
+                <a:solidFill>
+                  <a:schemeClr val="bg2">
+                    <a:lumMod val="25000"/>
+                  </a:schemeClr>
+                </a:solidFill>
+                <a:latin typeface="Montserrat" panose="02000505000000020004" pitchFamily="2" charset="0"/>
+                <a:cs typeface="Poppins"/>
+                <a:sym typeface="Poppins"/>
+                <a:rtl val="0"/>
+              </a:rPr>
+              <a:t>,</a:t>
+            </a:r>
+            <a:endParaRPr lang="en-US" sz="1400" dirty="0">
+              <a:solidFill>
+                <a:schemeClr val="bg2">
+                  <a:lumMod val="25000"/>
+                </a:schemeClr>
+              </a:solidFill>
+              <a:latin typeface="Montserrat" panose="02000505000000020004" pitchFamily="2" charset="0"/>
+              <a:cs typeface="Poppins"/>
+              <a:sym typeface="Poppins"/>
+              <a:rtl val="0"/>
+            </a:endParaRPr>
+          </a:p>
+        </p:txBody>
+      </p:sp>
+      <p:sp>
+        <p:nvSpPr>
+          <p:cNvPr id="92" name="TextBox 91">
+            <a:extLst>
+              <a:ext uri="{FF2B5EF4-FFF2-40B4-BE49-F238E27FC236}">
+                <a16:creationId xmlns:a16="http://schemas.microsoft.com/office/drawing/2014/main" id="{960BBC15-5E2C-489F-8995-8D7ECA5EE310}"/>
+              </a:ext>
+            </a:extLst>
+          </p:cNvPr>
+          <p:cNvSpPr txBox="1"/>
+          <p:nvPr/>
+        </p:nvSpPr>
+        <p:spPr>
+          <a:xfrm>
+            <a:off x="2307054" y="3464451"/>
+            <a:ext cx="1467068" cy="369332"/>
+          </a:xfrm>
+          <a:prstGeom prst="rect">
+            <a:avLst/>
+          </a:prstGeom>
+          <a:noFill/>
+        </p:spPr>
+        <p:txBody>
+          <a:bodyPr wrap="none" rtlCol="0">
+            <a:spAutoFit/>
+          </a:bodyPr>
+          <a:lstStyle/>
+          <a:p>
+            <a:r>
+              <a:rPr lang="hu-HU" dirty="0">
+                <a:gradFill>
+                  <a:gsLst>
+                    <a:gs pos="0">
+                      <a:srgbClr val="5D28FE"/>
+                    </a:gs>
+                    <a:gs pos="100000">
+                      <a:srgbClr val="BB66DD"/>
+                    </a:gs>
+                  </a:gsLst>
+                  <a:lin ang="10800000" scaled="1"/>
+                </a:gradFill>
+                <a:latin typeface="Montserrat ExtraBold" panose="00000900000000000000" pitchFamily="2" charset="0"/>
+                <a:cs typeface="Poppins"/>
+                <a:sym typeface="Poppins"/>
+                <a:rtl val="0"/>
+              </a:rPr>
+              <a:t>Erősségek</a:t>
+            </a:r>
+            <a:endParaRPr lang="en-US" dirty="0">
+              <a:gradFill>
+                <a:gsLst>
+                  <a:gs pos="0">
+                    <a:srgbClr val="5D28FE"/>
+                  </a:gs>
+                  <a:gs pos="100000">
+                    <a:srgbClr val="BB66DD"/>
+                  </a:gs>
+                </a:gsLst>
+                <a:lin ang="10800000" scaled="1"/>
+              </a:gradFill>
+              <a:latin typeface="Montserrat ExtraBold" panose="00000900000000000000" pitchFamily="2" charset="0"/>
+              <a:cs typeface="Poppins"/>
+              <a:sym typeface="Poppins"/>
+              <a:rtl val="0"/>
+            </a:endParaRPr>
+          </a:p>
+        </p:txBody>
+      </p:sp>
+      <p:sp>
+        <p:nvSpPr>
+          <p:cNvPr id="81" name="Freeform: Shape 80">
+            <a:extLst>
+              <a:ext uri="{FF2B5EF4-FFF2-40B4-BE49-F238E27FC236}">
+                <a16:creationId xmlns:a16="http://schemas.microsoft.com/office/drawing/2014/main" id="{9FEE7E67-7ADE-4E67-BEC8-32167C43CB64}"/>
+              </a:ext>
+            </a:extLst>
+          </p:cNvPr>
+          <p:cNvSpPr/>
+          <p:nvPr/>
+        </p:nvSpPr>
+        <p:spPr>
+          <a:xfrm>
+            <a:off x="6322028" y="3275489"/>
+            <a:ext cx="1332166" cy="1332166"/>
+          </a:xfrm>
+          <a:custGeom>
+            <a:avLst/>
+            <a:gdLst>
+              <a:gd name="connsiteX0" fmla="*/ 0 w 1332166"/>
+              <a:gd name="connsiteY0" fmla="*/ 0 h 1332166"/>
+              <a:gd name="connsiteX1" fmla="*/ 1332166 w 1332166"/>
+              <a:gd name="connsiteY1" fmla="*/ 0 h 1332166"/>
+              <a:gd name="connsiteX2" fmla="*/ 1332166 w 1332166"/>
+              <a:gd name="connsiteY2" fmla="*/ 1332167 h 1332166"/>
+              <a:gd name="connsiteX3" fmla="*/ 0 w 1332166"/>
+              <a:gd name="connsiteY3" fmla="*/ 1332167 h 1332166"/>
+            </a:gdLst>
+            <a:ahLst/>
+            <a:cxnLst>
+              <a:cxn ang="0">
+                <a:pos x="connsiteX0" y="connsiteY0"/>
+              </a:cxn>
+              <a:cxn ang="0">
+                <a:pos x="connsiteX1" y="connsiteY1"/>
+              </a:cxn>
+              <a:cxn ang="0">
+                <a:pos x="connsiteX2" y="connsiteY2"/>
+              </a:cxn>
+              <a:cxn ang="0">
+                <a:pos x="connsiteX3" y="connsiteY3"/>
+              </a:cxn>
+            </a:cxnLst>
+            <a:rect l="l" t="t" r="r" b="b"/>
+            <a:pathLst>
+              <a:path w="1332166" h="1332166">
+                <a:moveTo>
+                  <a:pt x="0" y="0"/>
+                </a:moveTo>
+                <a:lnTo>
+                  <a:pt x="1332166" y="0"/>
+                </a:lnTo>
+                <a:lnTo>
+                  <a:pt x="1332166" y="1332167"/>
+                </a:lnTo>
+                <a:lnTo>
+                  <a:pt x="0" y="1332167"/>
+                </a:lnTo>
+                <a:close/>
+              </a:path>
+            </a:pathLst>
+          </a:custGeom>
+          <a:solidFill>
+            <a:schemeClr val="bg2">
+              <a:lumMod val="25000"/>
+            </a:schemeClr>
+          </a:solidFill>
+          <a:ln w="9525" cap="flat">
+            <a:noFill/>
+            <a:prstDash val="solid"/>
+            <a:miter/>
+          </a:ln>
+        </p:spPr>
+        <p:txBody>
+          <a:bodyPr rtlCol="0" anchor="ctr"/>
+          <a:lstStyle/>
+          <a:p>
+            <a:endParaRPr lang="en-US">
+              <a:solidFill>
+                <a:prstClr val="black"/>
+              </a:solidFill>
+              <a:latin typeface="Montserrat"/>
+            </a:endParaRPr>
+          </a:p>
+        </p:txBody>
+      </p:sp>
+      <p:sp>
+        <p:nvSpPr>
+          <p:cNvPr id="93" name="Freeform: Shape 92">
+            <a:extLst>
+              <a:ext uri="{FF2B5EF4-FFF2-40B4-BE49-F238E27FC236}">
+                <a16:creationId xmlns:a16="http://schemas.microsoft.com/office/drawing/2014/main" id="{3122C8E7-869C-4529-BC7C-D2BC65E84EE5}"/>
+              </a:ext>
+            </a:extLst>
+          </p:cNvPr>
+          <p:cNvSpPr/>
+          <p:nvPr/>
+        </p:nvSpPr>
+        <p:spPr>
+          <a:xfrm>
+            <a:off x="687705" y="3275489"/>
+            <a:ext cx="1332166" cy="1332166"/>
+          </a:xfrm>
+          <a:custGeom>
+            <a:avLst/>
+            <a:gdLst>
+              <a:gd name="connsiteX0" fmla="*/ 0 w 1332166"/>
+              <a:gd name="connsiteY0" fmla="*/ 0 h 1332166"/>
+              <a:gd name="connsiteX1" fmla="*/ 1332167 w 1332166"/>
+              <a:gd name="connsiteY1" fmla="*/ 0 h 1332166"/>
+              <a:gd name="connsiteX2" fmla="*/ 1332167 w 1332166"/>
+              <a:gd name="connsiteY2" fmla="*/ 1332167 h 1332166"/>
+              <a:gd name="connsiteX3" fmla="*/ 0 w 1332166"/>
+              <a:gd name="connsiteY3" fmla="*/ 1332167 h 1332166"/>
+            </a:gdLst>
+            <a:ahLst/>
+            <a:cxnLst>
+              <a:cxn ang="0">
+                <a:pos x="connsiteX0" y="connsiteY0"/>
+              </a:cxn>
+              <a:cxn ang="0">
+                <a:pos x="connsiteX1" y="connsiteY1"/>
+              </a:cxn>
+              <a:cxn ang="0">
+                <a:pos x="connsiteX2" y="connsiteY2"/>
+              </a:cxn>
+              <a:cxn ang="0">
+                <a:pos x="connsiteX3" y="connsiteY3"/>
+              </a:cxn>
+            </a:cxnLst>
+            <a:rect l="l" t="t" r="r" b="b"/>
+            <a:pathLst>
+              <a:path w="1332166" h="1332166">
+                <a:moveTo>
+                  <a:pt x="0" y="0"/>
+                </a:moveTo>
+                <a:lnTo>
+                  <a:pt x="1332167" y="0"/>
+                </a:lnTo>
+                <a:lnTo>
+                  <a:pt x="1332167" y="1332167"/>
+                </a:lnTo>
+                <a:lnTo>
+                  <a:pt x="0" y="1332167"/>
+                </a:lnTo>
+                <a:close/>
+              </a:path>
+            </a:pathLst>
+          </a:custGeom>
+          <a:gradFill flip="none" rotWithShape="1">
+            <a:gsLst>
+              <a:gs pos="0">
+                <a:srgbClr val="5D28FE"/>
+              </a:gs>
+              <a:gs pos="100000">
+                <a:srgbClr val="BB66DD"/>
+              </a:gs>
+            </a:gsLst>
+            <a:path path="circle">
+              <a:fillToRect l="100000" t="100000"/>
+            </a:path>
+            <a:tileRect r="-100000" b="-100000"/>
+          </a:gradFill>
+          <a:ln>
+            <a:noFill/>
+          </a:ln>
+        </p:spPr>
+        <p:style>
+          <a:lnRef idx="2">
+            <a:schemeClr val="accent1">
+              <a:shade val="50000"/>
+            </a:schemeClr>
+          </a:lnRef>
+          <a:fillRef idx="1">
+            <a:schemeClr val="accent1"/>
+          </a:fillRef>
+          <a:effectRef idx="0">
+            <a:schemeClr val="accent1"/>
+          </a:effectRef>
+          <a:fontRef idx="minor">
+            <a:schemeClr val="lt1"/>
+          </a:fontRef>
+        </p:style>
+        <p:txBody>
+          <a:bodyPr rtlCol="0" anchor="ctr"/>
+          <a:lstStyle/>
+          <a:p>
+            <a:pPr algn="ctr"/>
+            <a:endParaRPr lang="en-US">
+              <a:solidFill>
+                <a:schemeClr val="lt1"/>
+              </a:solidFill>
+            </a:endParaRPr>
+          </a:p>
+        </p:txBody>
+      </p:sp>
+      <p:sp>
+        <p:nvSpPr>
+          <p:cNvPr id="94" name="TextBox 93">
+            <a:extLst>
+              <a:ext uri="{FF2B5EF4-FFF2-40B4-BE49-F238E27FC236}">
+                <a16:creationId xmlns:a16="http://schemas.microsoft.com/office/drawing/2014/main" id="{6FE083B4-FECD-48E8-9302-74F87F9A0147}"/>
+              </a:ext>
+            </a:extLst>
+          </p:cNvPr>
+          <p:cNvSpPr txBox="1"/>
+          <p:nvPr/>
+        </p:nvSpPr>
+        <p:spPr>
+          <a:xfrm>
+            <a:off x="924025" y="3526074"/>
+            <a:ext cx="859526" cy="830997"/>
+          </a:xfrm>
+          <a:prstGeom prst="rect">
+            <a:avLst/>
+          </a:prstGeom>
+          <a:noFill/>
+        </p:spPr>
+        <p:txBody>
+          <a:bodyPr wrap="square" rtlCol="0">
+            <a:spAutoFit/>
+          </a:bodyPr>
+          <a:lstStyle/>
+          <a:p>
+            <a:pPr algn="ctr"/>
+            <a:r>
+              <a:rPr lang="en-US" sz="4800" dirty="0">
+                <a:solidFill>
+                  <a:schemeClr val="bg1"/>
+                </a:solidFill>
+                <a:latin typeface="Montserrat ExtraBold" panose="00000900000000000000" pitchFamily="2" charset="0"/>
+                <a:cs typeface="Poppins"/>
+                <a:sym typeface="Poppins"/>
+                <a:rtl val="0"/>
+              </a:rPr>
+              <a:t>S</a:t>
+            </a:r>
+          </a:p>
+        </p:txBody>
+      </p:sp>
+      <p:sp>
+        <p:nvSpPr>
+          <p:cNvPr id="36" name="TextBox 35">
+            <a:extLst>
+              <a:ext uri="{FF2B5EF4-FFF2-40B4-BE49-F238E27FC236}">
+                <a16:creationId xmlns:a16="http://schemas.microsoft.com/office/drawing/2014/main" id="{C594F892-A806-43A6-B13D-68F78A76649C}"/>
+              </a:ext>
+            </a:extLst>
+          </p:cNvPr>
+          <p:cNvSpPr txBox="1"/>
+          <p:nvPr/>
+        </p:nvSpPr>
+        <p:spPr>
+          <a:xfrm>
+            <a:off x="6558348" y="3526074"/>
+            <a:ext cx="859526" cy="830997"/>
+          </a:xfrm>
+          <a:prstGeom prst="rect">
+            <a:avLst/>
+          </a:prstGeom>
+          <a:noFill/>
+        </p:spPr>
+        <p:txBody>
+          <a:bodyPr wrap="square" rtlCol="0">
+            <a:spAutoFit/>
+          </a:bodyPr>
+          <a:lstStyle/>
+          <a:p>
+            <a:pPr algn="ctr"/>
+            <a:r>
+              <a:rPr lang="en-US" sz="4800" dirty="0">
+                <a:solidFill>
+                  <a:schemeClr val="bg1"/>
+                </a:solidFill>
+                <a:latin typeface="Montserrat ExtraBold" panose="00000900000000000000" pitchFamily="2" charset="0"/>
+                <a:cs typeface="Poppins"/>
+                <a:sym typeface="Poppins"/>
+                <a:rtl val="0"/>
+              </a:rPr>
+              <a:t>O</a:t>
+            </a:r>
+          </a:p>
+        </p:txBody>
+      </p:sp>
+      <p:sp>
+        <p:nvSpPr>
+          <p:cNvPr id="39" name="TextBox 38">
+            <a:extLst>
+              <a:ext uri="{FF2B5EF4-FFF2-40B4-BE49-F238E27FC236}">
+                <a16:creationId xmlns:a16="http://schemas.microsoft.com/office/drawing/2014/main" id="{18A89E78-433E-4570-BD64-4929224E95E3}"/>
+              </a:ext>
+            </a:extLst>
+          </p:cNvPr>
+          <p:cNvSpPr txBox="1"/>
+          <p:nvPr/>
+        </p:nvSpPr>
+        <p:spPr>
+          <a:xfrm>
+            <a:off x="7941314" y="3781981"/>
+            <a:ext cx="4215882" cy="918841"/>
+          </a:xfrm>
+          <a:prstGeom prst="rect">
+            <a:avLst/>
+          </a:prstGeom>
+          <a:noFill/>
+        </p:spPr>
+        <p:txBody>
+          <a:bodyPr wrap="square" rtlCol="0">
+            <a:spAutoFit/>
+          </a:bodyPr>
+          <a:lstStyle/>
+          <a:p>
+            <a:pPr>
+              <a:lnSpc>
+                <a:spcPts val="2200"/>
+              </a:lnSpc>
+            </a:pPr>
+            <a:r>
+              <a:rPr lang="hu-HU" sz="1600" dirty="0">
+                <a:solidFill>
+                  <a:schemeClr val="bg2">
+                    <a:lumMod val="25000"/>
+                  </a:schemeClr>
+                </a:solidFill>
+                <a:latin typeface="Montserrat" panose="02000505000000020004" pitchFamily="2" charset="0"/>
+                <a:cs typeface="Poppins"/>
+                <a:sym typeface="Poppins"/>
+                <a:rtl val="0"/>
+              </a:rPr>
+              <a:t>Lehetőségünk nyílik az együttműködés készségét fejleszteni a csapatmunkának köszönhetően.</a:t>
+            </a:r>
+            <a:endParaRPr lang="en-US" sz="1600" dirty="0">
+              <a:solidFill>
+                <a:schemeClr val="bg2">
+                  <a:lumMod val="25000"/>
+                </a:schemeClr>
+              </a:solidFill>
+              <a:latin typeface="Montserrat" panose="02000505000000020004" pitchFamily="2" charset="0"/>
+              <a:cs typeface="Poppins"/>
+              <a:sym typeface="Poppins"/>
+              <a:rtl val="0"/>
+            </a:endParaRPr>
+          </a:p>
+        </p:txBody>
+      </p:sp>
+      <p:sp>
+        <p:nvSpPr>
+          <p:cNvPr id="40" name="TextBox 39">
+            <a:extLst>
+              <a:ext uri="{FF2B5EF4-FFF2-40B4-BE49-F238E27FC236}">
+                <a16:creationId xmlns:a16="http://schemas.microsoft.com/office/drawing/2014/main" id="{6CAEA254-7458-4209-AB60-A8FD9432E771}"/>
+              </a:ext>
+            </a:extLst>
+          </p:cNvPr>
+          <p:cNvSpPr txBox="1"/>
+          <p:nvPr/>
+        </p:nvSpPr>
+        <p:spPr>
+          <a:xfrm>
+            <a:off x="7941314" y="3464451"/>
+            <a:ext cx="1781257" cy="369332"/>
+          </a:xfrm>
+          <a:prstGeom prst="rect">
+            <a:avLst/>
+          </a:prstGeom>
+          <a:noFill/>
+        </p:spPr>
+        <p:txBody>
+          <a:bodyPr wrap="none" rtlCol="0">
+            <a:spAutoFit/>
+          </a:bodyPr>
+          <a:lstStyle/>
+          <a:p>
+            <a:r>
+              <a:rPr lang="hu-HU" dirty="0">
+                <a:solidFill>
+                  <a:schemeClr val="bg2">
+                    <a:lumMod val="25000"/>
+                  </a:schemeClr>
+                </a:solidFill>
+                <a:latin typeface="Montserrat ExtraBold" panose="00000900000000000000" pitchFamily="2" charset="0"/>
+                <a:cs typeface="Poppins"/>
+                <a:sym typeface="Poppins"/>
+                <a:rtl val="0"/>
+              </a:rPr>
+              <a:t>Lehetőségek</a:t>
+            </a:r>
+            <a:endParaRPr lang="en-US" dirty="0">
+              <a:solidFill>
+                <a:schemeClr val="bg2">
+                  <a:lumMod val="25000"/>
+                </a:schemeClr>
+              </a:solidFill>
+              <a:latin typeface="Montserrat ExtraBold" panose="00000900000000000000" pitchFamily="2" charset="0"/>
+              <a:cs typeface="Poppins"/>
+              <a:sym typeface="Poppins"/>
+              <a:rtl val="0"/>
+            </a:endParaRPr>
+          </a:p>
+        </p:txBody>
+      </p:sp>
+      <p:sp>
+        <p:nvSpPr>
+          <p:cNvPr id="57" name="Rectangle 56">
+            <a:extLst>
+              <a:ext uri="{FF2B5EF4-FFF2-40B4-BE49-F238E27FC236}">
+                <a16:creationId xmlns:a16="http://schemas.microsoft.com/office/drawing/2014/main" id="{9E96AA28-ADF6-4B19-AFE8-277951610AAE}"/>
+              </a:ext>
+            </a:extLst>
+          </p:cNvPr>
+          <p:cNvSpPr/>
+          <p:nvPr/>
+        </p:nvSpPr>
+        <p:spPr>
+          <a:xfrm rot="5400000">
+            <a:off x="4970828" y="-1919"/>
+            <a:ext cx="2250345" cy="11469491"/>
+          </a:xfrm>
+          <a:prstGeom prst="rect">
+            <a:avLst/>
+          </a:prstGeom>
+          <a:solidFill>
+            <a:schemeClr val="bg1"/>
+          </a:solidFill>
+          <a:ln>
+            <a:noFill/>
+          </a:ln>
+        </p:spPr>
+        <p:style>
+          <a:lnRef idx="2">
+            <a:schemeClr val="accent1">
+              <a:shade val="50000"/>
+            </a:schemeClr>
+          </a:lnRef>
+          <a:fillRef idx="1">
+            <a:schemeClr val="accent1"/>
+          </a:fillRef>
+          <a:effectRef idx="0">
+            <a:schemeClr val="accent1"/>
+          </a:effectRef>
+          <a:fontRef idx="minor">
+            <a:schemeClr val="lt1"/>
+          </a:fontRef>
+        </p:style>
+        <p:txBody>
+          <a:bodyPr rtlCol="0" anchor="ctr"/>
+          <a:lstStyle/>
+          <a:p>
+            <a:pPr algn="ctr"/>
+            <a:endParaRPr lang="en-US" dirty="0">
+              <a:solidFill>
+                <a:schemeClr val="lt1"/>
+              </a:solidFill>
+            </a:endParaRPr>
+          </a:p>
+        </p:txBody>
+      </p:sp>
+      <p:sp>
+        <p:nvSpPr>
+          <p:cNvPr id="27" name="TextBox 26">
+            <a:extLst>
+              <a:ext uri="{FF2B5EF4-FFF2-40B4-BE49-F238E27FC236}">
+                <a16:creationId xmlns:a16="http://schemas.microsoft.com/office/drawing/2014/main" id="{30E38A96-ECAE-4DD5-B775-C640A4913C0B}"/>
+              </a:ext>
+            </a:extLst>
+          </p:cNvPr>
+          <p:cNvSpPr txBox="1"/>
+          <p:nvPr/>
+        </p:nvSpPr>
+        <p:spPr>
+          <a:xfrm>
+            <a:off x="2307054" y="5114147"/>
+            <a:ext cx="3797413" cy="918841"/>
+          </a:xfrm>
+          <a:prstGeom prst="rect">
+            <a:avLst/>
+          </a:prstGeom>
+          <a:noFill/>
+        </p:spPr>
+        <p:txBody>
+          <a:bodyPr wrap="square" rtlCol="0">
+            <a:spAutoFit/>
+          </a:bodyPr>
+          <a:lstStyle/>
+          <a:p>
+            <a:pPr>
+              <a:lnSpc>
+                <a:spcPts val="2200"/>
+              </a:lnSpc>
+            </a:pPr>
+            <a:r>
+              <a:rPr lang="en-US" sz="1600" dirty="0" err="1">
+                <a:solidFill>
+                  <a:schemeClr val="bg2">
+                    <a:lumMod val="25000"/>
+                  </a:schemeClr>
+                </a:solidFill>
+                <a:latin typeface="Montserrat" panose="02000505000000020004" pitchFamily="2" charset="0"/>
+                <a:cs typeface="Poppins"/>
+                <a:sym typeface="Poppins"/>
+                <a:rtl val="0"/>
+              </a:rPr>
+              <a:t>Mobilalkalmazás-fejlesztésben</a:t>
+            </a:r>
+            <a:r>
+              <a:rPr lang="en-US" sz="1600" dirty="0">
+                <a:solidFill>
+                  <a:schemeClr val="bg2">
+                    <a:lumMod val="25000"/>
+                  </a:schemeClr>
+                </a:solidFill>
+                <a:latin typeface="Montserrat" panose="02000505000000020004" pitchFamily="2" charset="0"/>
+                <a:cs typeface="Poppins"/>
+                <a:sym typeface="Poppins"/>
+                <a:rtl val="0"/>
+              </a:rPr>
+              <a:t> </a:t>
+            </a:r>
+            <a:r>
+              <a:rPr lang="hu-HU" sz="1600" dirty="0">
+                <a:solidFill>
+                  <a:schemeClr val="bg2">
+                    <a:lumMod val="25000"/>
+                  </a:schemeClr>
+                </a:solidFill>
+                <a:latin typeface="Montserrat" panose="02000505000000020004" pitchFamily="2" charset="0"/>
+                <a:cs typeface="Poppins"/>
+                <a:sym typeface="Poppins"/>
+                <a:rtl val="0"/>
+              </a:rPr>
+              <a:t>nem rendelkezünk elég tapasztalattal.</a:t>
+            </a:r>
+            <a:endParaRPr lang="en-US" sz="1400" dirty="0">
+              <a:solidFill>
+                <a:schemeClr val="bg2">
+                  <a:lumMod val="25000"/>
+                </a:schemeClr>
+              </a:solidFill>
+              <a:latin typeface="Montserrat" panose="02000505000000020004" pitchFamily="2" charset="0"/>
+              <a:cs typeface="Poppins"/>
+              <a:sym typeface="Poppins"/>
+              <a:rtl val="0"/>
+            </a:endParaRPr>
+          </a:p>
+        </p:txBody>
+      </p:sp>
+      <p:sp>
+        <p:nvSpPr>
+          <p:cNvPr id="28" name="TextBox 27">
+            <a:extLst>
+              <a:ext uri="{FF2B5EF4-FFF2-40B4-BE49-F238E27FC236}">
+                <a16:creationId xmlns:a16="http://schemas.microsoft.com/office/drawing/2014/main" id="{9E880964-921D-41B2-AF39-0F312D94947A}"/>
+              </a:ext>
+            </a:extLst>
+          </p:cNvPr>
+          <p:cNvSpPr txBox="1"/>
+          <p:nvPr/>
+        </p:nvSpPr>
+        <p:spPr>
+          <a:xfrm>
+            <a:off x="2307054" y="4796617"/>
+            <a:ext cx="1867819" cy="369332"/>
+          </a:xfrm>
+          <a:prstGeom prst="rect">
+            <a:avLst/>
+          </a:prstGeom>
+          <a:noFill/>
+        </p:spPr>
+        <p:txBody>
+          <a:bodyPr wrap="none" rtlCol="0">
+            <a:spAutoFit/>
+          </a:bodyPr>
+          <a:lstStyle/>
+          <a:p>
+            <a:r>
+              <a:rPr lang="hu-HU" dirty="0">
+                <a:solidFill>
+                  <a:schemeClr val="bg2">
+                    <a:lumMod val="25000"/>
+                  </a:schemeClr>
+                </a:solidFill>
+                <a:latin typeface="Montserrat ExtraBold" panose="00000900000000000000" pitchFamily="2" charset="0"/>
+                <a:cs typeface="Poppins"/>
+                <a:sym typeface="Poppins"/>
+                <a:rtl val="0"/>
+              </a:rPr>
+              <a:t>Gyengeségek</a:t>
+            </a:r>
+            <a:endParaRPr lang="en-US" dirty="0">
+              <a:solidFill>
+                <a:schemeClr val="bg2">
+                  <a:lumMod val="25000"/>
+                </a:schemeClr>
+              </a:solidFill>
+              <a:latin typeface="Montserrat ExtraBold" panose="00000900000000000000" pitchFamily="2" charset="0"/>
+              <a:cs typeface="Poppins"/>
+              <a:sym typeface="Poppins"/>
+              <a:rtl val="0"/>
+            </a:endParaRPr>
+          </a:p>
+        </p:txBody>
+      </p:sp>
+      <p:sp>
+        <p:nvSpPr>
+          <p:cNvPr id="99" name="TextBox 98">
+            <a:extLst>
+              <a:ext uri="{FF2B5EF4-FFF2-40B4-BE49-F238E27FC236}">
+                <a16:creationId xmlns:a16="http://schemas.microsoft.com/office/drawing/2014/main" id="{232A09E6-8483-4090-816E-959E3B326AA1}"/>
+              </a:ext>
+            </a:extLst>
+          </p:cNvPr>
+          <p:cNvSpPr txBox="1"/>
+          <p:nvPr/>
+        </p:nvSpPr>
+        <p:spPr>
+          <a:xfrm>
+            <a:off x="1517235" y="1644694"/>
+            <a:ext cx="10113933" cy="1483098"/>
+          </a:xfrm>
+          <a:prstGeom prst="rect">
+            <a:avLst/>
+          </a:prstGeom>
+          <a:noFill/>
+        </p:spPr>
+        <p:txBody>
+          <a:bodyPr wrap="square" rtlCol="0">
+            <a:spAutoFit/>
+          </a:bodyPr>
+          <a:lstStyle/>
+          <a:p>
+            <a:pPr>
+              <a:lnSpc>
+                <a:spcPts val="2200"/>
+              </a:lnSpc>
+            </a:pPr>
+            <a:r>
+              <a:rPr lang="hu-HU" sz="1600" dirty="0">
+                <a:solidFill>
+                  <a:schemeClr val="bg2">
+                    <a:lumMod val="25000"/>
+                  </a:schemeClr>
+                </a:solidFill>
+                <a:latin typeface="Montserrat" panose="02000505000000020004" pitchFamily="2" charset="0"/>
+                <a:cs typeface="Poppins"/>
+                <a:sym typeface="Poppins"/>
+                <a:rtl val="0"/>
+              </a:rPr>
+              <a:t>A </a:t>
+            </a:r>
+            <a:r>
+              <a:rPr lang="hu-HU" sz="1600" dirty="0" err="1">
+                <a:solidFill>
+                  <a:schemeClr val="bg2">
+                    <a:lumMod val="25000"/>
+                  </a:schemeClr>
+                </a:solidFill>
+                <a:latin typeface="Montserrat" panose="02000505000000020004" pitchFamily="2" charset="0"/>
+                <a:cs typeface="Poppins"/>
+                <a:sym typeface="Poppins"/>
+                <a:rtl val="0"/>
+              </a:rPr>
+              <a:t>MyTunes</a:t>
+            </a:r>
+            <a:r>
+              <a:rPr lang="hu-HU" sz="1600" dirty="0">
+                <a:solidFill>
+                  <a:schemeClr val="bg2">
+                    <a:lumMod val="25000"/>
+                  </a:schemeClr>
+                </a:solidFill>
+                <a:latin typeface="Montserrat" panose="02000505000000020004" pitchFamily="2" charset="0"/>
+                <a:cs typeface="Poppins"/>
+                <a:sym typeface="Poppins"/>
+                <a:rtl val="0"/>
+              </a:rPr>
+              <a:t> egy modern, rugalmas és felhasználóközpontú zene-streaming platform, amely a minőségi hangzásra, a személyre szabott ajánlásokra és a tiszta, egyszerű felhasználói élményre helyezi a hangsúlyt. A következő SWOT elemzés áttekintést ad a projekt erősségeiről, gyengeségeiről, lehetőségeiről és a piacon jelen lévő fenyegetésekről, hogy segítsen stratégiai döntések meghozatalában és a szolgáltatás hosszú távú sikerének megalapozásában.</a:t>
+            </a:r>
+            <a:endParaRPr lang="en-US" sz="1600" spc="0" baseline="0" dirty="0">
+              <a:solidFill>
+                <a:schemeClr val="bg2">
+                  <a:lumMod val="25000"/>
+                </a:schemeClr>
+              </a:solidFill>
+              <a:latin typeface="Montserrat" panose="02000505000000020004" pitchFamily="2" charset="0"/>
+              <a:cs typeface="Poppins"/>
+              <a:sym typeface="Poppins"/>
+              <a:rtl val="0"/>
+            </a:endParaRPr>
+          </a:p>
+        </p:txBody>
+      </p:sp>
+      <p:sp>
+        <p:nvSpPr>
+          <p:cNvPr id="56" name="Rectangle 55">
+            <a:extLst>
+              <a:ext uri="{FF2B5EF4-FFF2-40B4-BE49-F238E27FC236}">
+                <a16:creationId xmlns:a16="http://schemas.microsoft.com/office/drawing/2014/main" id="{FC2548A6-03B8-4219-B52F-086BA7CC29FC}"/>
+              </a:ext>
+            </a:extLst>
+          </p:cNvPr>
+          <p:cNvSpPr/>
+          <p:nvPr/>
+        </p:nvSpPr>
+        <p:spPr>
+          <a:xfrm rot="5400000">
+            <a:off x="185239" y="1391744"/>
+            <a:ext cx="1051919" cy="1422401"/>
+          </a:xfrm>
+          <a:prstGeom prst="rect">
+            <a:avLst/>
+          </a:prstGeom>
+          <a:solidFill>
+            <a:schemeClr val="bg1"/>
+          </a:solidFill>
+          <a:ln>
+            <a:noFill/>
+          </a:ln>
+        </p:spPr>
+        <p:style>
+          <a:lnRef idx="2">
+            <a:schemeClr val="accent1">
+              <a:shade val="50000"/>
+            </a:schemeClr>
+          </a:lnRef>
+          <a:fillRef idx="1">
+            <a:schemeClr val="accent1"/>
+          </a:fillRef>
+          <a:effectRef idx="0">
+            <a:schemeClr val="accent1"/>
+          </a:effectRef>
+          <a:fontRef idx="minor">
+            <a:schemeClr val="lt1"/>
+          </a:fontRef>
+        </p:style>
+        <p:txBody>
+          <a:bodyPr rtlCol="0" anchor="ctr"/>
+          <a:lstStyle/>
+          <a:p>
+            <a:pPr algn="ctr"/>
+            <a:endParaRPr lang="en-US">
+              <a:solidFill>
+                <a:schemeClr val="lt1"/>
+              </a:solidFill>
+            </a:endParaRPr>
+          </a:p>
+        </p:txBody>
+      </p:sp>
+      <p:sp>
+        <p:nvSpPr>
+          <p:cNvPr id="95" name="TextBox 94">
+            <a:extLst>
+              <a:ext uri="{FF2B5EF4-FFF2-40B4-BE49-F238E27FC236}">
+                <a16:creationId xmlns:a16="http://schemas.microsoft.com/office/drawing/2014/main" id="{7D7A453F-8DB0-473E-84ED-8E9CC6F9B405}"/>
+              </a:ext>
+            </a:extLst>
+          </p:cNvPr>
+          <p:cNvSpPr txBox="1"/>
+          <p:nvPr/>
+        </p:nvSpPr>
+        <p:spPr>
+          <a:xfrm>
+            <a:off x="596265" y="552725"/>
+            <a:ext cx="2512226" cy="338554"/>
+          </a:xfrm>
+          <a:prstGeom prst="rect">
+            <a:avLst/>
+          </a:prstGeom>
+          <a:noFill/>
+        </p:spPr>
+        <p:txBody>
+          <a:bodyPr wrap="none" rtlCol="0">
+            <a:spAutoFit/>
+          </a:bodyPr>
+          <a:lstStyle/>
+          <a:p>
+            <a:r>
+              <a:rPr lang="hu-HU" sz="1600" dirty="0">
+                <a:solidFill>
+                  <a:schemeClr val="bg2">
+                    <a:lumMod val="25000"/>
+                  </a:schemeClr>
+                </a:solidFill>
+                <a:latin typeface="Montserrat" panose="02000505000000020004" pitchFamily="2" charset="0"/>
+                <a:cs typeface="Poppins"/>
+                <a:sym typeface="Poppins"/>
+                <a:rtl val="0"/>
+              </a:rPr>
+              <a:t>Projekt</a:t>
+            </a:r>
+            <a:r>
+              <a:rPr lang="en-US" sz="1600" dirty="0">
+                <a:solidFill>
+                  <a:schemeClr val="bg2">
+                    <a:lumMod val="25000"/>
+                  </a:schemeClr>
+                </a:solidFill>
+                <a:latin typeface="Montserrat" panose="02000505000000020004" pitchFamily="2" charset="0"/>
+                <a:cs typeface="Poppins"/>
+                <a:sym typeface="Poppins"/>
+                <a:rtl val="0"/>
+              </a:rPr>
+              <a:t> </a:t>
+            </a:r>
+            <a:r>
+              <a:rPr lang="en-US" sz="1600" dirty="0">
+                <a:gradFill>
+                  <a:gsLst>
+                    <a:gs pos="0">
+                      <a:srgbClr val="5D28FE"/>
+                    </a:gs>
+                    <a:gs pos="100000">
+                      <a:srgbClr val="BB66DD"/>
+                    </a:gs>
+                  </a:gsLst>
+                  <a:lin ang="10800000" scaled="1"/>
+                </a:gradFill>
+                <a:latin typeface="Montserrat" panose="02000505000000020004" pitchFamily="2" charset="0"/>
+                <a:cs typeface="Poppins"/>
+                <a:sym typeface="Poppins"/>
+                <a:rtl val="0"/>
+              </a:rPr>
+              <a:t>SWOT </a:t>
+            </a:r>
+            <a:r>
+              <a:rPr lang="hu-HU" sz="1600" dirty="0">
+                <a:gradFill>
+                  <a:gsLst>
+                    <a:gs pos="0">
+                      <a:srgbClr val="5D28FE"/>
+                    </a:gs>
+                    <a:gs pos="100000">
+                      <a:srgbClr val="BB66DD"/>
+                    </a:gs>
+                  </a:gsLst>
+                  <a:lin ang="10800000" scaled="1"/>
+                </a:gradFill>
+                <a:latin typeface="Montserrat" panose="02000505000000020004" pitchFamily="2" charset="0"/>
+                <a:cs typeface="Poppins"/>
+                <a:sym typeface="Poppins"/>
+                <a:rtl val="0"/>
+              </a:rPr>
+              <a:t>Analízis</a:t>
+            </a:r>
+            <a:r>
+              <a:rPr lang="en-US" sz="1600" dirty="0">
+                <a:gradFill>
+                  <a:gsLst>
+                    <a:gs pos="0">
+                      <a:srgbClr val="5D28FE"/>
+                    </a:gs>
+                    <a:gs pos="100000">
+                      <a:srgbClr val="BB66DD"/>
+                    </a:gs>
+                  </a:gsLst>
+                  <a:lin ang="10800000" scaled="1"/>
+                </a:gradFill>
+                <a:latin typeface="Montserrat" panose="02000505000000020004" pitchFamily="2" charset="0"/>
+                <a:cs typeface="Poppins"/>
+                <a:sym typeface="Poppins"/>
+                <a:rtl val="0"/>
+              </a:rPr>
+              <a:t> </a:t>
+            </a:r>
+          </a:p>
+        </p:txBody>
+      </p:sp>
+      <p:sp>
+        <p:nvSpPr>
+          <p:cNvPr id="96" name="TextBox 95">
+            <a:extLst>
+              <a:ext uri="{FF2B5EF4-FFF2-40B4-BE49-F238E27FC236}">
+                <a16:creationId xmlns:a16="http://schemas.microsoft.com/office/drawing/2014/main" id="{E327AAA5-BCBE-463C-9654-CF9DED3B447C}"/>
+              </a:ext>
+            </a:extLst>
+          </p:cNvPr>
+          <p:cNvSpPr txBox="1"/>
+          <p:nvPr/>
+        </p:nvSpPr>
+        <p:spPr>
+          <a:xfrm>
+            <a:off x="596265" y="930648"/>
+            <a:ext cx="8361584" cy="646331"/>
+          </a:xfrm>
+          <a:prstGeom prst="rect">
+            <a:avLst/>
+          </a:prstGeom>
+          <a:noFill/>
+        </p:spPr>
+        <p:txBody>
+          <a:bodyPr wrap="none" rtlCol="0">
+            <a:spAutoFit/>
+          </a:bodyPr>
+          <a:lstStyle/>
+          <a:p>
+            <a:r>
+              <a:rPr lang="hu-HU" sz="3600" dirty="0" err="1">
+                <a:solidFill>
+                  <a:schemeClr val="bg2">
+                    <a:lumMod val="25000"/>
+                  </a:schemeClr>
+                </a:solidFill>
+                <a:latin typeface="Montserrat ExtraBold" panose="00000900000000000000" pitchFamily="2" charset="0"/>
+                <a:cs typeface="Poppins"/>
+                <a:sym typeface="Poppins"/>
+                <a:rtl val="0"/>
+              </a:rPr>
+              <a:t>MyTunes</a:t>
+            </a:r>
+            <a:r>
+              <a:rPr lang="hu-HU" sz="3600" dirty="0">
+                <a:solidFill>
+                  <a:schemeClr val="bg2">
+                    <a:lumMod val="25000"/>
+                  </a:schemeClr>
+                </a:solidFill>
+                <a:latin typeface="Montserrat ExtraBold" panose="00000900000000000000" pitchFamily="2" charset="0"/>
+                <a:cs typeface="Poppins"/>
+                <a:sym typeface="Poppins"/>
+                <a:rtl val="0"/>
+              </a:rPr>
+              <a:t> Projekt </a:t>
+            </a:r>
+            <a:r>
+              <a:rPr lang="en-US" sz="3600" dirty="0">
+                <a:gradFill>
+                  <a:gsLst>
+                    <a:gs pos="0">
+                      <a:srgbClr val="5D28FE"/>
+                    </a:gs>
+                    <a:gs pos="100000">
+                      <a:srgbClr val="BB66DD"/>
+                    </a:gs>
+                  </a:gsLst>
+                  <a:lin ang="10800000" scaled="1"/>
+                </a:gradFill>
+                <a:latin typeface="Montserrat ExtraBold" panose="00000900000000000000" pitchFamily="2" charset="0"/>
+                <a:cs typeface="Poppins"/>
+                <a:sym typeface="Poppins"/>
+                <a:rtl val="0"/>
+              </a:rPr>
+              <a:t>SWOT Anal</a:t>
+            </a:r>
+            <a:r>
+              <a:rPr lang="hu-HU" sz="3600" dirty="0" err="1">
+                <a:gradFill>
+                  <a:gsLst>
+                    <a:gs pos="0">
+                      <a:srgbClr val="5D28FE"/>
+                    </a:gs>
+                    <a:gs pos="100000">
+                      <a:srgbClr val="BB66DD"/>
+                    </a:gs>
+                  </a:gsLst>
+                  <a:lin ang="10800000" scaled="1"/>
+                </a:gradFill>
+                <a:latin typeface="Montserrat ExtraBold" panose="00000900000000000000" pitchFamily="2" charset="0"/>
+                <a:cs typeface="Poppins"/>
+                <a:sym typeface="Poppins"/>
+                <a:rtl val="0"/>
+              </a:rPr>
+              <a:t>ízise</a:t>
+            </a:r>
+            <a:endParaRPr lang="en-US" sz="3600" dirty="0">
+              <a:gradFill>
+                <a:gsLst>
+                  <a:gs pos="0">
+                    <a:srgbClr val="5D28FE"/>
+                  </a:gs>
+                  <a:gs pos="100000">
+                    <a:srgbClr val="BB66DD"/>
+                  </a:gs>
+                </a:gsLst>
+                <a:lin ang="10800000" scaled="1"/>
+              </a:gradFill>
+              <a:latin typeface="Montserrat ExtraBold" panose="00000900000000000000" pitchFamily="2" charset="0"/>
+              <a:cs typeface="Poppins"/>
+              <a:sym typeface="Poppins"/>
+              <a:rtl val="0"/>
+            </a:endParaRPr>
+          </a:p>
+        </p:txBody>
+      </p:sp>
+      <p:sp>
+        <p:nvSpPr>
+          <p:cNvPr id="97" name="Freeform: Shape 96">
+            <a:extLst>
+              <a:ext uri="{FF2B5EF4-FFF2-40B4-BE49-F238E27FC236}">
+                <a16:creationId xmlns:a16="http://schemas.microsoft.com/office/drawing/2014/main" id="{EEA53D05-02D9-431E-9DCE-38B867A9F885}"/>
+              </a:ext>
+            </a:extLst>
+          </p:cNvPr>
+          <p:cNvSpPr/>
+          <p:nvPr/>
+        </p:nvSpPr>
+        <p:spPr>
+          <a:xfrm>
+            <a:off x="687705" y="1749689"/>
+            <a:ext cx="708850" cy="708850"/>
+          </a:xfrm>
+          <a:custGeom>
+            <a:avLst/>
+            <a:gdLst>
+              <a:gd name="connsiteX0" fmla="*/ 708850 w 708850"/>
+              <a:gd name="connsiteY0" fmla="*/ 354425 h 708850"/>
+              <a:gd name="connsiteX1" fmla="*/ 354425 w 708850"/>
+              <a:gd name="connsiteY1" fmla="*/ 708851 h 708850"/>
+              <a:gd name="connsiteX2" fmla="*/ 0 w 708850"/>
+              <a:gd name="connsiteY2" fmla="*/ 354425 h 708850"/>
+              <a:gd name="connsiteX3" fmla="*/ 354425 w 708850"/>
+              <a:gd name="connsiteY3" fmla="*/ 0 h 708850"/>
+              <a:gd name="connsiteX4" fmla="*/ 708850 w 708850"/>
+              <a:gd name="connsiteY4" fmla="*/ 354425 h 708850"/>
+            </a:gdLst>
+            <a:ahLst/>
+            <a:cxnLst>
+              <a:cxn ang="0">
+                <a:pos x="connsiteX0" y="connsiteY0"/>
+              </a:cxn>
+              <a:cxn ang="0">
+                <a:pos x="connsiteX1" y="connsiteY1"/>
+              </a:cxn>
+              <a:cxn ang="0">
+                <a:pos x="connsiteX2" y="connsiteY2"/>
+              </a:cxn>
+              <a:cxn ang="0">
+                <a:pos x="connsiteX3" y="connsiteY3"/>
+              </a:cxn>
+              <a:cxn ang="0">
+                <a:pos x="connsiteX4" y="connsiteY4"/>
+              </a:cxn>
+            </a:cxnLst>
+            <a:rect l="l" t="t" r="r" b="b"/>
+            <a:pathLst>
+              <a:path w="708850" h="708850">
+                <a:moveTo>
+                  <a:pt x="708850" y="354425"/>
+                </a:moveTo>
+                <a:cubicBezTo>
+                  <a:pt x="708850" y="550169"/>
+                  <a:pt x="550169" y="708851"/>
+                  <a:pt x="354425" y="708851"/>
+                </a:cubicBezTo>
+                <a:cubicBezTo>
+                  <a:pt x="158682" y="708851"/>
+                  <a:pt x="0" y="550169"/>
+                  <a:pt x="0" y="354425"/>
+                </a:cubicBezTo>
+                <a:cubicBezTo>
+                  <a:pt x="0" y="158681"/>
+                  <a:pt x="158682" y="0"/>
+                  <a:pt x="354425" y="0"/>
+                </a:cubicBezTo>
+                <a:cubicBezTo>
+                  <a:pt x="550169" y="0"/>
+                  <a:pt x="708850" y="158681"/>
+                  <a:pt x="708850" y="354425"/>
+                </a:cubicBezTo>
+                <a:close/>
+              </a:path>
+            </a:pathLst>
+          </a:custGeom>
+          <a:gradFill>
+            <a:gsLst>
+              <a:gs pos="0">
+                <a:srgbClr val="5D28FE"/>
+              </a:gs>
+              <a:gs pos="100000">
+                <a:srgbClr val="BB66DD"/>
+              </a:gs>
+            </a:gsLst>
+            <a:lin ang="10800000" scaled="1"/>
+          </a:gradFill>
+          <a:ln w="9525" cap="flat">
+            <a:noFill/>
+            <a:prstDash val="solid"/>
+            <a:miter/>
+          </a:ln>
+        </p:spPr>
+        <p:txBody>
+          <a:bodyPr rtlCol="0" anchor="ctr"/>
+          <a:lstStyle/>
+          <a:p>
+            <a:endParaRPr lang="en-US">
+              <a:solidFill>
+                <a:prstClr val="black"/>
+              </a:solidFill>
+              <a:latin typeface="Montserrat"/>
+            </a:endParaRPr>
+          </a:p>
+        </p:txBody>
+      </p:sp>
+      <p:sp>
+        <p:nvSpPr>
+          <p:cNvPr id="98" name="Freeform: Shape 97">
+            <a:extLst>
+              <a:ext uri="{FF2B5EF4-FFF2-40B4-BE49-F238E27FC236}">
+                <a16:creationId xmlns:a16="http://schemas.microsoft.com/office/drawing/2014/main" id="{5D68EEDD-B351-4D73-A4BF-503963FD2BC4}"/>
+              </a:ext>
+            </a:extLst>
+          </p:cNvPr>
+          <p:cNvSpPr/>
+          <p:nvPr/>
+        </p:nvSpPr>
+        <p:spPr>
+          <a:xfrm>
+            <a:off x="920806" y="1982820"/>
+            <a:ext cx="242649" cy="242589"/>
+          </a:xfrm>
+          <a:custGeom>
+            <a:avLst/>
+            <a:gdLst>
+              <a:gd name="connsiteX0" fmla="*/ 241506 w 242649"/>
+              <a:gd name="connsiteY0" fmla="*/ 9716 h 242589"/>
+              <a:gd name="connsiteX1" fmla="*/ 241125 w 242649"/>
+              <a:gd name="connsiteY1" fmla="*/ 8858 h 242589"/>
+              <a:gd name="connsiteX2" fmla="*/ 240840 w 242649"/>
+              <a:gd name="connsiteY2" fmla="*/ 8287 h 242589"/>
+              <a:gd name="connsiteX3" fmla="*/ 238744 w 242649"/>
+              <a:gd name="connsiteY3" fmla="*/ 5239 h 242589"/>
+              <a:gd name="connsiteX4" fmla="*/ 238363 w 242649"/>
+              <a:gd name="connsiteY4" fmla="*/ 4763 h 242589"/>
+              <a:gd name="connsiteX5" fmla="*/ 238077 w 242649"/>
+              <a:gd name="connsiteY5" fmla="*/ 4382 h 242589"/>
+              <a:gd name="connsiteX6" fmla="*/ 237696 w 242649"/>
+              <a:gd name="connsiteY6" fmla="*/ 4096 h 242589"/>
+              <a:gd name="connsiteX7" fmla="*/ 237220 w 242649"/>
+              <a:gd name="connsiteY7" fmla="*/ 3715 h 242589"/>
+              <a:gd name="connsiteX8" fmla="*/ 234172 w 242649"/>
+              <a:gd name="connsiteY8" fmla="*/ 1619 h 242589"/>
+              <a:gd name="connsiteX9" fmla="*/ 233601 w 242649"/>
+              <a:gd name="connsiteY9" fmla="*/ 1333 h 242589"/>
+              <a:gd name="connsiteX10" fmla="*/ 232743 w 242649"/>
+              <a:gd name="connsiteY10" fmla="*/ 953 h 242589"/>
+              <a:gd name="connsiteX11" fmla="*/ 232362 w 242649"/>
+              <a:gd name="connsiteY11" fmla="*/ 857 h 242589"/>
+              <a:gd name="connsiteX12" fmla="*/ 228362 w 242649"/>
+              <a:gd name="connsiteY12" fmla="*/ 0 h 242589"/>
+              <a:gd name="connsiteX13" fmla="*/ 228076 w 242649"/>
+              <a:gd name="connsiteY13" fmla="*/ 0 h 242589"/>
+              <a:gd name="connsiteX14" fmla="*/ 227886 w 242649"/>
+              <a:gd name="connsiteY14" fmla="*/ 0 h 242589"/>
+              <a:gd name="connsiteX15" fmla="*/ 226933 w 242649"/>
+              <a:gd name="connsiteY15" fmla="*/ 0 h 242589"/>
+              <a:gd name="connsiteX16" fmla="*/ 226743 w 242649"/>
+              <a:gd name="connsiteY16" fmla="*/ 0 h 242589"/>
+              <a:gd name="connsiteX17" fmla="*/ 89011 w 242649"/>
+              <a:gd name="connsiteY17" fmla="*/ 6096 h 242589"/>
+              <a:gd name="connsiteX18" fmla="*/ 74533 w 242649"/>
+              <a:gd name="connsiteY18" fmla="*/ 21908 h 242589"/>
+              <a:gd name="connsiteX19" fmla="*/ 90345 w 242649"/>
+              <a:gd name="connsiteY19" fmla="*/ 36386 h 242589"/>
+              <a:gd name="connsiteX20" fmla="*/ 189024 w 242649"/>
+              <a:gd name="connsiteY20" fmla="*/ 32004 h 242589"/>
+              <a:gd name="connsiteX21" fmla="*/ 4429 w 242649"/>
+              <a:gd name="connsiteY21" fmla="*/ 216599 h 242589"/>
+              <a:gd name="connsiteX22" fmla="*/ 4429 w 242649"/>
+              <a:gd name="connsiteY22" fmla="*/ 238125 h 242589"/>
+              <a:gd name="connsiteX23" fmla="*/ 25956 w 242649"/>
+              <a:gd name="connsiteY23" fmla="*/ 238125 h 242589"/>
+              <a:gd name="connsiteX24" fmla="*/ 210550 w 242649"/>
+              <a:gd name="connsiteY24" fmla="*/ 53530 h 242589"/>
+              <a:gd name="connsiteX25" fmla="*/ 206169 w 242649"/>
+              <a:gd name="connsiteY25" fmla="*/ 152209 h 242589"/>
+              <a:gd name="connsiteX26" fmla="*/ 220647 w 242649"/>
+              <a:gd name="connsiteY26" fmla="*/ 168021 h 242589"/>
+              <a:gd name="connsiteX27" fmla="*/ 232077 w 242649"/>
+              <a:gd name="connsiteY27" fmla="*/ 163544 h 242589"/>
+              <a:gd name="connsiteX28" fmla="*/ 236553 w 242649"/>
+              <a:gd name="connsiteY28" fmla="*/ 153448 h 242589"/>
+              <a:gd name="connsiteX29" fmla="*/ 242649 w 242649"/>
+              <a:gd name="connsiteY29" fmla="*/ 15621 h 242589"/>
+              <a:gd name="connsiteX30" fmla="*/ 242649 w 242649"/>
+              <a:gd name="connsiteY30" fmla="*/ 15430 h 242589"/>
+              <a:gd name="connsiteX31" fmla="*/ 242649 w 242649"/>
+              <a:gd name="connsiteY31" fmla="*/ 14573 h 242589"/>
+              <a:gd name="connsiteX32" fmla="*/ 242649 w 242649"/>
+              <a:gd name="connsiteY32" fmla="*/ 14288 h 242589"/>
+              <a:gd name="connsiteX33" fmla="*/ 242649 w 242649"/>
+              <a:gd name="connsiteY33" fmla="*/ 14002 h 242589"/>
+              <a:gd name="connsiteX34" fmla="*/ 241887 w 242649"/>
+              <a:gd name="connsiteY34" fmla="*/ 10001 h 242589"/>
+              <a:gd name="connsiteX35" fmla="*/ 241792 w 242649"/>
+              <a:gd name="connsiteY35" fmla="*/ 9620 h 242589"/>
+            </a:gdLst>
+            <a:ahLst/>
+            <a:cxnLst>
+              <a:cxn ang="0">
+                <a:pos x="connsiteX0" y="connsiteY0"/>
+              </a:cxn>
+              <a:cxn ang="0">
+                <a:pos x="connsiteX1" y="connsiteY1"/>
+              </a:cxn>
+              <a:cxn ang="0">
+                <a:pos x="connsiteX2" y="connsiteY2"/>
+              </a:cxn>
+              <a:cxn ang="0">
+                <a:pos x="connsiteX3" y="connsiteY3"/>
+              </a:cxn>
+              <a:cxn ang="0">
+                <a:pos x="connsiteX4" y="connsiteY4"/>
+              </a:cxn>
+              <a:cxn ang="0">
+                <a:pos x="connsiteX5" y="connsiteY5"/>
+              </a:cxn>
+              <a:cxn ang="0">
+                <a:pos x="connsiteX6" y="connsiteY6"/>
+              </a:cxn>
+              <a:cxn ang="0">
+                <a:pos x="connsiteX7" y="connsiteY7"/>
+              </a:cxn>
+              <a:cxn ang="0">
+                <a:pos x="connsiteX8" y="connsiteY8"/>
+              </a:cxn>
+              <a:cxn ang="0">
+                <a:pos x="connsiteX9" y="connsiteY9"/>
+              </a:cxn>
+              <a:cxn ang="0">
+                <a:pos x="connsiteX10" y="connsiteY10"/>
+              </a:cxn>
+              <a:cxn ang="0">
+                <a:pos x="connsiteX11" y="connsiteY11"/>
+              </a:cxn>
+              <a:cxn ang="0">
+                <a:pos x="connsiteX12" y="connsiteY12"/>
+              </a:cxn>
+              <a:cxn ang="0">
+                <a:pos x="connsiteX13" y="connsiteY13"/>
+              </a:cxn>
+              <a:cxn ang="0">
+                <a:pos x="connsiteX14" y="connsiteY14"/>
+              </a:cxn>
+              <a:cxn ang="0">
+                <a:pos x="connsiteX15" y="connsiteY15"/>
+              </a:cxn>
+              <a:cxn ang="0">
+                <a:pos x="connsiteX16" y="connsiteY16"/>
+              </a:cxn>
+              <a:cxn ang="0">
+                <a:pos x="connsiteX17" y="connsiteY17"/>
+              </a:cxn>
+              <a:cxn ang="0">
+                <a:pos x="connsiteX18" y="connsiteY18"/>
+              </a:cxn>
+              <a:cxn ang="0">
+                <a:pos x="connsiteX19" y="connsiteY19"/>
+              </a:cxn>
+              <a:cxn ang="0">
+                <a:pos x="connsiteX20" y="connsiteY20"/>
+              </a:cxn>
+              <a:cxn ang="0">
+                <a:pos x="connsiteX21" y="connsiteY21"/>
+              </a:cxn>
+              <a:cxn ang="0">
+                <a:pos x="connsiteX22" y="connsiteY22"/>
+              </a:cxn>
+              <a:cxn ang="0">
+                <a:pos x="connsiteX23" y="connsiteY23"/>
+              </a:cxn>
+              <a:cxn ang="0">
+                <a:pos x="connsiteX24" y="connsiteY24"/>
+              </a:cxn>
+              <a:cxn ang="0">
+                <a:pos x="connsiteX25" y="connsiteY25"/>
+              </a:cxn>
+              <a:cxn ang="0">
+                <a:pos x="connsiteX26" y="connsiteY26"/>
+              </a:cxn>
+              <a:cxn ang="0">
+                <a:pos x="connsiteX27" y="connsiteY27"/>
+              </a:cxn>
+              <a:cxn ang="0">
+                <a:pos x="connsiteX28" y="connsiteY28"/>
+              </a:cxn>
+              <a:cxn ang="0">
+                <a:pos x="connsiteX29" y="connsiteY29"/>
+              </a:cxn>
+              <a:cxn ang="0">
+                <a:pos x="connsiteX30" y="connsiteY30"/>
+              </a:cxn>
+              <a:cxn ang="0">
+                <a:pos x="connsiteX31" y="connsiteY31"/>
+              </a:cxn>
+              <a:cxn ang="0">
+                <a:pos x="connsiteX32" y="connsiteY32"/>
+              </a:cxn>
+              <a:cxn ang="0">
+                <a:pos x="connsiteX33" y="connsiteY33"/>
+              </a:cxn>
+              <a:cxn ang="0">
+                <a:pos x="connsiteX34" y="connsiteY34"/>
+              </a:cxn>
+              <a:cxn ang="0">
+                <a:pos x="connsiteX35" y="connsiteY35"/>
+              </a:cxn>
+            </a:cxnLst>
+            <a:rect l="l" t="t" r="r" b="b"/>
+            <a:pathLst>
+              <a:path w="242649" h="242589">
+                <a:moveTo>
+                  <a:pt x="241506" y="9716"/>
+                </a:moveTo>
+                <a:cubicBezTo>
+                  <a:pt x="241506" y="9716"/>
+                  <a:pt x="241221" y="9144"/>
+                  <a:pt x="241125" y="8858"/>
+                </a:cubicBezTo>
+                <a:cubicBezTo>
+                  <a:pt x="241125" y="8668"/>
+                  <a:pt x="240935" y="8477"/>
+                  <a:pt x="240840" y="8287"/>
+                </a:cubicBezTo>
+                <a:cubicBezTo>
+                  <a:pt x="240268" y="7239"/>
+                  <a:pt x="239601" y="6191"/>
+                  <a:pt x="238744" y="5239"/>
+                </a:cubicBezTo>
+                <a:cubicBezTo>
+                  <a:pt x="238649" y="5048"/>
+                  <a:pt x="238458" y="4953"/>
+                  <a:pt x="238363" y="4763"/>
+                </a:cubicBezTo>
+                <a:cubicBezTo>
+                  <a:pt x="238268" y="4667"/>
+                  <a:pt x="238173" y="4477"/>
+                  <a:pt x="238077" y="4382"/>
+                </a:cubicBezTo>
+                <a:cubicBezTo>
+                  <a:pt x="237982" y="4286"/>
+                  <a:pt x="237792" y="4191"/>
+                  <a:pt x="237696" y="4096"/>
+                </a:cubicBezTo>
+                <a:cubicBezTo>
+                  <a:pt x="237506" y="4000"/>
+                  <a:pt x="237411" y="3810"/>
+                  <a:pt x="237220" y="3715"/>
+                </a:cubicBezTo>
+                <a:cubicBezTo>
+                  <a:pt x="236268" y="2858"/>
+                  <a:pt x="235220" y="2191"/>
+                  <a:pt x="234172" y="1619"/>
+                </a:cubicBezTo>
+                <a:cubicBezTo>
+                  <a:pt x="233982" y="1524"/>
+                  <a:pt x="233791" y="1429"/>
+                  <a:pt x="233601" y="1333"/>
+                </a:cubicBezTo>
+                <a:cubicBezTo>
+                  <a:pt x="233315" y="1238"/>
+                  <a:pt x="233029" y="1048"/>
+                  <a:pt x="232743" y="953"/>
+                </a:cubicBezTo>
+                <a:cubicBezTo>
+                  <a:pt x="232648" y="953"/>
+                  <a:pt x="232458" y="953"/>
+                  <a:pt x="232362" y="857"/>
+                </a:cubicBezTo>
+                <a:cubicBezTo>
+                  <a:pt x="231029" y="381"/>
+                  <a:pt x="229695" y="95"/>
+                  <a:pt x="228362" y="0"/>
+                </a:cubicBezTo>
+                <a:cubicBezTo>
+                  <a:pt x="228267" y="0"/>
+                  <a:pt x="228171" y="0"/>
+                  <a:pt x="228076" y="0"/>
+                </a:cubicBezTo>
+                <a:cubicBezTo>
+                  <a:pt x="228076" y="0"/>
+                  <a:pt x="227981" y="0"/>
+                  <a:pt x="227886" y="0"/>
+                </a:cubicBezTo>
+                <a:cubicBezTo>
+                  <a:pt x="227600" y="0"/>
+                  <a:pt x="227219" y="0"/>
+                  <a:pt x="226933" y="0"/>
+                </a:cubicBezTo>
+                <a:cubicBezTo>
+                  <a:pt x="226933" y="0"/>
+                  <a:pt x="226838" y="0"/>
+                  <a:pt x="226743" y="0"/>
+                </a:cubicBezTo>
+                <a:lnTo>
+                  <a:pt x="89011" y="6096"/>
+                </a:lnTo>
+                <a:cubicBezTo>
+                  <a:pt x="80629" y="6477"/>
+                  <a:pt x="74152" y="13525"/>
+                  <a:pt x="74533" y="21908"/>
+                </a:cubicBezTo>
+                <a:cubicBezTo>
+                  <a:pt x="74914" y="30290"/>
+                  <a:pt x="81963" y="36767"/>
+                  <a:pt x="90345" y="36386"/>
+                </a:cubicBezTo>
+                <a:lnTo>
+                  <a:pt x="189024" y="32004"/>
+                </a:lnTo>
+                <a:lnTo>
+                  <a:pt x="4429" y="216599"/>
+                </a:lnTo>
+                <a:cubicBezTo>
+                  <a:pt x="-1476" y="222504"/>
+                  <a:pt x="-1476" y="232124"/>
+                  <a:pt x="4429" y="238125"/>
+                </a:cubicBezTo>
+                <a:cubicBezTo>
+                  <a:pt x="10335" y="244126"/>
+                  <a:pt x="19955" y="244030"/>
+                  <a:pt x="25956" y="238125"/>
+                </a:cubicBezTo>
+                <a:lnTo>
+                  <a:pt x="210550" y="53530"/>
+                </a:lnTo>
+                <a:lnTo>
+                  <a:pt x="206169" y="152209"/>
+                </a:lnTo>
+                <a:cubicBezTo>
+                  <a:pt x="205788" y="160592"/>
+                  <a:pt x="212265" y="167640"/>
+                  <a:pt x="220647" y="168021"/>
+                </a:cubicBezTo>
+                <a:cubicBezTo>
+                  <a:pt x="225123" y="168212"/>
+                  <a:pt x="229124" y="166497"/>
+                  <a:pt x="232077" y="163544"/>
+                </a:cubicBezTo>
+                <a:cubicBezTo>
+                  <a:pt x="234648" y="160972"/>
+                  <a:pt x="236363" y="157448"/>
+                  <a:pt x="236553" y="153448"/>
+                </a:cubicBezTo>
+                <a:lnTo>
+                  <a:pt x="242649" y="15621"/>
+                </a:lnTo>
+                <a:cubicBezTo>
+                  <a:pt x="242649" y="15621"/>
+                  <a:pt x="242649" y="15526"/>
+                  <a:pt x="242649" y="15430"/>
+                </a:cubicBezTo>
+                <a:cubicBezTo>
+                  <a:pt x="242649" y="15145"/>
+                  <a:pt x="242649" y="14859"/>
+                  <a:pt x="242649" y="14573"/>
+                </a:cubicBezTo>
+                <a:cubicBezTo>
+                  <a:pt x="242649" y="14478"/>
+                  <a:pt x="242649" y="14383"/>
+                  <a:pt x="242649" y="14288"/>
+                </a:cubicBezTo>
+                <a:cubicBezTo>
+                  <a:pt x="242649" y="14192"/>
+                  <a:pt x="242649" y="14097"/>
+                  <a:pt x="242649" y="14002"/>
+                </a:cubicBezTo>
+                <a:cubicBezTo>
+                  <a:pt x="242649" y="12668"/>
+                  <a:pt x="242268" y="11335"/>
+                  <a:pt x="241887" y="10001"/>
+                </a:cubicBezTo>
+                <a:cubicBezTo>
+                  <a:pt x="241887" y="9906"/>
+                  <a:pt x="241887" y="9716"/>
+                  <a:pt x="241792" y="9620"/>
+                </a:cubicBezTo>
+                <a:close/>
+              </a:path>
+            </a:pathLst>
+          </a:custGeom>
+          <a:solidFill>
+            <a:srgbClr val="F0F0F0"/>
+          </a:solidFill>
+          <a:ln w="9525" cap="flat">
+            <a:noFill/>
+            <a:prstDash val="solid"/>
+            <a:miter/>
+          </a:ln>
+        </p:spPr>
+        <p:txBody>
+          <a:bodyPr rtlCol="0" anchor="ctr"/>
+          <a:lstStyle/>
+          <a:p>
+            <a:endParaRPr lang="en-US">
+              <a:solidFill>
+                <a:prstClr val="black"/>
+              </a:solidFill>
+              <a:latin typeface="Montserrat"/>
+            </a:endParaRPr>
+          </a:p>
+        </p:txBody>
+      </p:sp>
+      <p:sp>
+        <p:nvSpPr>
+          <p:cNvPr id="85" name="Freeform: Shape 84">
+            <a:extLst>
+              <a:ext uri="{FF2B5EF4-FFF2-40B4-BE49-F238E27FC236}">
+                <a16:creationId xmlns:a16="http://schemas.microsoft.com/office/drawing/2014/main" id="{3017F608-B2AC-4C61-8777-293F3C9F3F7E}"/>
+              </a:ext>
+            </a:extLst>
+          </p:cNvPr>
+          <p:cNvSpPr/>
+          <p:nvPr/>
+        </p:nvSpPr>
+        <p:spPr>
+          <a:xfrm>
+            <a:off x="6322028" y="4607655"/>
+            <a:ext cx="1332166" cy="1332166"/>
+          </a:xfrm>
+          <a:custGeom>
+            <a:avLst/>
+            <a:gdLst>
+              <a:gd name="connsiteX0" fmla="*/ 0 w 1332166"/>
+              <a:gd name="connsiteY0" fmla="*/ 0 h 1332166"/>
+              <a:gd name="connsiteX1" fmla="*/ 1332166 w 1332166"/>
+              <a:gd name="connsiteY1" fmla="*/ 0 h 1332166"/>
+              <a:gd name="connsiteX2" fmla="*/ 1332166 w 1332166"/>
+              <a:gd name="connsiteY2" fmla="*/ 1332166 h 1332166"/>
+              <a:gd name="connsiteX3" fmla="*/ 0 w 1332166"/>
+              <a:gd name="connsiteY3" fmla="*/ 1332166 h 1332166"/>
+            </a:gdLst>
+            <a:ahLst/>
+            <a:cxnLst>
+              <a:cxn ang="0">
+                <a:pos x="connsiteX0" y="connsiteY0"/>
+              </a:cxn>
+              <a:cxn ang="0">
+                <a:pos x="connsiteX1" y="connsiteY1"/>
+              </a:cxn>
+              <a:cxn ang="0">
+                <a:pos x="connsiteX2" y="connsiteY2"/>
+              </a:cxn>
+              <a:cxn ang="0">
+                <a:pos x="connsiteX3" y="connsiteY3"/>
+              </a:cxn>
+            </a:cxnLst>
+            <a:rect l="l" t="t" r="r" b="b"/>
+            <a:pathLst>
+              <a:path w="1332166" h="1332166">
+                <a:moveTo>
+                  <a:pt x="0" y="0"/>
+                </a:moveTo>
+                <a:lnTo>
+                  <a:pt x="1332166" y="0"/>
+                </a:lnTo>
+                <a:lnTo>
+                  <a:pt x="1332166" y="1332166"/>
+                </a:lnTo>
+                <a:lnTo>
+                  <a:pt x="0" y="1332166"/>
+                </a:lnTo>
+                <a:close/>
+              </a:path>
+            </a:pathLst>
+          </a:custGeom>
+          <a:gradFill flip="none" rotWithShape="1">
+            <a:gsLst>
+              <a:gs pos="0">
+                <a:srgbClr val="5D28FE"/>
+              </a:gs>
+              <a:gs pos="100000">
+                <a:srgbClr val="BB66DD"/>
+              </a:gs>
+            </a:gsLst>
+            <a:path path="circle">
+              <a:fillToRect l="100000" t="100000"/>
+            </a:path>
+            <a:tileRect r="-100000" b="-100000"/>
+          </a:gradFill>
+          <a:ln w="9525" cap="flat">
+            <a:noFill/>
+            <a:prstDash val="solid"/>
+            <a:miter/>
+          </a:ln>
+        </p:spPr>
+        <p:txBody>
+          <a:bodyPr rtlCol="0" anchor="ctr"/>
+          <a:lstStyle/>
+          <a:p>
+            <a:endParaRPr lang="en-US">
+              <a:solidFill>
+                <a:prstClr val="black"/>
+              </a:solidFill>
+              <a:latin typeface="Montserrat"/>
+            </a:endParaRPr>
+          </a:p>
+        </p:txBody>
+      </p:sp>
+      <p:sp>
+        <p:nvSpPr>
+          <p:cNvPr id="89" name="Freeform: Shape 88">
+            <a:extLst>
+              <a:ext uri="{FF2B5EF4-FFF2-40B4-BE49-F238E27FC236}">
+                <a16:creationId xmlns:a16="http://schemas.microsoft.com/office/drawing/2014/main" id="{A6C3A525-8055-4A9D-93CF-9676265813D7}"/>
+              </a:ext>
+            </a:extLst>
+          </p:cNvPr>
+          <p:cNvSpPr/>
+          <p:nvPr/>
+        </p:nvSpPr>
+        <p:spPr>
+          <a:xfrm>
+            <a:off x="687705" y="4607655"/>
+            <a:ext cx="1332166" cy="1332166"/>
+          </a:xfrm>
+          <a:custGeom>
+            <a:avLst/>
+            <a:gdLst>
+              <a:gd name="connsiteX0" fmla="*/ 0 w 1332166"/>
+              <a:gd name="connsiteY0" fmla="*/ 0 h 1332166"/>
+              <a:gd name="connsiteX1" fmla="*/ 1332167 w 1332166"/>
+              <a:gd name="connsiteY1" fmla="*/ 0 h 1332166"/>
+              <a:gd name="connsiteX2" fmla="*/ 1332167 w 1332166"/>
+              <a:gd name="connsiteY2" fmla="*/ 1332166 h 1332166"/>
+              <a:gd name="connsiteX3" fmla="*/ 0 w 1332166"/>
+              <a:gd name="connsiteY3" fmla="*/ 1332166 h 1332166"/>
+            </a:gdLst>
+            <a:ahLst/>
+            <a:cxnLst>
+              <a:cxn ang="0">
+                <a:pos x="connsiteX0" y="connsiteY0"/>
+              </a:cxn>
+              <a:cxn ang="0">
+                <a:pos x="connsiteX1" y="connsiteY1"/>
+              </a:cxn>
+              <a:cxn ang="0">
+                <a:pos x="connsiteX2" y="connsiteY2"/>
+              </a:cxn>
+              <a:cxn ang="0">
+                <a:pos x="connsiteX3" y="connsiteY3"/>
+              </a:cxn>
+            </a:cxnLst>
+            <a:rect l="l" t="t" r="r" b="b"/>
+            <a:pathLst>
+              <a:path w="1332166" h="1332166">
+                <a:moveTo>
+                  <a:pt x="0" y="0"/>
+                </a:moveTo>
+                <a:lnTo>
+                  <a:pt x="1332167" y="0"/>
+                </a:lnTo>
+                <a:lnTo>
+                  <a:pt x="1332167" y="1332166"/>
+                </a:lnTo>
+                <a:lnTo>
+                  <a:pt x="0" y="1332166"/>
+                </a:lnTo>
+                <a:close/>
+              </a:path>
+            </a:pathLst>
+          </a:custGeom>
+          <a:solidFill>
+            <a:schemeClr val="bg2">
+              <a:lumMod val="25000"/>
+            </a:schemeClr>
+          </a:solidFill>
+          <a:ln>
+            <a:noFill/>
+          </a:ln>
+        </p:spPr>
+        <p:style>
+          <a:lnRef idx="2">
+            <a:schemeClr val="accent1">
+              <a:shade val="50000"/>
+            </a:schemeClr>
+          </a:lnRef>
+          <a:fillRef idx="1">
+            <a:schemeClr val="accent1"/>
+          </a:fillRef>
+          <a:effectRef idx="0">
+            <a:schemeClr val="accent1"/>
+          </a:effectRef>
+          <a:fontRef idx="minor">
+            <a:schemeClr val="lt1"/>
+          </a:fontRef>
+        </p:style>
+        <p:txBody>
+          <a:bodyPr rtlCol="0" anchor="ctr"/>
+          <a:lstStyle/>
+          <a:p>
+            <a:pPr algn="ctr"/>
+            <a:endParaRPr lang="en-US">
+              <a:solidFill>
+                <a:schemeClr val="lt1"/>
+              </a:solidFill>
+            </a:endParaRPr>
+          </a:p>
+        </p:txBody>
+      </p:sp>
+      <p:sp>
+        <p:nvSpPr>
+          <p:cNvPr id="25" name="TextBox 24">
+            <a:extLst>
+              <a:ext uri="{FF2B5EF4-FFF2-40B4-BE49-F238E27FC236}">
+                <a16:creationId xmlns:a16="http://schemas.microsoft.com/office/drawing/2014/main" id="{0664B7FD-8576-4E6D-981B-21F64E5A9502}"/>
+              </a:ext>
+            </a:extLst>
+          </p:cNvPr>
+          <p:cNvSpPr txBox="1"/>
+          <p:nvPr/>
+        </p:nvSpPr>
+        <p:spPr>
+          <a:xfrm>
+            <a:off x="924025" y="4858240"/>
+            <a:ext cx="859526" cy="830997"/>
+          </a:xfrm>
+          <a:prstGeom prst="rect">
+            <a:avLst/>
+          </a:prstGeom>
+          <a:noFill/>
+        </p:spPr>
+        <p:txBody>
+          <a:bodyPr wrap="square" rtlCol="0">
+            <a:spAutoFit/>
+          </a:bodyPr>
+          <a:lstStyle/>
+          <a:p>
+            <a:pPr algn="ctr"/>
+            <a:r>
+              <a:rPr lang="en-US" sz="4800" dirty="0">
+                <a:solidFill>
+                  <a:schemeClr val="bg1"/>
+                </a:solidFill>
+                <a:latin typeface="Montserrat ExtraBold" panose="00000900000000000000" pitchFamily="2" charset="0"/>
+                <a:cs typeface="Poppins"/>
+                <a:sym typeface="Poppins"/>
+                <a:rtl val="0"/>
+              </a:rPr>
+              <a:t>W</a:t>
+            </a:r>
+          </a:p>
+        </p:txBody>
+      </p:sp>
+      <p:sp>
+        <p:nvSpPr>
+          <p:cNvPr id="37" name="TextBox 36">
+            <a:extLst>
+              <a:ext uri="{FF2B5EF4-FFF2-40B4-BE49-F238E27FC236}">
+                <a16:creationId xmlns:a16="http://schemas.microsoft.com/office/drawing/2014/main" id="{AED5F35C-3965-4D39-BE41-CF48AD6EF3FE}"/>
+              </a:ext>
+            </a:extLst>
+          </p:cNvPr>
+          <p:cNvSpPr txBox="1"/>
+          <p:nvPr/>
+        </p:nvSpPr>
+        <p:spPr>
+          <a:xfrm>
+            <a:off x="6558348" y="4858240"/>
+            <a:ext cx="859526" cy="830997"/>
+          </a:xfrm>
+          <a:prstGeom prst="rect">
+            <a:avLst/>
+          </a:prstGeom>
+          <a:noFill/>
+        </p:spPr>
+        <p:txBody>
+          <a:bodyPr wrap="square" rtlCol="0">
+            <a:spAutoFit/>
+          </a:bodyPr>
+          <a:lstStyle/>
+          <a:p>
+            <a:pPr algn="ctr"/>
+            <a:r>
+              <a:rPr lang="en-US" sz="4800" dirty="0">
+                <a:solidFill>
+                  <a:schemeClr val="bg1"/>
+                </a:solidFill>
+                <a:latin typeface="Montserrat ExtraBold" panose="00000900000000000000" pitchFamily="2" charset="0"/>
+                <a:cs typeface="Poppins"/>
+                <a:sym typeface="Poppins"/>
+                <a:rtl val="0"/>
+              </a:rPr>
+              <a:t>T</a:t>
+            </a:r>
+          </a:p>
+        </p:txBody>
+      </p:sp>
+      <p:sp>
+        <p:nvSpPr>
+          <p:cNvPr id="42" name="TextBox 41">
+            <a:extLst>
+              <a:ext uri="{FF2B5EF4-FFF2-40B4-BE49-F238E27FC236}">
+                <a16:creationId xmlns:a16="http://schemas.microsoft.com/office/drawing/2014/main" id="{EB3BB609-3EAD-420B-9F9F-BFA5AE737F5A}"/>
+              </a:ext>
+            </a:extLst>
+          </p:cNvPr>
+          <p:cNvSpPr txBox="1"/>
+          <p:nvPr/>
+        </p:nvSpPr>
+        <p:spPr>
+          <a:xfrm>
+            <a:off x="7941314" y="5114147"/>
+            <a:ext cx="3797413" cy="918841"/>
+          </a:xfrm>
+          <a:prstGeom prst="rect">
+            <a:avLst/>
+          </a:prstGeom>
+          <a:noFill/>
+        </p:spPr>
+        <p:txBody>
+          <a:bodyPr wrap="square" rtlCol="0">
+            <a:spAutoFit/>
+          </a:bodyPr>
+          <a:lstStyle/>
+          <a:p>
+            <a:pPr>
+              <a:lnSpc>
+                <a:spcPts val="2200"/>
+              </a:lnSpc>
+            </a:pPr>
+            <a:r>
+              <a:rPr lang="hu-HU" sz="1600" spc="0" baseline="0" dirty="0">
+                <a:solidFill>
+                  <a:schemeClr val="bg2">
+                    <a:lumMod val="25000"/>
+                  </a:schemeClr>
+                </a:solidFill>
+                <a:latin typeface="Montserrat" panose="02000505000000020004" pitchFamily="2" charset="0"/>
+                <a:cs typeface="Poppins"/>
+                <a:sym typeface="Poppins"/>
+                <a:rtl val="0"/>
+              </a:rPr>
+              <a:t>A zene-streaming</a:t>
+            </a:r>
+            <a:r>
+              <a:rPr lang="hu-HU" sz="1600" spc="0" dirty="0">
+                <a:solidFill>
+                  <a:schemeClr val="bg2">
+                    <a:lumMod val="25000"/>
+                  </a:schemeClr>
+                </a:solidFill>
+                <a:latin typeface="Montserrat" panose="02000505000000020004" pitchFamily="2" charset="0"/>
+                <a:cs typeface="Poppins"/>
+                <a:sym typeface="Poppins"/>
+                <a:rtl val="0"/>
+              </a:rPr>
+              <a:t> piacon erős a verseny, a nagy szereplők gyorsan reagálnak az új belépőkre</a:t>
+            </a:r>
+            <a:endParaRPr lang="en-US" sz="1400" dirty="0">
+              <a:solidFill>
+                <a:schemeClr val="bg2">
+                  <a:lumMod val="25000"/>
+                </a:schemeClr>
+              </a:solidFill>
+              <a:latin typeface="Montserrat" panose="02000505000000020004" pitchFamily="2" charset="0"/>
+              <a:cs typeface="Poppins"/>
+              <a:sym typeface="Poppins"/>
+              <a:rtl val="0"/>
+            </a:endParaRPr>
+          </a:p>
+        </p:txBody>
+      </p:sp>
+      <p:sp>
+        <p:nvSpPr>
+          <p:cNvPr id="43" name="TextBox 42">
+            <a:extLst>
+              <a:ext uri="{FF2B5EF4-FFF2-40B4-BE49-F238E27FC236}">
+                <a16:creationId xmlns:a16="http://schemas.microsoft.com/office/drawing/2014/main" id="{DAEE56E7-5C23-4727-9E06-F94A78B7C19C}"/>
+              </a:ext>
+            </a:extLst>
+          </p:cNvPr>
+          <p:cNvSpPr txBox="1"/>
+          <p:nvPr/>
+        </p:nvSpPr>
+        <p:spPr>
+          <a:xfrm>
+            <a:off x="7941314" y="4796617"/>
+            <a:ext cx="1923925" cy="369332"/>
+          </a:xfrm>
+          <a:prstGeom prst="rect">
+            <a:avLst/>
+          </a:prstGeom>
+          <a:noFill/>
+        </p:spPr>
+        <p:txBody>
+          <a:bodyPr wrap="none" rtlCol="0">
+            <a:spAutoFit/>
+          </a:bodyPr>
+          <a:lstStyle/>
+          <a:p>
+            <a:r>
+              <a:rPr lang="hu-HU" dirty="0">
+                <a:gradFill>
+                  <a:gsLst>
+                    <a:gs pos="0">
+                      <a:srgbClr val="5D28FE"/>
+                    </a:gs>
+                    <a:gs pos="100000">
+                      <a:srgbClr val="BB66DD"/>
+                    </a:gs>
+                  </a:gsLst>
+                  <a:lin ang="10800000" scaled="1"/>
+                </a:gradFill>
+                <a:latin typeface="Montserrat ExtraBold" panose="00000900000000000000" pitchFamily="2" charset="0"/>
+                <a:cs typeface="Poppins"/>
+                <a:sym typeface="Poppins"/>
+                <a:rtl val="0"/>
+              </a:rPr>
+              <a:t>Fenyegetések</a:t>
+            </a:r>
+            <a:endParaRPr lang="en-US" dirty="0">
+              <a:gradFill>
+                <a:gsLst>
+                  <a:gs pos="0">
+                    <a:srgbClr val="5D28FE"/>
+                  </a:gs>
+                  <a:gs pos="100000">
+                    <a:srgbClr val="BB66DD"/>
+                  </a:gs>
+                </a:gsLst>
+                <a:lin ang="10800000" scaled="1"/>
+              </a:gradFill>
+              <a:latin typeface="Montserrat ExtraBold" panose="00000900000000000000" pitchFamily="2" charset="0"/>
+              <a:cs typeface="Poppins"/>
+              <a:sym typeface="Poppins"/>
+              <a:rtl val="0"/>
+            </a:endParaRPr>
+          </a:p>
+        </p:txBody>
+      </p:sp>
+      <p:sp>
+        <p:nvSpPr>
+          <p:cNvPr id="59" name="Rectangle 58">
+            <a:extLst>
+              <a:ext uri="{FF2B5EF4-FFF2-40B4-BE49-F238E27FC236}">
+                <a16:creationId xmlns:a16="http://schemas.microsoft.com/office/drawing/2014/main" id="{CF3775B7-5865-4356-8C89-4E71A2409E33}"/>
+              </a:ext>
+            </a:extLst>
+          </p:cNvPr>
+          <p:cNvSpPr/>
+          <p:nvPr/>
+        </p:nvSpPr>
+        <p:spPr>
+          <a:xfrm rot="5400000">
+            <a:off x="5683494" y="710748"/>
+            <a:ext cx="825012" cy="11469491"/>
+          </a:xfrm>
+          <a:prstGeom prst="rect">
+            <a:avLst/>
+          </a:prstGeom>
+          <a:solidFill>
+            <a:schemeClr val="bg1"/>
+          </a:solidFill>
+          <a:ln>
+            <a:noFill/>
+          </a:ln>
+        </p:spPr>
+        <p:style>
+          <a:lnRef idx="2">
+            <a:schemeClr val="accent1">
+              <a:shade val="50000"/>
+            </a:schemeClr>
+          </a:lnRef>
+          <a:fillRef idx="1">
+            <a:schemeClr val="accent1"/>
+          </a:fillRef>
+          <a:effectRef idx="0">
+            <a:schemeClr val="accent1"/>
+          </a:effectRef>
+          <a:fontRef idx="minor">
+            <a:schemeClr val="lt1"/>
+          </a:fontRef>
+        </p:style>
+        <p:txBody>
+          <a:bodyPr rtlCol="0" anchor="ctr"/>
+          <a:lstStyle/>
+          <a:p>
+            <a:pPr algn="ctr"/>
+            <a:endParaRPr lang="en-US">
+              <a:solidFill>
+                <a:schemeClr val="lt1"/>
+              </a:solidFill>
+            </a:endParaRPr>
+          </a:p>
+        </p:txBody>
+      </p:sp>
+    </p:spTree>
+    <p:extLst>
+      <p:ext uri="{BB962C8B-B14F-4D97-AF65-F5344CB8AC3E}">
+        <p14:creationId xmlns:p14="http://schemas.microsoft.com/office/powerpoint/2010/main" val="3639134648"/>
+      </p:ext>
+    </p:extLst>
+  </p:cSld>
+  <p:clrMapOvr>
+    <a:masterClrMapping/>
+  </p:clrMapOvr>
+  <p:timing>
+    <p:tnLst>
+      <p:par>
+        <p:cTn id="1" dur="indefinite" restart="never" nodeType="tmRoot">
+          <p:childTnLst>
+            <p:seq concurrent="1" nextAc="seek">
+              <p:cTn id="2" dur="indefinite" nodeType="mainSeq">
+                <p:childTnLst>
+                  <p:par>
+                    <p:cTn id="3" fill="hold">
+                      <p:stCondLst>
+                        <p:cond delay="indefinite"/>
+                        <p:cond evt="onBegin" delay="0">
+                          <p:tn val="2"/>
+                        </p:cond>
+                      </p:stCondLst>
+                      <p:childTnLst>
+                        <p:par>
+                          <p:cTn id="4" fill="hold">
+                            <p:stCondLst>
+                              <p:cond delay="0"/>
+                            </p:stCondLst>
+                            <p:childTnLst>
+                              <p:par>
+                                <p:cTn id="5" presetID="2" presetClass="entr" presetSubtype="8" decel="53333" fill="hold" grpId="0" nodeType="withEffect">
+                                  <p:stCondLst>
+                                    <p:cond delay="0"/>
+                                  </p:stCondLst>
+                                  <p:childTnLst>
+                                    <p:set>
+                                      <p:cBhvr>
+                                        <p:cTn id="6" dur="1" fill="hold">
+                                          <p:stCondLst>
+                                            <p:cond delay="0"/>
+                                          </p:stCondLst>
+                                        </p:cTn>
+                                        <p:tgtEl>
+                                          <p:spTgt spid="95"/>
+                                        </p:tgtEl>
+                                        <p:attrNameLst>
+                                          <p:attrName>style.visibility</p:attrName>
+                                        </p:attrNameLst>
+                                      </p:cBhvr>
+                                      <p:to>
+                                        <p:strVal val="visible"/>
+                                      </p:to>
+                                    </p:set>
+                                    <p:anim calcmode="lin" valueType="num">
+                                      <p:cBhvr additive="base">
+                                        <p:cTn id="7" dur="750" fill="hold"/>
+                                        <p:tgtEl>
+                                          <p:spTgt spid="95"/>
+                                        </p:tgtEl>
+                                        <p:attrNameLst>
+                                          <p:attrName>ppt_x</p:attrName>
+                                        </p:attrNameLst>
+                                      </p:cBhvr>
+                                      <p:tavLst>
+                                        <p:tav tm="0">
+                                          <p:val>
+                                            <p:strVal val="0-#ppt_w/2"/>
+                                          </p:val>
+                                        </p:tav>
+                                        <p:tav tm="100000">
+                                          <p:val>
+                                            <p:strVal val="#ppt_x"/>
+                                          </p:val>
+                                        </p:tav>
+                                      </p:tavLst>
+                                    </p:anim>
+                                    <p:anim calcmode="lin" valueType="num">
+                                      <p:cBhvr additive="base">
+                                        <p:cTn id="8" dur="750" fill="hold"/>
+                                        <p:tgtEl>
+                                          <p:spTgt spid="95"/>
+                                        </p:tgtEl>
+                                        <p:attrNameLst>
+                                          <p:attrName>ppt_y</p:attrName>
+                                        </p:attrNameLst>
+                                      </p:cBhvr>
+                                      <p:tavLst>
+                                        <p:tav tm="0">
+                                          <p:val>
+                                            <p:strVal val="#ppt_y"/>
+                                          </p:val>
+                                        </p:tav>
+                                        <p:tav tm="100000">
+                                          <p:val>
+                                            <p:strVal val="#ppt_y"/>
+                                          </p:val>
+                                        </p:tav>
+                                      </p:tavLst>
+                                    </p:anim>
+                                  </p:childTnLst>
+                                </p:cTn>
+                              </p:par>
+                              <p:par>
+                                <p:cTn id="9" presetID="2" presetClass="entr" presetSubtype="8" decel="53333" fill="hold" grpId="0" nodeType="withEffect">
+                                  <p:stCondLst>
+                                    <p:cond delay="150"/>
+                                  </p:stCondLst>
+                                  <p:childTnLst>
+                                    <p:set>
+                                      <p:cBhvr>
+                                        <p:cTn id="10" dur="1" fill="hold">
+                                          <p:stCondLst>
+                                            <p:cond delay="0"/>
+                                          </p:stCondLst>
+                                        </p:cTn>
+                                        <p:tgtEl>
+                                          <p:spTgt spid="96"/>
+                                        </p:tgtEl>
+                                        <p:attrNameLst>
+                                          <p:attrName>style.visibility</p:attrName>
+                                        </p:attrNameLst>
+                                      </p:cBhvr>
+                                      <p:to>
+                                        <p:strVal val="visible"/>
+                                      </p:to>
+                                    </p:set>
+                                    <p:anim calcmode="lin" valueType="num">
+                                      <p:cBhvr additive="base">
+                                        <p:cTn id="11" dur="750" fill="hold"/>
+                                        <p:tgtEl>
+                                          <p:spTgt spid="96"/>
+                                        </p:tgtEl>
+                                        <p:attrNameLst>
+                                          <p:attrName>ppt_x</p:attrName>
+                                        </p:attrNameLst>
+                                      </p:cBhvr>
+                                      <p:tavLst>
+                                        <p:tav tm="0">
+                                          <p:val>
+                                            <p:strVal val="0-#ppt_w/2"/>
+                                          </p:val>
+                                        </p:tav>
+                                        <p:tav tm="100000">
+                                          <p:val>
+                                            <p:strVal val="#ppt_x"/>
+                                          </p:val>
+                                        </p:tav>
+                                      </p:tavLst>
+                                    </p:anim>
+                                    <p:anim calcmode="lin" valueType="num">
+                                      <p:cBhvr additive="base">
+                                        <p:cTn id="12" dur="750" fill="hold"/>
+                                        <p:tgtEl>
+                                          <p:spTgt spid="96"/>
+                                        </p:tgtEl>
+                                        <p:attrNameLst>
+                                          <p:attrName>ppt_y</p:attrName>
+                                        </p:attrNameLst>
+                                      </p:cBhvr>
+                                      <p:tavLst>
+                                        <p:tav tm="0">
+                                          <p:val>
+                                            <p:strVal val="#ppt_y"/>
+                                          </p:val>
+                                        </p:tav>
+                                        <p:tav tm="100000">
+                                          <p:val>
+                                            <p:strVal val="#ppt_y"/>
+                                          </p:val>
+                                        </p:tav>
+                                      </p:tavLst>
+                                    </p:anim>
+                                  </p:childTnLst>
+                                </p:cTn>
+                              </p:par>
+                              <p:par>
+                                <p:cTn id="13" presetID="53" presetClass="entr" presetSubtype="16" fill="hold" grpId="0" nodeType="withEffect">
+                                  <p:stCondLst>
+                                    <p:cond delay="250"/>
+                                  </p:stCondLst>
+                                  <p:childTnLst>
+                                    <p:set>
+                                      <p:cBhvr>
+                                        <p:cTn id="14" dur="1" fill="hold">
+                                          <p:stCondLst>
+                                            <p:cond delay="0"/>
+                                          </p:stCondLst>
+                                        </p:cTn>
+                                        <p:tgtEl>
+                                          <p:spTgt spid="97"/>
+                                        </p:tgtEl>
+                                        <p:attrNameLst>
+                                          <p:attrName>style.visibility</p:attrName>
+                                        </p:attrNameLst>
+                                      </p:cBhvr>
+                                      <p:to>
+                                        <p:strVal val="visible"/>
+                                      </p:to>
+                                    </p:set>
+                                    <p:anim calcmode="lin" valueType="num">
+                                      <p:cBhvr>
+                                        <p:cTn id="15" dur="500" fill="hold"/>
+                                        <p:tgtEl>
+                                          <p:spTgt spid="97"/>
+                                        </p:tgtEl>
+                                        <p:attrNameLst>
+                                          <p:attrName>ppt_w</p:attrName>
+                                        </p:attrNameLst>
+                                      </p:cBhvr>
+                                      <p:tavLst>
+                                        <p:tav tm="0">
+                                          <p:val>
+                                            <p:fltVal val="0"/>
+                                          </p:val>
+                                        </p:tav>
+                                        <p:tav tm="100000">
+                                          <p:val>
+                                            <p:strVal val="#ppt_w"/>
+                                          </p:val>
+                                        </p:tav>
+                                      </p:tavLst>
+                                    </p:anim>
+                                    <p:anim calcmode="lin" valueType="num">
+                                      <p:cBhvr>
+                                        <p:cTn id="16" dur="500" fill="hold"/>
+                                        <p:tgtEl>
+                                          <p:spTgt spid="97"/>
+                                        </p:tgtEl>
+                                        <p:attrNameLst>
+                                          <p:attrName>ppt_h</p:attrName>
+                                        </p:attrNameLst>
+                                      </p:cBhvr>
+                                      <p:tavLst>
+                                        <p:tav tm="0">
+                                          <p:val>
+                                            <p:fltVal val="0"/>
+                                          </p:val>
+                                        </p:tav>
+                                        <p:tav tm="100000">
+                                          <p:val>
+                                            <p:strVal val="#ppt_h"/>
+                                          </p:val>
+                                        </p:tav>
+                                      </p:tavLst>
+                                    </p:anim>
+                                    <p:animEffect transition="in" filter="fade">
+                                      <p:cBhvr>
+                                        <p:cTn id="17" dur="500"/>
+                                        <p:tgtEl>
+                                          <p:spTgt spid="97"/>
+                                        </p:tgtEl>
+                                      </p:cBhvr>
+                                    </p:animEffect>
+                                  </p:childTnLst>
+                                </p:cTn>
+                              </p:par>
+                              <p:par>
+                                <p:cTn id="18" presetID="53" presetClass="entr" presetSubtype="16" fill="hold" grpId="0" nodeType="withEffect">
+                                  <p:stCondLst>
+                                    <p:cond delay="350"/>
+                                  </p:stCondLst>
+                                  <p:childTnLst>
+                                    <p:set>
+                                      <p:cBhvr>
+                                        <p:cTn id="19" dur="1" fill="hold">
+                                          <p:stCondLst>
+                                            <p:cond delay="0"/>
+                                          </p:stCondLst>
+                                        </p:cTn>
+                                        <p:tgtEl>
+                                          <p:spTgt spid="98"/>
+                                        </p:tgtEl>
+                                        <p:attrNameLst>
+                                          <p:attrName>style.visibility</p:attrName>
+                                        </p:attrNameLst>
+                                      </p:cBhvr>
+                                      <p:to>
+                                        <p:strVal val="visible"/>
+                                      </p:to>
+                                    </p:set>
+                                    <p:anim calcmode="lin" valueType="num">
+                                      <p:cBhvr>
+                                        <p:cTn id="20" dur="500" fill="hold"/>
+                                        <p:tgtEl>
+                                          <p:spTgt spid="98"/>
+                                        </p:tgtEl>
+                                        <p:attrNameLst>
+                                          <p:attrName>ppt_w</p:attrName>
+                                        </p:attrNameLst>
+                                      </p:cBhvr>
+                                      <p:tavLst>
+                                        <p:tav tm="0">
+                                          <p:val>
+                                            <p:fltVal val="0"/>
+                                          </p:val>
+                                        </p:tav>
+                                        <p:tav tm="100000">
+                                          <p:val>
+                                            <p:strVal val="#ppt_w"/>
+                                          </p:val>
+                                        </p:tav>
+                                      </p:tavLst>
+                                    </p:anim>
+                                    <p:anim calcmode="lin" valueType="num">
+                                      <p:cBhvr>
+                                        <p:cTn id="21" dur="500" fill="hold"/>
+                                        <p:tgtEl>
+                                          <p:spTgt spid="98"/>
+                                        </p:tgtEl>
+                                        <p:attrNameLst>
+                                          <p:attrName>ppt_h</p:attrName>
+                                        </p:attrNameLst>
+                                      </p:cBhvr>
+                                      <p:tavLst>
+                                        <p:tav tm="0">
+                                          <p:val>
+                                            <p:fltVal val="0"/>
+                                          </p:val>
+                                        </p:tav>
+                                        <p:tav tm="100000">
+                                          <p:val>
+                                            <p:strVal val="#ppt_h"/>
+                                          </p:val>
+                                        </p:tav>
+                                      </p:tavLst>
+                                    </p:anim>
+                                    <p:animEffect transition="in" filter="fade">
+                                      <p:cBhvr>
+                                        <p:cTn id="22" dur="500"/>
+                                        <p:tgtEl>
+                                          <p:spTgt spid="98"/>
+                                        </p:tgtEl>
+                                      </p:cBhvr>
+                                    </p:animEffect>
+                                  </p:childTnLst>
+                                </p:cTn>
+                              </p:par>
+                              <p:par>
+                                <p:cTn id="23" presetID="2" presetClass="entr" presetSubtype="8" decel="53333" fill="hold" grpId="0" nodeType="withEffect">
+                                  <p:stCondLst>
+                                    <p:cond delay="500"/>
+                                  </p:stCondLst>
+                                  <p:childTnLst>
+                                    <p:set>
+                                      <p:cBhvr>
+                                        <p:cTn id="24" dur="1" fill="hold">
+                                          <p:stCondLst>
+                                            <p:cond delay="0"/>
+                                          </p:stCondLst>
+                                        </p:cTn>
+                                        <p:tgtEl>
+                                          <p:spTgt spid="99"/>
+                                        </p:tgtEl>
+                                        <p:attrNameLst>
+                                          <p:attrName>style.visibility</p:attrName>
+                                        </p:attrNameLst>
+                                      </p:cBhvr>
+                                      <p:to>
+                                        <p:strVal val="visible"/>
+                                      </p:to>
+                                    </p:set>
+                                    <p:anim calcmode="lin" valueType="num">
+                                      <p:cBhvr additive="base">
+                                        <p:cTn id="25" dur="750" fill="hold"/>
+                                        <p:tgtEl>
+                                          <p:spTgt spid="99"/>
+                                        </p:tgtEl>
+                                        <p:attrNameLst>
+                                          <p:attrName>ppt_x</p:attrName>
+                                        </p:attrNameLst>
+                                      </p:cBhvr>
+                                      <p:tavLst>
+                                        <p:tav tm="0">
+                                          <p:val>
+                                            <p:strVal val="0-#ppt_w/2"/>
+                                          </p:val>
+                                        </p:tav>
+                                        <p:tav tm="100000">
+                                          <p:val>
+                                            <p:strVal val="#ppt_x"/>
+                                          </p:val>
+                                        </p:tav>
+                                      </p:tavLst>
+                                    </p:anim>
+                                    <p:anim calcmode="lin" valueType="num">
+                                      <p:cBhvr additive="base">
+                                        <p:cTn id="26" dur="750" fill="hold"/>
+                                        <p:tgtEl>
+                                          <p:spTgt spid="99"/>
+                                        </p:tgtEl>
+                                        <p:attrNameLst>
+                                          <p:attrName>ppt_y</p:attrName>
+                                        </p:attrNameLst>
+                                      </p:cBhvr>
+                                      <p:tavLst>
+                                        <p:tav tm="0">
+                                          <p:val>
+                                            <p:strVal val="#ppt_y"/>
+                                          </p:val>
+                                        </p:tav>
+                                        <p:tav tm="100000">
+                                          <p:val>
+                                            <p:strVal val="#ppt_y"/>
+                                          </p:val>
+                                        </p:tav>
+                                      </p:tavLst>
+                                    </p:anim>
+                                  </p:childTnLst>
+                                </p:cTn>
+                              </p:par>
+                              <p:par>
+                                <p:cTn id="27" presetID="2" presetClass="entr" presetSubtype="4" decel="53333" fill="hold" grpId="0" nodeType="withEffect">
+                                  <p:stCondLst>
+                                    <p:cond delay="1000"/>
+                                  </p:stCondLst>
+                                  <p:childTnLst>
+                                    <p:set>
+                                      <p:cBhvr>
+                                        <p:cTn id="28" dur="1" fill="hold">
+                                          <p:stCondLst>
+                                            <p:cond delay="0"/>
+                                          </p:stCondLst>
+                                        </p:cTn>
+                                        <p:tgtEl>
+                                          <p:spTgt spid="93"/>
+                                        </p:tgtEl>
+                                        <p:attrNameLst>
+                                          <p:attrName>style.visibility</p:attrName>
+                                        </p:attrNameLst>
+                                      </p:cBhvr>
+                                      <p:to>
+                                        <p:strVal val="visible"/>
+                                      </p:to>
+                                    </p:set>
+                                    <p:anim calcmode="lin" valueType="num">
+                                      <p:cBhvr additive="base">
+                                        <p:cTn id="29" dur="750" fill="hold"/>
+                                        <p:tgtEl>
+                                          <p:spTgt spid="93"/>
+                                        </p:tgtEl>
+                                        <p:attrNameLst>
+                                          <p:attrName>ppt_x</p:attrName>
+                                        </p:attrNameLst>
+                                      </p:cBhvr>
+                                      <p:tavLst>
+                                        <p:tav tm="0">
+                                          <p:val>
+                                            <p:strVal val="#ppt_x"/>
+                                          </p:val>
+                                        </p:tav>
+                                        <p:tav tm="100000">
+                                          <p:val>
+                                            <p:strVal val="#ppt_x"/>
+                                          </p:val>
+                                        </p:tav>
+                                      </p:tavLst>
+                                    </p:anim>
+                                    <p:anim calcmode="lin" valueType="num">
+                                      <p:cBhvr additive="base">
+                                        <p:cTn id="30" dur="750" fill="hold"/>
+                                        <p:tgtEl>
+                                          <p:spTgt spid="93"/>
+                                        </p:tgtEl>
+                                        <p:attrNameLst>
+                                          <p:attrName>ppt_y</p:attrName>
+                                        </p:attrNameLst>
+                                      </p:cBhvr>
+                                      <p:tavLst>
+                                        <p:tav tm="0">
+                                          <p:val>
+                                            <p:strVal val="1+#ppt_h/2"/>
+                                          </p:val>
+                                        </p:tav>
+                                        <p:tav tm="100000">
+                                          <p:val>
+                                            <p:strVal val="#ppt_y"/>
+                                          </p:val>
+                                        </p:tav>
+                                      </p:tavLst>
+                                    </p:anim>
+                                  </p:childTnLst>
+                                </p:cTn>
+                              </p:par>
+                              <p:par>
+                                <p:cTn id="31" presetID="10" presetClass="entr" presetSubtype="0" fill="hold" grpId="0" nodeType="withEffect">
+                                  <p:stCondLst>
+                                    <p:cond delay="1500"/>
+                                  </p:stCondLst>
+                                  <p:childTnLst>
+                                    <p:set>
+                                      <p:cBhvr>
+                                        <p:cTn id="32" dur="1" fill="hold">
+                                          <p:stCondLst>
+                                            <p:cond delay="0"/>
+                                          </p:stCondLst>
+                                        </p:cTn>
+                                        <p:tgtEl>
+                                          <p:spTgt spid="94"/>
+                                        </p:tgtEl>
+                                        <p:attrNameLst>
+                                          <p:attrName>style.visibility</p:attrName>
+                                        </p:attrNameLst>
+                                      </p:cBhvr>
+                                      <p:to>
+                                        <p:strVal val="visible"/>
+                                      </p:to>
+                                    </p:set>
+                                    <p:animEffect transition="in" filter="fade">
+                                      <p:cBhvr>
+                                        <p:cTn id="33" dur="500"/>
+                                        <p:tgtEl>
+                                          <p:spTgt spid="94"/>
+                                        </p:tgtEl>
+                                      </p:cBhvr>
+                                    </p:animEffect>
+                                  </p:childTnLst>
+                                </p:cTn>
+                              </p:par>
+                              <p:par>
+                                <p:cTn id="34" presetID="2" presetClass="entr" presetSubtype="4" decel="53333" fill="hold" grpId="0" nodeType="withEffect">
+                                  <p:stCondLst>
+                                    <p:cond delay="1500"/>
+                                  </p:stCondLst>
+                                  <p:childTnLst>
+                                    <p:set>
+                                      <p:cBhvr>
+                                        <p:cTn id="35" dur="1" fill="hold">
+                                          <p:stCondLst>
+                                            <p:cond delay="0"/>
+                                          </p:stCondLst>
+                                        </p:cTn>
+                                        <p:tgtEl>
+                                          <p:spTgt spid="92"/>
+                                        </p:tgtEl>
+                                        <p:attrNameLst>
+                                          <p:attrName>style.visibility</p:attrName>
+                                        </p:attrNameLst>
+                                      </p:cBhvr>
+                                      <p:to>
+                                        <p:strVal val="visible"/>
+                                      </p:to>
+                                    </p:set>
+                                    <p:anim calcmode="lin" valueType="num">
+                                      <p:cBhvr additive="base">
+                                        <p:cTn id="36" dur="750" fill="hold"/>
+                                        <p:tgtEl>
+                                          <p:spTgt spid="92"/>
+                                        </p:tgtEl>
+                                        <p:attrNameLst>
+                                          <p:attrName>ppt_x</p:attrName>
+                                        </p:attrNameLst>
+                                      </p:cBhvr>
+                                      <p:tavLst>
+                                        <p:tav tm="0">
+                                          <p:val>
+                                            <p:strVal val="#ppt_x"/>
+                                          </p:val>
+                                        </p:tav>
+                                        <p:tav tm="100000">
+                                          <p:val>
+                                            <p:strVal val="#ppt_x"/>
+                                          </p:val>
+                                        </p:tav>
+                                      </p:tavLst>
+                                    </p:anim>
+                                    <p:anim calcmode="lin" valueType="num">
+                                      <p:cBhvr additive="base">
+                                        <p:cTn id="37" dur="750" fill="hold"/>
+                                        <p:tgtEl>
+                                          <p:spTgt spid="92"/>
+                                        </p:tgtEl>
+                                        <p:attrNameLst>
+                                          <p:attrName>ppt_y</p:attrName>
+                                        </p:attrNameLst>
+                                      </p:cBhvr>
+                                      <p:tavLst>
+                                        <p:tav tm="0">
+                                          <p:val>
+                                            <p:strVal val="1+#ppt_h/2"/>
+                                          </p:val>
+                                        </p:tav>
+                                        <p:tav tm="100000">
+                                          <p:val>
+                                            <p:strVal val="#ppt_y"/>
+                                          </p:val>
+                                        </p:tav>
+                                      </p:tavLst>
+                                    </p:anim>
+                                  </p:childTnLst>
+                                </p:cTn>
+                              </p:par>
+                              <p:par>
+                                <p:cTn id="38" presetID="2" presetClass="entr" presetSubtype="4" decel="53333" fill="hold" grpId="0" nodeType="withEffect">
+                                  <p:stCondLst>
+                                    <p:cond delay="1650"/>
+                                  </p:stCondLst>
+                                  <p:childTnLst>
+                                    <p:set>
+                                      <p:cBhvr>
+                                        <p:cTn id="39" dur="1" fill="hold">
+                                          <p:stCondLst>
+                                            <p:cond delay="0"/>
+                                          </p:stCondLst>
+                                        </p:cTn>
+                                        <p:tgtEl>
+                                          <p:spTgt spid="91"/>
+                                        </p:tgtEl>
+                                        <p:attrNameLst>
+                                          <p:attrName>style.visibility</p:attrName>
+                                        </p:attrNameLst>
+                                      </p:cBhvr>
+                                      <p:to>
+                                        <p:strVal val="visible"/>
+                                      </p:to>
+                                    </p:set>
+                                    <p:anim calcmode="lin" valueType="num">
+                                      <p:cBhvr additive="base">
+                                        <p:cTn id="40" dur="750" fill="hold"/>
+                                        <p:tgtEl>
+                                          <p:spTgt spid="91"/>
+                                        </p:tgtEl>
+                                        <p:attrNameLst>
+                                          <p:attrName>ppt_x</p:attrName>
+                                        </p:attrNameLst>
+                                      </p:cBhvr>
+                                      <p:tavLst>
+                                        <p:tav tm="0">
+                                          <p:val>
+                                            <p:strVal val="#ppt_x"/>
+                                          </p:val>
+                                        </p:tav>
+                                        <p:tav tm="100000">
+                                          <p:val>
+                                            <p:strVal val="#ppt_x"/>
+                                          </p:val>
+                                        </p:tav>
+                                      </p:tavLst>
+                                    </p:anim>
+                                    <p:anim calcmode="lin" valueType="num">
+                                      <p:cBhvr additive="base">
+                                        <p:cTn id="41" dur="750" fill="hold"/>
+                                        <p:tgtEl>
+                                          <p:spTgt spid="91"/>
+                                        </p:tgtEl>
+                                        <p:attrNameLst>
+                                          <p:attrName>ppt_y</p:attrName>
+                                        </p:attrNameLst>
+                                      </p:cBhvr>
+                                      <p:tavLst>
+                                        <p:tav tm="0">
+                                          <p:val>
+                                            <p:strVal val="1+#ppt_h/2"/>
+                                          </p:val>
+                                        </p:tav>
+                                        <p:tav tm="100000">
+                                          <p:val>
+                                            <p:strVal val="#ppt_y"/>
+                                          </p:val>
+                                        </p:tav>
+                                      </p:tavLst>
+                                    </p:anim>
+                                  </p:childTnLst>
+                                </p:cTn>
+                              </p:par>
+                            </p:childTnLst>
+                          </p:cTn>
+                        </p:par>
+                        <p:par>
+                          <p:cTn id="42" fill="hold">
+                            <p:stCondLst>
+                              <p:cond delay="2400"/>
+                            </p:stCondLst>
+                            <p:childTnLst>
+                              <p:par>
+                                <p:cTn id="43" presetID="2" presetClass="entr" presetSubtype="4" decel="53333" fill="hold" grpId="0" nodeType="afterEffect">
+                                  <p:stCondLst>
+                                    <p:cond delay="0"/>
+                                  </p:stCondLst>
+                                  <p:childTnLst>
+                                    <p:set>
+                                      <p:cBhvr>
+                                        <p:cTn id="44" dur="1" fill="hold">
+                                          <p:stCondLst>
+                                            <p:cond delay="0"/>
+                                          </p:stCondLst>
+                                        </p:cTn>
+                                        <p:tgtEl>
+                                          <p:spTgt spid="89"/>
+                                        </p:tgtEl>
+                                        <p:attrNameLst>
+                                          <p:attrName>style.visibility</p:attrName>
+                                        </p:attrNameLst>
+                                      </p:cBhvr>
+                                      <p:to>
+                                        <p:strVal val="visible"/>
+                                      </p:to>
+                                    </p:set>
+                                    <p:anim calcmode="lin" valueType="num">
+                                      <p:cBhvr additive="base">
+                                        <p:cTn id="45" dur="750" fill="hold"/>
+                                        <p:tgtEl>
+                                          <p:spTgt spid="89"/>
+                                        </p:tgtEl>
+                                        <p:attrNameLst>
+                                          <p:attrName>ppt_x</p:attrName>
+                                        </p:attrNameLst>
+                                      </p:cBhvr>
+                                      <p:tavLst>
+                                        <p:tav tm="0">
+                                          <p:val>
+                                            <p:strVal val="#ppt_x"/>
+                                          </p:val>
+                                        </p:tav>
+                                        <p:tav tm="100000">
+                                          <p:val>
+                                            <p:strVal val="#ppt_x"/>
+                                          </p:val>
+                                        </p:tav>
+                                      </p:tavLst>
+                                    </p:anim>
+                                    <p:anim calcmode="lin" valueType="num">
+                                      <p:cBhvr additive="base">
+                                        <p:cTn id="46" dur="750" fill="hold"/>
+                                        <p:tgtEl>
+                                          <p:spTgt spid="89"/>
+                                        </p:tgtEl>
+                                        <p:attrNameLst>
+                                          <p:attrName>ppt_y</p:attrName>
+                                        </p:attrNameLst>
+                                      </p:cBhvr>
+                                      <p:tavLst>
+                                        <p:tav tm="0">
+                                          <p:val>
+                                            <p:strVal val="1+#ppt_h/2"/>
+                                          </p:val>
+                                        </p:tav>
+                                        <p:tav tm="100000">
+                                          <p:val>
+                                            <p:strVal val="#ppt_y"/>
+                                          </p:val>
+                                        </p:tav>
+                                      </p:tavLst>
+                                    </p:anim>
+                                  </p:childTnLst>
+                                </p:cTn>
+                              </p:par>
+                              <p:par>
+                                <p:cTn id="47" presetID="10" presetClass="entr" presetSubtype="0" fill="hold" grpId="0" nodeType="withEffect">
+                                  <p:stCondLst>
+                                    <p:cond delay="500"/>
+                                  </p:stCondLst>
+                                  <p:childTnLst>
+                                    <p:set>
+                                      <p:cBhvr>
+                                        <p:cTn id="48" dur="1" fill="hold">
+                                          <p:stCondLst>
+                                            <p:cond delay="0"/>
+                                          </p:stCondLst>
+                                        </p:cTn>
+                                        <p:tgtEl>
+                                          <p:spTgt spid="25"/>
+                                        </p:tgtEl>
+                                        <p:attrNameLst>
+                                          <p:attrName>style.visibility</p:attrName>
+                                        </p:attrNameLst>
+                                      </p:cBhvr>
+                                      <p:to>
+                                        <p:strVal val="visible"/>
+                                      </p:to>
+                                    </p:set>
+                                    <p:animEffect transition="in" filter="fade">
+                                      <p:cBhvr>
+                                        <p:cTn id="49" dur="500"/>
+                                        <p:tgtEl>
+                                          <p:spTgt spid="25"/>
+                                        </p:tgtEl>
+                                      </p:cBhvr>
+                                    </p:animEffect>
+                                  </p:childTnLst>
+                                </p:cTn>
+                              </p:par>
+                              <p:par>
+                                <p:cTn id="50" presetID="2" presetClass="entr" presetSubtype="4" decel="53333" fill="hold" grpId="0" nodeType="withEffect">
+                                  <p:stCondLst>
+                                    <p:cond delay="500"/>
+                                  </p:stCondLst>
+                                  <p:childTnLst>
+                                    <p:set>
+                                      <p:cBhvr>
+                                        <p:cTn id="51" dur="1" fill="hold">
+                                          <p:stCondLst>
+                                            <p:cond delay="0"/>
+                                          </p:stCondLst>
+                                        </p:cTn>
+                                        <p:tgtEl>
+                                          <p:spTgt spid="28"/>
+                                        </p:tgtEl>
+                                        <p:attrNameLst>
+                                          <p:attrName>style.visibility</p:attrName>
+                                        </p:attrNameLst>
+                                      </p:cBhvr>
+                                      <p:to>
+                                        <p:strVal val="visible"/>
+                                      </p:to>
+                                    </p:set>
+                                    <p:anim calcmode="lin" valueType="num">
+                                      <p:cBhvr additive="base">
+                                        <p:cTn id="52" dur="750" fill="hold"/>
+                                        <p:tgtEl>
+                                          <p:spTgt spid="28"/>
+                                        </p:tgtEl>
+                                        <p:attrNameLst>
+                                          <p:attrName>ppt_x</p:attrName>
+                                        </p:attrNameLst>
+                                      </p:cBhvr>
+                                      <p:tavLst>
+                                        <p:tav tm="0">
+                                          <p:val>
+                                            <p:strVal val="#ppt_x"/>
+                                          </p:val>
+                                        </p:tav>
+                                        <p:tav tm="100000">
+                                          <p:val>
+                                            <p:strVal val="#ppt_x"/>
+                                          </p:val>
+                                        </p:tav>
+                                      </p:tavLst>
+                                    </p:anim>
+                                    <p:anim calcmode="lin" valueType="num">
+                                      <p:cBhvr additive="base">
+                                        <p:cTn id="53" dur="750" fill="hold"/>
+                                        <p:tgtEl>
+                                          <p:spTgt spid="28"/>
+                                        </p:tgtEl>
+                                        <p:attrNameLst>
+                                          <p:attrName>ppt_y</p:attrName>
+                                        </p:attrNameLst>
+                                      </p:cBhvr>
+                                      <p:tavLst>
+                                        <p:tav tm="0">
+                                          <p:val>
+                                            <p:strVal val="1+#ppt_h/2"/>
+                                          </p:val>
+                                        </p:tav>
+                                        <p:tav tm="100000">
+                                          <p:val>
+                                            <p:strVal val="#ppt_y"/>
+                                          </p:val>
+                                        </p:tav>
+                                      </p:tavLst>
+                                    </p:anim>
+                                  </p:childTnLst>
+                                </p:cTn>
+                              </p:par>
+                              <p:par>
+                                <p:cTn id="54" presetID="2" presetClass="entr" presetSubtype="4" decel="53333" fill="hold" grpId="0" nodeType="withEffect">
+                                  <p:stCondLst>
+                                    <p:cond delay="650"/>
+                                  </p:stCondLst>
+                                  <p:childTnLst>
+                                    <p:set>
+                                      <p:cBhvr>
+                                        <p:cTn id="55" dur="1" fill="hold">
+                                          <p:stCondLst>
+                                            <p:cond delay="0"/>
+                                          </p:stCondLst>
+                                        </p:cTn>
+                                        <p:tgtEl>
+                                          <p:spTgt spid="27"/>
+                                        </p:tgtEl>
+                                        <p:attrNameLst>
+                                          <p:attrName>style.visibility</p:attrName>
+                                        </p:attrNameLst>
+                                      </p:cBhvr>
+                                      <p:to>
+                                        <p:strVal val="visible"/>
+                                      </p:to>
+                                    </p:set>
+                                    <p:anim calcmode="lin" valueType="num">
+                                      <p:cBhvr additive="base">
+                                        <p:cTn id="56" dur="750" fill="hold"/>
+                                        <p:tgtEl>
+                                          <p:spTgt spid="27"/>
+                                        </p:tgtEl>
+                                        <p:attrNameLst>
+                                          <p:attrName>ppt_x</p:attrName>
+                                        </p:attrNameLst>
+                                      </p:cBhvr>
+                                      <p:tavLst>
+                                        <p:tav tm="0">
+                                          <p:val>
+                                            <p:strVal val="#ppt_x"/>
+                                          </p:val>
+                                        </p:tav>
+                                        <p:tav tm="100000">
+                                          <p:val>
+                                            <p:strVal val="#ppt_x"/>
+                                          </p:val>
+                                        </p:tav>
+                                      </p:tavLst>
+                                    </p:anim>
+                                    <p:anim calcmode="lin" valueType="num">
+                                      <p:cBhvr additive="base">
+                                        <p:cTn id="57" dur="750" fill="hold"/>
+                                        <p:tgtEl>
+                                          <p:spTgt spid="27"/>
+                                        </p:tgtEl>
+                                        <p:attrNameLst>
+                                          <p:attrName>ppt_y</p:attrName>
+                                        </p:attrNameLst>
+                                      </p:cBhvr>
+                                      <p:tavLst>
+                                        <p:tav tm="0">
+                                          <p:val>
+                                            <p:strVal val="1+#ppt_h/2"/>
+                                          </p:val>
+                                        </p:tav>
+                                        <p:tav tm="100000">
+                                          <p:val>
+                                            <p:strVal val="#ppt_y"/>
+                                          </p:val>
+                                        </p:tav>
+                                      </p:tavLst>
+                                    </p:anim>
+                                  </p:childTnLst>
+                                </p:cTn>
+                              </p:par>
+                            </p:childTnLst>
+                          </p:cTn>
+                        </p:par>
+                        <p:par>
+                          <p:cTn id="58" fill="hold">
+                            <p:stCondLst>
+                              <p:cond delay="3800"/>
+                            </p:stCondLst>
+                            <p:childTnLst>
+                              <p:par>
+                                <p:cTn id="59" presetID="2" presetClass="entr" presetSubtype="4" decel="53333" fill="hold" grpId="0" nodeType="afterEffect">
+                                  <p:stCondLst>
+                                    <p:cond delay="0"/>
+                                  </p:stCondLst>
+                                  <p:childTnLst>
+                                    <p:set>
+                                      <p:cBhvr>
+                                        <p:cTn id="60" dur="1" fill="hold">
+                                          <p:stCondLst>
+                                            <p:cond delay="0"/>
+                                          </p:stCondLst>
+                                        </p:cTn>
+                                        <p:tgtEl>
+                                          <p:spTgt spid="81"/>
+                                        </p:tgtEl>
+                                        <p:attrNameLst>
+                                          <p:attrName>style.visibility</p:attrName>
+                                        </p:attrNameLst>
+                                      </p:cBhvr>
+                                      <p:to>
+                                        <p:strVal val="visible"/>
+                                      </p:to>
+                                    </p:set>
+                                    <p:anim calcmode="lin" valueType="num">
+                                      <p:cBhvr additive="base">
+                                        <p:cTn id="61" dur="750" fill="hold"/>
+                                        <p:tgtEl>
+                                          <p:spTgt spid="81"/>
+                                        </p:tgtEl>
+                                        <p:attrNameLst>
+                                          <p:attrName>ppt_x</p:attrName>
+                                        </p:attrNameLst>
+                                      </p:cBhvr>
+                                      <p:tavLst>
+                                        <p:tav tm="0">
+                                          <p:val>
+                                            <p:strVal val="#ppt_x"/>
+                                          </p:val>
+                                        </p:tav>
+                                        <p:tav tm="100000">
+                                          <p:val>
+                                            <p:strVal val="#ppt_x"/>
+                                          </p:val>
+                                        </p:tav>
+                                      </p:tavLst>
+                                    </p:anim>
+                                    <p:anim calcmode="lin" valueType="num">
+                                      <p:cBhvr additive="base">
+                                        <p:cTn id="62" dur="750" fill="hold"/>
+                                        <p:tgtEl>
+                                          <p:spTgt spid="81"/>
+                                        </p:tgtEl>
+                                        <p:attrNameLst>
+                                          <p:attrName>ppt_y</p:attrName>
+                                        </p:attrNameLst>
+                                      </p:cBhvr>
+                                      <p:tavLst>
+                                        <p:tav tm="0">
+                                          <p:val>
+                                            <p:strVal val="1+#ppt_h/2"/>
+                                          </p:val>
+                                        </p:tav>
+                                        <p:tav tm="100000">
+                                          <p:val>
+                                            <p:strVal val="#ppt_y"/>
+                                          </p:val>
+                                        </p:tav>
+                                      </p:tavLst>
+                                    </p:anim>
+                                  </p:childTnLst>
+                                </p:cTn>
+                              </p:par>
+                              <p:par>
+                                <p:cTn id="63" presetID="10" presetClass="entr" presetSubtype="0" fill="hold" grpId="0" nodeType="withEffect">
+                                  <p:stCondLst>
+                                    <p:cond delay="500"/>
+                                  </p:stCondLst>
+                                  <p:childTnLst>
+                                    <p:set>
+                                      <p:cBhvr>
+                                        <p:cTn id="64" dur="1" fill="hold">
+                                          <p:stCondLst>
+                                            <p:cond delay="0"/>
+                                          </p:stCondLst>
+                                        </p:cTn>
+                                        <p:tgtEl>
+                                          <p:spTgt spid="36"/>
+                                        </p:tgtEl>
+                                        <p:attrNameLst>
+                                          <p:attrName>style.visibility</p:attrName>
+                                        </p:attrNameLst>
+                                      </p:cBhvr>
+                                      <p:to>
+                                        <p:strVal val="visible"/>
+                                      </p:to>
+                                    </p:set>
+                                    <p:animEffect transition="in" filter="fade">
+                                      <p:cBhvr>
+                                        <p:cTn id="65" dur="500"/>
+                                        <p:tgtEl>
+                                          <p:spTgt spid="36"/>
+                                        </p:tgtEl>
+                                      </p:cBhvr>
+                                    </p:animEffect>
+                                  </p:childTnLst>
+                                </p:cTn>
+                              </p:par>
+                              <p:par>
+                                <p:cTn id="66" presetID="2" presetClass="entr" presetSubtype="4" decel="53333" fill="hold" grpId="0" nodeType="withEffect">
+                                  <p:stCondLst>
+                                    <p:cond delay="500"/>
+                                  </p:stCondLst>
+                                  <p:childTnLst>
+                                    <p:set>
+                                      <p:cBhvr>
+                                        <p:cTn id="67" dur="1" fill="hold">
+                                          <p:stCondLst>
+                                            <p:cond delay="0"/>
+                                          </p:stCondLst>
+                                        </p:cTn>
+                                        <p:tgtEl>
+                                          <p:spTgt spid="40"/>
+                                        </p:tgtEl>
+                                        <p:attrNameLst>
+                                          <p:attrName>style.visibility</p:attrName>
+                                        </p:attrNameLst>
+                                      </p:cBhvr>
+                                      <p:to>
+                                        <p:strVal val="visible"/>
+                                      </p:to>
+                                    </p:set>
+                                    <p:anim calcmode="lin" valueType="num">
+                                      <p:cBhvr additive="base">
+                                        <p:cTn id="68" dur="750" fill="hold"/>
+                                        <p:tgtEl>
+                                          <p:spTgt spid="40"/>
+                                        </p:tgtEl>
+                                        <p:attrNameLst>
+                                          <p:attrName>ppt_x</p:attrName>
+                                        </p:attrNameLst>
+                                      </p:cBhvr>
+                                      <p:tavLst>
+                                        <p:tav tm="0">
+                                          <p:val>
+                                            <p:strVal val="#ppt_x"/>
+                                          </p:val>
+                                        </p:tav>
+                                        <p:tav tm="100000">
+                                          <p:val>
+                                            <p:strVal val="#ppt_x"/>
+                                          </p:val>
+                                        </p:tav>
+                                      </p:tavLst>
+                                    </p:anim>
+                                    <p:anim calcmode="lin" valueType="num">
+                                      <p:cBhvr additive="base">
+                                        <p:cTn id="69" dur="750" fill="hold"/>
+                                        <p:tgtEl>
+                                          <p:spTgt spid="40"/>
+                                        </p:tgtEl>
+                                        <p:attrNameLst>
+                                          <p:attrName>ppt_y</p:attrName>
+                                        </p:attrNameLst>
+                                      </p:cBhvr>
+                                      <p:tavLst>
+                                        <p:tav tm="0">
+                                          <p:val>
+                                            <p:strVal val="1+#ppt_h/2"/>
+                                          </p:val>
+                                        </p:tav>
+                                        <p:tav tm="100000">
+                                          <p:val>
+                                            <p:strVal val="#ppt_y"/>
+                                          </p:val>
+                                        </p:tav>
+                                      </p:tavLst>
+                                    </p:anim>
+                                  </p:childTnLst>
+                                </p:cTn>
+                              </p:par>
+                              <p:par>
+                                <p:cTn id="70" presetID="2" presetClass="entr" presetSubtype="4" decel="53333" fill="hold" grpId="0" nodeType="withEffect">
+                                  <p:stCondLst>
+                                    <p:cond delay="650"/>
+                                  </p:stCondLst>
+                                  <p:childTnLst>
+                                    <p:set>
+                                      <p:cBhvr>
+                                        <p:cTn id="71" dur="1" fill="hold">
+                                          <p:stCondLst>
+                                            <p:cond delay="0"/>
+                                          </p:stCondLst>
+                                        </p:cTn>
+                                        <p:tgtEl>
+                                          <p:spTgt spid="39"/>
+                                        </p:tgtEl>
+                                        <p:attrNameLst>
+                                          <p:attrName>style.visibility</p:attrName>
+                                        </p:attrNameLst>
+                                      </p:cBhvr>
+                                      <p:to>
+                                        <p:strVal val="visible"/>
+                                      </p:to>
+                                    </p:set>
+                                    <p:anim calcmode="lin" valueType="num">
+                                      <p:cBhvr additive="base">
+                                        <p:cTn id="72" dur="750" fill="hold"/>
+                                        <p:tgtEl>
+                                          <p:spTgt spid="39"/>
+                                        </p:tgtEl>
+                                        <p:attrNameLst>
+                                          <p:attrName>ppt_x</p:attrName>
+                                        </p:attrNameLst>
+                                      </p:cBhvr>
+                                      <p:tavLst>
+                                        <p:tav tm="0">
+                                          <p:val>
+                                            <p:strVal val="#ppt_x"/>
+                                          </p:val>
+                                        </p:tav>
+                                        <p:tav tm="100000">
+                                          <p:val>
+                                            <p:strVal val="#ppt_x"/>
+                                          </p:val>
+                                        </p:tav>
+                                      </p:tavLst>
+                                    </p:anim>
+                                    <p:anim calcmode="lin" valueType="num">
+                                      <p:cBhvr additive="base">
+                                        <p:cTn id="73" dur="750" fill="hold"/>
+                                        <p:tgtEl>
+                                          <p:spTgt spid="39"/>
+                                        </p:tgtEl>
+                                        <p:attrNameLst>
+                                          <p:attrName>ppt_y</p:attrName>
+                                        </p:attrNameLst>
+                                      </p:cBhvr>
+                                      <p:tavLst>
+                                        <p:tav tm="0">
+                                          <p:val>
+                                            <p:strVal val="1+#ppt_h/2"/>
+                                          </p:val>
+                                        </p:tav>
+                                        <p:tav tm="100000">
+                                          <p:val>
+                                            <p:strVal val="#ppt_y"/>
+                                          </p:val>
+                                        </p:tav>
+                                      </p:tavLst>
+                                    </p:anim>
+                                  </p:childTnLst>
+                                </p:cTn>
+                              </p:par>
+                            </p:childTnLst>
+                          </p:cTn>
+                        </p:par>
+                        <p:par>
+                          <p:cTn id="74" fill="hold">
+                            <p:stCondLst>
+                              <p:cond delay="5200"/>
+                            </p:stCondLst>
+                            <p:childTnLst>
+                              <p:par>
+                                <p:cTn id="75" presetID="2" presetClass="entr" presetSubtype="4" decel="53333" fill="hold" grpId="0" nodeType="afterEffect">
+                                  <p:stCondLst>
+                                    <p:cond delay="0"/>
+                                  </p:stCondLst>
+                                  <p:childTnLst>
+                                    <p:set>
+                                      <p:cBhvr>
+                                        <p:cTn id="76" dur="1" fill="hold">
+                                          <p:stCondLst>
+                                            <p:cond delay="0"/>
+                                          </p:stCondLst>
+                                        </p:cTn>
+                                        <p:tgtEl>
+                                          <p:spTgt spid="85"/>
+                                        </p:tgtEl>
+                                        <p:attrNameLst>
+                                          <p:attrName>style.visibility</p:attrName>
+                                        </p:attrNameLst>
+                                      </p:cBhvr>
+                                      <p:to>
+                                        <p:strVal val="visible"/>
+                                      </p:to>
+                                    </p:set>
+                                    <p:anim calcmode="lin" valueType="num">
+                                      <p:cBhvr additive="base">
+                                        <p:cTn id="77" dur="750" fill="hold"/>
+                                        <p:tgtEl>
+                                          <p:spTgt spid="85"/>
+                                        </p:tgtEl>
+                                        <p:attrNameLst>
+                                          <p:attrName>ppt_x</p:attrName>
+                                        </p:attrNameLst>
+                                      </p:cBhvr>
+                                      <p:tavLst>
+                                        <p:tav tm="0">
+                                          <p:val>
+                                            <p:strVal val="#ppt_x"/>
+                                          </p:val>
+                                        </p:tav>
+                                        <p:tav tm="100000">
+                                          <p:val>
+                                            <p:strVal val="#ppt_x"/>
+                                          </p:val>
+                                        </p:tav>
+                                      </p:tavLst>
+                                    </p:anim>
+                                    <p:anim calcmode="lin" valueType="num">
+                                      <p:cBhvr additive="base">
+                                        <p:cTn id="78" dur="750" fill="hold"/>
+                                        <p:tgtEl>
+                                          <p:spTgt spid="85"/>
+                                        </p:tgtEl>
+                                        <p:attrNameLst>
+                                          <p:attrName>ppt_y</p:attrName>
+                                        </p:attrNameLst>
+                                      </p:cBhvr>
+                                      <p:tavLst>
+                                        <p:tav tm="0">
+                                          <p:val>
+                                            <p:strVal val="1+#ppt_h/2"/>
+                                          </p:val>
+                                        </p:tav>
+                                        <p:tav tm="100000">
+                                          <p:val>
+                                            <p:strVal val="#ppt_y"/>
+                                          </p:val>
+                                        </p:tav>
+                                      </p:tavLst>
+                                    </p:anim>
+                                  </p:childTnLst>
+                                </p:cTn>
+                              </p:par>
+                              <p:par>
+                                <p:cTn id="79" presetID="10" presetClass="entr" presetSubtype="0" fill="hold" grpId="0" nodeType="withEffect">
+                                  <p:stCondLst>
+                                    <p:cond delay="500"/>
+                                  </p:stCondLst>
+                                  <p:childTnLst>
+                                    <p:set>
+                                      <p:cBhvr>
+                                        <p:cTn id="80" dur="1" fill="hold">
+                                          <p:stCondLst>
+                                            <p:cond delay="0"/>
+                                          </p:stCondLst>
+                                        </p:cTn>
+                                        <p:tgtEl>
+                                          <p:spTgt spid="37"/>
+                                        </p:tgtEl>
+                                        <p:attrNameLst>
+                                          <p:attrName>style.visibility</p:attrName>
+                                        </p:attrNameLst>
+                                      </p:cBhvr>
+                                      <p:to>
+                                        <p:strVal val="visible"/>
+                                      </p:to>
+                                    </p:set>
+                                    <p:animEffect transition="in" filter="fade">
+                                      <p:cBhvr>
+                                        <p:cTn id="81" dur="500"/>
+                                        <p:tgtEl>
+                                          <p:spTgt spid="37"/>
+                                        </p:tgtEl>
+                                      </p:cBhvr>
+                                    </p:animEffect>
+                                  </p:childTnLst>
+                                </p:cTn>
+                              </p:par>
+                              <p:par>
+                                <p:cTn id="82" presetID="2" presetClass="entr" presetSubtype="4" decel="53333" fill="hold" grpId="0" nodeType="withEffect">
+                                  <p:stCondLst>
+                                    <p:cond delay="500"/>
+                                  </p:stCondLst>
+                                  <p:childTnLst>
+                                    <p:set>
+                                      <p:cBhvr>
+                                        <p:cTn id="83" dur="1" fill="hold">
+                                          <p:stCondLst>
+                                            <p:cond delay="0"/>
+                                          </p:stCondLst>
+                                        </p:cTn>
+                                        <p:tgtEl>
+                                          <p:spTgt spid="43"/>
+                                        </p:tgtEl>
+                                        <p:attrNameLst>
+                                          <p:attrName>style.visibility</p:attrName>
+                                        </p:attrNameLst>
+                                      </p:cBhvr>
+                                      <p:to>
+                                        <p:strVal val="visible"/>
+                                      </p:to>
+                                    </p:set>
+                                    <p:anim calcmode="lin" valueType="num">
+                                      <p:cBhvr additive="base">
+                                        <p:cTn id="84" dur="750" fill="hold"/>
+                                        <p:tgtEl>
+                                          <p:spTgt spid="43"/>
+                                        </p:tgtEl>
+                                        <p:attrNameLst>
+                                          <p:attrName>ppt_x</p:attrName>
+                                        </p:attrNameLst>
+                                      </p:cBhvr>
+                                      <p:tavLst>
+                                        <p:tav tm="0">
+                                          <p:val>
+                                            <p:strVal val="#ppt_x"/>
+                                          </p:val>
+                                        </p:tav>
+                                        <p:tav tm="100000">
+                                          <p:val>
+                                            <p:strVal val="#ppt_x"/>
+                                          </p:val>
+                                        </p:tav>
+                                      </p:tavLst>
+                                    </p:anim>
+                                    <p:anim calcmode="lin" valueType="num">
+                                      <p:cBhvr additive="base">
+                                        <p:cTn id="85" dur="750" fill="hold"/>
+                                        <p:tgtEl>
+                                          <p:spTgt spid="43"/>
+                                        </p:tgtEl>
+                                        <p:attrNameLst>
+                                          <p:attrName>ppt_y</p:attrName>
+                                        </p:attrNameLst>
+                                      </p:cBhvr>
+                                      <p:tavLst>
+                                        <p:tav tm="0">
+                                          <p:val>
+                                            <p:strVal val="1+#ppt_h/2"/>
+                                          </p:val>
+                                        </p:tav>
+                                        <p:tav tm="100000">
+                                          <p:val>
+                                            <p:strVal val="#ppt_y"/>
+                                          </p:val>
+                                        </p:tav>
+                                      </p:tavLst>
+                                    </p:anim>
+                                  </p:childTnLst>
+                                </p:cTn>
+                              </p:par>
+                              <p:par>
+                                <p:cTn id="86" presetID="2" presetClass="entr" presetSubtype="4" decel="53333" fill="hold" grpId="0" nodeType="withEffect">
+                                  <p:stCondLst>
+                                    <p:cond delay="650"/>
+                                  </p:stCondLst>
+                                  <p:childTnLst>
+                                    <p:set>
+                                      <p:cBhvr>
+                                        <p:cTn id="87" dur="1" fill="hold">
+                                          <p:stCondLst>
+                                            <p:cond delay="0"/>
+                                          </p:stCondLst>
+                                        </p:cTn>
+                                        <p:tgtEl>
+                                          <p:spTgt spid="42"/>
+                                        </p:tgtEl>
+                                        <p:attrNameLst>
+                                          <p:attrName>style.visibility</p:attrName>
+                                        </p:attrNameLst>
+                                      </p:cBhvr>
+                                      <p:to>
+                                        <p:strVal val="visible"/>
+                                      </p:to>
+                                    </p:set>
+                                    <p:anim calcmode="lin" valueType="num">
+                                      <p:cBhvr additive="base">
+                                        <p:cTn id="88" dur="750" fill="hold"/>
+                                        <p:tgtEl>
+                                          <p:spTgt spid="42"/>
+                                        </p:tgtEl>
+                                        <p:attrNameLst>
+                                          <p:attrName>ppt_x</p:attrName>
+                                        </p:attrNameLst>
+                                      </p:cBhvr>
+                                      <p:tavLst>
+                                        <p:tav tm="0">
+                                          <p:val>
+                                            <p:strVal val="#ppt_x"/>
+                                          </p:val>
+                                        </p:tav>
+                                        <p:tav tm="100000">
+                                          <p:val>
+                                            <p:strVal val="#ppt_x"/>
+                                          </p:val>
+                                        </p:tav>
+                                      </p:tavLst>
+                                    </p:anim>
+                                    <p:anim calcmode="lin" valueType="num">
+                                      <p:cBhvr additive="base">
+                                        <p:cTn id="89" dur="750" fill="hold"/>
+                                        <p:tgtEl>
+                                          <p:spTgt spid="42"/>
+                                        </p:tgtEl>
+                                        <p:attrNameLst>
+                                          <p:attrName>ppt_y</p:attrName>
+                                        </p:attrNameLst>
+                                      </p:cBhvr>
+                                      <p:tavLst>
+                                        <p:tav tm="0">
+                                          <p:val>
+                                            <p:strVal val="1+#ppt_h/2"/>
+                                          </p:val>
+                                        </p:tav>
+                                        <p:tav tm="100000">
+                                          <p:val>
+                                            <p:strVal val="#ppt_y"/>
+                                          </p:val>
+                                        </p:tav>
+                                      </p:tavLst>
+                                    </p:anim>
+                                  </p:childTnLst>
+                                </p:cTn>
+                              </p:par>
+                            </p:childTnLst>
+                          </p:cTn>
+                        </p:par>
+                      </p:childTnLst>
+                    </p:cTn>
+                  </p:par>
+                </p:childTnLst>
+              </p:cTn>
+              <p:prevCondLst>
+                <p:cond evt="onPrev" delay="0">
+                  <p:tgtEl>
+                    <p:sldTgt/>
+                  </p:tgtEl>
+                </p:cond>
+              </p:prevCondLst>
+              <p:nextCondLst>
+                <p:cond evt="onNext" delay="0">
+                  <p:tgtEl>
+                    <p:sldTgt/>
+                  </p:tgtEl>
+                </p:cond>
+              </p:nextCondLst>
+            </p:seq>
+          </p:childTnLst>
+        </p:cTn>
+      </p:par>
+    </p:tnLst>
+    <p:bldLst>
+      <p:bldP spid="91" grpId="0"/>
+      <p:bldP spid="92" grpId="0"/>
+      <p:bldP spid="81" grpId="0" animBg="1"/>
+      <p:bldP spid="93" grpId="0" animBg="1"/>
+      <p:bldP spid="94" grpId="0"/>
+      <p:bldP spid="36" grpId="0"/>
+      <p:bldP spid="39" grpId="0"/>
+      <p:bldP spid="40" grpId="0"/>
+      <p:bldP spid="27" grpId="0"/>
+      <p:bldP spid="28" grpId="0"/>
+      <p:bldP spid="99" grpId="0"/>
+      <p:bldP spid="95" grpId="0"/>
+      <p:bldP spid="96" grpId="0"/>
+      <p:bldP spid="97" grpId="0" animBg="1"/>
+      <p:bldP spid="98" grpId="0" animBg="1"/>
+      <p:bldP spid="85" grpId="0" animBg="1"/>
+      <p:bldP spid="89" grpId="0" animBg="1"/>
+      <p:bldP spid="25" grpId="0"/>
+      <p:bldP spid="37" grpId="0"/>
+      <p:bldP spid="42" grpId="0"/>
+      <p:bldP spid="43" grpId="0"/>
+    </p:bldLst>
+  </p:timing>
+</p:sld>
+</file>
+
+<file path=ppt/slides/slide5.xml><?xml version="1.0" encoding="utf-8"?>
+<p:sld xmlns:a="http://schemas.openxmlformats.org/drawingml/2006/main" xmlns:r="http://schemas.openxmlformats.org/officeDocument/2006/relationships" xmlns:p="http://schemas.openxmlformats.org/presentationml/2006/main">
+  <p:cSld>
+    <p:spTree>
+      <p:nvGrpSpPr>
+        <p:cNvPr id="1" name=""/>
+        <p:cNvGrpSpPr/>
+        <p:nvPr/>
+      </p:nvGrpSpPr>
+      <p:grpSpPr>
+        <a:xfrm>
+          <a:off x="0" y="0"/>
+          <a:ext cx="0" cy="0"/>
+          <a:chOff x="0" y="0"/>
+          <a:chExt cx="0" cy="0"/>
+        </a:xfrm>
+      </p:grpSpPr>
+      <p:sp>
+        <p:nvSpPr>
+          <p:cNvPr id="2" name="Cím 1">
+            <a:extLst>
+              <a:ext uri="{FF2B5EF4-FFF2-40B4-BE49-F238E27FC236}">
+                <a16:creationId xmlns:a16="http://schemas.microsoft.com/office/drawing/2014/main" id="{AC9F701E-25F9-B7DD-80F2-0D1881D21A3F}"/>
+              </a:ext>
+            </a:extLst>
+          </p:cNvPr>
+          <p:cNvSpPr>
+            <a:spLocks noGrp="1"/>
+          </p:cNvSpPr>
+          <p:nvPr>
+            <p:ph type="title"/>
+          </p:nvPr>
+        </p:nvSpPr>
+        <p:spPr/>
+        <p:txBody>
+          <a:bodyPr/>
+          <a:lstStyle/>
+          <a:p>
+            <a:r>
+              <a:rPr lang="hu-HU" dirty="0" err="1"/>
+              <a:t>Gantt</a:t>
+            </a:r>
+            <a:r>
+              <a:rPr lang="hu-HU" dirty="0"/>
+              <a:t> diagram</a:t>
+            </a:r>
+          </a:p>
+        </p:txBody>
+      </p:sp>
+      <p:pic>
+        <p:nvPicPr>
+          <p:cNvPr id="7" name="Kép 6">
+            <a:extLst>
+              <a:ext uri="{FF2B5EF4-FFF2-40B4-BE49-F238E27FC236}">
+                <a16:creationId xmlns:a16="http://schemas.microsoft.com/office/drawing/2014/main" id="{F4C608AC-6F66-3610-3B61-0811CC976258}"/>
+              </a:ext>
+            </a:extLst>
+          </p:cNvPr>
+          <p:cNvPicPr>
+            <a:picLocks noChangeAspect="1"/>
+          </p:cNvPicPr>
+          <p:nvPr/>
+        </p:nvPicPr>
+        <p:blipFill>
+          <a:blip r:embed="rId2"/>
+          <a:stretch>
+            <a:fillRect/>
+          </a:stretch>
+        </p:blipFill>
+        <p:spPr>
+          <a:xfrm>
+            <a:off x="284408" y="2818561"/>
+            <a:ext cx="11623183" cy="2586038"/>
+          </a:xfrm>
+          <a:prstGeom prst="rect">
+            <a:avLst/>
+          </a:prstGeom>
+        </p:spPr>
+      </p:pic>
+    </p:spTree>
+    <p:extLst>
+      <p:ext uri="{BB962C8B-B14F-4D97-AF65-F5344CB8AC3E}">
+        <p14:creationId xmlns:p14="http://schemas.microsoft.com/office/powerpoint/2010/main" val="3538836154"/>
+      </p:ext>
+    </p:extLst>
+  </p:cSld>
+  <p:clrMapOvr>
+    <a:masterClrMapping/>
+  </p:clrMapOvr>
+</p:sld>
+</file>
+
+<file path=ppt/slides/slide6.xml><?xml version="1.0" encoding="utf-8"?>
+<p:sld xmlns:a="http://schemas.openxmlformats.org/drawingml/2006/main" xmlns:r="http://schemas.openxmlformats.org/officeDocument/2006/relationships" xmlns:p="http://schemas.openxmlformats.org/presentationml/2006/main">
+  <p:cSld>
+    <p:spTree>
+      <p:nvGrpSpPr>
+        <p:cNvPr id="1" name=""/>
+        <p:cNvGrpSpPr/>
+        <p:nvPr/>
+      </p:nvGrpSpPr>
+      <p:grpSpPr>
+        <a:xfrm>
+          <a:off x="0" y="0"/>
+          <a:ext cx="0" cy="0"/>
+          <a:chOff x="0" y="0"/>
+          <a:chExt cx="0" cy="0"/>
+        </a:xfrm>
+      </p:grpSpPr>
+      <p:sp>
+        <p:nvSpPr>
+          <p:cNvPr id="2" name="Cím 1">
+            <a:extLst>
+              <a:ext uri="{FF2B5EF4-FFF2-40B4-BE49-F238E27FC236}">
+                <a16:creationId xmlns:a16="http://schemas.microsoft.com/office/drawing/2014/main" id="{211AF4E2-2100-82AE-9FA3-FDF19E500A51}"/>
+              </a:ext>
+            </a:extLst>
+          </p:cNvPr>
+          <p:cNvSpPr>
+            <a:spLocks noGrp="1"/>
+          </p:cNvSpPr>
+          <p:nvPr>
+            <p:ph type="title"/>
+          </p:nvPr>
+        </p:nvSpPr>
+        <p:spPr/>
+        <p:txBody>
+          <a:bodyPr/>
+          <a:lstStyle/>
+          <a:p>
+            <a:r>
+              <a:rPr lang="hu-HU" dirty="0" err="1"/>
+              <a:t>Wireframe</a:t>
+            </a:r>
+            <a:endParaRPr lang="hu-HU" dirty="0"/>
+          </a:p>
+        </p:txBody>
+      </p:sp>
+      <p:pic>
+        <p:nvPicPr>
+          <p:cNvPr id="4" name="Kép 3" descr="A képen szöveg, diagram, Műszaki rajz, Téglalap látható&#10;&#10;Előfordulhat, hogy az AI által létrehozott tartalom helytelen.">
+            <a:extLst>
+              <a:ext uri="{FF2B5EF4-FFF2-40B4-BE49-F238E27FC236}">
+                <a16:creationId xmlns:a16="http://schemas.microsoft.com/office/drawing/2014/main" id="{171290BD-38F9-5D55-FB28-FFDE901B6863}"/>
+              </a:ext>
+            </a:extLst>
+          </p:cNvPr>
+          <p:cNvPicPr>
+            <a:picLocks noChangeAspect="1"/>
+          </p:cNvPicPr>
+          <p:nvPr/>
+        </p:nvPicPr>
+        <p:blipFill>
+          <a:blip r:embed="rId2"/>
+          <a:stretch>
+            <a:fillRect/>
+          </a:stretch>
+        </p:blipFill>
+        <p:spPr>
+          <a:xfrm>
+            <a:off x="1464877" y="2011680"/>
+            <a:ext cx="8852603" cy="4535593"/>
+          </a:xfrm>
+          <a:prstGeom prst="rect">
+            <a:avLst/>
+          </a:prstGeom>
+        </p:spPr>
+      </p:pic>
+    </p:spTree>
+    <p:extLst>
+      <p:ext uri="{BB962C8B-B14F-4D97-AF65-F5344CB8AC3E}">
+        <p14:creationId xmlns:p14="http://schemas.microsoft.com/office/powerpoint/2010/main" val="238907221"/>
+      </p:ext>
+    </p:extLst>
+  </p:cSld>
+  <p:clrMapOvr>
+    <a:masterClrMapping/>
+  </p:clrMapOvr>
 </p:sld>
 </file>
 
 <file path=ppt/theme/theme1.xml><?xml version="1.0" encoding="utf-8"?>
-<a:theme xmlns:a="http://schemas.openxmlformats.org/drawingml/2006/main" name="ChronicleVTI">
+<a:theme xmlns:a="http://schemas.openxmlformats.org/drawingml/2006/main" name="DashVTI">
   <a:themeElements>
-    <a:clrScheme name="Chronicle">
+    <a:clrScheme name="Custom 6">
       <a:dk1>
-        <a:srgbClr val="000000"/>
+        <a:sysClr val="windowText" lastClr="000000"/>
       </a:dk1>
       <a:lt1>
-        <a:srgbClr val="FFFFFF"/>
+        <a:sysClr val="window" lastClr="FFFFFF"/>
       </a:lt1>
       <a:dk2>
-        <a:srgbClr val="1C1C32"/>
+        <a:srgbClr val="0D1C3B"/>
       </a:dk2>
       <a:lt2>
-        <a:srgbClr val="F8F4F1"/>
+        <a:srgbClr val="F5F2F9"/>
       </a:lt2>
       <a:accent1>
-        <a:srgbClr val="734B67"/>
+        <a:srgbClr val="1973EB"/>
       </a:accent1>
       <a:accent2>
-        <a:srgbClr val="959EBB"/>
+        <a:srgbClr val="25C8A2"/>
       </a:accent2>
       <a:accent3>
-        <a:srgbClr val="596781"/>
+        <a:srgbClr val="BF8ED1"/>
       </a:accent3>
       <a:accent4>
-        <a:srgbClr val="7F6E8C"/>
+        <a:srgbClr val="FE733C"/>
       </a:accent4>
       <a:accent5>
-        <a:srgbClr val="DB9A8F"/>
+        <a:srgbClr val="FE5A5A"/>
       </a:accent5>
       <a:accent6>
-        <a:srgbClr val="C29AB1"/>
+        <a:srgbClr val="1AC16E"/>
       </a:accent6>
       <a:hlink>
-        <a:srgbClr val="778BA2"/>
+        <a:srgbClr val="1AC16E"/>
       </a:hlink>
       <a:folHlink>
-        <a:srgbClr val="A27C99"/>
+        <a:srgbClr val="00B0F0"/>
       </a:folHlink>
     </a:clrScheme>
-    <a:fontScheme name="Univers Calisto">
+    <a:fontScheme name="grandview display">
       <a:majorFont>
-        <a:latin typeface="Univers Condensed"/>
+        <a:latin typeface="Grandview Display"/>
         <a:ea typeface=""/>
         <a:cs typeface=""/>
       </a:majorFont>
       <a:minorFont>
-        <a:latin typeface="Calisto MT"/>
+        <a:latin typeface="Grandview Display"/>
         <a:ea typeface=""/>
         <a:cs typeface=""/>
       </a:minorFont>
@@ -3943,57 +8692,11 @@
       </a:bgFillStyleLst>
     </a:fmtScheme>
   </a:themeElements>
-  <a:objectDefaults>
-    <a:spDef>
-      <a:spPr>
-        <a:ln w="12700" cap="flat" cmpd="sng" algn="ctr">
-          <a:noFill/>
-          <a:prstDash val="solid"/>
-          <a:miter lim="800000"/>
-        </a:ln>
-        <a:effectLst/>
-        <a:extLst>
-          <a:ext uri="{91240B29-F687-4F45-9708-019B960494DF}">
-            <a14:hiddenLine xmlns:a14="http://schemas.microsoft.com/office/drawing/2010/main" w="12700" cap="flat" cmpd="sng" algn="ctr">
-              <a:solidFill>
-                <a:schemeClr val="accent1">
-                  <a:shade val="50000"/>
-                </a:schemeClr>
-              </a:solidFill>
-              <a:prstDash val="solid"/>
-              <a:miter lim="800000"/>
-            </a14:hiddenLine>
-          </a:ext>
-        </a:extLst>
-      </a:spPr>
-      <a:bodyPr rtlCol="0" anchor="ctr"/>
-      <a:lstStyle>
-        <a:defPPr algn="ctr">
-          <a:defRPr/>
-        </a:defPPr>
-      </a:lstStyle>
-      <a:style>
-        <a:lnRef idx="2">
-          <a:schemeClr val="accent1">
-            <a:shade val="50000"/>
-          </a:schemeClr>
-        </a:lnRef>
-        <a:fillRef idx="1">
-          <a:schemeClr val="accent1"/>
-        </a:fillRef>
-        <a:effectRef idx="0">
-          <a:schemeClr val="accent1"/>
-        </a:effectRef>
-        <a:fontRef idx="minor">
-          <a:schemeClr val="lt1"/>
-        </a:fontRef>
-      </a:style>
-    </a:spDef>
-  </a:objectDefaults>
+  <a:objectDefaults/>
   <a:extraClrSchemeLst/>
   <a:extLst>
     <a:ext uri="{05A4C25C-085E-4340-85A3-A5531E510DB2}">
-      <thm15:themeFamily xmlns:thm15="http://schemas.microsoft.com/office/thememl/2012/main" name="ChronicleVTI" id="{508E4D90-5116-4BF0-876B-3F422DD1F65F}" vid="{AA21DC3D-92A8-43A4-8358-ED428371CD55}"/>
+      <thm15:themeFamily xmlns:thm15="http://schemas.microsoft.com/office/thememl/2012/main" name="DashVTI" id="{0A75137F-CDEB-4E94-A788-9D255EBE1B91}" vid="{DE9A6A09-5855-45A3-8E99-4290ED24057C}"/>
     </a:ext>
   </a:extLst>
 </a:theme>

--- a/documentation/mytunes presentation.pptx
+++ b/documentation/mytunes presentation.pptx
@@ -11,6 +11,11 @@
     <p:sldId id="549" r:id="rId5"/>
     <p:sldId id="259" r:id="rId6"/>
     <p:sldId id="550" r:id="rId7"/>
+    <p:sldId id="551" r:id="rId8"/>
+    <p:sldId id="552" r:id="rId9"/>
+    <p:sldId id="553" r:id="rId10"/>
+    <p:sldId id="554" r:id="rId11"/>
+    <p:sldId id="555" r:id="rId12"/>
   </p:sldIdLst>
   <p:sldSz cx="12192000" cy="6858000"/>
   <p:notesSz cx="6858000" cy="9144000"/>
@@ -4179,6 +4184,1614 @@
 </p:sld>
 </file>
 
+<file path=ppt/slides/slide10.xml><?xml version="1.0" encoding="utf-8"?>
+<p:sld xmlns:a="http://schemas.openxmlformats.org/drawingml/2006/main" xmlns:r="http://schemas.openxmlformats.org/officeDocument/2006/relationships" xmlns:p="http://schemas.openxmlformats.org/presentationml/2006/main">
+  <p:cSld>
+    <p:spTree>
+      <p:nvGrpSpPr>
+        <p:cNvPr id="1" name=""/>
+        <p:cNvGrpSpPr/>
+        <p:nvPr/>
+      </p:nvGrpSpPr>
+      <p:grpSpPr>
+        <a:xfrm>
+          <a:off x="0" y="0"/>
+          <a:ext cx="0" cy="0"/>
+          <a:chOff x="0" y="0"/>
+          <a:chExt cx="0" cy="0"/>
+        </a:xfrm>
+      </p:grpSpPr>
+      <p:sp>
+        <p:nvSpPr>
+          <p:cNvPr id="2" name="Cím 1">
+            <a:extLst>
+              <a:ext uri="{FF2B5EF4-FFF2-40B4-BE49-F238E27FC236}">
+                <a16:creationId xmlns:a16="http://schemas.microsoft.com/office/drawing/2014/main" id="{28054C95-C947-C0E8-879A-DF2E896ADE72}"/>
+              </a:ext>
+            </a:extLst>
+          </p:cNvPr>
+          <p:cNvSpPr>
+            <a:spLocks noGrp="1"/>
+          </p:cNvSpPr>
+          <p:nvPr>
+            <p:ph type="title"/>
+          </p:nvPr>
+        </p:nvSpPr>
+        <p:spPr/>
+        <p:txBody>
+          <a:bodyPr/>
+          <a:lstStyle/>
+          <a:p>
+            <a:r>
+              <a:rPr lang="hu-HU" dirty="0">
+                <a:latin typeface="Montserrat" panose="00000500000000000000" pitchFamily="2" charset="-18"/>
+              </a:rPr>
+              <a:t>Tipográfia</a:t>
+            </a:r>
+          </a:p>
+        </p:txBody>
+      </p:sp>
+      <p:sp>
+        <p:nvSpPr>
+          <p:cNvPr id="3" name="Tartalom helye 2">
+            <a:extLst>
+              <a:ext uri="{FF2B5EF4-FFF2-40B4-BE49-F238E27FC236}">
+                <a16:creationId xmlns:a16="http://schemas.microsoft.com/office/drawing/2014/main" id="{8FF9A8F0-254D-5FB9-7007-B3330FFA8DE1}"/>
+              </a:ext>
+            </a:extLst>
+          </p:cNvPr>
+          <p:cNvSpPr>
+            <a:spLocks noGrp="1"/>
+          </p:cNvSpPr>
+          <p:nvPr>
+            <p:ph idx="1"/>
+          </p:nvPr>
+        </p:nvSpPr>
+        <p:spPr>
+          <a:xfrm>
+            <a:off x="788187" y="2672109"/>
+            <a:ext cx="3674343" cy="3566160"/>
+          </a:xfrm>
+        </p:spPr>
+        <p:txBody>
+          <a:bodyPr>
+            <a:normAutofit fontScale="92500" lnSpcReduction="10000"/>
+          </a:bodyPr>
+          <a:lstStyle/>
+          <a:p>
+            <a:r>
+              <a:rPr lang="hu-HU" sz="6000" dirty="0">
+                <a:solidFill>
+                  <a:srgbClr val="FF00FF"/>
+                </a:solidFill>
+                <a:latin typeface="Montserrat" panose="00000500000000000000" pitchFamily="2" charset="-18"/>
+              </a:rPr>
+              <a:t>Címsor 1</a:t>
+            </a:r>
+          </a:p>
+          <a:p>
+            <a:r>
+              <a:rPr lang="hu-HU" sz="4800" dirty="0">
+                <a:solidFill>
+                  <a:srgbClr val="BF40FF"/>
+                </a:solidFill>
+                <a:latin typeface="Montserrat" panose="00000500000000000000" pitchFamily="2" charset="-18"/>
+              </a:rPr>
+              <a:t>Címsor 2</a:t>
+            </a:r>
+          </a:p>
+          <a:p>
+            <a:r>
+              <a:rPr lang="hu-HU" sz="3900" dirty="0">
+                <a:solidFill>
+                  <a:srgbClr val="8080FF"/>
+                </a:solidFill>
+                <a:latin typeface="Montserrat" panose="00000500000000000000" pitchFamily="2" charset="-18"/>
+              </a:rPr>
+              <a:t>Címsor 3</a:t>
+            </a:r>
+          </a:p>
+          <a:p>
+            <a:r>
+              <a:rPr lang="hu-HU" sz="2400" dirty="0">
+                <a:solidFill>
+                  <a:srgbClr val="40BFFF"/>
+                </a:solidFill>
+                <a:latin typeface="Montserrat" panose="00000500000000000000" pitchFamily="2" charset="-18"/>
+              </a:rPr>
+              <a:t>Címsor 4</a:t>
+            </a:r>
+          </a:p>
+          <a:p>
+            <a:r>
+              <a:rPr lang="hu-HU" sz="1500" dirty="0">
+                <a:solidFill>
+                  <a:srgbClr val="00FFFF"/>
+                </a:solidFill>
+                <a:latin typeface="Montserrat" panose="00000500000000000000" pitchFamily="2" charset="-18"/>
+              </a:rPr>
+              <a:t>Címsor 5</a:t>
+            </a:r>
+          </a:p>
+        </p:txBody>
+      </p:sp>
+      <p:sp>
+        <p:nvSpPr>
+          <p:cNvPr id="4" name="Tartalom helye 2">
+            <a:extLst>
+              <a:ext uri="{FF2B5EF4-FFF2-40B4-BE49-F238E27FC236}">
+                <a16:creationId xmlns:a16="http://schemas.microsoft.com/office/drawing/2014/main" id="{16E92EC3-39C6-115A-BC84-9C7003BFA03A}"/>
+              </a:ext>
+            </a:extLst>
+          </p:cNvPr>
+          <p:cNvSpPr txBox="1">
+            <a:spLocks/>
+          </p:cNvSpPr>
+          <p:nvPr/>
+        </p:nvSpPr>
+        <p:spPr>
+          <a:xfrm>
+            <a:off x="5003872" y="2672109"/>
+            <a:ext cx="6136353" cy="3566160"/>
+          </a:xfrm>
+          <a:prstGeom prst="rect">
+            <a:avLst/>
+          </a:prstGeom>
+        </p:spPr>
+        <p:txBody>
+          <a:bodyPr vert="horz" lIns="91440" tIns="45720" rIns="91440" bIns="45720" rtlCol="0">
+            <a:normAutofit/>
+          </a:bodyPr>
+          <a:lstStyle>
+            <a:lvl1pPr marL="228600" indent="-228600" algn="l" defTabSz="914400" rtl="0" eaLnBrk="1" latinLnBrk="0" hangingPunct="1">
+              <a:lnSpc>
+                <a:spcPct val="120000"/>
+              </a:lnSpc>
+              <a:spcBef>
+                <a:spcPts val="1000"/>
+              </a:spcBef>
+              <a:buSzPct val="87000"/>
+              <a:buFont typeface="Arial" panose="020B0604020202020204" pitchFamily="34" charset="0"/>
+              <a:buChar char="•"/>
+              <a:defRPr sz="2000" kern="1200">
+                <a:solidFill>
+                  <a:schemeClr val="tx1"/>
+                </a:solidFill>
+                <a:latin typeface="+mn-lt"/>
+                <a:ea typeface="+mn-ea"/>
+                <a:cs typeface="+mn-cs"/>
+              </a:defRPr>
+            </a:lvl1pPr>
+            <a:lvl2pPr marL="493776" indent="-228600" algn="l" defTabSz="914400" rtl="0" eaLnBrk="1" latinLnBrk="0" hangingPunct="1">
+              <a:lnSpc>
+                <a:spcPct val="120000"/>
+              </a:lnSpc>
+              <a:spcBef>
+                <a:spcPts val="500"/>
+              </a:spcBef>
+              <a:buSzPct val="87000"/>
+              <a:buFont typeface="Arial" panose="020B0604020202020204" pitchFamily="34" charset="0"/>
+              <a:buChar char="•"/>
+              <a:defRPr sz="1800" kern="1200">
+                <a:solidFill>
+                  <a:schemeClr val="tx1"/>
+                </a:solidFill>
+                <a:latin typeface="+mn-lt"/>
+                <a:ea typeface="+mn-ea"/>
+                <a:cs typeface="+mn-cs"/>
+              </a:defRPr>
+            </a:lvl2pPr>
+            <a:lvl3pPr marL="731520" indent="-228600" algn="l" defTabSz="914400" rtl="0" eaLnBrk="1" latinLnBrk="0" hangingPunct="1">
+              <a:lnSpc>
+                <a:spcPct val="120000"/>
+              </a:lnSpc>
+              <a:spcBef>
+                <a:spcPts val="500"/>
+              </a:spcBef>
+              <a:buSzPct val="87000"/>
+              <a:buFont typeface="Arial" panose="020B0604020202020204" pitchFamily="34" charset="0"/>
+              <a:buChar char="•"/>
+              <a:defRPr sz="1600" kern="1200">
+                <a:solidFill>
+                  <a:schemeClr val="tx1"/>
+                </a:solidFill>
+                <a:latin typeface="+mn-lt"/>
+                <a:ea typeface="+mn-ea"/>
+                <a:cs typeface="+mn-cs"/>
+              </a:defRPr>
+            </a:lvl3pPr>
+            <a:lvl4pPr marL="1051560" indent="-285750" algn="l" defTabSz="914400" rtl="0" eaLnBrk="1" latinLnBrk="0" hangingPunct="1">
+              <a:lnSpc>
+                <a:spcPct val="120000"/>
+              </a:lnSpc>
+              <a:spcBef>
+                <a:spcPts val="500"/>
+              </a:spcBef>
+              <a:buSzPct val="87000"/>
+              <a:buFont typeface="Arial" panose="020B0604020202020204" pitchFamily="34" charset="0"/>
+              <a:buChar char="•"/>
+              <a:defRPr sz="1400" kern="1200">
+                <a:solidFill>
+                  <a:schemeClr val="tx1"/>
+                </a:solidFill>
+                <a:latin typeface="+mn-lt"/>
+                <a:ea typeface="+mn-ea"/>
+                <a:cs typeface="+mn-cs"/>
+              </a:defRPr>
+            </a:lvl4pPr>
+            <a:lvl5pPr marL="1298448" indent="-228600" algn="l" defTabSz="914400" rtl="0" eaLnBrk="1" latinLnBrk="0" hangingPunct="1">
+              <a:lnSpc>
+                <a:spcPct val="120000"/>
+              </a:lnSpc>
+              <a:spcBef>
+                <a:spcPts val="500"/>
+              </a:spcBef>
+              <a:buSzPct val="87000"/>
+              <a:buFont typeface="Arial" panose="020B0604020202020204" pitchFamily="34" charset="0"/>
+              <a:buChar char="•"/>
+              <a:defRPr sz="1400" kern="1200">
+                <a:solidFill>
+                  <a:schemeClr val="tx1"/>
+                </a:solidFill>
+                <a:latin typeface="+mn-lt"/>
+                <a:ea typeface="+mn-ea"/>
+                <a:cs typeface="+mn-cs"/>
+              </a:defRPr>
+            </a:lvl5pPr>
+            <a:lvl6pPr marL="2514600" indent="-228600" algn="l" defTabSz="914400" rtl="0" eaLnBrk="1" latinLnBrk="0" hangingPunct="1">
+              <a:lnSpc>
+                <a:spcPct val="90000"/>
+              </a:lnSpc>
+              <a:spcBef>
+                <a:spcPts val="500"/>
+              </a:spcBef>
+              <a:buFont typeface="Arial" panose="020B0604020202020204" pitchFamily="34" charset="0"/>
+              <a:buChar char="•"/>
+              <a:defRPr sz="1800" kern="1200">
+                <a:solidFill>
+                  <a:schemeClr val="tx1"/>
+                </a:solidFill>
+                <a:latin typeface="+mn-lt"/>
+                <a:ea typeface="+mn-ea"/>
+                <a:cs typeface="+mn-cs"/>
+              </a:defRPr>
+            </a:lvl6pPr>
+            <a:lvl7pPr marL="2971800" indent="-228600" algn="l" defTabSz="914400" rtl="0" eaLnBrk="1" latinLnBrk="0" hangingPunct="1">
+              <a:lnSpc>
+                <a:spcPct val="90000"/>
+              </a:lnSpc>
+              <a:spcBef>
+                <a:spcPts val="500"/>
+              </a:spcBef>
+              <a:buFont typeface="Arial" panose="020B0604020202020204" pitchFamily="34" charset="0"/>
+              <a:buChar char="•"/>
+              <a:defRPr sz="1800" kern="1200">
+                <a:solidFill>
+                  <a:schemeClr val="tx1"/>
+                </a:solidFill>
+                <a:latin typeface="+mn-lt"/>
+                <a:ea typeface="+mn-ea"/>
+                <a:cs typeface="+mn-cs"/>
+              </a:defRPr>
+            </a:lvl7pPr>
+            <a:lvl8pPr marL="3429000" indent="-228600" algn="l" defTabSz="914400" rtl="0" eaLnBrk="1" latinLnBrk="0" hangingPunct="1">
+              <a:lnSpc>
+                <a:spcPct val="90000"/>
+              </a:lnSpc>
+              <a:spcBef>
+                <a:spcPts val="500"/>
+              </a:spcBef>
+              <a:buFont typeface="Arial" panose="020B0604020202020204" pitchFamily="34" charset="0"/>
+              <a:buChar char="•"/>
+              <a:defRPr sz="1800" kern="1200">
+                <a:solidFill>
+                  <a:schemeClr val="tx1"/>
+                </a:solidFill>
+                <a:latin typeface="+mn-lt"/>
+                <a:ea typeface="+mn-ea"/>
+                <a:cs typeface="+mn-cs"/>
+              </a:defRPr>
+            </a:lvl8pPr>
+            <a:lvl9pPr marL="3886200" indent="-228600" algn="l" defTabSz="914400" rtl="0" eaLnBrk="1" latinLnBrk="0" hangingPunct="1">
+              <a:lnSpc>
+                <a:spcPct val="90000"/>
+              </a:lnSpc>
+              <a:spcBef>
+                <a:spcPts val="500"/>
+              </a:spcBef>
+              <a:buFont typeface="Arial" panose="020B0604020202020204" pitchFamily="34" charset="0"/>
+              <a:buChar char="•"/>
+              <a:defRPr sz="1800" kern="1200">
+                <a:solidFill>
+                  <a:schemeClr val="tx1"/>
+                </a:solidFill>
+                <a:latin typeface="+mn-lt"/>
+                <a:ea typeface="+mn-ea"/>
+                <a:cs typeface="+mn-cs"/>
+              </a:defRPr>
+            </a:lvl9pPr>
+          </a:lstStyle>
+          <a:p>
+            <a:pPr marL="0" indent="0" algn="just">
+              <a:buNone/>
+            </a:pPr>
+            <a:r>
+              <a:rPr lang="hu-HU" sz="1200" dirty="0">
+                <a:latin typeface="Montserrat" panose="00000500000000000000" pitchFamily="2" charset="-18"/>
+              </a:rPr>
+              <a:t>	</a:t>
+            </a:r>
+            <a:r>
+              <a:rPr lang="hu-HU" sz="1200" dirty="0" err="1">
+                <a:latin typeface="Montserrat" panose="00000500000000000000" pitchFamily="2" charset="-18"/>
+              </a:rPr>
+              <a:t>Lorem</a:t>
+            </a:r>
+            <a:r>
+              <a:rPr lang="hu-HU" sz="1200" dirty="0">
+                <a:latin typeface="Montserrat" panose="00000500000000000000" pitchFamily="2" charset="-18"/>
+              </a:rPr>
+              <a:t> </a:t>
+            </a:r>
+            <a:r>
+              <a:rPr lang="hu-HU" sz="1200" dirty="0" err="1">
+                <a:latin typeface="Montserrat" panose="00000500000000000000" pitchFamily="2" charset="-18"/>
+              </a:rPr>
+              <a:t>ipsum</a:t>
+            </a:r>
+            <a:r>
+              <a:rPr lang="hu-HU" sz="1200" dirty="0">
+                <a:latin typeface="Montserrat" panose="00000500000000000000" pitchFamily="2" charset="-18"/>
+              </a:rPr>
+              <a:t> </a:t>
+            </a:r>
+            <a:r>
+              <a:rPr lang="hu-HU" sz="1200" dirty="0" err="1">
+                <a:latin typeface="Montserrat" panose="00000500000000000000" pitchFamily="2" charset="-18"/>
+              </a:rPr>
+              <a:t>dolor</a:t>
+            </a:r>
+            <a:r>
+              <a:rPr lang="hu-HU" sz="1200" dirty="0">
+                <a:latin typeface="Montserrat" panose="00000500000000000000" pitchFamily="2" charset="-18"/>
+              </a:rPr>
+              <a:t> </a:t>
+            </a:r>
+            <a:r>
+              <a:rPr lang="hu-HU" sz="1200" dirty="0" err="1">
+                <a:latin typeface="Montserrat" panose="00000500000000000000" pitchFamily="2" charset="-18"/>
+              </a:rPr>
+              <a:t>sit</a:t>
+            </a:r>
+            <a:r>
+              <a:rPr lang="hu-HU" sz="1200" dirty="0">
+                <a:latin typeface="Montserrat" panose="00000500000000000000" pitchFamily="2" charset="-18"/>
+              </a:rPr>
+              <a:t> </a:t>
+            </a:r>
+            <a:r>
+              <a:rPr lang="hu-HU" sz="1200" dirty="0" err="1">
+                <a:latin typeface="Montserrat" panose="00000500000000000000" pitchFamily="2" charset="-18"/>
+              </a:rPr>
+              <a:t>amet</a:t>
+            </a:r>
+            <a:r>
+              <a:rPr lang="hu-HU" sz="1200" dirty="0">
+                <a:latin typeface="Montserrat" panose="00000500000000000000" pitchFamily="2" charset="-18"/>
+              </a:rPr>
+              <a:t>, </a:t>
+            </a:r>
+            <a:r>
+              <a:rPr lang="hu-HU" sz="1200" dirty="0" err="1">
+                <a:latin typeface="Montserrat" panose="00000500000000000000" pitchFamily="2" charset="-18"/>
+              </a:rPr>
+              <a:t>consectetur</a:t>
+            </a:r>
+            <a:r>
+              <a:rPr lang="hu-HU" sz="1200" dirty="0">
+                <a:latin typeface="Montserrat" panose="00000500000000000000" pitchFamily="2" charset="-18"/>
+              </a:rPr>
+              <a:t> </a:t>
+            </a:r>
+            <a:r>
+              <a:rPr lang="hu-HU" sz="1200" dirty="0" err="1">
+                <a:latin typeface="Montserrat" panose="00000500000000000000" pitchFamily="2" charset="-18"/>
+              </a:rPr>
+              <a:t>adipiscing</a:t>
+            </a:r>
+            <a:r>
+              <a:rPr lang="hu-HU" sz="1200" dirty="0">
+                <a:latin typeface="Montserrat" panose="00000500000000000000" pitchFamily="2" charset="-18"/>
+              </a:rPr>
+              <a:t> elit. </a:t>
+            </a:r>
+            <a:r>
+              <a:rPr lang="hu-HU" sz="1200" dirty="0" err="1">
+                <a:latin typeface="Montserrat" panose="00000500000000000000" pitchFamily="2" charset="-18"/>
+              </a:rPr>
+              <a:t>Suspendisse</a:t>
+            </a:r>
+            <a:r>
+              <a:rPr lang="hu-HU" sz="1200" dirty="0">
+                <a:latin typeface="Montserrat" panose="00000500000000000000" pitchFamily="2" charset="-18"/>
+              </a:rPr>
+              <a:t> </a:t>
+            </a:r>
+            <a:r>
+              <a:rPr lang="hu-HU" sz="1200" dirty="0" err="1">
+                <a:latin typeface="Montserrat" panose="00000500000000000000" pitchFamily="2" charset="-18"/>
+              </a:rPr>
+              <a:t>ac</a:t>
+            </a:r>
+            <a:r>
+              <a:rPr lang="hu-HU" sz="1200" dirty="0">
+                <a:latin typeface="Montserrat" panose="00000500000000000000" pitchFamily="2" charset="-18"/>
+              </a:rPr>
+              <a:t> est </a:t>
+            </a:r>
+            <a:r>
+              <a:rPr lang="hu-HU" sz="1200" dirty="0" err="1">
+                <a:latin typeface="Montserrat" panose="00000500000000000000" pitchFamily="2" charset="-18"/>
+              </a:rPr>
+              <a:t>ornare</a:t>
+            </a:r>
+            <a:r>
+              <a:rPr lang="hu-HU" sz="1200" dirty="0">
+                <a:latin typeface="Montserrat" panose="00000500000000000000" pitchFamily="2" charset="-18"/>
+              </a:rPr>
+              <a:t>, </a:t>
+            </a:r>
+            <a:r>
+              <a:rPr lang="hu-HU" sz="1200" dirty="0" err="1">
+                <a:latin typeface="Montserrat" panose="00000500000000000000" pitchFamily="2" charset="-18"/>
+              </a:rPr>
+              <a:t>tempor</a:t>
+            </a:r>
+            <a:r>
+              <a:rPr lang="hu-HU" sz="1200" dirty="0">
+                <a:latin typeface="Montserrat" panose="00000500000000000000" pitchFamily="2" charset="-18"/>
+              </a:rPr>
+              <a:t> </a:t>
+            </a:r>
+            <a:r>
+              <a:rPr lang="hu-HU" sz="1200" dirty="0" err="1">
+                <a:latin typeface="Montserrat" panose="00000500000000000000" pitchFamily="2" charset="-18"/>
+              </a:rPr>
+              <a:t>velit</a:t>
+            </a:r>
+            <a:r>
+              <a:rPr lang="hu-HU" sz="1200" dirty="0">
+                <a:latin typeface="Montserrat" panose="00000500000000000000" pitchFamily="2" charset="-18"/>
+              </a:rPr>
+              <a:t> </a:t>
+            </a:r>
+            <a:r>
+              <a:rPr lang="hu-HU" sz="1200" dirty="0" err="1">
+                <a:latin typeface="Montserrat" panose="00000500000000000000" pitchFamily="2" charset="-18"/>
+              </a:rPr>
+              <a:t>id</a:t>
+            </a:r>
+            <a:r>
+              <a:rPr lang="hu-HU" sz="1200" dirty="0">
+                <a:latin typeface="Montserrat" panose="00000500000000000000" pitchFamily="2" charset="-18"/>
+              </a:rPr>
+              <a:t>, </a:t>
+            </a:r>
+            <a:r>
+              <a:rPr lang="hu-HU" sz="1200" dirty="0" err="1">
+                <a:latin typeface="Montserrat" panose="00000500000000000000" pitchFamily="2" charset="-18"/>
+              </a:rPr>
+              <a:t>hendrerit</a:t>
+            </a:r>
+            <a:r>
+              <a:rPr lang="hu-HU" sz="1200" dirty="0">
+                <a:latin typeface="Montserrat" panose="00000500000000000000" pitchFamily="2" charset="-18"/>
+              </a:rPr>
+              <a:t> </a:t>
+            </a:r>
+            <a:r>
+              <a:rPr lang="hu-HU" sz="1200" dirty="0" err="1">
+                <a:latin typeface="Montserrat" panose="00000500000000000000" pitchFamily="2" charset="-18"/>
+              </a:rPr>
+              <a:t>risus</a:t>
+            </a:r>
+            <a:r>
+              <a:rPr lang="hu-HU" sz="1200" dirty="0">
+                <a:latin typeface="Montserrat" panose="00000500000000000000" pitchFamily="2" charset="-18"/>
+              </a:rPr>
+              <a:t>. </a:t>
+            </a:r>
+            <a:r>
+              <a:rPr lang="hu-HU" sz="1200" dirty="0" err="1">
+                <a:latin typeface="Montserrat" panose="00000500000000000000" pitchFamily="2" charset="-18"/>
+              </a:rPr>
+              <a:t>Vestibulum</a:t>
+            </a:r>
+            <a:r>
+              <a:rPr lang="hu-HU" sz="1200" dirty="0">
+                <a:latin typeface="Montserrat" panose="00000500000000000000" pitchFamily="2" charset="-18"/>
+              </a:rPr>
+              <a:t> ante </a:t>
+            </a:r>
+            <a:r>
+              <a:rPr lang="hu-HU" sz="1200" dirty="0" err="1">
+                <a:latin typeface="Montserrat" panose="00000500000000000000" pitchFamily="2" charset="-18"/>
+              </a:rPr>
+              <a:t>ipsum</a:t>
+            </a:r>
+            <a:r>
+              <a:rPr lang="hu-HU" sz="1200" dirty="0">
+                <a:latin typeface="Montserrat" panose="00000500000000000000" pitchFamily="2" charset="-18"/>
+              </a:rPr>
+              <a:t> </a:t>
+            </a:r>
+            <a:r>
+              <a:rPr lang="hu-HU" sz="1200" dirty="0" err="1">
+                <a:latin typeface="Montserrat" panose="00000500000000000000" pitchFamily="2" charset="-18"/>
+              </a:rPr>
+              <a:t>primis</a:t>
+            </a:r>
+            <a:r>
+              <a:rPr lang="hu-HU" sz="1200" dirty="0">
+                <a:latin typeface="Montserrat" panose="00000500000000000000" pitchFamily="2" charset="-18"/>
+              </a:rPr>
+              <a:t> in </a:t>
+            </a:r>
+            <a:r>
+              <a:rPr lang="hu-HU" sz="1200" dirty="0" err="1">
+                <a:latin typeface="Montserrat" panose="00000500000000000000" pitchFamily="2" charset="-18"/>
+              </a:rPr>
+              <a:t>faucibus</a:t>
+            </a:r>
+            <a:r>
+              <a:rPr lang="hu-HU" sz="1200" dirty="0">
+                <a:latin typeface="Montserrat" panose="00000500000000000000" pitchFamily="2" charset="-18"/>
+              </a:rPr>
+              <a:t> </a:t>
+            </a:r>
+            <a:r>
+              <a:rPr lang="hu-HU" sz="1200" dirty="0" err="1">
+                <a:latin typeface="Montserrat" panose="00000500000000000000" pitchFamily="2" charset="-18"/>
+              </a:rPr>
+              <a:t>orci</a:t>
+            </a:r>
+            <a:r>
+              <a:rPr lang="hu-HU" sz="1200" dirty="0">
+                <a:latin typeface="Montserrat" panose="00000500000000000000" pitchFamily="2" charset="-18"/>
+              </a:rPr>
+              <a:t> </a:t>
+            </a:r>
+            <a:r>
+              <a:rPr lang="hu-HU" sz="1200" dirty="0" err="1">
+                <a:latin typeface="Montserrat" panose="00000500000000000000" pitchFamily="2" charset="-18"/>
+              </a:rPr>
+              <a:t>luctus</a:t>
+            </a:r>
+            <a:r>
+              <a:rPr lang="hu-HU" sz="1200" dirty="0">
+                <a:latin typeface="Montserrat" panose="00000500000000000000" pitchFamily="2" charset="-18"/>
+              </a:rPr>
+              <a:t> </a:t>
+            </a:r>
+            <a:r>
+              <a:rPr lang="hu-HU" sz="1200" dirty="0" err="1">
+                <a:latin typeface="Montserrat" panose="00000500000000000000" pitchFamily="2" charset="-18"/>
+              </a:rPr>
+              <a:t>et</a:t>
+            </a:r>
+            <a:r>
+              <a:rPr lang="hu-HU" sz="1200" dirty="0">
+                <a:latin typeface="Montserrat" panose="00000500000000000000" pitchFamily="2" charset="-18"/>
+              </a:rPr>
+              <a:t> </a:t>
+            </a:r>
+            <a:r>
+              <a:rPr lang="hu-HU" sz="1200" dirty="0" err="1">
+                <a:latin typeface="Montserrat" panose="00000500000000000000" pitchFamily="2" charset="-18"/>
+              </a:rPr>
+              <a:t>ultrices</a:t>
+            </a:r>
+            <a:r>
+              <a:rPr lang="hu-HU" sz="1200" dirty="0">
+                <a:latin typeface="Montserrat" panose="00000500000000000000" pitchFamily="2" charset="-18"/>
+              </a:rPr>
+              <a:t> </a:t>
+            </a:r>
+            <a:r>
+              <a:rPr lang="hu-HU" sz="1200" dirty="0" err="1">
+                <a:latin typeface="Montserrat" panose="00000500000000000000" pitchFamily="2" charset="-18"/>
+              </a:rPr>
+              <a:t>posuere</a:t>
+            </a:r>
+            <a:r>
+              <a:rPr lang="hu-HU" sz="1200" dirty="0">
+                <a:latin typeface="Montserrat" panose="00000500000000000000" pitchFamily="2" charset="-18"/>
+              </a:rPr>
+              <a:t> </a:t>
+            </a:r>
+            <a:r>
+              <a:rPr lang="hu-HU" sz="1200" dirty="0" err="1">
+                <a:latin typeface="Montserrat" panose="00000500000000000000" pitchFamily="2" charset="-18"/>
+              </a:rPr>
+              <a:t>cubilia</a:t>
+            </a:r>
+            <a:r>
+              <a:rPr lang="hu-HU" sz="1200" dirty="0">
+                <a:latin typeface="Montserrat" panose="00000500000000000000" pitchFamily="2" charset="-18"/>
+              </a:rPr>
+              <a:t> </a:t>
+            </a:r>
+            <a:r>
+              <a:rPr lang="hu-HU" sz="1200" dirty="0" err="1">
+                <a:latin typeface="Montserrat" panose="00000500000000000000" pitchFamily="2" charset="-18"/>
+              </a:rPr>
+              <a:t>curae</a:t>
+            </a:r>
+            <a:r>
+              <a:rPr lang="hu-HU" sz="1200" dirty="0">
+                <a:latin typeface="Montserrat" panose="00000500000000000000" pitchFamily="2" charset="-18"/>
+              </a:rPr>
+              <a:t>; </a:t>
+            </a:r>
+            <a:r>
+              <a:rPr lang="hu-HU" sz="1200" dirty="0" err="1">
+                <a:latin typeface="Montserrat" panose="00000500000000000000" pitchFamily="2" charset="-18"/>
+              </a:rPr>
+              <a:t>Mauris</a:t>
+            </a:r>
+            <a:r>
+              <a:rPr lang="hu-HU" sz="1200" dirty="0">
+                <a:latin typeface="Montserrat" panose="00000500000000000000" pitchFamily="2" charset="-18"/>
+              </a:rPr>
+              <a:t> </a:t>
+            </a:r>
+            <a:r>
+              <a:rPr lang="hu-HU" sz="1200" dirty="0" err="1">
+                <a:latin typeface="Montserrat" panose="00000500000000000000" pitchFamily="2" charset="-18"/>
+              </a:rPr>
+              <a:t>volutpat</a:t>
+            </a:r>
+            <a:r>
+              <a:rPr lang="hu-HU" sz="1200" dirty="0">
+                <a:latin typeface="Montserrat" panose="00000500000000000000" pitchFamily="2" charset="-18"/>
+              </a:rPr>
+              <a:t> </a:t>
+            </a:r>
+            <a:r>
+              <a:rPr lang="hu-HU" sz="1200" dirty="0" err="1">
+                <a:latin typeface="Montserrat" panose="00000500000000000000" pitchFamily="2" charset="-18"/>
+              </a:rPr>
+              <a:t>justo</a:t>
+            </a:r>
+            <a:r>
+              <a:rPr lang="hu-HU" sz="1200" dirty="0">
+                <a:latin typeface="Montserrat" panose="00000500000000000000" pitchFamily="2" charset="-18"/>
+              </a:rPr>
+              <a:t> </a:t>
+            </a:r>
+            <a:r>
+              <a:rPr lang="hu-HU" sz="1200" dirty="0" err="1">
+                <a:latin typeface="Montserrat" panose="00000500000000000000" pitchFamily="2" charset="-18"/>
+              </a:rPr>
+              <a:t>lacus</a:t>
+            </a:r>
+            <a:r>
+              <a:rPr lang="hu-HU" sz="1200" dirty="0">
+                <a:latin typeface="Montserrat" panose="00000500000000000000" pitchFamily="2" charset="-18"/>
+              </a:rPr>
+              <a:t>, </a:t>
+            </a:r>
+            <a:r>
+              <a:rPr lang="hu-HU" sz="1200" dirty="0" err="1">
+                <a:latin typeface="Montserrat" panose="00000500000000000000" pitchFamily="2" charset="-18"/>
+              </a:rPr>
+              <a:t>ac</a:t>
+            </a:r>
+            <a:r>
+              <a:rPr lang="hu-HU" sz="1200" dirty="0">
+                <a:latin typeface="Montserrat" panose="00000500000000000000" pitchFamily="2" charset="-18"/>
+              </a:rPr>
+              <a:t> </a:t>
+            </a:r>
+            <a:r>
+              <a:rPr lang="hu-HU" sz="1200" dirty="0" err="1">
+                <a:latin typeface="Montserrat" panose="00000500000000000000" pitchFamily="2" charset="-18"/>
+              </a:rPr>
+              <a:t>vestibulum</a:t>
+            </a:r>
+            <a:r>
+              <a:rPr lang="hu-HU" sz="1200" dirty="0">
+                <a:latin typeface="Montserrat" panose="00000500000000000000" pitchFamily="2" charset="-18"/>
+              </a:rPr>
+              <a:t> tortor </a:t>
+            </a:r>
+            <a:r>
+              <a:rPr lang="hu-HU" sz="1200" dirty="0" err="1">
+                <a:latin typeface="Montserrat" panose="00000500000000000000" pitchFamily="2" charset="-18"/>
+              </a:rPr>
+              <a:t>rhoncus</a:t>
+            </a:r>
+            <a:r>
+              <a:rPr lang="hu-HU" sz="1200" dirty="0">
+                <a:latin typeface="Montserrat" panose="00000500000000000000" pitchFamily="2" charset="-18"/>
+              </a:rPr>
+              <a:t> non. In </a:t>
+            </a:r>
+            <a:r>
+              <a:rPr lang="hu-HU" sz="1200" dirty="0" err="1">
+                <a:latin typeface="Montserrat" panose="00000500000000000000" pitchFamily="2" charset="-18"/>
+              </a:rPr>
+              <a:t>quis</a:t>
+            </a:r>
+            <a:r>
+              <a:rPr lang="hu-HU" sz="1200" dirty="0">
+                <a:latin typeface="Montserrat" panose="00000500000000000000" pitchFamily="2" charset="-18"/>
+              </a:rPr>
+              <a:t> </a:t>
+            </a:r>
+            <a:r>
+              <a:rPr lang="hu-HU" sz="1200" dirty="0" err="1">
+                <a:latin typeface="Montserrat" panose="00000500000000000000" pitchFamily="2" charset="-18"/>
+              </a:rPr>
+              <a:t>tincidunt</a:t>
+            </a:r>
+            <a:r>
+              <a:rPr lang="hu-HU" sz="1200" dirty="0">
+                <a:latin typeface="Montserrat" panose="00000500000000000000" pitchFamily="2" charset="-18"/>
+              </a:rPr>
+              <a:t> </a:t>
+            </a:r>
+            <a:r>
+              <a:rPr lang="hu-HU" sz="1200" dirty="0" err="1">
+                <a:latin typeface="Montserrat" panose="00000500000000000000" pitchFamily="2" charset="-18"/>
+              </a:rPr>
+              <a:t>lorem</a:t>
+            </a:r>
+            <a:r>
+              <a:rPr lang="hu-HU" sz="1200" dirty="0">
+                <a:latin typeface="Montserrat" panose="00000500000000000000" pitchFamily="2" charset="-18"/>
+              </a:rPr>
+              <a:t>. Nulla </a:t>
+            </a:r>
+            <a:r>
+              <a:rPr lang="hu-HU" sz="1200" dirty="0" err="1">
+                <a:latin typeface="Montserrat" panose="00000500000000000000" pitchFamily="2" charset="-18"/>
+              </a:rPr>
+              <a:t>efficitur</a:t>
+            </a:r>
+            <a:r>
+              <a:rPr lang="hu-HU" sz="1200" dirty="0">
+                <a:latin typeface="Montserrat" panose="00000500000000000000" pitchFamily="2" charset="-18"/>
+              </a:rPr>
+              <a:t> </a:t>
+            </a:r>
+            <a:r>
+              <a:rPr lang="hu-HU" sz="1200" dirty="0" err="1">
+                <a:latin typeface="Montserrat" panose="00000500000000000000" pitchFamily="2" charset="-18"/>
+              </a:rPr>
+              <a:t>hendrerit</a:t>
+            </a:r>
+            <a:r>
+              <a:rPr lang="hu-HU" sz="1200" dirty="0">
+                <a:latin typeface="Montserrat" panose="00000500000000000000" pitchFamily="2" charset="-18"/>
+              </a:rPr>
+              <a:t> </a:t>
+            </a:r>
+            <a:r>
+              <a:rPr lang="hu-HU" sz="1200" dirty="0" err="1">
+                <a:latin typeface="Montserrat" panose="00000500000000000000" pitchFamily="2" charset="-18"/>
+              </a:rPr>
+              <a:t>efficitur</a:t>
+            </a:r>
+            <a:r>
+              <a:rPr lang="hu-HU" sz="1200" dirty="0">
+                <a:latin typeface="Montserrat" panose="00000500000000000000" pitchFamily="2" charset="-18"/>
+              </a:rPr>
+              <a:t>. </a:t>
+            </a:r>
+            <a:r>
+              <a:rPr lang="hu-HU" sz="1200" dirty="0" err="1">
+                <a:latin typeface="Montserrat" panose="00000500000000000000" pitchFamily="2" charset="-18"/>
+              </a:rPr>
+              <a:t>Vivamus</a:t>
+            </a:r>
+            <a:r>
+              <a:rPr lang="hu-HU" sz="1200" dirty="0">
+                <a:latin typeface="Montserrat" panose="00000500000000000000" pitchFamily="2" charset="-18"/>
+              </a:rPr>
+              <a:t> </a:t>
+            </a:r>
+            <a:r>
+              <a:rPr lang="hu-HU" sz="1200" dirty="0" err="1">
+                <a:latin typeface="Montserrat" panose="00000500000000000000" pitchFamily="2" charset="-18"/>
+              </a:rPr>
+              <a:t>ut</a:t>
+            </a:r>
+            <a:r>
+              <a:rPr lang="hu-HU" sz="1200" dirty="0">
+                <a:latin typeface="Montserrat" panose="00000500000000000000" pitchFamily="2" charset="-18"/>
+              </a:rPr>
+              <a:t> </a:t>
+            </a:r>
+            <a:r>
+              <a:rPr lang="hu-HU" sz="1200" dirty="0" err="1">
+                <a:latin typeface="Montserrat" panose="00000500000000000000" pitchFamily="2" charset="-18"/>
+              </a:rPr>
+              <a:t>euismod</a:t>
+            </a:r>
+            <a:r>
+              <a:rPr lang="hu-HU" sz="1200" dirty="0">
+                <a:latin typeface="Montserrat" panose="00000500000000000000" pitchFamily="2" charset="-18"/>
+              </a:rPr>
+              <a:t> est. </a:t>
+            </a:r>
+            <a:r>
+              <a:rPr lang="hu-HU" sz="1200" dirty="0" err="1">
+                <a:latin typeface="Montserrat" panose="00000500000000000000" pitchFamily="2" charset="-18"/>
+              </a:rPr>
+              <a:t>Etiam</a:t>
+            </a:r>
+            <a:r>
+              <a:rPr lang="hu-HU" sz="1200" dirty="0">
+                <a:latin typeface="Montserrat" panose="00000500000000000000" pitchFamily="2" charset="-18"/>
+              </a:rPr>
+              <a:t> </a:t>
+            </a:r>
+            <a:r>
+              <a:rPr lang="hu-HU" sz="1200" dirty="0" err="1">
+                <a:latin typeface="Montserrat" panose="00000500000000000000" pitchFamily="2" charset="-18"/>
+              </a:rPr>
+              <a:t>viverra</a:t>
+            </a:r>
+            <a:r>
+              <a:rPr lang="hu-HU" sz="1200" dirty="0">
+                <a:latin typeface="Montserrat" panose="00000500000000000000" pitchFamily="2" charset="-18"/>
+              </a:rPr>
+              <a:t>, </a:t>
+            </a:r>
+            <a:r>
+              <a:rPr lang="hu-HU" sz="1200" dirty="0" err="1">
+                <a:latin typeface="Montserrat" panose="00000500000000000000" pitchFamily="2" charset="-18"/>
+              </a:rPr>
+              <a:t>eros</a:t>
+            </a:r>
+            <a:r>
+              <a:rPr lang="hu-HU" sz="1200" dirty="0">
+                <a:latin typeface="Montserrat" panose="00000500000000000000" pitchFamily="2" charset="-18"/>
+              </a:rPr>
+              <a:t> </a:t>
+            </a:r>
+            <a:r>
+              <a:rPr lang="hu-HU" sz="1200" dirty="0" err="1">
+                <a:latin typeface="Montserrat" panose="00000500000000000000" pitchFamily="2" charset="-18"/>
+              </a:rPr>
+              <a:t>sit</a:t>
+            </a:r>
+            <a:r>
+              <a:rPr lang="hu-HU" sz="1200" dirty="0">
+                <a:latin typeface="Montserrat" panose="00000500000000000000" pitchFamily="2" charset="-18"/>
+              </a:rPr>
+              <a:t> </a:t>
+            </a:r>
+            <a:r>
+              <a:rPr lang="hu-HU" sz="1200" dirty="0" err="1">
+                <a:latin typeface="Montserrat" panose="00000500000000000000" pitchFamily="2" charset="-18"/>
+              </a:rPr>
+              <a:t>amet</a:t>
+            </a:r>
+            <a:r>
+              <a:rPr lang="hu-HU" sz="1200" dirty="0">
+                <a:latin typeface="Montserrat" panose="00000500000000000000" pitchFamily="2" charset="-18"/>
+              </a:rPr>
+              <a:t> </a:t>
+            </a:r>
+            <a:r>
+              <a:rPr lang="hu-HU" sz="1200" dirty="0" err="1">
+                <a:latin typeface="Montserrat" panose="00000500000000000000" pitchFamily="2" charset="-18"/>
+              </a:rPr>
+              <a:t>maximus</a:t>
+            </a:r>
+            <a:r>
+              <a:rPr lang="hu-HU" sz="1200" dirty="0">
+                <a:latin typeface="Montserrat" panose="00000500000000000000" pitchFamily="2" charset="-18"/>
+              </a:rPr>
+              <a:t> </a:t>
+            </a:r>
+            <a:r>
+              <a:rPr lang="hu-HU" sz="1200" dirty="0" err="1">
+                <a:latin typeface="Montserrat" panose="00000500000000000000" pitchFamily="2" charset="-18"/>
+              </a:rPr>
+              <a:t>pellentesque</a:t>
+            </a:r>
+            <a:r>
+              <a:rPr lang="hu-HU" sz="1200" dirty="0">
+                <a:latin typeface="Montserrat" panose="00000500000000000000" pitchFamily="2" charset="-18"/>
+              </a:rPr>
+              <a:t>, </a:t>
+            </a:r>
+            <a:r>
+              <a:rPr lang="hu-HU" sz="1200" dirty="0" err="1">
+                <a:latin typeface="Montserrat" panose="00000500000000000000" pitchFamily="2" charset="-18"/>
+              </a:rPr>
+              <a:t>orci</a:t>
+            </a:r>
+            <a:r>
+              <a:rPr lang="hu-HU" sz="1200" dirty="0">
+                <a:latin typeface="Montserrat" panose="00000500000000000000" pitchFamily="2" charset="-18"/>
+              </a:rPr>
+              <a:t> </a:t>
+            </a:r>
+            <a:r>
+              <a:rPr lang="hu-HU" sz="1200" dirty="0" err="1">
+                <a:latin typeface="Montserrat" panose="00000500000000000000" pitchFamily="2" charset="-18"/>
+              </a:rPr>
+              <a:t>dui</a:t>
+            </a:r>
+            <a:r>
+              <a:rPr lang="hu-HU" sz="1200" dirty="0">
+                <a:latin typeface="Montserrat" panose="00000500000000000000" pitchFamily="2" charset="-18"/>
+              </a:rPr>
+              <a:t> </a:t>
+            </a:r>
+            <a:r>
+              <a:rPr lang="hu-HU" sz="1200" dirty="0" err="1">
+                <a:latin typeface="Montserrat" panose="00000500000000000000" pitchFamily="2" charset="-18"/>
+              </a:rPr>
+              <a:t>auctor</a:t>
+            </a:r>
+            <a:r>
+              <a:rPr lang="hu-HU" sz="1200" dirty="0">
+                <a:latin typeface="Montserrat" panose="00000500000000000000" pitchFamily="2" charset="-18"/>
+              </a:rPr>
+              <a:t> </a:t>
+            </a:r>
+            <a:r>
+              <a:rPr lang="hu-HU" sz="1200" dirty="0" err="1">
+                <a:latin typeface="Montserrat" panose="00000500000000000000" pitchFamily="2" charset="-18"/>
+              </a:rPr>
+              <a:t>massa</a:t>
+            </a:r>
+            <a:r>
+              <a:rPr lang="hu-HU" sz="1200" dirty="0">
+                <a:latin typeface="Montserrat" panose="00000500000000000000" pitchFamily="2" charset="-18"/>
+              </a:rPr>
+              <a:t>, </a:t>
+            </a:r>
+            <a:r>
+              <a:rPr lang="hu-HU" sz="1200" dirty="0" err="1">
+                <a:latin typeface="Montserrat" panose="00000500000000000000" pitchFamily="2" charset="-18"/>
+              </a:rPr>
+              <a:t>sit</a:t>
+            </a:r>
+            <a:r>
+              <a:rPr lang="hu-HU" sz="1200" dirty="0">
+                <a:latin typeface="Montserrat" panose="00000500000000000000" pitchFamily="2" charset="-18"/>
+              </a:rPr>
+              <a:t> </a:t>
+            </a:r>
+            <a:r>
+              <a:rPr lang="hu-HU" sz="1200" dirty="0" err="1">
+                <a:latin typeface="Montserrat" panose="00000500000000000000" pitchFamily="2" charset="-18"/>
+              </a:rPr>
+              <a:t>amet</a:t>
+            </a:r>
+            <a:r>
+              <a:rPr lang="hu-HU" sz="1200" dirty="0">
+                <a:latin typeface="Montserrat" panose="00000500000000000000" pitchFamily="2" charset="-18"/>
+              </a:rPr>
+              <a:t> </a:t>
+            </a:r>
+            <a:r>
+              <a:rPr lang="hu-HU" sz="1200" dirty="0" err="1">
+                <a:latin typeface="Montserrat" panose="00000500000000000000" pitchFamily="2" charset="-18"/>
+              </a:rPr>
+              <a:t>sollicitudin</a:t>
+            </a:r>
+            <a:r>
+              <a:rPr lang="hu-HU" sz="1200" dirty="0">
+                <a:latin typeface="Montserrat" panose="00000500000000000000" pitchFamily="2" charset="-18"/>
+              </a:rPr>
+              <a:t> mi </a:t>
+            </a:r>
+            <a:r>
+              <a:rPr lang="hu-HU" sz="1200" dirty="0" err="1">
+                <a:latin typeface="Montserrat" panose="00000500000000000000" pitchFamily="2" charset="-18"/>
+              </a:rPr>
+              <a:t>nibh</a:t>
+            </a:r>
+            <a:r>
+              <a:rPr lang="hu-HU" sz="1200" dirty="0">
+                <a:latin typeface="Montserrat" panose="00000500000000000000" pitchFamily="2" charset="-18"/>
+              </a:rPr>
+              <a:t> non </a:t>
+            </a:r>
+            <a:r>
+              <a:rPr lang="hu-HU" sz="1200" dirty="0" err="1">
+                <a:latin typeface="Montserrat" panose="00000500000000000000" pitchFamily="2" charset="-18"/>
+              </a:rPr>
+              <a:t>nisi</a:t>
+            </a:r>
+            <a:r>
+              <a:rPr lang="hu-HU" sz="1200" dirty="0">
+                <a:latin typeface="Montserrat" panose="00000500000000000000" pitchFamily="2" charset="-18"/>
+              </a:rPr>
+              <a:t>. Nullam dictum ante </a:t>
+            </a:r>
+            <a:r>
+              <a:rPr lang="hu-HU" sz="1200" dirty="0" err="1">
+                <a:latin typeface="Montserrat" panose="00000500000000000000" pitchFamily="2" charset="-18"/>
+              </a:rPr>
+              <a:t>sit</a:t>
+            </a:r>
+            <a:r>
+              <a:rPr lang="hu-HU" sz="1200" dirty="0">
+                <a:latin typeface="Montserrat" panose="00000500000000000000" pitchFamily="2" charset="-18"/>
+              </a:rPr>
+              <a:t> </a:t>
+            </a:r>
+            <a:r>
+              <a:rPr lang="hu-HU" sz="1200" dirty="0" err="1">
+                <a:latin typeface="Montserrat" panose="00000500000000000000" pitchFamily="2" charset="-18"/>
+              </a:rPr>
+              <a:t>amet</a:t>
+            </a:r>
+            <a:r>
+              <a:rPr lang="hu-HU" sz="1200" dirty="0">
+                <a:latin typeface="Montserrat" panose="00000500000000000000" pitchFamily="2" charset="-18"/>
+              </a:rPr>
+              <a:t> mi </a:t>
+            </a:r>
+            <a:r>
+              <a:rPr lang="hu-HU" sz="1200" dirty="0" err="1">
+                <a:latin typeface="Montserrat" panose="00000500000000000000" pitchFamily="2" charset="-18"/>
+              </a:rPr>
+              <a:t>aliquam</a:t>
+            </a:r>
+            <a:r>
+              <a:rPr lang="hu-HU" sz="1200" dirty="0">
+                <a:latin typeface="Montserrat" panose="00000500000000000000" pitchFamily="2" charset="-18"/>
+              </a:rPr>
+              <a:t>, in </a:t>
+            </a:r>
+            <a:r>
+              <a:rPr lang="hu-HU" sz="1200" dirty="0" err="1">
+                <a:latin typeface="Montserrat" panose="00000500000000000000" pitchFamily="2" charset="-18"/>
+              </a:rPr>
+              <a:t>gravida</a:t>
+            </a:r>
+            <a:r>
+              <a:rPr lang="hu-HU" sz="1200" dirty="0">
+                <a:latin typeface="Montserrat" panose="00000500000000000000" pitchFamily="2" charset="-18"/>
+              </a:rPr>
+              <a:t> </a:t>
+            </a:r>
+            <a:r>
+              <a:rPr lang="hu-HU" sz="1200" dirty="0" err="1">
+                <a:latin typeface="Montserrat" panose="00000500000000000000" pitchFamily="2" charset="-18"/>
+              </a:rPr>
+              <a:t>ipsum</a:t>
+            </a:r>
+            <a:r>
+              <a:rPr lang="hu-HU" sz="1200" dirty="0">
+                <a:latin typeface="Montserrat" panose="00000500000000000000" pitchFamily="2" charset="-18"/>
+              </a:rPr>
+              <a:t> </a:t>
+            </a:r>
+            <a:r>
+              <a:rPr lang="hu-HU" sz="1200" dirty="0" err="1">
+                <a:latin typeface="Montserrat" panose="00000500000000000000" pitchFamily="2" charset="-18"/>
+              </a:rPr>
+              <a:t>consequat</a:t>
+            </a:r>
+            <a:r>
+              <a:rPr lang="hu-HU" sz="1200" dirty="0">
+                <a:latin typeface="Montserrat" panose="00000500000000000000" pitchFamily="2" charset="-18"/>
+              </a:rPr>
+              <a:t>. </a:t>
+            </a:r>
+            <a:r>
+              <a:rPr lang="hu-HU" sz="1200" dirty="0" err="1">
+                <a:latin typeface="Montserrat" panose="00000500000000000000" pitchFamily="2" charset="-18"/>
+              </a:rPr>
+              <a:t>Morbi</a:t>
+            </a:r>
+            <a:r>
+              <a:rPr lang="hu-HU" sz="1200" dirty="0">
+                <a:latin typeface="Montserrat" panose="00000500000000000000" pitchFamily="2" charset="-18"/>
+              </a:rPr>
+              <a:t> </a:t>
+            </a:r>
+            <a:r>
+              <a:rPr lang="hu-HU" sz="1200" dirty="0" err="1">
+                <a:latin typeface="Montserrat" panose="00000500000000000000" pitchFamily="2" charset="-18"/>
+              </a:rPr>
+              <a:t>sodales</a:t>
+            </a:r>
+            <a:r>
+              <a:rPr lang="hu-HU" sz="1200" dirty="0">
+                <a:latin typeface="Montserrat" panose="00000500000000000000" pitchFamily="2" charset="-18"/>
+              </a:rPr>
+              <a:t> </a:t>
+            </a:r>
+            <a:r>
+              <a:rPr lang="hu-HU" sz="1200" dirty="0" err="1">
+                <a:latin typeface="Montserrat" panose="00000500000000000000" pitchFamily="2" charset="-18"/>
+              </a:rPr>
+              <a:t>luctus</a:t>
+            </a:r>
+            <a:r>
+              <a:rPr lang="hu-HU" sz="1200" dirty="0">
+                <a:latin typeface="Montserrat" panose="00000500000000000000" pitchFamily="2" charset="-18"/>
+              </a:rPr>
+              <a:t> </a:t>
+            </a:r>
+            <a:r>
+              <a:rPr lang="hu-HU" sz="1200" dirty="0" err="1">
+                <a:latin typeface="Montserrat" panose="00000500000000000000" pitchFamily="2" charset="-18"/>
+              </a:rPr>
+              <a:t>ligula</a:t>
+            </a:r>
+            <a:r>
+              <a:rPr lang="hu-HU" sz="1200" dirty="0">
+                <a:latin typeface="Montserrat" panose="00000500000000000000" pitchFamily="2" charset="-18"/>
+              </a:rPr>
+              <a:t> non </a:t>
+            </a:r>
+            <a:r>
+              <a:rPr lang="hu-HU" sz="1200" dirty="0" err="1">
+                <a:latin typeface="Montserrat" panose="00000500000000000000" pitchFamily="2" charset="-18"/>
+              </a:rPr>
+              <a:t>bibendum</a:t>
+            </a:r>
+            <a:r>
+              <a:rPr lang="hu-HU" sz="1200" dirty="0">
+                <a:latin typeface="Montserrat" panose="00000500000000000000" pitchFamily="2" charset="-18"/>
+              </a:rPr>
+              <a:t>. </a:t>
+            </a:r>
+            <a:r>
+              <a:rPr lang="hu-HU" sz="1200" dirty="0" err="1">
+                <a:latin typeface="Montserrat" panose="00000500000000000000" pitchFamily="2" charset="-18"/>
+              </a:rPr>
+              <a:t>Curabitur</a:t>
+            </a:r>
+            <a:r>
+              <a:rPr lang="hu-HU" sz="1200" dirty="0">
+                <a:latin typeface="Montserrat" panose="00000500000000000000" pitchFamily="2" charset="-18"/>
+              </a:rPr>
+              <a:t> </a:t>
+            </a:r>
+            <a:r>
+              <a:rPr lang="hu-HU" sz="1200" dirty="0" err="1">
+                <a:latin typeface="Montserrat" panose="00000500000000000000" pitchFamily="2" charset="-18"/>
+              </a:rPr>
+              <a:t>laoreet</a:t>
+            </a:r>
+            <a:r>
+              <a:rPr lang="hu-HU" sz="1200" dirty="0">
+                <a:latin typeface="Montserrat" panose="00000500000000000000" pitchFamily="2" charset="-18"/>
+              </a:rPr>
+              <a:t> </a:t>
+            </a:r>
+            <a:r>
+              <a:rPr lang="hu-HU" sz="1200" dirty="0" err="1">
+                <a:latin typeface="Montserrat" panose="00000500000000000000" pitchFamily="2" charset="-18"/>
+              </a:rPr>
+              <a:t>placerat</a:t>
+            </a:r>
+            <a:r>
+              <a:rPr lang="hu-HU" sz="1200" dirty="0">
+                <a:latin typeface="Montserrat" panose="00000500000000000000" pitchFamily="2" charset="-18"/>
+              </a:rPr>
+              <a:t> </a:t>
+            </a:r>
+            <a:r>
+              <a:rPr lang="hu-HU" sz="1200" dirty="0" err="1">
+                <a:latin typeface="Montserrat" panose="00000500000000000000" pitchFamily="2" charset="-18"/>
+              </a:rPr>
+              <a:t>augue</a:t>
+            </a:r>
+            <a:r>
+              <a:rPr lang="hu-HU" sz="1200" dirty="0">
+                <a:latin typeface="Montserrat" panose="00000500000000000000" pitchFamily="2" charset="-18"/>
+              </a:rPr>
+              <a:t>, a </a:t>
+            </a:r>
+            <a:r>
+              <a:rPr lang="hu-HU" sz="1200" dirty="0" err="1">
+                <a:latin typeface="Montserrat" panose="00000500000000000000" pitchFamily="2" charset="-18"/>
+              </a:rPr>
+              <a:t>feugiat</a:t>
+            </a:r>
+            <a:r>
+              <a:rPr lang="hu-HU" sz="1200" dirty="0">
+                <a:latin typeface="Montserrat" panose="00000500000000000000" pitchFamily="2" charset="-18"/>
+              </a:rPr>
+              <a:t> </a:t>
+            </a:r>
+            <a:r>
+              <a:rPr lang="hu-HU" sz="1200" dirty="0" err="1">
+                <a:latin typeface="Montserrat" panose="00000500000000000000" pitchFamily="2" charset="-18"/>
+              </a:rPr>
+              <a:t>ipsum</a:t>
+            </a:r>
+            <a:r>
+              <a:rPr lang="hu-HU" sz="1200" dirty="0">
+                <a:latin typeface="Montserrat" panose="00000500000000000000" pitchFamily="2" charset="-18"/>
+              </a:rPr>
+              <a:t> </a:t>
+            </a:r>
+            <a:r>
+              <a:rPr lang="hu-HU" sz="1200" dirty="0" err="1">
+                <a:latin typeface="Montserrat" panose="00000500000000000000" pitchFamily="2" charset="-18"/>
+              </a:rPr>
+              <a:t>consequat</a:t>
+            </a:r>
+            <a:r>
+              <a:rPr lang="hu-HU" sz="1200" dirty="0">
+                <a:latin typeface="Montserrat" panose="00000500000000000000" pitchFamily="2" charset="-18"/>
+              </a:rPr>
+              <a:t> </a:t>
+            </a:r>
+            <a:r>
+              <a:rPr lang="hu-HU" sz="1200" dirty="0" err="1">
+                <a:latin typeface="Montserrat" panose="00000500000000000000" pitchFamily="2" charset="-18"/>
+              </a:rPr>
+              <a:t>pulvinar</a:t>
+            </a:r>
+            <a:r>
+              <a:rPr lang="hu-HU" sz="1200" dirty="0">
+                <a:latin typeface="Montserrat" panose="00000500000000000000" pitchFamily="2" charset="-18"/>
+              </a:rPr>
+              <a:t>. </a:t>
+            </a:r>
+            <a:r>
+              <a:rPr lang="hu-HU" sz="1200" dirty="0" err="1">
+                <a:latin typeface="Montserrat" panose="00000500000000000000" pitchFamily="2" charset="-18"/>
+              </a:rPr>
+              <a:t>Etiam</a:t>
+            </a:r>
+            <a:r>
+              <a:rPr lang="hu-HU" sz="1200" dirty="0">
+                <a:latin typeface="Montserrat" panose="00000500000000000000" pitchFamily="2" charset="-18"/>
+              </a:rPr>
+              <a:t> </a:t>
+            </a:r>
+            <a:r>
+              <a:rPr lang="hu-HU" sz="1200" dirty="0" err="1">
+                <a:latin typeface="Montserrat" panose="00000500000000000000" pitchFamily="2" charset="-18"/>
+              </a:rPr>
+              <a:t>efficitur</a:t>
+            </a:r>
+            <a:r>
+              <a:rPr lang="hu-HU" sz="1200" dirty="0">
+                <a:latin typeface="Montserrat" panose="00000500000000000000" pitchFamily="2" charset="-18"/>
+              </a:rPr>
+              <a:t> </a:t>
+            </a:r>
+            <a:r>
+              <a:rPr lang="hu-HU" sz="1200" dirty="0" err="1">
+                <a:latin typeface="Montserrat" panose="00000500000000000000" pitchFamily="2" charset="-18"/>
+              </a:rPr>
+              <a:t>nunc</a:t>
+            </a:r>
+            <a:r>
+              <a:rPr lang="hu-HU" sz="1200" dirty="0">
+                <a:latin typeface="Montserrat" panose="00000500000000000000" pitchFamily="2" charset="-18"/>
+              </a:rPr>
+              <a:t> vel </a:t>
+            </a:r>
+            <a:r>
+              <a:rPr lang="hu-HU" sz="1200" dirty="0" err="1">
+                <a:latin typeface="Montserrat" panose="00000500000000000000" pitchFamily="2" charset="-18"/>
+              </a:rPr>
+              <a:t>dui</a:t>
+            </a:r>
+            <a:r>
+              <a:rPr lang="hu-HU" sz="1200" dirty="0">
+                <a:latin typeface="Montserrat" panose="00000500000000000000" pitchFamily="2" charset="-18"/>
+              </a:rPr>
+              <a:t> </a:t>
+            </a:r>
+            <a:r>
+              <a:rPr lang="hu-HU" sz="1200" dirty="0" err="1">
+                <a:latin typeface="Montserrat" panose="00000500000000000000" pitchFamily="2" charset="-18"/>
+              </a:rPr>
+              <a:t>porttitor</a:t>
+            </a:r>
+            <a:r>
+              <a:rPr lang="hu-HU" sz="1200" dirty="0">
+                <a:latin typeface="Montserrat" panose="00000500000000000000" pitchFamily="2" charset="-18"/>
+              </a:rPr>
+              <a:t>, </a:t>
+            </a:r>
+            <a:r>
+              <a:rPr lang="hu-HU" sz="1200" dirty="0" err="1">
+                <a:latin typeface="Montserrat" panose="00000500000000000000" pitchFamily="2" charset="-18"/>
+              </a:rPr>
+              <a:t>ac</a:t>
+            </a:r>
+            <a:r>
+              <a:rPr lang="hu-HU" sz="1200" dirty="0">
+                <a:latin typeface="Montserrat" panose="00000500000000000000" pitchFamily="2" charset="-18"/>
+              </a:rPr>
+              <a:t> </a:t>
+            </a:r>
+            <a:r>
+              <a:rPr lang="hu-HU" sz="1200" dirty="0" err="1">
+                <a:latin typeface="Montserrat" panose="00000500000000000000" pitchFamily="2" charset="-18"/>
+              </a:rPr>
+              <a:t>lacinia</a:t>
+            </a:r>
+            <a:r>
+              <a:rPr lang="hu-HU" sz="1200" dirty="0">
+                <a:latin typeface="Montserrat" panose="00000500000000000000" pitchFamily="2" charset="-18"/>
+              </a:rPr>
+              <a:t> </a:t>
+            </a:r>
+            <a:r>
+              <a:rPr lang="hu-HU" sz="1200" dirty="0" err="1">
+                <a:latin typeface="Montserrat" panose="00000500000000000000" pitchFamily="2" charset="-18"/>
+              </a:rPr>
+              <a:t>velit</a:t>
+            </a:r>
+            <a:r>
+              <a:rPr lang="hu-HU" sz="1200" dirty="0">
+                <a:latin typeface="Montserrat" panose="00000500000000000000" pitchFamily="2" charset="-18"/>
+              </a:rPr>
+              <a:t> </a:t>
+            </a:r>
+            <a:r>
+              <a:rPr lang="hu-HU" sz="1200" dirty="0" err="1">
+                <a:latin typeface="Montserrat" panose="00000500000000000000" pitchFamily="2" charset="-18"/>
+              </a:rPr>
+              <a:t>volutpat</a:t>
+            </a:r>
+            <a:r>
+              <a:rPr lang="hu-HU" sz="1200" dirty="0">
+                <a:latin typeface="Montserrat" panose="00000500000000000000" pitchFamily="2" charset="-18"/>
+              </a:rPr>
+              <a:t>. Nullam </a:t>
+            </a:r>
+            <a:r>
+              <a:rPr lang="hu-HU" sz="1200" dirty="0" err="1">
+                <a:latin typeface="Montserrat" panose="00000500000000000000" pitchFamily="2" charset="-18"/>
+              </a:rPr>
+              <a:t>sit</a:t>
+            </a:r>
+            <a:r>
+              <a:rPr lang="hu-HU" sz="1200" dirty="0">
+                <a:latin typeface="Montserrat" panose="00000500000000000000" pitchFamily="2" charset="-18"/>
+              </a:rPr>
+              <a:t> </a:t>
+            </a:r>
+            <a:r>
+              <a:rPr lang="hu-HU" sz="1200" dirty="0" err="1">
+                <a:latin typeface="Montserrat" panose="00000500000000000000" pitchFamily="2" charset="-18"/>
+              </a:rPr>
+              <a:t>amet</a:t>
+            </a:r>
+            <a:r>
+              <a:rPr lang="hu-HU" sz="1200" dirty="0">
+                <a:latin typeface="Montserrat" panose="00000500000000000000" pitchFamily="2" charset="-18"/>
+              </a:rPr>
+              <a:t> </a:t>
+            </a:r>
+            <a:r>
+              <a:rPr lang="hu-HU" sz="1200" dirty="0" err="1">
+                <a:latin typeface="Montserrat" panose="00000500000000000000" pitchFamily="2" charset="-18"/>
+              </a:rPr>
+              <a:t>iaculis</a:t>
+            </a:r>
+            <a:r>
+              <a:rPr lang="hu-HU" sz="1200" dirty="0">
+                <a:latin typeface="Montserrat" panose="00000500000000000000" pitchFamily="2" charset="-18"/>
+              </a:rPr>
+              <a:t> </a:t>
+            </a:r>
+            <a:r>
+              <a:rPr lang="hu-HU" sz="1200" dirty="0" err="1">
+                <a:latin typeface="Montserrat" panose="00000500000000000000" pitchFamily="2" charset="-18"/>
+              </a:rPr>
+              <a:t>nunc</a:t>
+            </a:r>
+            <a:r>
+              <a:rPr lang="hu-HU" sz="1200" dirty="0">
+                <a:latin typeface="Montserrat" panose="00000500000000000000" pitchFamily="2" charset="-18"/>
+              </a:rPr>
+              <a:t>. </a:t>
+            </a:r>
+            <a:r>
+              <a:rPr lang="hu-HU" sz="1200" dirty="0" err="1">
+                <a:latin typeface="Montserrat" panose="00000500000000000000" pitchFamily="2" charset="-18"/>
+              </a:rPr>
+              <a:t>Aenean</a:t>
+            </a:r>
+            <a:r>
+              <a:rPr lang="hu-HU" sz="1200" dirty="0">
+                <a:latin typeface="Montserrat" panose="00000500000000000000" pitchFamily="2" charset="-18"/>
+              </a:rPr>
+              <a:t> vitae </a:t>
+            </a:r>
+            <a:r>
+              <a:rPr lang="hu-HU" sz="1200" dirty="0" err="1">
+                <a:latin typeface="Montserrat" panose="00000500000000000000" pitchFamily="2" charset="-18"/>
+              </a:rPr>
+              <a:t>lorem</a:t>
+            </a:r>
+            <a:r>
+              <a:rPr lang="hu-HU" sz="1200" dirty="0">
+                <a:latin typeface="Montserrat" panose="00000500000000000000" pitchFamily="2" charset="-18"/>
+              </a:rPr>
+              <a:t> </a:t>
+            </a:r>
+            <a:r>
+              <a:rPr lang="hu-HU" sz="1200" dirty="0" err="1">
+                <a:latin typeface="Montserrat" panose="00000500000000000000" pitchFamily="2" charset="-18"/>
+              </a:rPr>
+              <a:t>pellentesque</a:t>
+            </a:r>
+            <a:r>
+              <a:rPr lang="hu-HU" sz="1200" dirty="0">
+                <a:latin typeface="Montserrat" panose="00000500000000000000" pitchFamily="2" charset="-18"/>
+              </a:rPr>
+              <a:t>, </a:t>
+            </a:r>
+            <a:r>
+              <a:rPr lang="hu-HU" sz="1200" dirty="0" err="1">
+                <a:latin typeface="Montserrat" panose="00000500000000000000" pitchFamily="2" charset="-18"/>
+              </a:rPr>
+              <a:t>egestas</a:t>
+            </a:r>
+            <a:r>
+              <a:rPr lang="hu-HU" sz="1200" dirty="0">
+                <a:latin typeface="Montserrat" panose="00000500000000000000" pitchFamily="2" charset="-18"/>
+              </a:rPr>
+              <a:t> mi </a:t>
+            </a:r>
+            <a:r>
+              <a:rPr lang="hu-HU" sz="1200" dirty="0" err="1">
+                <a:latin typeface="Montserrat" panose="00000500000000000000" pitchFamily="2" charset="-18"/>
+              </a:rPr>
+              <a:t>at</a:t>
+            </a:r>
+            <a:r>
+              <a:rPr lang="hu-HU" sz="1200" dirty="0">
+                <a:latin typeface="Montserrat" panose="00000500000000000000" pitchFamily="2" charset="-18"/>
+              </a:rPr>
+              <a:t>, </a:t>
+            </a:r>
+            <a:r>
+              <a:rPr lang="hu-HU" sz="1200" dirty="0" err="1">
+                <a:latin typeface="Montserrat" panose="00000500000000000000" pitchFamily="2" charset="-18"/>
+              </a:rPr>
+              <a:t>egestas</a:t>
+            </a:r>
+            <a:r>
+              <a:rPr lang="hu-HU" sz="1200" dirty="0">
+                <a:latin typeface="Montserrat" panose="00000500000000000000" pitchFamily="2" charset="-18"/>
+              </a:rPr>
+              <a:t> </a:t>
+            </a:r>
+            <a:r>
+              <a:rPr lang="hu-HU" sz="1200" dirty="0" err="1">
+                <a:latin typeface="Montserrat" panose="00000500000000000000" pitchFamily="2" charset="-18"/>
+              </a:rPr>
+              <a:t>augue</a:t>
+            </a:r>
+            <a:r>
+              <a:rPr lang="hu-HU" sz="1200" dirty="0">
+                <a:latin typeface="Montserrat" panose="00000500000000000000" pitchFamily="2" charset="-18"/>
+              </a:rPr>
+              <a:t>.</a:t>
+            </a:r>
+          </a:p>
+          <a:p>
+            <a:pPr marL="0" indent="0" algn="just">
+              <a:buNone/>
+            </a:pPr>
+            <a:endParaRPr lang="hu-HU" sz="1200" dirty="0">
+              <a:solidFill>
+                <a:srgbClr val="00FFFF"/>
+              </a:solidFill>
+              <a:latin typeface="Montserrat" panose="00000500000000000000" pitchFamily="2" charset="-18"/>
+            </a:endParaRPr>
+          </a:p>
+          <a:p>
+            <a:pPr marL="0" indent="0" algn="just">
+              <a:buNone/>
+            </a:pPr>
+            <a:r>
+              <a:rPr lang="hu-HU" sz="1200" u="sng" dirty="0">
+                <a:solidFill>
+                  <a:srgbClr val="BF40FF"/>
+                </a:solidFill>
+                <a:latin typeface="Montserrat" panose="00000500000000000000" pitchFamily="2" charset="-18"/>
+              </a:rPr>
+              <a:t>https://www.hivatkozasminta.hu</a:t>
+            </a:r>
+          </a:p>
+        </p:txBody>
+      </p:sp>
+    </p:spTree>
+    <p:extLst>
+      <p:ext uri="{BB962C8B-B14F-4D97-AF65-F5344CB8AC3E}">
+        <p14:creationId xmlns:p14="http://schemas.microsoft.com/office/powerpoint/2010/main" val="1537887581"/>
+      </p:ext>
+    </p:extLst>
+  </p:cSld>
+  <p:clrMapOvr>
+    <a:masterClrMapping/>
+  </p:clrMapOvr>
+</p:sld>
+</file>
+
+<file path=ppt/slides/slide11.xml><?xml version="1.0" encoding="utf-8"?>
+<p:sld xmlns:a="http://schemas.openxmlformats.org/drawingml/2006/main" xmlns:r="http://schemas.openxmlformats.org/officeDocument/2006/relationships" xmlns:p="http://schemas.openxmlformats.org/presentationml/2006/main">
+  <p:cSld>
+    <p:spTree>
+      <p:nvGrpSpPr>
+        <p:cNvPr id="1" name="">
+          <a:extLst>
+            <a:ext uri="{FF2B5EF4-FFF2-40B4-BE49-F238E27FC236}">
+              <a16:creationId xmlns:a16="http://schemas.microsoft.com/office/drawing/2014/main" id="{792C2CB7-F649-E372-FA34-25F1519556A9}"/>
+            </a:ext>
+          </a:extLst>
+        </p:cNvPr>
+        <p:cNvGrpSpPr/>
+        <p:nvPr/>
+      </p:nvGrpSpPr>
+      <p:grpSpPr>
+        <a:xfrm>
+          <a:off x="0" y="0"/>
+          <a:ext cx="0" cy="0"/>
+          <a:chOff x="0" y="0"/>
+          <a:chExt cx="0" cy="0"/>
+        </a:xfrm>
+      </p:grpSpPr>
+      <p:sp>
+        <p:nvSpPr>
+          <p:cNvPr id="2" name="Cím 1">
+            <a:extLst>
+              <a:ext uri="{FF2B5EF4-FFF2-40B4-BE49-F238E27FC236}">
+                <a16:creationId xmlns:a16="http://schemas.microsoft.com/office/drawing/2014/main" id="{6C0A7E7E-1EE6-E3EA-54ED-2514E7692337}"/>
+              </a:ext>
+            </a:extLst>
+          </p:cNvPr>
+          <p:cNvSpPr>
+            <a:spLocks noGrp="1"/>
+          </p:cNvSpPr>
+          <p:nvPr>
+            <p:ph type="title"/>
+          </p:nvPr>
+        </p:nvSpPr>
+        <p:spPr/>
+        <p:txBody>
+          <a:bodyPr/>
+          <a:lstStyle/>
+          <a:p>
+            <a:r>
+              <a:rPr lang="hu-HU" dirty="0">
+                <a:latin typeface="Montserrat" panose="00000500000000000000" pitchFamily="2" charset="-18"/>
+              </a:rPr>
+              <a:t>Ikonok</a:t>
+            </a:r>
+          </a:p>
+        </p:txBody>
+      </p:sp>
+    </p:spTree>
+    <p:extLst>
+      <p:ext uri="{BB962C8B-B14F-4D97-AF65-F5344CB8AC3E}">
+        <p14:creationId xmlns:p14="http://schemas.microsoft.com/office/powerpoint/2010/main" val="4221162758"/>
+      </p:ext>
+    </p:extLst>
+  </p:cSld>
+  <p:clrMapOvr>
+    <a:masterClrMapping/>
+  </p:clrMapOvr>
+</p:sld>
+</file>
+
 <file path=ppt/slides/slide2.xml><?xml version="1.0" encoding="utf-8"?>
 <p:sld xmlns:a="http://schemas.openxmlformats.org/drawingml/2006/main" xmlns:r="http://schemas.openxmlformats.org/officeDocument/2006/relationships" xmlns:p="http://schemas.openxmlformats.org/presentationml/2006/main">
   <p:cSld>
@@ -4218,7 +5831,9 @@
           <a:lstStyle/>
           <a:p>
             <a:r>
-              <a:rPr lang="hu-HU" dirty="0"/>
+              <a:rPr lang="hu-HU" dirty="0">
+                <a:latin typeface="Montserrat" panose="00000500000000000000" pitchFamily="2" charset="-18"/>
+              </a:rPr>
               <a:t>Projekt célja</a:t>
             </a:r>
           </a:p>
@@ -4246,19 +5861,25 @@
           <a:lstStyle/>
           <a:p>
             <a:r>
-              <a:rPr lang="hu-HU" dirty="0"/>
+              <a:rPr lang="hu-HU" dirty="0">
+                <a:latin typeface="Montserrat" panose="00000500000000000000" pitchFamily="2" charset="-18"/>
+              </a:rPr>
               <a:t>Zene streaming alkalmazás létrehozása</a:t>
             </a:r>
           </a:p>
           <a:p>
             <a:r>
-              <a:rPr lang="hu-HU" dirty="0"/>
+              <a:rPr lang="hu-HU" dirty="0">
+                <a:latin typeface="Montserrat" panose="00000500000000000000" pitchFamily="2" charset="-18"/>
+              </a:rPr>
               <a:t>Web, asztali és mobil platformokra</a:t>
             </a:r>
           </a:p>
           <a:p>
             <a:r>
-              <a:rPr lang="hu-HU" dirty="0"/>
+              <a:rPr lang="hu-HU" dirty="0">
+                <a:latin typeface="Montserrat" panose="00000500000000000000" pitchFamily="2" charset="-18"/>
+              </a:rPr>
               <a:t>Ingyenes felhasználói modell</a:t>
             </a:r>
           </a:p>
@@ -4316,7 +5937,9 @@
           <a:lstStyle/>
           <a:p>
             <a:r>
-              <a:rPr lang="hu-HU" dirty="0"/>
+              <a:rPr lang="hu-HU" dirty="0">
+                <a:latin typeface="Montserrat" panose="00000500000000000000" pitchFamily="2" charset="-18"/>
+              </a:rPr>
               <a:t>Projekt készítői</a:t>
             </a:r>
           </a:p>
@@ -4349,7 +5972,9 @@
           <a:lstStyle/>
           <a:p>
             <a:r>
-              <a:rPr lang="hu-HU" dirty="0"/>
+              <a:rPr lang="hu-HU" dirty="0">
+                <a:latin typeface="Montserrat" panose="00000500000000000000" pitchFamily="2" charset="-18"/>
+              </a:rPr>
               <a:t>Bernáth Ábel (beosztás, feladatok)</a:t>
             </a:r>
           </a:p>
@@ -4367,7 +5992,9 @@
           </a:p>
           <a:p>
             <a:r>
-              <a:rPr lang="hu-HU" dirty="0"/>
+              <a:rPr lang="hu-HU" dirty="0">
+                <a:latin typeface="Montserrat" panose="00000500000000000000" pitchFamily="2" charset="-18"/>
+              </a:rPr>
               <a:t>Nagy Ákos (-”-)</a:t>
             </a:r>
           </a:p>
@@ -8359,11 +9986,15 @@
           <a:lstStyle/>
           <a:p>
             <a:r>
-              <a:rPr lang="hu-HU" dirty="0" err="1"/>
+              <a:rPr lang="hu-HU" dirty="0" err="1">
+                <a:latin typeface="Montserrat" panose="00000500000000000000" pitchFamily="2" charset="-18"/>
+              </a:rPr>
               <a:t>Gantt</a:t>
             </a:r>
             <a:r>
-              <a:rPr lang="hu-HU" dirty="0"/>
+              <a:rPr lang="hu-HU" dirty="0">
+                <a:latin typeface="Montserrat" panose="00000500000000000000" pitchFamily="2" charset="-18"/>
+              </a:rPr>
               <a:t> diagram</a:t>
             </a:r>
           </a:p>
@@ -8451,10 +10082,14 @@
           <a:lstStyle/>
           <a:p>
             <a:r>
-              <a:rPr lang="hu-HU" dirty="0" err="1"/>
+              <a:rPr lang="hu-HU" dirty="0" err="1">
+                <a:latin typeface="Montserrat" panose="00000500000000000000" pitchFamily="2" charset="-18"/>
+              </a:rPr>
               <a:t>Wireframe</a:t>
             </a:r>
-            <a:endParaRPr lang="hu-HU" dirty="0"/>
+            <a:endParaRPr lang="hu-HU" dirty="0">
+              <a:latin typeface="Montserrat" panose="00000500000000000000" pitchFamily="2" charset="-18"/>
+            </a:endParaRPr>
           </a:p>
         </p:txBody>
       </p:sp>
@@ -8492,6 +10127,1973 @@
     <p:extLst>
       <p:ext uri="{BB962C8B-B14F-4D97-AF65-F5344CB8AC3E}">
         <p14:creationId xmlns:p14="http://schemas.microsoft.com/office/powerpoint/2010/main" val="238907221"/>
+      </p:ext>
+    </p:extLst>
+  </p:cSld>
+  <p:clrMapOvr>
+    <a:masterClrMapping/>
+  </p:clrMapOvr>
+</p:sld>
+</file>
+
+<file path=ppt/slides/slide7.xml><?xml version="1.0" encoding="utf-8"?>
+<p:sld xmlns:a="http://schemas.openxmlformats.org/drawingml/2006/main" xmlns:r="http://schemas.openxmlformats.org/officeDocument/2006/relationships" xmlns:p="http://schemas.openxmlformats.org/presentationml/2006/main">
+  <p:cSld>
+    <p:spTree>
+      <p:nvGrpSpPr>
+        <p:cNvPr id="1" name=""/>
+        <p:cNvGrpSpPr/>
+        <p:nvPr/>
+      </p:nvGrpSpPr>
+      <p:grpSpPr>
+        <a:xfrm>
+          <a:off x="0" y="0"/>
+          <a:ext cx="0" cy="0"/>
+          <a:chOff x="0" y="0"/>
+          <a:chExt cx="0" cy="0"/>
+        </a:xfrm>
+      </p:grpSpPr>
+      <p:sp>
+        <p:nvSpPr>
+          <p:cNvPr id="2" name="Cím 1">
+            <a:extLst>
+              <a:ext uri="{FF2B5EF4-FFF2-40B4-BE49-F238E27FC236}">
+                <a16:creationId xmlns:a16="http://schemas.microsoft.com/office/drawing/2014/main" id="{7EF01593-0B6B-B035-325B-6ABD2776C307}"/>
+              </a:ext>
+            </a:extLst>
+          </p:cNvPr>
+          <p:cNvSpPr>
+            <a:spLocks noGrp="1"/>
+          </p:cNvSpPr>
+          <p:nvPr>
+            <p:ph type="title"/>
+          </p:nvPr>
+        </p:nvSpPr>
+        <p:spPr>
+          <a:xfrm>
+            <a:off x="958671" y="2612801"/>
+            <a:ext cx="10274657" cy="1632397"/>
+          </a:xfrm>
+        </p:spPr>
+        <p:txBody>
+          <a:bodyPr>
+            <a:normAutofit fontScale="90000"/>
+          </a:bodyPr>
+          <a:lstStyle/>
+          <a:p>
+            <a:r>
+              <a:rPr lang="hu-HU" sz="8000" dirty="0">
+                <a:latin typeface="Montserrat" panose="00000500000000000000" pitchFamily="2" charset="-18"/>
+              </a:rPr>
+              <a:t>Arculat design </a:t>
+            </a:r>
+            <a:r>
+              <a:rPr lang="hu-HU" sz="8000" dirty="0" err="1">
+                <a:latin typeface="Montserrat" panose="00000500000000000000" pitchFamily="2" charset="-18"/>
+              </a:rPr>
+              <a:t>guide</a:t>
+            </a:r>
+            <a:endParaRPr lang="hu-HU" sz="8000" dirty="0">
+              <a:latin typeface="Montserrat" panose="00000500000000000000" pitchFamily="2" charset="-18"/>
+            </a:endParaRPr>
+          </a:p>
+        </p:txBody>
+      </p:sp>
+    </p:spTree>
+    <p:extLst>
+      <p:ext uri="{BB962C8B-B14F-4D97-AF65-F5344CB8AC3E}">
+        <p14:creationId xmlns:p14="http://schemas.microsoft.com/office/powerpoint/2010/main" val="4088233558"/>
+      </p:ext>
+    </p:extLst>
+  </p:cSld>
+  <p:clrMapOvr>
+    <a:masterClrMapping/>
+  </p:clrMapOvr>
+</p:sld>
+</file>
+
+<file path=ppt/slides/slide8.xml><?xml version="1.0" encoding="utf-8"?>
+<p:sld xmlns:a="http://schemas.openxmlformats.org/drawingml/2006/main" xmlns:r="http://schemas.openxmlformats.org/officeDocument/2006/relationships" xmlns:p="http://schemas.openxmlformats.org/presentationml/2006/main">
+  <p:cSld>
+    <p:spTree>
+      <p:nvGrpSpPr>
+        <p:cNvPr id="1" name=""/>
+        <p:cNvGrpSpPr/>
+        <p:nvPr/>
+      </p:nvGrpSpPr>
+      <p:grpSpPr>
+        <a:xfrm>
+          <a:off x="0" y="0"/>
+          <a:ext cx="0" cy="0"/>
+          <a:chOff x="0" y="0"/>
+          <a:chExt cx="0" cy="0"/>
+        </a:xfrm>
+      </p:grpSpPr>
+      <p:sp>
+        <p:nvSpPr>
+          <p:cNvPr id="9" name="Ellipszis 8">
+            <a:extLst>
+              <a:ext uri="{FF2B5EF4-FFF2-40B4-BE49-F238E27FC236}">
+                <a16:creationId xmlns:a16="http://schemas.microsoft.com/office/drawing/2014/main" id="{B414BDAD-30C9-EFC7-1755-89FB684D684A}"/>
+              </a:ext>
+            </a:extLst>
+          </p:cNvPr>
+          <p:cNvSpPr/>
+          <p:nvPr/>
+        </p:nvSpPr>
+        <p:spPr>
+          <a:xfrm>
+            <a:off x="5996856" y="1551905"/>
+            <a:ext cx="5306095" cy="5306095"/>
+          </a:xfrm>
+          <a:prstGeom prst="ellipse">
+            <a:avLst/>
+          </a:prstGeom>
+          <a:solidFill>
+            <a:schemeClr val="tx1"/>
+          </a:solidFill>
+          <a:ln>
+            <a:solidFill>
+              <a:schemeClr val="tx1"/>
+            </a:solidFill>
+          </a:ln>
+        </p:spPr>
+        <p:style>
+          <a:lnRef idx="2">
+            <a:schemeClr val="accent1">
+              <a:shade val="15000"/>
+            </a:schemeClr>
+          </a:lnRef>
+          <a:fillRef idx="1">
+            <a:schemeClr val="accent1"/>
+          </a:fillRef>
+          <a:effectRef idx="0">
+            <a:schemeClr val="accent1"/>
+          </a:effectRef>
+          <a:fontRef idx="minor">
+            <a:schemeClr val="lt1"/>
+          </a:fontRef>
+        </p:style>
+        <p:txBody>
+          <a:bodyPr rtlCol="0" anchor="ctr"/>
+          <a:lstStyle/>
+          <a:p>
+            <a:pPr algn="ctr"/>
+            <a:endParaRPr lang="hu-HU"/>
+          </a:p>
+        </p:txBody>
+      </p:sp>
+      <p:sp>
+        <p:nvSpPr>
+          <p:cNvPr id="2" name="Cím 1">
+            <a:extLst>
+              <a:ext uri="{FF2B5EF4-FFF2-40B4-BE49-F238E27FC236}">
+                <a16:creationId xmlns:a16="http://schemas.microsoft.com/office/drawing/2014/main" id="{4D15DB0F-3D64-569C-C47B-6200024C51CD}"/>
+              </a:ext>
+            </a:extLst>
+          </p:cNvPr>
+          <p:cNvSpPr>
+            <a:spLocks noGrp="1"/>
+          </p:cNvSpPr>
+          <p:nvPr>
+            <p:ph type="title"/>
+          </p:nvPr>
+        </p:nvSpPr>
+        <p:spPr>
+          <a:xfrm>
+            <a:off x="2004405" y="1196178"/>
+            <a:ext cx="7087135" cy="711454"/>
+          </a:xfrm>
+        </p:spPr>
+        <p:txBody>
+          <a:bodyPr/>
+          <a:lstStyle/>
+          <a:p>
+            <a:r>
+              <a:rPr lang="hu-HU" dirty="0">
+                <a:latin typeface="Montserrat" panose="00000500000000000000" pitchFamily="2" charset="-18"/>
+              </a:rPr>
+              <a:t>Logók</a:t>
+            </a:r>
+          </a:p>
+        </p:txBody>
+      </p:sp>
+      <p:pic>
+        <p:nvPicPr>
+          <p:cNvPr id="5" name="Ábra 4">
+            <a:extLst>
+              <a:ext uri="{FF2B5EF4-FFF2-40B4-BE49-F238E27FC236}">
+                <a16:creationId xmlns:a16="http://schemas.microsoft.com/office/drawing/2014/main" id="{2578BB54-4CB7-C644-96F7-C4B3938388E8}"/>
+              </a:ext>
+            </a:extLst>
+          </p:cNvPr>
+          <p:cNvPicPr>
+            <a:picLocks noChangeAspect="1"/>
+          </p:cNvPicPr>
+          <p:nvPr/>
+        </p:nvPicPr>
+        <p:blipFill>
+          <a:blip r:embed="rId2">
+            <a:extLst>
+              <a:ext uri="{96DAC541-7B7A-43D3-8B79-37D633B846F1}">
+                <asvg:svgBlip xmlns:asvg="http://schemas.microsoft.com/office/drawing/2016/SVG/main" r:embed="rId3"/>
+              </a:ext>
+            </a:extLst>
+          </a:blip>
+          <a:stretch>
+            <a:fillRect/>
+          </a:stretch>
+        </p:blipFill>
+        <p:spPr>
+          <a:xfrm>
+            <a:off x="5220903" y="775952"/>
+            <a:ext cx="6858000" cy="6858000"/>
+          </a:xfrm>
+          <a:prstGeom prst="rect">
+            <a:avLst/>
+          </a:prstGeom>
+        </p:spPr>
+      </p:pic>
+      <p:pic>
+        <p:nvPicPr>
+          <p:cNvPr id="7" name="Ábra 6">
+            <a:extLst>
+              <a:ext uri="{FF2B5EF4-FFF2-40B4-BE49-F238E27FC236}">
+                <a16:creationId xmlns:a16="http://schemas.microsoft.com/office/drawing/2014/main" id="{9100729D-17BC-81CD-C488-44CCAC92A6E8}"/>
+              </a:ext>
+            </a:extLst>
+          </p:cNvPr>
+          <p:cNvPicPr>
+            <a:picLocks noChangeAspect="1"/>
+          </p:cNvPicPr>
+          <p:nvPr/>
+        </p:nvPicPr>
+        <p:blipFill>
+          <a:blip r:embed="rId4">
+            <a:extLst>
+              <a:ext uri="{96DAC541-7B7A-43D3-8B79-37D633B846F1}">
+                <asvg:svgBlip xmlns:asvg="http://schemas.microsoft.com/office/drawing/2016/SVG/main" r:embed="rId5"/>
+              </a:ext>
+            </a:extLst>
+          </a:blip>
+          <a:stretch>
+            <a:fillRect/>
+          </a:stretch>
+        </p:blipFill>
+        <p:spPr>
+          <a:xfrm>
+            <a:off x="-420710" y="775952"/>
+            <a:ext cx="6858000" cy="6858000"/>
+          </a:xfrm>
+          <a:prstGeom prst="rect">
+            <a:avLst/>
+          </a:prstGeom>
+        </p:spPr>
+      </p:pic>
+    </p:spTree>
+    <p:extLst>
+      <p:ext uri="{BB962C8B-B14F-4D97-AF65-F5344CB8AC3E}">
+        <p14:creationId xmlns:p14="http://schemas.microsoft.com/office/powerpoint/2010/main" val="3588338528"/>
+      </p:ext>
+    </p:extLst>
+  </p:cSld>
+  <p:clrMapOvr>
+    <a:masterClrMapping/>
+  </p:clrMapOvr>
+</p:sld>
+</file>
+
+<file path=ppt/slides/slide9.xml><?xml version="1.0" encoding="utf-8"?>
+<p:sld xmlns:a="http://schemas.openxmlformats.org/drawingml/2006/main" xmlns:r="http://schemas.openxmlformats.org/officeDocument/2006/relationships" xmlns:p="http://schemas.openxmlformats.org/presentationml/2006/main">
+  <p:cSld>
+    <p:spTree>
+      <p:nvGrpSpPr>
+        <p:cNvPr id="1" name=""/>
+        <p:cNvGrpSpPr/>
+        <p:nvPr/>
+      </p:nvGrpSpPr>
+      <p:grpSpPr>
+        <a:xfrm>
+          <a:off x="0" y="0"/>
+          <a:ext cx="0" cy="0"/>
+          <a:chOff x="0" y="0"/>
+          <a:chExt cx="0" cy="0"/>
+        </a:xfrm>
+      </p:grpSpPr>
+      <p:sp>
+        <p:nvSpPr>
+          <p:cNvPr id="2" name="Cím 1">
+            <a:extLst>
+              <a:ext uri="{FF2B5EF4-FFF2-40B4-BE49-F238E27FC236}">
+                <a16:creationId xmlns:a16="http://schemas.microsoft.com/office/drawing/2014/main" id="{E5B99551-B982-2EFF-9B9A-BBDAF6056BB4}"/>
+              </a:ext>
+            </a:extLst>
+          </p:cNvPr>
+          <p:cNvSpPr>
+            <a:spLocks noGrp="1"/>
+          </p:cNvSpPr>
+          <p:nvPr>
+            <p:ph type="title"/>
+          </p:nvPr>
+        </p:nvSpPr>
+        <p:spPr/>
+        <p:txBody>
+          <a:bodyPr/>
+          <a:lstStyle/>
+          <a:p>
+            <a:r>
+              <a:rPr lang="hu-HU" dirty="0">
+                <a:latin typeface="Montserrat" panose="00000500000000000000" pitchFamily="2" charset="-18"/>
+              </a:rPr>
+              <a:t>Színpaletta</a:t>
+            </a:r>
+          </a:p>
+        </p:txBody>
+      </p:sp>
+      <p:sp>
+        <p:nvSpPr>
+          <p:cNvPr id="4" name="Freeform 5">
+            <a:extLst>
+              <a:ext uri="{FF2B5EF4-FFF2-40B4-BE49-F238E27FC236}">
+                <a16:creationId xmlns:a16="http://schemas.microsoft.com/office/drawing/2014/main" id="{613DC5CD-693B-E391-B34B-7CD5D5976E8D}"/>
+              </a:ext>
+            </a:extLst>
+          </p:cNvPr>
+          <p:cNvSpPr>
+            <a:spLocks/>
+          </p:cNvSpPr>
+          <p:nvPr/>
+        </p:nvSpPr>
+        <p:spPr bwMode="auto">
+          <a:xfrm>
+            <a:off x="1236761" y="2348331"/>
+            <a:ext cx="1704568" cy="1704568"/>
+          </a:xfrm>
+          <a:custGeom>
+            <a:avLst/>
+            <a:gdLst>
+              <a:gd name="T0" fmla="*/ 892 w 1784"/>
+              <a:gd name="T1" fmla="*/ 1784 h 1784"/>
+              <a:gd name="T2" fmla="*/ 261 w 1784"/>
+              <a:gd name="T3" fmla="*/ 1522 h 1784"/>
+              <a:gd name="T4" fmla="*/ 0 w 1784"/>
+              <a:gd name="T5" fmla="*/ 892 h 1784"/>
+              <a:gd name="T6" fmla="*/ 261 w 1784"/>
+              <a:gd name="T7" fmla="*/ 261 h 1784"/>
+              <a:gd name="T8" fmla="*/ 892 w 1784"/>
+              <a:gd name="T9" fmla="*/ 0 h 1784"/>
+              <a:gd name="T10" fmla="*/ 1523 w 1784"/>
+              <a:gd name="T11" fmla="*/ 261 h 1784"/>
+              <a:gd name="T12" fmla="*/ 1784 w 1784"/>
+              <a:gd name="T13" fmla="*/ 892 h 1784"/>
+              <a:gd name="T14" fmla="*/ 1523 w 1784"/>
+              <a:gd name="T15" fmla="*/ 1522 h 1784"/>
+              <a:gd name="T16" fmla="*/ 892 w 1784"/>
+              <a:gd name="T17" fmla="*/ 1784 h 1784"/>
+            </a:gdLst>
+            <a:ahLst/>
+            <a:cxnLst>
+              <a:cxn ang="0">
+                <a:pos x="T0" y="T1"/>
+              </a:cxn>
+              <a:cxn ang="0">
+                <a:pos x="T2" y="T3"/>
+              </a:cxn>
+              <a:cxn ang="0">
+                <a:pos x="T4" y="T5"/>
+              </a:cxn>
+              <a:cxn ang="0">
+                <a:pos x="T6" y="T7"/>
+              </a:cxn>
+              <a:cxn ang="0">
+                <a:pos x="T8" y="T9"/>
+              </a:cxn>
+              <a:cxn ang="0">
+                <a:pos x="T10" y="T11"/>
+              </a:cxn>
+              <a:cxn ang="0">
+                <a:pos x="T12" y="T13"/>
+              </a:cxn>
+              <a:cxn ang="0">
+                <a:pos x="T14" y="T15"/>
+              </a:cxn>
+              <a:cxn ang="0">
+                <a:pos x="T16" y="T17"/>
+              </a:cxn>
+            </a:cxnLst>
+            <a:rect l="0" t="0" r="r" b="b"/>
+            <a:pathLst>
+              <a:path w="1784" h="1784">
+                <a:moveTo>
+                  <a:pt x="892" y="1784"/>
+                </a:moveTo>
+                <a:cubicBezTo>
+                  <a:pt x="654" y="1784"/>
+                  <a:pt x="430" y="1691"/>
+                  <a:pt x="261" y="1522"/>
+                </a:cubicBezTo>
+                <a:cubicBezTo>
+                  <a:pt x="93" y="1354"/>
+                  <a:pt x="0" y="1130"/>
+                  <a:pt x="0" y="892"/>
+                </a:cubicBezTo>
+                <a:cubicBezTo>
+                  <a:pt x="0" y="654"/>
+                  <a:pt x="93" y="430"/>
+                  <a:pt x="261" y="261"/>
+                </a:cubicBezTo>
+                <a:cubicBezTo>
+                  <a:pt x="430" y="93"/>
+                  <a:pt x="654" y="0"/>
+                  <a:pt x="892" y="0"/>
+                </a:cubicBezTo>
+                <a:cubicBezTo>
+                  <a:pt x="1130" y="0"/>
+                  <a:pt x="1354" y="93"/>
+                  <a:pt x="1523" y="261"/>
+                </a:cubicBezTo>
+                <a:cubicBezTo>
+                  <a:pt x="1691" y="430"/>
+                  <a:pt x="1784" y="654"/>
+                  <a:pt x="1784" y="892"/>
+                </a:cubicBezTo>
+                <a:cubicBezTo>
+                  <a:pt x="1784" y="1130"/>
+                  <a:pt x="1691" y="1354"/>
+                  <a:pt x="1523" y="1522"/>
+                </a:cubicBezTo>
+                <a:cubicBezTo>
+                  <a:pt x="1354" y="1691"/>
+                  <a:pt x="1130" y="1784"/>
+                  <a:pt x="892" y="1784"/>
+                </a:cubicBezTo>
+                <a:close/>
+              </a:path>
+            </a:pathLst>
+          </a:custGeom>
+          <a:solidFill>
+            <a:schemeClr val="bg1"/>
+          </a:solidFill>
+          <a:ln>
+            <a:noFill/>
+          </a:ln>
+          <a:effectLst>
+            <a:outerShdw blurRad="152400" sx="102000" sy="102000" algn="ctr" rotWithShape="0">
+              <a:prstClr val="black">
+                <a:alpha val="10000"/>
+              </a:prstClr>
+            </a:outerShdw>
+          </a:effectLst>
+        </p:spPr>
+        <p:style>
+          <a:lnRef idx="2">
+            <a:schemeClr val="accent1">
+              <a:shade val="50000"/>
+            </a:schemeClr>
+          </a:lnRef>
+          <a:fillRef idx="1">
+            <a:schemeClr val="accent1"/>
+          </a:fillRef>
+          <a:effectRef idx="0">
+            <a:schemeClr val="accent1"/>
+          </a:effectRef>
+          <a:fontRef idx="minor">
+            <a:schemeClr val="lt1"/>
+          </a:fontRef>
+        </p:style>
+        <p:txBody>
+          <a:bodyPr rtlCol="0" anchor="ctr"/>
+          <a:lstStyle/>
+          <a:p>
+            <a:pPr algn="ctr"/>
+            <a:endParaRPr lang="en-US">
+              <a:solidFill>
+                <a:schemeClr val="tx1"/>
+              </a:solidFill>
+            </a:endParaRPr>
+          </a:p>
+        </p:txBody>
+      </p:sp>
+      <p:sp>
+        <p:nvSpPr>
+          <p:cNvPr id="5" name="Oval 45">
+            <a:extLst>
+              <a:ext uri="{FF2B5EF4-FFF2-40B4-BE49-F238E27FC236}">
+                <a16:creationId xmlns:a16="http://schemas.microsoft.com/office/drawing/2014/main" id="{95FAE627-E920-70B1-3A3A-ED91CE894040}"/>
+              </a:ext>
+            </a:extLst>
+          </p:cNvPr>
+          <p:cNvSpPr/>
+          <p:nvPr/>
+        </p:nvSpPr>
+        <p:spPr>
+          <a:xfrm>
+            <a:off x="1388295" y="2498173"/>
+            <a:ext cx="1401500" cy="1401500"/>
+          </a:xfrm>
+          <a:prstGeom prst="ellipse">
+            <a:avLst/>
+          </a:prstGeom>
+          <a:solidFill>
+            <a:schemeClr val="bg1"/>
+          </a:solidFill>
+          <a:ln>
+            <a:noFill/>
+          </a:ln>
+          <a:effectLst>
+            <a:outerShdw blurRad="152400" sx="102000" sy="102000" algn="ctr" rotWithShape="0">
+              <a:prstClr val="black">
+                <a:alpha val="10000"/>
+              </a:prstClr>
+            </a:outerShdw>
+          </a:effectLst>
+        </p:spPr>
+        <p:style>
+          <a:lnRef idx="2">
+            <a:schemeClr val="accent1">
+              <a:shade val="50000"/>
+            </a:schemeClr>
+          </a:lnRef>
+          <a:fillRef idx="1">
+            <a:schemeClr val="accent1"/>
+          </a:fillRef>
+          <a:effectRef idx="0">
+            <a:schemeClr val="accent1"/>
+          </a:effectRef>
+          <a:fontRef idx="minor">
+            <a:schemeClr val="lt1"/>
+          </a:fontRef>
+        </p:style>
+        <p:txBody>
+          <a:bodyPr rtlCol="0" anchor="ctr"/>
+          <a:lstStyle/>
+          <a:p>
+            <a:pPr algn="ctr"/>
+            <a:endParaRPr lang="en-US">
+              <a:solidFill>
+                <a:schemeClr val="tx1"/>
+              </a:solidFill>
+            </a:endParaRPr>
+          </a:p>
+        </p:txBody>
+      </p:sp>
+      <p:sp>
+        <p:nvSpPr>
+          <p:cNvPr id="6" name="Oval 49">
+            <a:extLst>
+              <a:ext uri="{FF2B5EF4-FFF2-40B4-BE49-F238E27FC236}">
+                <a16:creationId xmlns:a16="http://schemas.microsoft.com/office/drawing/2014/main" id="{1BAD7F67-1ECA-752F-40B6-89AA75F91AE2}"/>
+              </a:ext>
+            </a:extLst>
+          </p:cNvPr>
+          <p:cNvSpPr/>
+          <p:nvPr/>
+        </p:nvSpPr>
+        <p:spPr>
+          <a:xfrm>
+            <a:off x="1531908" y="2641786"/>
+            <a:ext cx="1114274" cy="1114274"/>
+          </a:xfrm>
+          <a:prstGeom prst="ellipse">
+            <a:avLst/>
+          </a:prstGeom>
+          <a:solidFill>
+            <a:schemeClr val="tx1"/>
+          </a:solidFill>
+          <a:ln>
+            <a:solidFill>
+              <a:schemeClr val="tx1"/>
+            </a:solidFill>
+          </a:ln>
+        </p:spPr>
+        <p:style>
+          <a:lnRef idx="2">
+            <a:schemeClr val="accent1">
+              <a:shade val="50000"/>
+            </a:schemeClr>
+          </a:lnRef>
+          <a:fillRef idx="1">
+            <a:schemeClr val="accent1"/>
+          </a:fillRef>
+          <a:effectRef idx="0">
+            <a:schemeClr val="accent1"/>
+          </a:effectRef>
+          <a:fontRef idx="minor">
+            <a:schemeClr val="lt1"/>
+          </a:fontRef>
+        </p:style>
+        <p:txBody>
+          <a:bodyPr rtlCol="0" anchor="ctr"/>
+          <a:lstStyle/>
+          <a:p>
+            <a:pPr algn="ctr"/>
+            <a:endParaRPr lang="en-US"/>
+          </a:p>
+        </p:txBody>
+      </p:sp>
+      <p:sp>
+        <p:nvSpPr>
+          <p:cNvPr id="7" name="Freeform 5">
+            <a:extLst>
+              <a:ext uri="{FF2B5EF4-FFF2-40B4-BE49-F238E27FC236}">
+                <a16:creationId xmlns:a16="http://schemas.microsoft.com/office/drawing/2014/main" id="{FFC88AED-0705-0A6F-B537-F4F2F3FA4785}"/>
+              </a:ext>
+            </a:extLst>
+          </p:cNvPr>
+          <p:cNvSpPr>
+            <a:spLocks/>
+          </p:cNvSpPr>
+          <p:nvPr/>
+        </p:nvSpPr>
+        <p:spPr bwMode="auto">
+          <a:xfrm>
+            <a:off x="3240239" y="2346638"/>
+            <a:ext cx="1704568" cy="1704568"/>
+          </a:xfrm>
+          <a:custGeom>
+            <a:avLst/>
+            <a:gdLst>
+              <a:gd name="T0" fmla="*/ 892 w 1784"/>
+              <a:gd name="T1" fmla="*/ 1784 h 1784"/>
+              <a:gd name="T2" fmla="*/ 261 w 1784"/>
+              <a:gd name="T3" fmla="*/ 1522 h 1784"/>
+              <a:gd name="T4" fmla="*/ 0 w 1784"/>
+              <a:gd name="T5" fmla="*/ 892 h 1784"/>
+              <a:gd name="T6" fmla="*/ 261 w 1784"/>
+              <a:gd name="T7" fmla="*/ 261 h 1784"/>
+              <a:gd name="T8" fmla="*/ 892 w 1784"/>
+              <a:gd name="T9" fmla="*/ 0 h 1784"/>
+              <a:gd name="T10" fmla="*/ 1523 w 1784"/>
+              <a:gd name="T11" fmla="*/ 261 h 1784"/>
+              <a:gd name="T12" fmla="*/ 1784 w 1784"/>
+              <a:gd name="T13" fmla="*/ 892 h 1784"/>
+              <a:gd name="T14" fmla="*/ 1523 w 1784"/>
+              <a:gd name="T15" fmla="*/ 1522 h 1784"/>
+              <a:gd name="T16" fmla="*/ 892 w 1784"/>
+              <a:gd name="T17" fmla="*/ 1784 h 1784"/>
+            </a:gdLst>
+            <a:ahLst/>
+            <a:cxnLst>
+              <a:cxn ang="0">
+                <a:pos x="T0" y="T1"/>
+              </a:cxn>
+              <a:cxn ang="0">
+                <a:pos x="T2" y="T3"/>
+              </a:cxn>
+              <a:cxn ang="0">
+                <a:pos x="T4" y="T5"/>
+              </a:cxn>
+              <a:cxn ang="0">
+                <a:pos x="T6" y="T7"/>
+              </a:cxn>
+              <a:cxn ang="0">
+                <a:pos x="T8" y="T9"/>
+              </a:cxn>
+              <a:cxn ang="0">
+                <a:pos x="T10" y="T11"/>
+              </a:cxn>
+              <a:cxn ang="0">
+                <a:pos x="T12" y="T13"/>
+              </a:cxn>
+              <a:cxn ang="0">
+                <a:pos x="T14" y="T15"/>
+              </a:cxn>
+              <a:cxn ang="0">
+                <a:pos x="T16" y="T17"/>
+              </a:cxn>
+            </a:cxnLst>
+            <a:rect l="0" t="0" r="r" b="b"/>
+            <a:pathLst>
+              <a:path w="1784" h="1784">
+                <a:moveTo>
+                  <a:pt x="892" y="1784"/>
+                </a:moveTo>
+                <a:cubicBezTo>
+                  <a:pt x="654" y="1784"/>
+                  <a:pt x="430" y="1691"/>
+                  <a:pt x="261" y="1522"/>
+                </a:cubicBezTo>
+                <a:cubicBezTo>
+                  <a:pt x="93" y="1354"/>
+                  <a:pt x="0" y="1130"/>
+                  <a:pt x="0" y="892"/>
+                </a:cubicBezTo>
+                <a:cubicBezTo>
+                  <a:pt x="0" y="654"/>
+                  <a:pt x="93" y="430"/>
+                  <a:pt x="261" y="261"/>
+                </a:cubicBezTo>
+                <a:cubicBezTo>
+                  <a:pt x="430" y="93"/>
+                  <a:pt x="654" y="0"/>
+                  <a:pt x="892" y="0"/>
+                </a:cubicBezTo>
+                <a:cubicBezTo>
+                  <a:pt x="1130" y="0"/>
+                  <a:pt x="1354" y="93"/>
+                  <a:pt x="1523" y="261"/>
+                </a:cubicBezTo>
+                <a:cubicBezTo>
+                  <a:pt x="1691" y="430"/>
+                  <a:pt x="1784" y="654"/>
+                  <a:pt x="1784" y="892"/>
+                </a:cubicBezTo>
+                <a:cubicBezTo>
+                  <a:pt x="1784" y="1130"/>
+                  <a:pt x="1691" y="1354"/>
+                  <a:pt x="1523" y="1522"/>
+                </a:cubicBezTo>
+                <a:cubicBezTo>
+                  <a:pt x="1354" y="1691"/>
+                  <a:pt x="1130" y="1784"/>
+                  <a:pt x="892" y="1784"/>
+                </a:cubicBezTo>
+                <a:close/>
+              </a:path>
+            </a:pathLst>
+          </a:custGeom>
+          <a:solidFill>
+            <a:schemeClr val="bg1"/>
+          </a:solidFill>
+          <a:ln>
+            <a:noFill/>
+          </a:ln>
+          <a:effectLst>
+            <a:outerShdw blurRad="152400" sx="102000" sy="102000" algn="ctr" rotWithShape="0">
+              <a:prstClr val="black">
+                <a:alpha val="10000"/>
+              </a:prstClr>
+            </a:outerShdw>
+          </a:effectLst>
+        </p:spPr>
+        <p:style>
+          <a:lnRef idx="2">
+            <a:schemeClr val="accent1">
+              <a:shade val="50000"/>
+            </a:schemeClr>
+          </a:lnRef>
+          <a:fillRef idx="1">
+            <a:schemeClr val="accent1"/>
+          </a:fillRef>
+          <a:effectRef idx="0">
+            <a:schemeClr val="accent1"/>
+          </a:effectRef>
+          <a:fontRef idx="minor">
+            <a:schemeClr val="lt1"/>
+          </a:fontRef>
+        </p:style>
+        <p:txBody>
+          <a:bodyPr rtlCol="0" anchor="ctr"/>
+          <a:lstStyle/>
+          <a:p>
+            <a:pPr algn="ctr"/>
+            <a:endParaRPr lang="en-US">
+              <a:solidFill>
+                <a:schemeClr val="tx1"/>
+              </a:solidFill>
+            </a:endParaRPr>
+          </a:p>
+        </p:txBody>
+      </p:sp>
+      <p:sp>
+        <p:nvSpPr>
+          <p:cNvPr id="8" name="Oval 51">
+            <a:extLst>
+              <a:ext uri="{FF2B5EF4-FFF2-40B4-BE49-F238E27FC236}">
+                <a16:creationId xmlns:a16="http://schemas.microsoft.com/office/drawing/2014/main" id="{43C9236F-42D7-0915-3CBE-B2CB04291EC9}"/>
+              </a:ext>
+            </a:extLst>
+          </p:cNvPr>
+          <p:cNvSpPr/>
+          <p:nvPr/>
+        </p:nvSpPr>
+        <p:spPr>
+          <a:xfrm>
+            <a:off x="3391773" y="2496480"/>
+            <a:ext cx="1401500" cy="1401500"/>
+          </a:xfrm>
+          <a:prstGeom prst="ellipse">
+            <a:avLst/>
+          </a:prstGeom>
+          <a:solidFill>
+            <a:schemeClr val="bg1"/>
+          </a:solidFill>
+          <a:ln>
+            <a:noFill/>
+          </a:ln>
+          <a:effectLst>
+            <a:outerShdw blurRad="152400" sx="102000" sy="102000" algn="ctr" rotWithShape="0">
+              <a:prstClr val="black">
+                <a:alpha val="10000"/>
+              </a:prstClr>
+            </a:outerShdw>
+          </a:effectLst>
+        </p:spPr>
+        <p:style>
+          <a:lnRef idx="2">
+            <a:schemeClr val="accent1">
+              <a:shade val="50000"/>
+            </a:schemeClr>
+          </a:lnRef>
+          <a:fillRef idx="1">
+            <a:schemeClr val="accent1"/>
+          </a:fillRef>
+          <a:effectRef idx="0">
+            <a:schemeClr val="accent1"/>
+          </a:effectRef>
+          <a:fontRef idx="minor">
+            <a:schemeClr val="lt1"/>
+          </a:fontRef>
+        </p:style>
+        <p:txBody>
+          <a:bodyPr rtlCol="0" anchor="ctr"/>
+          <a:lstStyle/>
+          <a:p>
+            <a:pPr algn="ctr"/>
+            <a:endParaRPr lang="en-US">
+              <a:solidFill>
+                <a:schemeClr val="tx1"/>
+              </a:solidFill>
+            </a:endParaRPr>
+          </a:p>
+        </p:txBody>
+      </p:sp>
+      <p:sp>
+        <p:nvSpPr>
+          <p:cNvPr id="9" name="Oval 52">
+            <a:extLst>
+              <a:ext uri="{FF2B5EF4-FFF2-40B4-BE49-F238E27FC236}">
+                <a16:creationId xmlns:a16="http://schemas.microsoft.com/office/drawing/2014/main" id="{031D03D0-D9CA-9F7A-EFC1-012B76E1639D}"/>
+              </a:ext>
+            </a:extLst>
+          </p:cNvPr>
+          <p:cNvSpPr/>
+          <p:nvPr/>
+        </p:nvSpPr>
+        <p:spPr>
+          <a:xfrm>
+            <a:off x="3535386" y="2640093"/>
+            <a:ext cx="1114274" cy="1114274"/>
+          </a:xfrm>
+          <a:prstGeom prst="ellipse">
+            <a:avLst/>
+          </a:prstGeom>
+          <a:solidFill>
+            <a:schemeClr val="bg1"/>
+          </a:solidFill>
+          <a:ln>
+            <a:solidFill>
+              <a:schemeClr val="tx1"/>
+            </a:solidFill>
+          </a:ln>
+        </p:spPr>
+        <p:style>
+          <a:lnRef idx="2">
+            <a:schemeClr val="accent1">
+              <a:shade val="50000"/>
+            </a:schemeClr>
+          </a:lnRef>
+          <a:fillRef idx="1">
+            <a:schemeClr val="accent1"/>
+          </a:fillRef>
+          <a:effectRef idx="0">
+            <a:schemeClr val="accent1"/>
+          </a:effectRef>
+          <a:fontRef idx="minor">
+            <a:schemeClr val="lt1"/>
+          </a:fontRef>
+        </p:style>
+        <p:txBody>
+          <a:bodyPr rtlCol="0" anchor="ctr"/>
+          <a:lstStyle/>
+          <a:p>
+            <a:pPr algn="ctr"/>
+            <a:endParaRPr lang="en-US"/>
+          </a:p>
+        </p:txBody>
+      </p:sp>
+      <p:sp>
+        <p:nvSpPr>
+          <p:cNvPr id="10" name="Freeform 5">
+            <a:extLst>
+              <a:ext uri="{FF2B5EF4-FFF2-40B4-BE49-F238E27FC236}">
+                <a16:creationId xmlns:a16="http://schemas.microsoft.com/office/drawing/2014/main" id="{45D8553C-C699-2367-1D09-430E918428D4}"/>
+              </a:ext>
+            </a:extLst>
+          </p:cNvPr>
+          <p:cNvSpPr>
+            <a:spLocks/>
+          </p:cNvSpPr>
+          <p:nvPr/>
+        </p:nvSpPr>
+        <p:spPr bwMode="auto">
+          <a:xfrm>
+            <a:off x="7247195" y="2343253"/>
+            <a:ext cx="1704568" cy="1704568"/>
+          </a:xfrm>
+          <a:custGeom>
+            <a:avLst/>
+            <a:gdLst>
+              <a:gd name="T0" fmla="*/ 892 w 1784"/>
+              <a:gd name="T1" fmla="*/ 1784 h 1784"/>
+              <a:gd name="T2" fmla="*/ 261 w 1784"/>
+              <a:gd name="T3" fmla="*/ 1522 h 1784"/>
+              <a:gd name="T4" fmla="*/ 0 w 1784"/>
+              <a:gd name="T5" fmla="*/ 892 h 1784"/>
+              <a:gd name="T6" fmla="*/ 261 w 1784"/>
+              <a:gd name="T7" fmla="*/ 261 h 1784"/>
+              <a:gd name="T8" fmla="*/ 892 w 1784"/>
+              <a:gd name="T9" fmla="*/ 0 h 1784"/>
+              <a:gd name="T10" fmla="*/ 1523 w 1784"/>
+              <a:gd name="T11" fmla="*/ 261 h 1784"/>
+              <a:gd name="T12" fmla="*/ 1784 w 1784"/>
+              <a:gd name="T13" fmla="*/ 892 h 1784"/>
+              <a:gd name="T14" fmla="*/ 1523 w 1784"/>
+              <a:gd name="T15" fmla="*/ 1522 h 1784"/>
+              <a:gd name="T16" fmla="*/ 892 w 1784"/>
+              <a:gd name="T17" fmla="*/ 1784 h 1784"/>
+            </a:gdLst>
+            <a:ahLst/>
+            <a:cxnLst>
+              <a:cxn ang="0">
+                <a:pos x="T0" y="T1"/>
+              </a:cxn>
+              <a:cxn ang="0">
+                <a:pos x="T2" y="T3"/>
+              </a:cxn>
+              <a:cxn ang="0">
+                <a:pos x="T4" y="T5"/>
+              </a:cxn>
+              <a:cxn ang="0">
+                <a:pos x="T6" y="T7"/>
+              </a:cxn>
+              <a:cxn ang="0">
+                <a:pos x="T8" y="T9"/>
+              </a:cxn>
+              <a:cxn ang="0">
+                <a:pos x="T10" y="T11"/>
+              </a:cxn>
+              <a:cxn ang="0">
+                <a:pos x="T12" y="T13"/>
+              </a:cxn>
+              <a:cxn ang="0">
+                <a:pos x="T14" y="T15"/>
+              </a:cxn>
+              <a:cxn ang="0">
+                <a:pos x="T16" y="T17"/>
+              </a:cxn>
+            </a:cxnLst>
+            <a:rect l="0" t="0" r="r" b="b"/>
+            <a:pathLst>
+              <a:path w="1784" h="1784">
+                <a:moveTo>
+                  <a:pt x="892" y="1784"/>
+                </a:moveTo>
+                <a:cubicBezTo>
+                  <a:pt x="654" y="1784"/>
+                  <a:pt x="430" y="1691"/>
+                  <a:pt x="261" y="1522"/>
+                </a:cubicBezTo>
+                <a:cubicBezTo>
+                  <a:pt x="93" y="1354"/>
+                  <a:pt x="0" y="1130"/>
+                  <a:pt x="0" y="892"/>
+                </a:cubicBezTo>
+                <a:cubicBezTo>
+                  <a:pt x="0" y="654"/>
+                  <a:pt x="93" y="430"/>
+                  <a:pt x="261" y="261"/>
+                </a:cubicBezTo>
+                <a:cubicBezTo>
+                  <a:pt x="430" y="93"/>
+                  <a:pt x="654" y="0"/>
+                  <a:pt x="892" y="0"/>
+                </a:cubicBezTo>
+                <a:cubicBezTo>
+                  <a:pt x="1130" y="0"/>
+                  <a:pt x="1354" y="93"/>
+                  <a:pt x="1523" y="261"/>
+                </a:cubicBezTo>
+                <a:cubicBezTo>
+                  <a:pt x="1691" y="430"/>
+                  <a:pt x="1784" y="654"/>
+                  <a:pt x="1784" y="892"/>
+                </a:cubicBezTo>
+                <a:cubicBezTo>
+                  <a:pt x="1784" y="1130"/>
+                  <a:pt x="1691" y="1354"/>
+                  <a:pt x="1523" y="1522"/>
+                </a:cubicBezTo>
+                <a:cubicBezTo>
+                  <a:pt x="1354" y="1691"/>
+                  <a:pt x="1130" y="1784"/>
+                  <a:pt x="892" y="1784"/>
+                </a:cubicBezTo>
+                <a:close/>
+              </a:path>
+            </a:pathLst>
+          </a:custGeom>
+          <a:solidFill>
+            <a:schemeClr val="bg1"/>
+          </a:solidFill>
+          <a:ln>
+            <a:noFill/>
+          </a:ln>
+          <a:effectLst>
+            <a:outerShdw blurRad="152400" sx="102000" sy="102000" algn="ctr" rotWithShape="0">
+              <a:prstClr val="black">
+                <a:alpha val="10000"/>
+              </a:prstClr>
+            </a:outerShdw>
+          </a:effectLst>
+        </p:spPr>
+        <p:style>
+          <a:lnRef idx="2">
+            <a:schemeClr val="accent1">
+              <a:shade val="50000"/>
+            </a:schemeClr>
+          </a:lnRef>
+          <a:fillRef idx="1">
+            <a:schemeClr val="accent1"/>
+          </a:fillRef>
+          <a:effectRef idx="0">
+            <a:schemeClr val="accent1"/>
+          </a:effectRef>
+          <a:fontRef idx="minor">
+            <a:schemeClr val="lt1"/>
+          </a:fontRef>
+        </p:style>
+        <p:txBody>
+          <a:bodyPr rtlCol="0" anchor="ctr"/>
+          <a:lstStyle/>
+          <a:p>
+            <a:pPr algn="ctr"/>
+            <a:endParaRPr lang="en-US">
+              <a:solidFill>
+                <a:schemeClr val="tx1"/>
+              </a:solidFill>
+            </a:endParaRPr>
+          </a:p>
+        </p:txBody>
+      </p:sp>
+      <p:sp>
+        <p:nvSpPr>
+          <p:cNvPr id="11" name="Oval 54">
+            <a:extLst>
+              <a:ext uri="{FF2B5EF4-FFF2-40B4-BE49-F238E27FC236}">
+                <a16:creationId xmlns:a16="http://schemas.microsoft.com/office/drawing/2014/main" id="{CCEC9820-B6A2-4960-C3F0-2010F200D6A7}"/>
+              </a:ext>
+            </a:extLst>
+          </p:cNvPr>
+          <p:cNvSpPr/>
+          <p:nvPr/>
+        </p:nvSpPr>
+        <p:spPr>
+          <a:xfrm>
+            <a:off x="7398729" y="2493095"/>
+            <a:ext cx="1401500" cy="1401500"/>
+          </a:xfrm>
+          <a:prstGeom prst="ellipse">
+            <a:avLst/>
+          </a:prstGeom>
+          <a:solidFill>
+            <a:schemeClr val="bg1"/>
+          </a:solidFill>
+          <a:ln>
+            <a:noFill/>
+          </a:ln>
+          <a:effectLst>
+            <a:outerShdw blurRad="152400" sx="102000" sy="102000" algn="ctr" rotWithShape="0">
+              <a:prstClr val="black">
+                <a:alpha val="10000"/>
+              </a:prstClr>
+            </a:outerShdw>
+          </a:effectLst>
+        </p:spPr>
+        <p:style>
+          <a:lnRef idx="2">
+            <a:schemeClr val="accent1">
+              <a:shade val="50000"/>
+            </a:schemeClr>
+          </a:lnRef>
+          <a:fillRef idx="1">
+            <a:schemeClr val="accent1"/>
+          </a:fillRef>
+          <a:effectRef idx="0">
+            <a:schemeClr val="accent1"/>
+          </a:effectRef>
+          <a:fontRef idx="minor">
+            <a:schemeClr val="lt1"/>
+          </a:fontRef>
+        </p:style>
+        <p:txBody>
+          <a:bodyPr rtlCol="0" anchor="ctr"/>
+          <a:lstStyle/>
+          <a:p>
+            <a:pPr algn="ctr"/>
+            <a:endParaRPr lang="en-US">
+              <a:solidFill>
+                <a:schemeClr val="tx1"/>
+              </a:solidFill>
+            </a:endParaRPr>
+          </a:p>
+        </p:txBody>
+      </p:sp>
+      <p:sp>
+        <p:nvSpPr>
+          <p:cNvPr id="12" name="Oval 55">
+            <a:extLst>
+              <a:ext uri="{FF2B5EF4-FFF2-40B4-BE49-F238E27FC236}">
+                <a16:creationId xmlns:a16="http://schemas.microsoft.com/office/drawing/2014/main" id="{692E475C-BBB3-BDE9-651B-0EE3F2E49533}"/>
+              </a:ext>
+            </a:extLst>
+          </p:cNvPr>
+          <p:cNvSpPr/>
+          <p:nvPr/>
+        </p:nvSpPr>
+        <p:spPr>
+          <a:xfrm>
+            <a:off x="7542342" y="2636708"/>
+            <a:ext cx="1114274" cy="1114274"/>
+          </a:xfrm>
+          <a:prstGeom prst="ellipse">
+            <a:avLst/>
+          </a:prstGeom>
+          <a:solidFill>
+            <a:srgbClr val="00FFFF"/>
+          </a:solidFill>
+          <a:ln>
+            <a:solidFill>
+              <a:srgbClr val="00FFFF"/>
+            </a:solidFill>
+          </a:ln>
+        </p:spPr>
+        <p:style>
+          <a:lnRef idx="2">
+            <a:schemeClr val="accent1">
+              <a:shade val="50000"/>
+            </a:schemeClr>
+          </a:lnRef>
+          <a:fillRef idx="1">
+            <a:schemeClr val="accent1"/>
+          </a:fillRef>
+          <a:effectRef idx="0">
+            <a:schemeClr val="accent1"/>
+          </a:effectRef>
+          <a:fontRef idx="minor">
+            <a:schemeClr val="lt1"/>
+          </a:fontRef>
+        </p:style>
+        <p:txBody>
+          <a:bodyPr rtlCol="0" anchor="ctr"/>
+          <a:lstStyle/>
+          <a:p>
+            <a:pPr algn="ctr"/>
+            <a:endParaRPr lang="en-US"/>
+          </a:p>
+        </p:txBody>
+      </p:sp>
+      <p:sp>
+        <p:nvSpPr>
+          <p:cNvPr id="13" name="Freeform 5">
+            <a:extLst>
+              <a:ext uri="{FF2B5EF4-FFF2-40B4-BE49-F238E27FC236}">
+                <a16:creationId xmlns:a16="http://schemas.microsoft.com/office/drawing/2014/main" id="{DC4322F5-6833-1038-09FF-32C980185417}"/>
+              </a:ext>
+            </a:extLst>
+          </p:cNvPr>
+          <p:cNvSpPr>
+            <a:spLocks/>
+          </p:cNvSpPr>
+          <p:nvPr/>
+        </p:nvSpPr>
+        <p:spPr bwMode="auto">
+          <a:xfrm>
+            <a:off x="9250671" y="2341561"/>
+            <a:ext cx="1704568" cy="1704568"/>
+          </a:xfrm>
+          <a:custGeom>
+            <a:avLst/>
+            <a:gdLst>
+              <a:gd name="T0" fmla="*/ 892 w 1784"/>
+              <a:gd name="T1" fmla="*/ 1784 h 1784"/>
+              <a:gd name="T2" fmla="*/ 261 w 1784"/>
+              <a:gd name="T3" fmla="*/ 1522 h 1784"/>
+              <a:gd name="T4" fmla="*/ 0 w 1784"/>
+              <a:gd name="T5" fmla="*/ 892 h 1784"/>
+              <a:gd name="T6" fmla="*/ 261 w 1784"/>
+              <a:gd name="T7" fmla="*/ 261 h 1784"/>
+              <a:gd name="T8" fmla="*/ 892 w 1784"/>
+              <a:gd name="T9" fmla="*/ 0 h 1784"/>
+              <a:gd name="T10" fmla="*/ 1523 w 1784"/>
+              <a:gd name="T11" fmla="*/ 261 h 1784"/>
+              <a:gd name="T12" fmla="*/ 1784 w 1784"/>
+              <a:gd name="T13" fmla="*/ 892 h 1784"/>
+              <a:gd name="T14" fmla="*/ 1523 w 1784"/>
+              <a:gd name="T15" fmla="*/ 1522 h 1784"/>
+              <a:gd name="T16" fmla="*/ 892 w 1784"/>
+              <a:gd name="T17" fmla="*/ 1784 h 1784"/>
+            </a:gdLst>
+            <a:ahLst/>
+            <a:cxnLst>
+              <a:cxn ang="0">
+                <a:pos x="T0" y="T1"/>
+              </a:cxn>
+              <a:cxn ang="0">
+                <a:pos x="T2" y="T3"/>
+              </a:cxn>
+              <a:cxn ang="0">
+                <a:pos x="T4" y="T5"/>
+              </a:cxn>
+              <a:cxn ang="0">
+                <a:pos x="T6" y="T7"/>
+              </a:cxn>
+              <a:cxn ang="0">
+                <a:pos x="T8" y="T9"/>
+              </a:cxn>
+              <a:cxn ang="0">
+                <a:pos x="T10" y="T11"/>
+              </a:cxn>
+              <a:cxn ang="0">
+                <a:pos x="T12" y="T13"/>
+              </a:cxn>
+              <a:cxn ang="0">
+                <a:pos x="T14" y="T15"/>
+              </a:cxn>
+              <a:cxn ang="0">
+                <a:pos x="T16" y="T17"/>
+              </a:cxn>
+            </a:cxnLst>
+            <a:rect l="0" t="0" r="r" b="b"/>
+            <a:pathLst>
+              <a:path w="1784" h="1784">
+                <a:moveTo>
+                  <a:pt x="892" y="1784"/>
+                </a:moveTo>
+                <a:cubicBezTo>
+                  <a:pt x="654" y="1784"/>
+                  <a:pt x="430" y="1691"/>
+                  <a:pt x="261" y="1522"/>
+                </a:cubicBezTo>
+                <a:cubicBezTo>
+                  <a:pt x="93" y="1354"/>
+                  <a:pt x="0" y="1130"/>
+                  <a:pt x="0" y="892"/>
+                </a:cubicBezTo>
+                <a:cubicBezTo>
+                  <a:pt x="0" y="654"/>
+                  <a:pt x="93" y="430"/>
+                  <a:pt x="261" y="261"/>
+                </a:cubicBezTo>
+                <a:cubicBezTo>
+                  <a:pt x="430" y="93"/>
+                  <a:pt x="654" y="0"/>
+                  <a:pt x="892" y="0"/>
+                </a:cubicBezTo>
+                <a:cubicBezTo>
+                  <a:pt x="1130" y="0"/>
+                  <a:pt x="1354" y="93"/>
+                  <a:pt x="1523" y="261"/>
+                </a:cubicBezTo>
+                <a:cubicBezTo>
+                  <a:pt x="1691" y="430"/>
+                  <a:pt x="1784" y="654"/>
+                  <a:pt x="1784" y="892"/>
+                </a:cubicBezTo>
+                <a:cubicBezTo>
+                  <a:pt x="1784" y="1130"/>
+                  <a:pt x="1691" y="1354"/>
+                  <a:pt x="1523" y="1522"/>
+                </a:cubicBezTo>
+                <a:cubicBezTo>
+                  <a:pt x="1354" y="1691"/>
+                  <a:pt x="1130" y="1784"/>
+                  <a:pt x="892" y="1784"/>
+                </a:cubicBezTo>
+                <a:close/>
+              </a:path>
+            </a:pathLst>
+          </a:custGeom>
+          <a:solidFill>
+            <a:schemeClr val="bg1"/>
+          </a:solidFill>
+          <a:ln>
+            <a:noFill/>
+          </a:ln>
+          <a:effectLst>
+            <a:outerShdw blurRad="152400" sx="102000" sy="102000" algn="ctr" rotWithShape="0">
+              <a:prstClr val="black">
+                <a:alpha val="10000"/>
+              </a:prstClr>
+            </a:outerShdw>
+          </a:effectLst>
+        </p:spPr>
+        <p:style>
+          <a:lnRef idx="2">
+            <a:schemeClr val="accent1">
+              <a:shade val="50000"/>
+            </a:schemeClr>
+          </a:lnRef>
+          <a:fillRef idx="1">
+            <a:schemeClr val="accent1"/>
+          </a:fillRef>
+          <a:effectRef idx="0">
+            <a:schemeClr val="accent1"/>
+          </a:effectRef>
+          <a:fontRef idx="minor">
+            <a:schemeClr val="lt1"/>
+          </a:fontRef>
+        </p:style>
+        <p:txBody>
+          <a:bodyPr rtlCol="0" anchor="ctr"/>
+          <a:lstStyle/>
+          <a:p>
+            <a:pPr algn="ctr"/>
+            <a:endParaRPr lang="en-US">
+              <a:solidFill>
+                <a:schemeClr val="tx1"/>
+              </a:solidFill>
+            </a:endParaRPr>
+          </a:p>
+        </p:txBody>
+      </p:sp>
+      <p:sp>
+        <p:nvSpPr>
+          <p:cNvPr id="14" name="Oval 57">
+            <a:extLst>
+              <a:ext uri="{FF2B5EF4-FFF2-40B4-BE49-F238E27FC236}">
+                <a16:creationId xmlns:a16="http://schemas.microsoft.com/office/drawing/2014/main" id="{ECAE1546-3AB9-9C24-8032-CAEFC35A5EB5}"/>
+              </a:ext>
+            </a:extLst>
+          </p:cNvPr>
+          <p:cNvSpPr/>
+          <p:nvPr/>
+        </p:nvSpPr>
+        <p:spPr>
+          <a:xfrm>
+            <a:off x="9402205" y="2491403"/>
+            <a:ext cx="1401500" cy="1401500"/>
+          </a:xfrm>
+          <a:prstGeom prst="ellipse">
+            <a:avLst/>
+          </a:prstGeom>
+          <a:solidFill>
+            <a:schemeClr val="bg1"/>
+          </a:solidFill>
+          <a:ln>
+            <a:noFill/>
+          </a:ln>
+          <a:effectLst>
+            <a:outerShdw blurRad="152400" sx="102000" sy="102000" algn="ctr" rotWithShape="0">
+              <a:prstClr val="black">
+                <a:alpha val="10000"/>
+              </a:prstClr>
+            </a:outerShdw>
+          </a:effectLst>
+        </p:spPr>
+        <p:style>
+          <a:lnRef idx="2">
+            <a:schemeClr val="accent1">
+              <a:shade val="50000"/>
+            </a:schemeClr>
+          </a:lnRef>
+          <a:fillRef idx="1">
+            <a:schemeClr val="accent1"/>
+          </a:fillRef>
+          <a:effectRef idx="0">
+            <a:schemeClr val="accent1"/>
+          </a:effectRef>
+          <a:fontRef idx="minor">
+            <a:schemeClr val="lt1"/>
+          </a:fontRef>
+        </p:style>
+        <p:txBody>
+          <a:bodyPr rtlCol="0" anchor="ctr"/>
+          <a:lstStyle/>
+          <a:p>
+            <a:pPr algn="ctr"/>
+            <a:endParaRPr lang="en-US">
+              <a:solidFill>
+                <a:schemeClr val="tx1"/>
+              </a:solidFill>
+            </a:endParaRPr>
+          </a:p>
+        </p:txBody>
+      </p:sp>
+      <p:sp>
+        <p:nvSpPr>
+          <p:cNvPr id="15" name="Oval 58">
+            <a:extLst>
+              <a:ext uri="{FF2B5EF4-FFF2-40B4-BE49-F238E27FC236}">
+                <a16:creationId xmlns:a16="http://schemas.microsoft.com/office/drawing/2014/main" id="{45E8685F-E7BC-6B0F-009A-F07423DE2665}"/>
+              </a:ext>
+            </a:extLst>
+          </p:cNvPr>
+          <p:cNvSpPr/>
+          <p:nvPr/>
+        </p:nvSpPr>
+        <p:spPr>
+          <a:xfrm>
+            <a:off x="9545818" y="2635016"/>
+            <a:ext cx="1114274" cy="1114274"/>
+          </a:xfrm>
+          <a:prstGeom prst="ellipse">
+            <a:avLst/>
+          </a:prstGeom>
+          <a:solidFill>
+            <a:srgbClr val="FF00FF"/>
+          </a:solidFill>
+          <a:ln>
+            <a:solidFill>
+              <a:srgbClr val="FF00FF"/>
+            </a:solidFill>
+          </a:ln>
+        </p:spPr>
+        <p:style>
+          <a:lnRef idx="2">
+            <a:schemeClr val="accent1">
+              <a:shade val="50000"/>
+            </a:schemeClr>
+          </a:lnRef>
+          <a:fillRef idx="1">
+            <a:schemeClr val="accent1"/>
+          </a:fillRef>
+          <a:effectRef idx="0">
+            <a:schemeClr val="accent1"/>
+          </a:effectRef>
+          <a:fontRef idx="minor">
+            <a:schemeClr val="lt1"/>
+          </a:fontRef>
+        </p:style>
+        <p:txBody>
+          <a:bodyPr rtlCol="0" anchor="ctr"/>
+          <a:lstStyle/>
+          <a:p>
+            <a:pPr algn="ctr"/>
+            <a:endParaRPr lang="en-US"/>
+          </a:p>
+        </p:txBody>
+      </p:sp>
+      <p:sp>
+        <p:nvSpPr>
+          <p:cNvPr id="16" name="Freeform 5">
+            <a:extLst>
+              <a:ext uri="{FF2B5EF4-FFF2-40B4-BE49-F238E27FC236}">
+                <a16:creationId xmlns:a16="http://schemas.microsoft.com/office/drawing/2014/main" id="{7D5439FC-FE66-4650-D83E-FC8636E76659}"/>
+              </a:ext>
+            </a:extLst>
+          </p:cNvPr>
+          <p:cNvSpPr>
+            <a:spLocks/>
+          </p:cNvSpPr>
+          <p:nvPr/>
+        </p:nvSpPr>
+        <p:spPr bwMode="auto">
+          <a:xfrm>
+            <a:off x="5237588" y="2344946"/>
+            <a:ext cx="1704568" cy="1704568"/>
+          </a:xfrm>
+          <a:custGeom>
+            <a:avLst/>
+            <a:gdLst>
+              <a:gd name="T0" fmla="*/ 892 w 1784"/>
+              <a:gd name="T1" fmla="*/ 1784 h 1784"/>
+              <a:gd name="T2" fmla="*/ 261 w 1784"/>
+              <a:gd name="T3" fmla="*/ 1522 h 1784"/>
+              <a:gd name="T4" fmla="*/ 0 w 1784"/>
+              <a:gd name="T5" fmla="*/ 892 h 1784"/>
+              <a:gd name="T6" fmla="*/ 261 w 1784"/>
+              <a:gd name="T7" fmla="*/ 261 h 1784"/>
+              <a:gd name="T8" fmla="*/ 892 w 1784"/>
+              <a:gd name="T9" fmla="*/ 0 h 1784"/>
+              <a:gd name="T10" fmla="*/ 1523 w 1784"/>
+              <a:gd name="T11" fmla="*/ 261 h 1784"/>
+              <a:gd name="T12" fmla="*/ 1784 w 1784"/>
+              <a:gd name="T13" fmla="*/ 892 h 1784"/>
+              <a:gd name="T14" fmla="*/ 1523 w 1784"/>
+              <a:gd name="T15" fmla="*/ 1522 h 1784"/>
+              <a:gd name="T16" fmla="*/ 892 w 1784"/>
+              <a:gd name="T17" fmla="*/ 1784 h 1784"/>
+            </a:gdLst>
+            <a:ahLst/>
+            <a:cxnLst>
+              <a:cxn ang="0">
+                <a:pos x="T0" y="T1"/>
+              </a:cxn>
+              <a:cxn ang="0">
+                <a:pos x="T2" y="T3"/>
+              </a:cxn>
+              <a:cxn ang="0">
+                <a:pos x="T4" y="T5"/>
+              </a:cxn>
+              <a:cxn ang="0">
+                <a:pos x="T6" y="T7"/>
+              </a:cxn>
+              <a:cxn ang="0">
+                <a:pos x="T8" y="T9"/>
+              </a:cxn>
+              <a:cxn ang="0">
+                <a:pos x="T10" y="T11"/>
+              </a:cxn>
+              <a:cxn ang="0">
+                <a:pos x="T12" y="T13"/>
+              </a:cxn>
+              <a:cxn ang="0">
+                <a:pos x="T14" y="T15"/>
+              </a:cxn>
+              <a:cxn ang="0">
+                <a:pos x="T16" y="T17"/>
+              </a:cxn>
+            </a:cxnLst>
+            <a:rect l="0" t="0" r="r" b="b"/>
+            <a:pathLst>
+              <a:path w="1784" h="1784">
+                <a:moveTo>
+                  <a:pt x="892" y="1784"/>
+                </a:moveTo>
+                <a:cubicBezTo>
+                  <a:pt x="654" y="1784"/>
+                  <a:pt x="430" y="1691"/>
+                  <a:pt x="261" y="1522"/>
+                </a:cubicBezTo>
+                <a:cubicBezTo>
+                  <a:pt x="93" y="1354"/>
+                  <a:pt x="0" y="1130"/>
+                  <a:pt x="0" y="892"/>
+                </a:cubicBezTo>
+                <a:cubicBezTo>
+                  <a:pt x="0" y="654"/>
+                  <a:pt x="93" y="430"/>
+                  <a:pt x="261" y="261"/>
+                </a:cubicBezTo>
+                <a:cubicBezTo>
+                  <a:pt x="430" y="93"/>
+                  <a:pt x="654" y="0"/>
+                  <a:pt x="892" y="0"/>
+                </a:cubicBezTo>
+                <a:cubicBezTo>
+                  <a:pt x="1130" y="0"/>
+                  <a:pt x="1354" y="93"/>
+                  <a:pt x="1523" y="261"/>
+                </a:cubicBezTo>
+                <a:cubicBezTo>
+                  <a:pt x="1691" y="430"/>
+                  <a:pt x="1784" y="654"/>
+                  <a:pt x="1784" y="892"/>
+                </a:cubicBezTo>
+                <a:cubicBezTo>
+                  <a:pt x="1784" y="1130"/>
+                  <a:pt x="1691" y="1354"/>
+                  <a:pt x="1523" y="1522"/>
+                </a:cubicBezTo>
+                <a:cubicBezTo>
+                  <a:pt x="1354" y="1691"/>
+                  <a:pt x="1130" y="1784"/>
+                  <a:pt x="892" y="1784"/>
+                </a:cubicBezTo>
+                <a:close/>
+              </a:path>
+            </a:pathLst>
+          </a:custGeom>
+          <a:solidFill>
+            <a:schemeClr val="bg1"/>
+          </a:solidFill>
+          <a:ln>
+            <a:noFill/>
+          </a:ln>
+          <a:effectLst>
+            <a:outerShdw blurRad="152400" sx="102000" sy="102000" algn="ctr" rotWithShape="0">
+              <a:prstClr val="black">
+                <a:alpha val="10000"/>
+              </a:prstClr>
+            </a:outerShdw>
+          </a:effectLst>
+        </p:spPr>
+        <p:style>
+          <a:lnRef idx="2">
+            <a:schemeClr val="accent1">
+              <a:shade val="50000"/>
+            </a:schemeClr>
+          </a:lnRef>
+          <a:fillRef idx="1">
+            <a:schemeClr val="accent1"/>
+          </a:fillRef>
+          <a:effectRef idx="0">
+            <a:schemeClr val="accent1"/>
+          </a:effectRef>
+          <a:fontRef idx="minor">
+            <a:schemeClr val="lt1"/>
+          </a:fontRef>
+        </p:style>
+        <p:txBody>
+          <a:bodyPr rtlCol="0" anchor="ctr"/>
+          <a:lstStyle/>
+          <a:p>
+            <a:pPr algn="ctr"/>
+            <a:endParaRPr lang="en-US">
+              <a:solidFill>
+                <a:schemeClr val="tx1"/>
+              </a:solidFill>
+            </a:endParaRPr>
+          </a:p>
+        </p:txBody>
+      </p:sp>
+      <p:sp>
+        <p:nvSpPr>
+          <p:cNvPr id="17" name="Oval 60">
+            <a:extLst>
+              <a:ext uri="{FF2B5EF4-FFF2-40B4-BE49-F238E27FC236}">
+                <a16:creationId xmlns:a16="http://schemas.microsoft.com/office/drawing/2014/main" id="{FBD07944-0635-CDD3-C13E-B286FB5209CE}"/>
+              </a:ext>
+            </a:extLst>
+          </p:cNvPr>
+          <p:cNvSpPr/>
+          <p:nvPr/>
+        </p:nvSpPr>
+        <p:spPr>
+          <a:xfrm>
+            <a:off x="5389122" y="2494788"/>
+            <a:ext cx="1401500" cy="1401500"/>
+          </a:xfrm>
+          <a:prstGeom prst="ellipse">
+            <a:avLst/>
+          </a:prstGeom>
+          <a:solidFill>
+            <a:schemeClr val="bg1"/>
+          </a:solidFill>
+          <a:ln>
+            <a:noFill/>
+          </a:ln>
+          <a:effectLst>
+            <a:outerShdw blurRad="152400" sx="102000" sy="102000" algn="ctr" rotWithShape="0">
+              <a:prstClr val="black">
+                <a:alpha val="10000"/>
+              </a:prstClr>
+            </a:outerShdw>
+          </a:effectLst>
+        </p:spPr>
+        <p:style>
+          <a:lnRef idx="2">
+            <a:schemeClr val="accent1">
+              <a:shade val="50000"/>
+            </a:schemeClr>
+          </a:lnRef>
+          <a:fillRef idx="1">
+            <a:schemeClr val="accent1"/>
+          </a:fillRef>
+          <a:effectRef idx="0">
+            <a:schemeClr val="accent1"/>
+          </a:effectRef>
+          <a:fontRef idx="minor">
+            <a:schemeClr val="lt1"/>
+          </a:fontRef>
+        </p:style>
+        <p:txBody>
+          <a:bodyPr rtlCol="0" anchor="ctr"/>
+          <a:lstStyle/>
+          <a:p>
+            <a:pPr algn="ctr"/>
+            <a:endParaRPr lang="en-US">
+              <a:solidFill>
+                <a:schemeClr val="tx1"/>
+              </a:solidFill>
+            </a:endParaRPr>
+          </a:p>
+        </p:txBody>
+      </p:sp>
+      <p:sp>
+        <p:nvSpPr>
+          <p:cNvPr id="18" name="Oval 61">
+            <a:extLst>
+              <a:ext uri="{FF2B5EF4-FFF2-40B4-BE49-F238E27FC236}">
+                <a16:creationId xmlns:a16="http://schemas.microsoft.com/office/drawing/2014/main" id="{18B9EE15-12C2-576F-D907-5D449534B533}"/>
+              </a:ext>
+            </a:extLst>
+          </p:cNvPr>
+          <p:cNvSpPr/>
+          <p:nvPr/>
+        </p:nvSpPr>
+        <p:spPr>
+          <a:xfrm>
+            <a:off x="5532735" y="2638401"/>
+            <a:ext cx="1114274" cy="1114274"/>
+          </a:xfrm>
+          <a:prstGeom prst="ellipse">
+            <a:avLst/>
+          </a:prstGeom>
+          <a:solidFill>
+            <a:srgbClr val="5D28FE"/>
+          </a:solidFill>
+          <a:ln>
+            <a:solidFill>
+              <a:srgbClr val="5D28FE"/>
+            </a:solidFill>
+          </a:ln>
+        </p:spPr>
+        <p:style>
+          <a:lnRef idx="2">
+            <a:schemeClr val="accent1">
+              <a:shade val="50000"/>
+            </a:schemeClr>
+          </a:lnRef>
+          <a:fillRef idx="1">
+            <a:schemeClr val="accent1"/>
+          </a:fillRef>
+          <a:effectRef idx="0">
+            <a:schemeClr val="accent1"/>
+          </a:effectRef>
+          <a:fontRef idx="minor">
+            <a:schemeClr val="lt1"/>
+          </a:fontRef>
+        </p:style>
+        <p:txBody>
+          <a:bodyPr rtlCol="0" anchor="ctr"/>
+          <a:lstStyle/>
+          <a:p>
+            <a:pPr algn="ctr"/>
+            <a:endParaRPr lang="en-US"/>
+          </a:p>
+        </p:txBody>
+      </p:sp>
+      <p:sp>
+        <p:nvSpPr>
+          <p:cNvPr id="99" name="Szövegdoboz 98">
+            <a:extLst>
+              <a:ext uri="{FF2B5EF4-FFF2-40B4-BE49-F238E27FC236}">
+                <a16:creationId xmlns:a16="http://schemas.microsoft.com/office/drawing/2014/main" id="{2E92D029-3B1D-D38C-9006-DEB84121215F}"/>
+              </a:ext>
+            </a:extLst>
+          </p:cNvPr>
+          <p:cNvSpPr txBox="1"/>
+          <p:nvPr/>
+        </p:nvSpPr>
+        <p:spPr>
+          <a:xfrm>
+            <a:off x="1236761" y="4370231"/>
+            <a:ext cx="1704568" cy="369332"/>
+          </a:xfrm>
+          <a:prstGeom prst="rect">
+            <a:avLst/>
+          </a:prstGeom>
+          <a:noFill/>
+        </p:spPr>
+        <p:txBody>
+          <a:bodyPr wrap="square" rtlCol="0">
+            <a:spAutoFit/>
+          </a:bodyPr>
+          <a:lstStyle/>
+          <a:p>
+            <a:pPr algn="ctr"/>
+            <a:r>
+              <a:rPr lang="hu-HU" b="1" dirty="0">
+                <a:latin typeface="Montserrat" panose="00000500000000000000" pitchFamily="2" charset="-18"/>
+              </a:rPr>
+              <a:t>#</a:t>
+            </a:r>
+            <a:r>
+              <a:rPr lang="en-US" b="1" dirty="0">
+                <a:latin typeface="Montserrat" panose="00000500000000000000" pitchFamily="2" charset="-18"/>
+              </a:rPr>
+              <a:t>000000</a:t>
+            </a:r>
+            <a:endParaRPr lang="hu-HU" b="1" dirty="0">
+              <a:latin typeface="Montserrat" panose="00000500000000000000" pitchFamily="2" charset="-18"/>
+            </a:endParaRPr>
+          </a:p>
+        </p:txBody>
+      </p:sp>
+      <p:sp>
+        <p:nvSpPr>
+          <p:cNvPr id="100" name="Szövegdoboz 99">
+            <a:extLst>
+              <a:ext uri="{FF2B5EF4-FFF2-40B4-BE49-F238E27FC236}">
+                <a16:creationId xmlns:a16="http://schemas.microsoft.com/office/drawing/2014/main" id="{4762BF07-2C39-2E9B-8EDE-EB94871F84F9}"/>
+              </a:ext>
+            </a:extLst>
+          </p:cNvPr>
+          <p:cNvSpPr txBox="1"/>
+          <p:nvPr/>
+        </p:nvSpPr>
+        <p:spPr>
+          <a:xfrm>
+            <a:off x="3240239" y="4370231"/>
+            <a:ext cx="1704568" cy="369332"/>
+          </a:xfrm>
+          <a:prstGeom prst="rect">
+            <a:avLst/>
+          </a:prstGeom>
+          <a:noFill/>
+        </p:spPr>
+        <p:txBody>
+          <a:bodyPr wrap="square" rtlCol="0">
+            <a:spAutoFit/>
+          </a:bodyPr>
+          <a:lstStyle/>
+          <a:p>
+            <a:pPr algn="ctr"/>
+            <a:r>
+              <a:rPr lang="hu-HU" b="1" dirty="0">
+                <a:latin typeface="Montserrat" panose="00000500000000000000" pitchFamily="2" charset="-18"/>
+              </a:rPr>
+              <a:t>#</a:t>
+            </a:r>
+            <a:r>
+              <a:rPr lang="en-US" b="1" dirty="0">
+                <a:latin typeface="Montserrat" panose="00000500000000000000" pitchFamily="2" charset="-18"/>
+              </a:rPr>
+              <a:t>FFFFFF</a:t>
+            </a:r>
+            <a:endParaRPr lang="hu-HU" b="1" dirty="0">
+              <a:latin typeface="Montserrat" panose="00000500000000000000" pitchFamily="2" charset="-18"/>
+            </a:endParaRPr>
+          </a:p>
+        </p:txBody>
+      </p:sp>
+      <p:sp>
+        <p:nvSpPr>
+          <p:cNvPr id="101" name="Szövegdoboz 100">
+            <a:extLst>
+              <a:ext uri="{FF2B5EF4-FFF2-40B4-BE49-F238E27FC236}">
+                <a16:creationId xmlns:a16="http://schemas.microsoft.com/office/drawing/2014/main" id="{5F650E00-289C-70B1-8F06-615ECC0EB90A}"/>
+              </a:ext>
+            </a:extLst>
+          </p:cNvPr>
+          <p:cNvSpPr txBox="1"/>
+          <p:nvPr/>
+        </p:nvSpPr>
+        <p:spPr>
+          <a:xfrm>
+            <a:off x="5237588" y="4370231"/>
+            <a:ext cx="1704568" cy="369332"/>
+          </a:xfrm>
+          <a:prstGeom prst="rect">
+            <a:avLst/>
+          </a:prstGeom>
+          <a:noFill/>
+        </p:spPr>
+        <p:txBody>
+          <a:bodyPr wrap="square" rtlCol="0">
+            <a:spAutoFit/>
+          </a:bodyPr>
+          <a:lstStyle/>
+          <a:p>
+            <a:pPr algn="ctr"/>
+            <a:r>
+              <a:rPr lang="hu-HU" b="1" dirty="0">
+                <a:latin typeface="Montserrat" panose="00000500000000000000" pitchFamily="2" charset="-18"/>
+              </a:rPr>
+              <a:t>#</a:t>
+            </a:r>
+            <a:r>
+              <a:rPr lang="en-US" b="1" dirty="0">
+                <a:latin typeface="Montserrat" panose="00000500000000000000" pitchFamily="2" charset="-18"/>
+              </a:rPr>
+              <a:t>5D28FE</a:t>
+            </a:r>
+            <a:endParaRPr lang="hu-HU" b="1" dirty="0">
+              <a:latin typeface="Montserrat" panose="00000500000000000000" pitchFamily="2" charset="-18"/>
+            </a:endParaRPr>
+          </a:p>
+        </p:txBody>
+      </p:sp>
+      <p:sp>
+        <p:nvSpPr>
+          <p:cNvPr id="102" name="Szövegdoboz 101">
+            <a:extLst>
+              <a:ext uri="{FF2B5EF4-FFF2-40B4-BE49-F238E27FC236}">
+                <a16:creationId xmlns:a16="http://schemas.microsoft.com/office/drawing/2014/main" id="{ACA30E87-0C24-0E0A-25A5-27EC084FAE33}"/>
+              </a:ext>
+            </a:extLst>
+          </p:cNvPr>
+          <p:cNvSpPr txBox="1"/>
+          <p:nvPr/>
+        </p:nvSpPr>
+        <p:spPr>
+          <a:xfrm>
+            <a:off x="7247195" y="4370231"/>
+            <a:ext cx="1704568" cy="369332"/>
+          </a:xfrm>
+          <a:prstGeom prst="rect">
+            <a:avLst/>
+          </a:prstGeom>
+          <a:noFill/>
+        </p:spPr>
+        <p:txBody>
+          <a:bodyPr wrap="square" rtlCol="0">
+            <a:spAutoFit/>
+          </a:bodyPr>
+          <a:lstStyle/>
+          <a:p>
+            <a:pPr algn="ctr"/>
+            <a:r>
+              <a:rPr lang="hu-HU" b="1" dirty="0">
+                <a:latin typeface="Montserrat" panose="00000500000000000000" pitchFamily="2" charset="-18"/>
+              </a:rPr>
+              <a:t>#</a:t>
+            </a:r>
+            <a:r>
+              <a:rPr lang="en-US" b="1" dirty="0">
+                <a:latin typeface="Montserrat" panose="00000500000000000000" pitchFamily="2" charset="-18"/>
+              </a:rPr>
+              <a:t>00FFFF</a:t>
+            </a:r>
+            <a:endParaRPr lang="hu-HU" b="1" dirty="0">
+              <a:latin typeface="Montserrat" panose="00000500000000000000" pitchFamily="2" charset="-18"/>
+            </a:endParaRPr>
+          </a:p>
+        </p:txBody>
+      </p:sp>
+      <p:sp>
+        <p:nvSpPr>
+          <p:cNvPr id="103" name="Szövegdoboz 102">
+            <a:extLst>
+              <a:ext uri="{FF2B5EF4-FFF2-40B4-BE49-F238E27FC236}">
+                <a16:creationId xmlns:a16="http://schemas.microsoft.com/office/drawing/2014/main" id="{2ACE293A-4535-3A8B-D690-A0E164FC841E}"/>
+              </a:ext>
+            </a:extLst>
+          </p:cNvPr>
+          <p:cNvSpPr txBox="1"/>
+          <p:nvPr/>
+        </p:nvSpPr>
+        <p:spPr>
+          <a:xfrm>
+            <a:off x="9250671" y="4370231"/>
+            <a:ext cx="1704568" cy="369332"/>
+          </a:xfrm>
+          <a:prstGeom prst="rect">
+            <a:avLst/>
+          </a:prstGeom>
+          <a:noFill/>
+        </p:spPr>
+        <p:txBody>
+          <a:bodyPr wrap="square" rtlCol="0">
+            <a:spAutoFit/>
+          </a:bodyPr>
+          <a:lstStyle/>
+          <a:p>
+            <a:pPr algn="ctr"/>
+            <a:r>
+              <a:rPr lang="hu-HU" b="1" dirty="0">
+                <a:latin typeface="Montserrat" panose="00000500000000000000" pitchFamily="2" charset="-18"/>
+              </a:rPr>
+              <a:t>#</a:t>
+            </a:r>
+            <a:r>
+              <a:rPr lang="en-US" b="1" dirty="0">
+                <a:latin typeface="Montserrat" panose="00000500000000000000" pitchFamily="2" charset="-18"/>
+              </a:rPr>
+              <a:t>FF00FF</a:t>
+            </a:r>
+            <a:endParaRPr lang="hu-HU" b="1" dirty="0">
+              <a:latin typeface="Montserrat" panose="00000500000000000000" pitchFamily="2" charset="-18"/>
+            </a:endParaRPr>
+          </a:p>
+        </p:txBody>
+      </p:sp>
+    </p:spTree>
+    <p:extLst>
+      <p:ext uri="{BB962C8B-B14F-4D97-AF65-F5344CB8AC3E}">
+        <p14:creationId xmlns:p14="http://schemas.microsoft.com/office/powerpoint/2010/main" val="47627406"/>
       </p:ext>
     </p:extLst>
   </p:cSld>

--- a/documentation/mytunes presentation.pptx
+++ b/documentation/mytunes presentation.pptx
@@ -278,7 +278,7 @@
           <a:p>
             <a:fld id="{6444479B-705B-4489-957E-7E8A228BDFA0}" type="datetime1">
               <a:rPr lang="en-US" smtClean="0"/>
-              <a:t>11/22/2025</a:t>
+              <a:t>11/24/2025</a:t>
             </a:fld>
             <a:endParaRPr lang="en-US"/>
           </a:p>
@@ -478,7 +478,7 @@
           <a:p>
             <a:fld id="{C07B66AD-7C08-490A-ADA4-B47E10FB2407}" type="datetime1">
               <a:rPr lang="en-US" smtClean="0"/>
-              <a:t>11/22/2025</a:t>
+              <a:t>11/24/2025</a:t>
             </a:fld>
             <a:endParaRPr lang="en-US"/>
           </a:p>
@@ -737,7 +737,7 @@
           <a:p>
             <a:fld id="{05B95027-4255-49E7-9841-CD21BCC99996}" type="datetime1">
               <a:rPr lang="en-US" smtClean="0"/>
-              <a:t>11/22/2025</a:t>
+              <a:t>11/24/2025</a:t>
             </a:fld>
             <a:endParaRPr lang="en-US"/>
           </a:p>
@@ -982,7 +982,7 @@
           <a:p>
             <a:fld id="{9F89F774-3FA6-43B8-9241-99959C8FD463}" type="datetime1">
               <a:rPr lang="en-US" smtClean="0"/>
-              <a:t>11/22/2025</a:t>
+              <a:t>11/24/2025</a:t>
             </a:fld>
             <a:endParaRPr lang="en-US"/>
           </a:p>
@@ -1309,7 +1309,7 @@
           <a:p>
             <a:fld id="{F9504452-5DCC-4FE2-A5C9-8A5EF6714D65}" type="datetime1">
               <a:rPr lang="en-US" smtClean="0"/>
-              <a:t>11/22/2025</a:t>
+              <a:t>11/24/2025</a:t>
             </a:fld>
             <a:endParaRPr lang="en-US"/>
           </a:p>
@@ -1619,7 +1619,7 @@
           <a:p>
             <a:fld id="{E579ABC2-0180-4F3A-A895-A85BC724D472}" type="datetime1">
               <a:rPr lang="en-US" smtClean="0"/>
-              <a:t>11/22/2025</a:t>
+              <a:t>11/24/2025</a:t>
             </a:fld>
             <a:endParaRPr lang="en-US"/>
           </a:p>
@@ -2037,7 +2037,7 @@
           <a:p>
             <a:fld id="{6AEEA9BA-4E8F-439E-BEA4-91FBA01E3F5F}" type="datetime1">
               <a:rPr lang="en-US" smtClean="0"/>
-              <a:t>11/22/2025</a:t>
+              <a:t>11/24/2025</a:t>
             </a:fld>
             <a:endParaRPr lang="en-US"/>
           </a:p>
@@ -2179,7 +2179,7 @@
           <a:p>
             <a:fld id="{BE15BF18-0007-481C-AA29-413124BC3EE7}" type="datetime1">
               <a:rPr lang="en-US" smtClean="0"/>
-              <a:t>11/22/2025</a:t>
+              <a:t>11/24/2025</a:t>
             </a:fld>
             <a:endParaRPr lang="en-US"/>
           </a:p>
@@ -2341,7 +2341,7 @@
           <a:p>
             <a:fld id="{09BE9870-3748-43AD-B547-02A075CB4A1D}" type="datetime1">
               <a:rPr lang="en-US" smtClean="0"/>
-              <a:t>11/22/2025</a:t>
+              <a:t>11/24/2025</a:t>
             </a:fld>
             <a:endParaRPr lang="en-US"/>
           </a:p>
@@ -2658,7 +2658,7 @@
           <a:p>
             <a:fld id="{558E7897-33C5-4F1A-9307-D068E37F3DC7}" type="datetime1">
               <a:rPr lang="en-US" smtClean="0"/>
-              <a:t>11/22/2025</a:t>
+              <a:t>11/24/2025</a:t>
             </a:fld>
             <a:endParaRPr lang="en-US"/>
           </a:p>
@@ -2953,7 +2953,7 @@
           <a:p>
             <a:fld id="{82E171BA-CC09-47C8-A6DF-F5C5CB59CEEC}" type="datetime1">
               <a:rPr lang="en-US" smtClean="0"/>
-              <a:t>11/22/2025</a:t>
+              <a:t>11/24/2025</a:t>
             </a:fld>
             <a:endParaRPr lang="en-US"/>
           </a:p>
@@ -3240,7 +3240,7 @@
           <a:p>
             <a:fld id="{7DA38F49-B3E2-4BF0-BEC7-C30D34ABBB8D}" type="datetime1">
               <a:rPr lang="en-US" smtClean="0"/>
-              <a:t>11/22/2025</a:t>
+              <a:t>11/24/2025</a:t>
             </a:fld>
             <a:endParaRPr lang="en-US"/>
           </a:p>

--- a/documentation/mytunes presentation.pptx
+++ b/documentation/mytunes presentation.pptx
@@ -278,7 +278,7 @@
           <a:p>
             <a:fld id="{6444479B-705B-4489-957E-7E8A228BDFA0}" type="datetime1">
               <a:rPr lang="en-US" smtClean="0"/>
-              <a:t>11/24/2025</a:t>
+              <a:t>12/8/2025</a:t>
             </a:fld>
             <a:endParaRPr lang="en-US"/>
           </a:p>
@@ -478,7 +478,7 @@
           <a:p>
             <a:fld id="{C07B66AD-7C08-490A-ADA4-B47E10FB2407}" type="datetime1">
               <a:rPr lang="en-US" smtClean="0"/>
-              <a:t>11/24/2025</a:t>
+              <a:t>12/8/2025</a:t>
             </a:fld>
             <a:endParaRPr lang="en-US"/>
           </a:p>
@@ -737,7 +737,7 @@
           <a:p>
             <a:fld id="{05B95027-4255-49E7-9841-CD21BCC99996}" type="datetime1">
               <a:rPr lang="en-US" smtClean="0"/>
-              <a:t>11/24/2025</a:t>
+              <a:t>12/8/2025</a:t>
             </a:fld>
             <a:endParaRPr lang="en-US"/>
           </a:p>
@@ -982,7 +982,7 @@
           <a:p>
             <a:fld id="{9F89F774-3FA6-43B8-9241-99959C8FD463}" type="datetime1">
               <a:rPr lang="en-US" smtClean="0"/>
-              <a:t>11/24/2025</a:t>
+              <a:t>12/8/2025</a:t>
             </a:fld>
             <a:endParaRPr lang="en-US"/>
           </a:p>
@@ -1309,7 +1309,7 @@
           <a:p>
             <a:fld id="{F9504452-5DCC-4FE2-A5C9-8A5EF6714D65}" type="datetime1">
               <a:rPr lang="en-US" smtClean="0"/>
-              <a:t>11/24/2025</a:t>
+              <a:t>12/8/2025</a:t>
             </a:fld>
             <a:endParaRPr lang="en-US"/>
           </a:p>
@@ -1619,7 +1619,7 @@
           <a:p>
             <a:fld id="{E579ABC2-0180-4F3A-A895-A85BC724D472}" type="datetime1">
               <a:rPr lang="en-US" smtClean="0"/>
-              <a:t>11/24/2025</a:t>
+              <a:t>12/8/2025</a:t>
             </a:fld>
             <a:endParaRPr lang="en-US"/>
           </a:p>
@@ -2037,7 +2037,7 @@
           <a:p>
             <a:fld id="{6AEEA9BA-4E8F-439E-BEA4-91FBA01E3F5F}" type="datetime1">
               <a:rPr lang="en-US" smtClean="0"/>
-              <a:t>11/24/2025</a:t>
+              <a:t>12/8/2025</a:t>
             </a:fld>
             <a:endParaRPr lang="en-US"/>
           </a:p>
@@ -2179,7 +2179,7 @@
           <a:p>
             <a:fld id="{BE15BF18-0007-481C-AA29-413124BC3EE7}" type="datetime1">
               <a:rPr lang="en-US" smtClean="0"/>
-              <a:t>11/24/2025</a:t>
+              <a:t>12/8/2025</a:t>
             </a:fld>
             <a:endParaRPr lang="en-US"/>
           </a:p>
@@ -2341,7 +2341,7 @@
           <a:p>
             <a:fld id="{09BE9870-3748-43AD-B547-02A075CB4A1D}" type="datetime1">
               <a:rPr lang="en-US" smtClean="0"/>
-              <a:t>11/24/2025</a:t>
+              <a:t>12/8/2025</a:t>
             </a:fld>
             <a:endParaRPr lang="en-US"/>
           </a:p>
@@ -2658,7 +2658,7 @@
           <a:p>
             <a:fld id="{558E7897-33C5-4F1A-9307-D068E37F3DC7}" type="datetime1">
               <a:rPr lang="en-US" smtClean="0"/>
-              <a:t>11/24/2025</a:t>
+              <a:t>12/8/2025</a:t>
             </a:fld>
             <a:endParaRPr lang="en-US"/>
           </a:p>
@@ -2953,7 +2953,7 @@
           <a:p>
             <a:fld id="{82E171BA-CC09-47C8-A6DF-F5C5CB59CEEC}" type="datetime1">
               <a:rPr lang="en-US" smtClean="0"/>
-              <a:t>11/24/2025</a:t>
+              <a:t>12/8/2025</a:t>
             </a:fld>
             <a:endParaRPr lang="en-US"/>
           </a:p>
@@ -3240,7 +3240,7 @@
           <a:p>
             <a:fld id="{7DA38F49-B3E2-4BF0-BEC7-C30D34ABBB8D}" type="datetime1">
               <a:rPr lang="en-US" smtClean="0"/>
-              <a:t>11/24/2025</a:t>
+              <a:t>12/8/2025</a:t>
             </a:fld>
             <a:endParaRPr lang="en-US"/>
           </a:p>
@@ -4255,63 +4255,111 @@
         </p:spPr>
         <p:txBody>
           <a:bodyPr>
-            <a:normAutofit fontScale="92500" lnSpcReduction="10000"/>
+            <a:normAutofit fontScale="77500" lnSpcReduction="20000"/>
           </a:bodyPr>
           <a:lstStyle/>
           <a:p>
             <a:r>
-              <a:rPr lang="hu-HU" sz="6000" dirty="0">
+              <a:rPr lang="hu-HU" sz="5700" dirty="0" err="1">
                 <a:solidFill>
                   <a:srgbClr val="FF00FF"/>
                 </a:solidFill>
                 <a:latin typeface="Montserrat" panose="00000500000000000000" pitchFamily="2" charset="-18"/>
               </a:rPr>
-              <a:t>Címsor 1</a:t>
-            </a:r>
-          </a:p>
-          <a:p>
-            <a:r>
-              <a:rPr lang="hu-HU" sz="4800" dirty="0">
+              <a:t>Monsterrat</a:t>
+            </a:r>
+            <a:endParaRPr lang="hu-HU" sz="5700" dirty="0">
+              <a:solidFill>
+                <a:srgbClr val="FF00FF"/>
+              </a:solidFill>
+              <a:latin typeface="Montserrat" panose="00000500000000000000" pitchFamily="2" charset="-18"/>
+            </a:endParaRPr>
+          </a:p>
+          <a:p>
+            <a:r>
+              <a:rPr lang="hu-HU" sz="4800" b="1" dirty="0" err="1">
                 <a:solidFill>
                   <a:srgbClr val="BF40FF"/>
                 </a:solidFill>
                 <a:latin typeface="Montserrat" panose="00000500000000000000" pitchFamily="2" charset="-18"/>
               </a:rPr>
-              <a:t>Címsor 2</a:t>
-            </a:r>
-          </a:p>
-          <a:p>
-            <a:r>
-              <a:rPr lang="hu-HU" sz="3900" dirty="0">
+              <a:t>Bold</a:t>
+            </a:r>
+            <a:endParaRPr lang="hu-HU" sz="4800" b="1" dirty="0">
+              <a:solidFill>
+                <a:srgbClr val="BF40FF"/>
+              </a:solidFill>
+              <a:latin typeface="Montserrat" panose="00000500000000000000" pitchFamily="2" charset="-18"/>
+            </a:endParaRPr>
+          </a:p>
+          <a:p>
+            <a:r>
+              <a:rPr lang="hu-HU" sz="3900" i="1" dirty="0" err="1">
                 <a:solidFill>
                   <a:srgbClr val="8080FF"/>
                 </a:solidFill>
                 <a:latin typeface="Montserrat" panose="00000500000000000000" pitchFamily="2" charset="-18"/>
               </a:rPr>
-              <a:t>Címsor 3</a:t>
-            </a:r>
-          </a:p>
-          <a:p>
-            <a:r>
-              <a:rPr lang="hu-HU" sz="2400" dirty="0">
+              <a:t>Italic</a:t>
+            </a:r>
+            <a:endParaRPr lang="hu-HU" sz="3900" i="1" dirty="0">
+              <a:solidFill>
+                <a:srgbClr val="8080FF"/>
+              </a:solidFill>
+              <a:latin typeface="Montserrat" panose="00000500000000000000" pitchFamily="2" charset="-18"/>
+            </a:endParaRPr>
+          </a:p>
+          <a:p>
+            <a:r>
+              <a:rPr lang="hu-HU" sz="2400" u="sng" dirty="0" err="1">
                 <a:solidFill>
                   <a:srgbClr val="40BFFF"/>
                 </a:solidFill>
                 <a:latin typeface="Montserrat" panose="00000500000000000000" pitchFamily="2" charset="-18"/>
               </a:rPr>
-              <a:t>Címsor 4</a:t>
-            </a:r>
-          </a:p>
-          <a:p>
-            <a:r>
-              <a:rPr lang="hu-HU" sz="1500" dirty="0">
+              <a:t>Underlined</a:t>
+            </a:r>
+            <a:endParaRPr lang="hu-HU" sz="2400" u="sng" dirty="0">
+              <a:solidFill>
+                <a:srgbClr val="40BFFF"/>
+              </a:solidFill>
+              <a:latin typeface="Montserrat" panose="00000500000000000000" pitchFamily="2" charset="-18"/>
+            </a:endParaRPr>
+          </a:p>
+          <a:p>
+            <a:r>
+              <a:rPr lang="hu-HU" sz="1500" cap="small" dirty="0" err="1">
                 <a:solidFill>
                   <a:srgbClr val="00FFFF"/>
                 </a:solidFill>
                 <a:latin typeface="Montserrat" panose="00000500000000000000" pitchFamily="2" charset="-18"/>
               </a:rPr>
-              <a:t>Címsor 5</a:t>
-            </a:r>
+              <a:t>Small</a:t>
+            </a:r>
+            <a:r>
+              <a:rPr lang="hu-HU" sz="1500" cap="small" dirty="0">
+                <a:solidFill>
+                  <a:srgbClr val="00FFFF"/>
+                </a:solidFill>
+                <a:latin typeface="Montserrat" panose="00000500000000000000" pitchFamily="2" charset="-18"/>
+              </a:rPr>
+              <a:t> </a:t>
+            </a:r>
+            <a:r>
+              <a:rPr lang="hu-HU" sz="1500" cap="small" dirty="0" err="1">
+                <a:solidFill>
+                  <a:srgbClr val="00FFFF"/>
+                </a:solidFill>
+                <a:latin typeface="Montserrat" panose="00000500000000000000" pitchFamily="2" charset="-18"/>
+              </a:rPr>
+              <a:t>caps</a:t>
+            </a:r>
+            <a:endParaRPr lang="hu-HU" sz="1500" cap="small" dirty="0">
+              <a:solidFill>
+                <a:srgbClr val="00FFFF"/>
+              </a:solidFill>
+              <a:latin typeface="Montserrat" panose="00000500000000000000" pitchFamily="2" charset="-18"/>
+            </a:endParaRPr>
           </a:p>
         </p:txBody>
       </p:sp>
@@ -4340,7 +4388,7 @@
         </p:spPr>
         <p:txBody>
           <a:bodyPr vert="horz" lIns="91440" tIns="45720" rIns="91440" bIns="45720" rtlCol="0">
-            <a:normAutofit/>
+            <a:normAutofit fontScale="92500" lnSpcReduction="20000"/>
           </a:bodyPr>
           <a:lstStyle>
             <a:lvl1pPr marL="228600" indent="-228600" algn="l" defTabSz="914400" rtl="0" eaLnBrk="1" latinLnBrk="0" hangingPunct="1">
@@ -4517,1184 +4565,57 @@
             </a:pPr>
             <a:r>
               <a:rPr lang="hu-HU" sz="1200" dirty="0">
-                <a:latin typeface="Montserrat" panose="00000500000000000000" pitchFamily="2" charset="-18"/>
+                <a:latin typeface="Monsterrrat"/>
               </a:rPr>
               <a:t>	</a:t>
             </a:r>
             <a:r>
-              <a:rPr lang="hu-HU" sz="1200" dirty="0" err="1">
-                <a:latin typeface="Montserrat" panose="00000500000000000000" pitchFamily="2" charset="-18"/>
+              <a:rPr lang="en-US" dirty="0">
+                <a:latin typeface="Monsterrrat"/>
               </a:rPr>
-              <a:t>Lorem</a:t>
-            </a:r>
-            <a:r>
-              <a:rPr lang="hu-HU" sz="1200" dirty="0">
-                <a:latin typeface="Montserrat" panose="00000500000000000000" pitchFamily="2" charset="-18"/>
+              <a:t>Inspired by the old posters and signs in the traditional Montserrat </a:t>
+            </a:r>
+            <a:r>
+              <a:rPr lang="en-US" dirty="0" err="1">
+                <a:latin typeface="Monsterrrat"/>
               </a:rPr>
-              <a:t> </a:t>
-            </a:r>
-            <a:r>
-              <a:rPr lang="hu-HU" sz="1200" dirty="0" err="1">
-                <a:latin typeface="Montserrat" panose="00000500000000000000" pitchFamily="2" charset="-18"/>
+              <a:t>neighbourhood</a:t>
+            </a:r>
+            <a:r>
+              <a:rPr lang="en-US" dirty="0">
+                <a:latin typeface="Monsterrrat"/>
               </a:rPr>
-              <a:t>ipsum</a:t>
-            </a:r>
-            <a:r>
-              <a:rPr lang="hu-HU" sz="1200" dirty="0">
-                <a:latin typeface="Montserrat" panose="00000500000000000000" pitchFamily="2" charset="-18"/>
+              <a:t> of Buenos Aires, Montserrat Font was created in 2010 by Argentine artist Julieta </a:t>
+            </a:r>
+            <a:r>
+              <a:rPr lang="en-US" dirty="0" err="1">
+                <a:latin typeface="Monsterrrat"/>
               </a:rPr>
-              <a:t> </a:t>
-            </a:r>
-            <a:r>
-              <a:rPr lang="hu-HU" sz="1200" dirty="0" err="1">
-                <a:latin typeface="Montserrat" panose="00000500000000000000" pitchFamily="2" charset="-18"/>
+              <a:t>Ulanovsky</a:t>
+            </a:r>
+            <a:r>
+              <a:rPr lang="en-US" dirty="0">
+                <a:latin typeface="Monsterrrat"/>
               </a:rPr>
-              <a:t>dolor</a:t>
-            </a:r>
-            <a:r>
-              <a:rPr lang="hu-HU" sz="1200" dirty="0">
-                <a:latin typeface="Montserrat" panose="00000500000000000000" pitchFamily="2" charset="-18"/>
+              <a:t> in a homage to the beauty of the urban typography that emerged in the </a:t>
+            </a:r>
+            <a:r>
+              <a:rPr lang="en-US" dirty="0" err="1">
+                <a:latin typeface="Monsterrrat"/>
               </a:rPr>
-              <a:t> </a:t>
-            </a:r>
-            <a:r>
-              <a:rPr lang="hu-HU" sz="1200" dirty="0" err="1">
-                <a:latin typeface="Montserrat" panose="00000500000000000000" pitchFamily="2" charset="-18"/>
+              <a:t>neighbourhood</a:t>
+            </a:r>
+            <a:r>
+              <a:rPr lang="en-US" dirty="0">
+                <a:latin typeface="Monsterrrat"/>
               </a:rPr>
-              <a:t>sit</a:t>
-            </a:r>
-            <a:r>
-              <a:rPr lang="hu-HU" sz="1200" dirty="0">
-                <a:latin typeface="Montserrat" panose="00000500000000000000" pitchFamily="2" charset="-18"/>
-              </a:rPr>
-              <a:t> </a:t>
-            </a:r>
-            <a:r>
-              <a:rPr lang="hu-HU" sz="1200" dirty="0" err="1">
-                <a:latin typeface="Montserrat" panose="00000500000000000000" pitchFamily="2" charset="-18"/>
-              </a:rPr>
-              <a:t>amet</a:t>
-            </a:r>
-            <a:r>
-              <a:rPr lang="hu-HU" sz="1200" dirty="0">
-                <a:latin typeface="Montserrat" panose="00000500000000000000" pitchFamily="2" charset="-18"/>
-              </a:rPr>
-              <a:t>, </a:t>
-            </a:r>
-            <a:r>
-              <a:rPr lang="hu-HU" sz="1200" dirty="0" err="1">
-                <a:latin typeface="Montserrat" panose="00000500000000000000" pitchFamily="2" charset="-18"/>
-              </a:rPr>
-              <a:t>consectetur</a:t>
-            </a:r>
-            <a:r>
-              <a:rPr lang="hu-HU" sz="1200" dirty="0">
-                <a:latin typeface="Montserrat" panose="00000500000000000000" pitchFamily="2" charset="-18"/>
-              </a:rPr>
-              <a:t> </a:t>
-            </a:r>
-            <a:r>
-              <a:rPr lang="hu-HU" sz="1200" dirty="0" err="1">
-                <a:latin typeface="Montserrat" panose="00000500000000000000" pitchFamily="2" charset="-18"/>
-              </a:rPr>
-              <a:t>adipiscing</a:t>
-            </a:r>
-            <a:r>
-              <a:rPr lang="hu-HU" sz="1200" dirty="0">
-                <a:latin typeface="Montserrat" panose="00000500000000000000" pitchFamily="2" charset="-18"/>
-              </a:rPr>
-              <a:t> elit. </a:t>
-            </a:r>
-            <a:r>
-              <a:rPr lang="hu-HU" sz="1200" dirty="0" err="1">
-                <a:latin typeface="Montserrat" panose="00000500000000000000" pitchFamily="2" charset="-18"/>
-              </a:rPr>
-              <a:t>Suspendisse</a:t>
-            </a:r>
-            <a:r>
-              <a:rPr lang="hu-HU" sz="1200" dirty="0">
-                <a:latin typeface="Montserrat" panose="00000500000000000000" pitchFamily="2" charset="-18"/>
-              </a:rPr>
-              <a:t> </a:t>
-            </a:r>
-            <a:r>
-              <a:rPr lang="hu-HU" sz="1200" dirty="0" err="1">
-                <a:latin typeface="Montserrat" panose="00000500000000000000" pitchFamily="2" charset="-18"/>
-              </a:rPr>
-              <a:t>ac</a:t>
-            </a:r>
-            <a:r>
-              <a:rPr lang="hu-HU" sz="1200" dirty="0">
-                <a:latin typeface="Montserrat" panose="00000500000000000000" pitchFamily="2" charset="-18"/>
-              </a:rPr>
-              <a:t> est </a:t>
-            </a:r>
-            <a:r>
-              <a:rPr lang="hu-HU" sz="1200" dirty="0" err="1">
-                <a:latin typeface="Montserrat" panose="00000500000000000000" pitchFamily="2" charset="-18"/>
-              </a:rPr>
-              <a:t>ornare</a:t>
-            </a:r>
-            <a:r>
-              <a:rPr lang="hu-HU" sz="1200" dirty="0">
-                <a:latin typeface="Montserrat" panose="00000500000000000000" pitchFamily="2" charset="-18"/>
-              </a:rPr>
-              <a:t>, </a:t>
-            </a:r>
-            <a:r>
-              <a:rPr lang="hu-HU" sz="1200" dirty="0" err="1">
-                <a:latin typeface="Montserrat" panose="00000500000000000000" pitchFamily="2" charset="-18"/>
-              </a:rPr>
-              <a:t>tempor</a:t>
-            </a:r>
-            <a:r>
-              <a:rPr lang="hu-HU" sz="1200" dirty="0">
-                <a:latin typeface="Montserrat" panose="00000500000000000000" pitchFamily="2" charset="-18"/>
-              </a:rPr>
-              <a:t> </a:t>
-            </a:r>
-            <a:r>
-              <a:rPr lang="hu-HU" sz="1200" dirty="0" err="1">
-                <a:latin typeface="Montserrat" panose="00000500000000000000" pitchFamily="2" charset="-18"/>
-              </a:rPr>
-              <a:t>velit</a:t>
-            </a:r>
-            <a:r>
-              <a:rPr lang="hu-HU" sz="1200" dirty="0">
-                <a:latin typeface="Montserrat" panose="00000500000000000000" pitchFamily="2" charset="-18"/>
-              </a:rPr>
-              <a:t> </a:t>
-            </a:r>
-            <a:r>
-              <a:rPr lang="hu-HU" sz="1200" dirty="0" err="1">
-                <a:latin typeface="Montserrat" panose="00000500000000000000" pitchFamily="2" charset="-18"/>
-              </a:rPr>
-              <a:t>id</a:t>
-            </a:r>
-            <a:r>
-              <a:rPr lang="hu-HU" sz="1200" dirty="0">
-                <a:latin typeface="Montserrat" panose="00000500000000000000" pitchFamily="2" charset="-18"/>
-              </a:rPr>
-              <a:t>, </a:t>
-            </a:r>
-            <a:r>
-              <a:rPr lang="hu-HU" sz="1200" dirty="0" err="1">
-                <a:latin typeface="Montserrat" panose="00000500000000000000" pitchFamily="2" charset="-18"/>
-              </a:rPr>
-              <a:t>hendrerit</a:t>
-            </a:r>
-            <a:r>
-              <a:rPr lang="hu-HU" sz="1200" dirty="0">
-                <a:latin typeface="Montserrat" panose="00000500000000000000" pitchFamily="2" charset="-18"/>
-              </a:rPr>
-              <a:t> </a:t>
-            </a:r>
-            <a:r>
-              <a:rPr lang="hu-HU" sz="1200" dirty="0" err="1">
-                <a:latin typeface="Montserrat" panose="00000500000000000000" pitchFamily="2" charset="-18"/>
-              </a:rPr>
-              <a:t>risus</a:t>
-            </a:r>
-            <a:r>
-              <a:rPr lang="hu-HU" sz="1200" dirty="0">
-                <a:latin typeface="Montserrat" panose="00000500000000000000" pitchFamily="2" charset="-18"/>
-              </a:rPr>
-              <a:t>. </a:t>
-            </a:r>
-            <a:r>
-              <a:rPr lang="hu-HU" sz="1200" dirty="0" err="1">
-                <a:latin typeface="Montserrat" panose="00000500000000000000" pitchFamily="2" charset="-18"/>
-              </a:rPr>
-              <a:t>Vestibulum</a:t>
-            </a:r>
-            <a:r>
-              <a:rPr lang="hu-HU" sz="1200" dirty="0">
-                <a:latin typeface="Montserrat" panose="00000500000000000000" pitchFamily="2" charset="-18"/>
-              </a:rPr>
-              <a:t> ante </a:t>
-            </a:r>
-            <a:r>
-              <a:rPr lang="hu-HU" sz="1200" dirty="0" err="1">
-                <a:latin typeface="Montserrat" panose="00000500000000000000" pitchFamily="2" charset="-18"/>
-              </a:rPr>
-              <a:t>ipsum</a:t>
-            </a:r>
-            <a:r>
-              <a:rPr lang="hu-HU" sz="1200" dirty="0">
-                <a:latin typeface="Montserrat" panose="00000500000000000000" pitchFamily="2" charset="-18"/>
-              </a:rPr>
-              <a:t> </a:t>
-            </a:r>
-            <a:r>
-              <a:rPr lang="hu-HU" sz="1200" dirty="0" err="1">
-                <a:latin typeface="Montserrat" panose="00000500000000000000" pitchFamily="2" charset="-18"/>
-              </a:rPr>
-              <a:t>primis</a:t>
-            </a:r>
-            <a:r>
-              <a:rPr lang="hu-HU" sz="1200" dirty="0">
-                <a:latin typeface="Montserrat" panose="00000500000000000000" pitchFamily="2" charset="-18"/>
-              </a:rPr>
-              <a:t> in </a:t>
-            </a:r>
-            <a:r>
-              <a:rPr lang="hu-HU" sz="1200" dirty="0" err="1">
-                <a:latin typeface="Montserrat" panose="00000500000000000000" pitchFamily="2" charset="-18"/>
-              </a:rPr>
-              <a:t>faucibus</a:t>
-            </a:r>
-            <a:r>
-              <a:rPr lang="hu-HU" sz="1200" dirty="0">
-                <a:latin typeface="Montserrat" panose="00000500000000000000" pitchFamily="2" charset="-18"/>
-              </a:rPr>
-              <a:t> </a:t>
-            </a:r>
-            <a:r>
-              <a:rPr lang="hu-HU" sz="1200" dirty="0" err="1">
-                <a:latin typeface="Montserrat" panose="00000500000000000000" pitchFamily="2" charset="-18"/>
-              </a:rPr>
-              <a:t>orci</a:t>
-            </a:r>
-            <a:r>
-              <a:rPr lang="hu-HU" sz="1200" dirty="0">
-                <a:latin typeface="Montserrat" panose="00000500000000000000" pitchFamily="2" charset="-18"/>
-              </a:rPr>
-              <a:t> </a:t>
-            </a:r>
-            <a:r>
-              <a:rPr lang="hu-HU" sz="1200" dirty="0" err="1">
-                <a:latin typeface="Montserrat" panose="00000500000000000000" pitchFamily="2" charset="-18"/>
-              </a:rPr>
-              <a:t>luctus</a:t>
-            </a:r>
-            <a:r>
-              <a:rPr lang="hu-HU" sz="1200" dirty="0">
-                <a:latin typeface="Montserrat" panose="00000500000000000000" pitchFamily="2" charset="-18"/>
-              </a:rPr>
-              <a:t> </a:t>
-            </a:r>
-            <a:r>
-              <a:rPr lang="hu-HU" sz="1200" dirty="0" err="1">
-                <a:latin typeface="Montserrat" panose="00000500000000000000" pitchFamily="2" charset="-18"/>
-              </a:rPr>
-              <a:t>et</a:t>
-            </a:r>
-            <a:r>
-              <a:rPr lang="hu-HU" sz="1200" dirty="0">
-                <a:latin typeface="Montserrat" panose="00000500000000000000" pitchFamily="2" charset="-18"/>
-              </a:rPr>
-              <a:t> </a:t>
-            </a:r>
-            <a:r>
-              <a:rPr lang="hu-HU" sz="1200" dirty="0" err="1">
-                <a:latin typeface="Montserrat" panose="00000500000000000000" pitchFamily="2" charset="-18"/>
-              </a:rPr>
-              <a:t>ultrices</a:t>
-            </a:r>
-            <a:r>
-              <a:rPr lang="hu-HU" sz="1200" dirty="0">
-                <a:latin typeface="Montserrat" panose="00000500000000000000" pitchFamily="2" charset="-18"/>
-              </a:rPr>
-              <a:t> </a:t>
-            </a:r>
-            <a:r>
-              <a:rPr lang="hu-HU" sz="1200" dirty="0" err="1">
-                <a:latin typeface="Montserrat" panose="00000500000000000000" pitchFamily="2" charset="-18"/>
-              </a:rPr>
-              <a:t>posuere</a:t>
-            </a:r>
-            <a:r>
-              <a:rPr lang="hu-HU" sz="1200" dirty="0">
-                <a:latin typeface="Montserrat" panose="00000500000000000000" pitchFamily="2" charset="-18"/>
-              </a:rPr>
-              <a:t> </a:t>
-            </a:r>
-            <a:r>
-              <a:rPr lang="hu-HU" sz="1200" dirty="0" err="1">
-                <a:latin typeface="Montserrat" panose="00000500000000000000" pitchFamily="2" charset="-18"/>
-              </a:rPr>
-              <a:t>cubilia</a:t>
-            </a:r>
-            <a:r>
-              <a:rPr lang="hu-HU" sz="1200" dirty="0">
-                <a:latin typeface="Montserrat" panose="00000500000000000000" pitchFamily="2" charset="-18"/>
-              </a:rPr>
-              <a:t> </a:t>
-            </a:r>
-            <a:r>
-              <a:rPr lang="hu-HU" sz="1200" dirty="0" err="1">
-                <a:latin typeface="Montserrat" panose="00000500000000000000" pitchFamily="2" charset="-18"/>
-              </a:rPr>
-              <a:t>curae</a:t>
-            </a:r>
-            <a:r>
-              <a:rPr lang="hu-HU" sz="1200" dirty="0">
-                <a:latin typeface="Montserrat" panose="00000500000000000000" pitchFamily="2" charset="-18"/>
-              </a:rPr>
-              <a:t>; </a:t>
-            </a:r>
-            <a:r>
-              <a:rPr lang="hu-HU" sz="1200" dirty="0" err="1">
-                <a:latin typeface="Montserrat" panose="00000500000000000000" pitchFamily="2" charset="-18"/>
-              </a:rPr>
-              <a:t>Mauris</a:t>
-            </a:r>
-            <a:r>
-              <a:rPr lang="hu-HU" sz="1200" dirty="0">
-                <a:latin typeface="Montserrat" panose="00000500000000000000" pitchFamily="2" charset="-18"/>
-              </a:rPr>
-              <a:t> </a:t>
-            </a:r>
-            <a:r>
-              <a:rPr lang="hu-HU" sz="1200" dirty="0" err="1">
-                <a:latin typeface="Montserrat" panose="00000500000000000000" pitchFamily="2" charset="-18"/>
-              </a:rPr>
-              <a:t>volutpat</a:t>
-            </a:r>
-            <a:r>
-              <a:rPr lang="hu-HU" sz="1200" dirty="0">
-                <a:latin typeface="Montserrat" panose="00000500000000000000" pitchFamily="2" charset="-18"/>
-              </a:rPr>
-              <a:t> </a:t>
-            </a:r>
-            <a:r>
-              <a:rPr lang="hu-HU" sz="1200" dirty="0" err="1">
-                <a:latin typeface="Montserrat" panose="00000500000000000000" pitchFamily="2" charset="-18"/>
-              </a:rPr>
-              <a:t>justo</a:t>
-            </a:r>
-            <a:r>
-              <a:rPr lang="hu-HU" sz="1200" dirty="0">
-                <a:latin typeface="Montserrat" panose="00000500000000000000" pitchFamily="2" charset="-18"/>
-              </a:rPr>
-              <a:t> </a:t>
-            </a:r>
-            <a:r>
-              <a:rPr lang="hu-HU" sz="1200" dirty="0" err="1">
-                <a:latin typeface="Montserrat" panose="00000500000000000000" pitchFamily="2" charset="-18"/>
-              </a:rPr>
-              <a:t>lacus</a:t>
-            </a:r>
-            <a:r>
-              <a:rPr lang="hu-HU" sz="1200" dirty="0">
-                <a:latin typeface="Montserrat" panose="00000500000000000000" pitchFamily="2" charset="-18"/>
-              </a:rPr>
-              <a:t>, </a:t>
-            </a:r>
-            <a:r>
-              <a:rPr lang="hu-HU" sz="1200" dirty="0" err="1">
-                <a:latin typeface="Montserrat" panose="00000500000000000000" pitchFamily="2" charset="-18"/>
-              </a:rPr>
-              <a:t>ac</a:t>
-            </a:r>
-            <a:r>
-              <a:rPr lang="hu-HU" sz="1200" dirty="0">
-                <a:latin typeface="Montserrat" panose="00000500000000000000" pitchFamily="2" charset="-18"/>
-              </a:rPr>
-              <a:t> </a:t>
-            </a:r>
-            <a:r>
-              <a:rPr lang="hu-HU" sz="1200" dirty="0" err="1">
-                <a:latin typeface="Montserrat" panose="00000500000000000000" pitchFamily="2" charset="-18"/>
-              </a:rPr>
-              <a:t>vestibulum</a:t>
-            </a:r>
-            <a:r>
-              <a:rPr lang="hu-HU" sz="1200" dirty="0">
-                <a:latin typeface="Montserrat" panose="00000500000000000000" pitchFamily="2" charset="-18"/>
-              </a:rPr>
-              <a:t> tortor </a:t>
-            </a:r>
-            <a:r>
-              <a:rPr lang="hu-HU" sz="1200" dirty="0" err="1">
-                <a:latin typeface="Montserrat" panose="00000500000000000000" pitchFamily="2" charset="-18"/>
-              </a:rPr>
-              <a:t>rhoncus</a:t>
-            </a:r>
-            <a:r>
-              <a:rPr lang="hu-HU" sz="1200" dirty="0">
-                <a:latin typeface="Montserrat" panose="00000500000000000000" pitchFamily="2" charset="-18"/>
-              </a:rPr>
-              <a:t> non. In </a:t>
-            </a:r>
-            <a:r>
-              <a:rPr lang="hu-HU" sz="1200" dirty="0" err="1">
-                <a:latin typeface="Montserrat" panose="00000500000000000000" pitchFamily="2" charset="-18"/>
-              </a:rPr>
-              <a:t>quis</a:t>
-            </a:r>
-            <a:r>
-              <a:rPr lang="hu-HU" sz="1200" dirty="0">
-                <a:latin typeface="Montserrat" panose="00000500000000000000" pitchFamily="2" charset="-18"/>
-              </a:rPr>
-              <a:t> </a:t>
-            </a:r>
-            <a:r>
-              <a:rPr lang="hu-HU" sz="1200" dirty="0" err="1">
-                <a:latin typeface="Montserrat" panose="00000500000000000000" pitchFamily="2" charset="-18"/>
-              </a:rPr>
-              <a:t>tincidunt</a:t>
-            </a:r>
-            <a:r>
-              <a:rPr lang="hu-HU" sz="1200" dirty="0">
-                <a:latin typeface="Montserrat" panose="00000500000000000000" pitchFamily="2" charset="-18"/>
-              </a:rPr>
-              <a:t> </a:t>
-            </a:r>
-            <a:r>
-              <a:rPr lang="hu-HU" sz="1200" dirty="0" err="1">
-                <a:latin typeface="Montserrat" panose="00000500000000000000" pitchFamily="2" charset="-18"/>
-              </a:rPr>
-              <a:t>lorem</a:t>
-            </a:r>
-            <a:r>
-              <a:rPr lang="hu-HU" sz="1200" dirty="0">
-                <a:latin typeface="Montserrat" panose="00000500000000000000" pitchFamily="2" charset="-18"/>
-              </a:rPr>
-              <a:t>. Nulla </a:t>
-            </a:r>
-            <a:r>
-              <a:rPr lang="hu-HU" sz="1200" dirty="0" err="1">
-                <a:latin typeface="Montserrat" panose="00000500000000000000" pitchFamily="2" charset="-18"/>
-              </a:rPr>
-              <a:t>efficitur</a:t>
-            </a:r>
-            <a:r>
-              <a:rPr lang="hu-HU" sz="1200" dirty="0">
-                <a:latin typeface="Montserrat" panose="00000500000000000000" pitchFamily="2" charset="-18"/>
-              </a:rPr>
-              <a:t> </a:t>
-            </a:r>
-            <a:r>
-              <a:rPr lang="hu-HU" sz="1200" dirty="0" err="1">
-                <a:latin typeface="Montserrat" panose="00000500000000000000" pitchFamily="2" charset="-18"/>
-              </a:rPr>
-              <a:t>hendrerit</a:t>
-            </a:r>
-            <a:r>
-              <a:rPr lang="hu-HU" sz="1200" dirty="0">
-                <a:latin typeface="Montserrat" panose="00000500000000000000" pitchFamily="2" charset="-18"/>
-              </a:rPr>
-              <a:t> </a:t>
-            </a:r>
-            <a:r>
-              <a:rPr lang="hu-HU" sz="1200" dirty="0" err="1">
-                <a:latin typeface="Montserrat" panose="00000500000000000000" pitchFamily="2" charset="-18"/>
-              </a:rPr>
-              <a:t>efficitur</a:t>
-            </a:r>
-            <a:r>
-              <a:rPr lang="hu-HU" sz="1200" dirty="0">
-                <a:latin typeface="Montserrat" panose="00000500000000000000" pitchFamily="2" charset="-18"/>
-              </a:rPr>
-              <a:t>. </a:t>
-            </a:r>
-            <a:r>
-              <a:rPr lang="hu-HU" sz="1200" dirty="0" err="1">
-                <a:latin typeface="Montserrat" panose="00000500000000000000" pitchFamily="2" charset="-18"/>
-              </a:rPr>
-              <a:t>Vivamus</a:t>
-            </a:r>
-            <a:r>
-              <a:rPr lang="hu-HU" sz="1200" dirty="0">
-                <a:latin typeface="Montserrat" panose="00000500000000000000" pitchFamily="2" charset="-18"/>
-              </a:rPr>
-              <a:t> </a:t>
-            </a:r>
-            <a:r>
-              <a:rPr lang="hu-HU" sz="1200" dirty="0" err="1">
-                <a:latin typeface="Montserrat" panose="00000500000000000000" pitchFamily="2" charset="-18"/>
-              </a:rPr>
-              <a:t>ut</a:t>
-            </a:r>
-            <a:r>
-              <a:rPr lang="hu-HU" sz="1200" dirty="0">
-                <a:latin typeface="Montserrat" panose="00000500000000000000" pitchFamily="2" charset="-18"/>
-              </a:rPr>
-              <a:t> </a:t>
-            </a:r>
-            <a:r>
-              <a:rPr lang="hu-HU" sz="1200" dirty="0" err="1">
-                <a:latin typeface="Montserrat" panose="00000500000000000000" pitchFamily="2" charset="-18"/>
-              </a:rPr>
-              <a:t>euismod</a:t>
-            </a:r>
-            <a:r>
-              <a:rPr lang="hu-HU" sz="1200" dirty="0">
-                <a:latin typeface="Montserrat" panose="00000500000000000000" pitchFamily="2" charset="-18"/>
-              </a:rPr>
-              <a:t> est. </a:t>
-            </a:r>
-            <a:r>
-              <a:rPr lang="hu-HU" sz="1200" dirty="0" err="1">
-                <a:latin typeface="Montserrat" panose="00000500000000000000" pitchFamily="2" charset="-18"/>
-              </a:rPr>
-              <a:t>Etiam</a:t>
-            </a:r>
-            <a:r>
-              <a:rPr lang="hu-HU" sz="1200" dirty="0">
-                <a:latin typeface="Montserrat" panose="00000500000000000000" pitchFamily="2" charset="-18"/>
-              </a:rPr>
-              <a:t> </a:t>
-            </a:r>
-            <a:r>
-              <a:rPr lang="hu-HU" sz="1200" dirty="0" err="1">
-                <a:latin typeface="Montserrat" panose="00000500000000000000" pitchFamily="2" charset="-18"/>
-              </a:rPr>
-              <a:t>viverra</a:t>
-            </a:r>
-            <a:r>
-              <a:rPr lang="hu-HU" sz="1200" dirty="0">
-                <a:latin typeface="Montserrat" panose="00000500000000000000" pitchFamily="2" charset="-18"/>
-              </a:rPr>
-              <a:t>, </a:t>
-            </a:r>
-            <a:r>
-              <a:rPr lang="hu-HU" sz="1200" dirty="0" err="1">
-                <a:latin typeface="Montserrat" panose="00000500000000000000" pitchFamily="2" charset="-18"/>
-              </a:rPr>
-              <a:t>eros</a:t>
-            </a:r>
-            <a:r>
-              <a:rPr lang="hu-HU" sz="1200" dirty="0">
-                <a:latin typeface="Montserrat" panose="00000500000000000000" pitchFamily="2" charset="-18"/>
-              </a:rPr>
-              <a:t> </a:t>
-            </a:r>
-            <a:r>
-              <a:rPr lang="hu-HU" sz="1200" dirty="0" err="1">
-                <a:latin typeface="Montserrat" panose="00000500000000000000" pitchFamily="2" charset="-18"/>
-              </a:rPr>
-              <a:t>sit</a:t>
-            </a:r>
-            <a:r>
-              <a:rPr lang="hu-HU" sz="1200" dirty="0">
-                <a:latin typeface="Montserrat" panose="00000500000000000000" pitchFamily="2" charset="-18"/>
-              </a:rPr>
-              <a:t> </a:t>
-            </a:r>
-            <a:r>
-              <a:rPr lang="hu-HU" sz="1200" dirty="0" err="1">
-                <a:latin typeface="Montserrat" panose="00000500000000000000" pitchFamily="2" charset="-18"/>
-              </a:rPr>
-              <a:t>amet</a:t>
-            </a:r>
-            <a:r>
-              <a:rPr lang="hu-HU" sz="1200" dirty="0">
-                <a:latin typeface="Montserrat" panose="00000500000000000000" pitchFamily="2" charset="-18"/>
-              </a:rPr>
-              <a:t> </a:t>
-            </a:r>
-            <a:r>
-              <a:rPr lang="hu-HU" sz="1200" dirty="0" err="1">
-                <a:latin typeface="Montserrat" panose="00000500000000000000" pitchFamily="2" charset="-18"/>
-              </a:rPr>
-              <a:t>maximus</a:t>
-            </a:r>
-            <a:r>
-              <a:rPr lang="hu-HU" sz="1200" dirty="0">
-                <a:latin typeface="Montserrat" panose="00000500000000000000" pitchFamily="2" charset="-18"/>
-              </a:rPr>
-              <a:t> </a:t>
-            </a:r>
-            <a:r>
-              <a:rPr lang="hu-HU" sz="1200" dirty="0" err="1">
-                <a:latin typeface="Montserrat" panose="00000500000000000000" pitchFamily="2" charset="-18"/>
-              </a:rPr>
-              <a:t>pellentesque</a:t>
-            </a:r>
-            <a:r>
-              <a:rPr lang="hu-HU" sz="1200" dirty="0">
-                <a:latin typeface="Montserrat" panose="00000500000000000000" pitchFamily="2" charset="-18"/>
-              </a:rPr>
-              <a:t>, </a:t>
-            </a:r>
-            <a:r>
-              <a:rPr lang="hu-HU" sz="1200" dirty="0" err="1">
-                <a:latin typeface="Montserrat" panose="00000500000000000000" pitchFamily="2" charset="-18"/>
-              </a:rPr>
-              <a:t>orci</a:t>
-            </a:r>
-            <a:r>
-              <a:rPr lang="hu-HU" sz="1200" dirty="0">
-                <a:latin typeface="Montserrat" panose="00000500000000000000" pitchFamily="2" charset="-18"/>
-              </a:rPr>
-              <a:t> </a:t>
-            </a:r>
-            <a:r>
-              <a:rPr lang="hu-HU" sz="1200" dirty="0" err="1">
-                <a:latin typeface="Montserrat" panose="00000500000000000000" pitchFamily="2" charset="-18"/>
-              </a:rPr>
-              <a:t>dui</a:t>
-            </a:r>
-            <a:r>
-              <a:rPr lang="hu-HU" sz="1200" dirty="0">
-                <a:latin typeface="Montserrat" panose="00000500000000000000" pitchFamily="2" charset="-18"/>
-              </a:rPr>
-              <a:t> </a:t>
-            </a:r>
-            <a:r>
-              <a:rPr lang="hu-HU" sz="1200" dirty="0" err="1">
-                <a:latin typeface="Montserrat" panose="00000500000000000000" pitchFamily="2" charset="-18"/>
-              </a:rPr>
-              <a:t>auctor</a:t>
-            </a:r>
-            <a:r>
-              <a:rPr lang="hu-HU" sz="1200" dirty="0">
-                <a:latin typeface="Montserrat" panose="00000500000000000000" pitchFamily="2" charset="-18"/>
-              </a:rPr>
-              <a:t> </a:t>
-            </a:r>
-            <a:r>
-              <a:rPr lang="hu-HU" sz="1200" dirty="0" err="1">
-                <a:latin typeface="Montserrat" panose="00000500000000000000" pitchFamily="2" charset="-18"/>
-              </a:rPr>
-              <a:t>massa</a:t>
-            </a:r>
-            <a:r>
-              <a:rPr lang="hu-HU" sz="1200" dirty="0">
-                <a:latin typeface="Montserrat" panose="00000500000000000000" pitchFamily="2" charset="-18"/>
-              </a:rPr>
-              <a:t>, </a:t>
-            </a:r>
-            <a:r>
-              <a:rPr lang="hu-HU" sz="1200" dirty="0" err="1">
-                <a:latin typeface="Montserrat" panose="00000500000000000000" pitchFamily="2" charset="-18"/>
-              </a:rPr>
-              <a:t>sit</a:t>
-            </a:r>
-            <a:r>
-              <a:rPr lang="hu-HU" sz="1200" dirty="0">
-                <a:latin typeface="Montserrat" panose="00000500000000000000" pitchFamily="2" charset="-18"/>
-              </a:rPr>
-              <a:t> </a:t>
-            </a:r>
-            <a:r>
-              <a:rPr lang="hu-HU" sz="1200" dirty="0" err="1">
-                <a:latin typeface="Montserrat" panose="00000500000000000000" pitchFamily="2" charset="-18"/>
-              </a:rPr>
-              <a:t>amet</a:t>
-            </a:r>
-            <a:r>
-              <a:rPr lang="hu-HU" sz="1200" dirty="0">
-                <a:latin typeface="Montserrat" panose="00000500000000000000" pitchFamily="2" charset="-18"/>
-              </a:rPr>
-              <a:t> </a:t>
-            </a:r>
-            <a:r>
-              <a:rPr lang="hu-HU" sz="1200" dirty="0" err="1">
-                <a:latin typeface="Montserrat" panose="00000500000000000000" pitchFamily="2" charset="-18"/>
-              </a:rPr>
-              <a:t>sollicitudin</a:t>
-            </a:r>
-            <a:r>
-              <a:rPr lang="hu-HU" sz="1200" dirty="0">
-                <a:latin typeface="Montserrat" panose="00000500000000000000" pitchFamily="2" charset="-18"/>
-              </a:rPr>
-              <a:t> mi </a:t>
-            </a:r>
-            <a:r>
-              <a:rPr lang="hu-HU" sz="1200" dirty="0" err="1">
-                <a:latin typeface="Montserrat" panose="00000500000000000000" pitchFamily="2" charset="-18"/>
-              </a:rPr>
-              <a:t>nibh</a:t>
-            </a:r>
-            <a:r>
-              <a:rPr lang="hu-HU" sz="1200" dirty="0">
-                <a:latin typeface="Montserrat" panose="00000500000000000000" pitchFamily="2" charset="-18"/>
-              </a:rPr>
-              <a:t> non </a:t>
-            </a:r>
-            <a:r>
-              <a:rPr lang="hu-HU" sz="1200" dirty="0" err="1">
-                <a:latin typeface="Montserrat" panose="00000500000000000000" pitchFamily="2" charset="-18"/>
-              </a:rPr>
-              <a:t>nisi</a:t>
-            </a:r>
-            <a:r>
-              <a:rPr lang="hu-HU" sz="1200" dirty="0">
-                <a:latin typeface="Montserrat" panose="00000500000000000000" pitchFamily="2" charset="-18"/>
-              </a:rPr>
-              <a:t>. Nullam dictum ante </a:t>
-            </a:r>
-            <a:r>
-              <a:rPr lang="hu-HU" sz="1200" dirty="0" err="1">
-                <a:latin typeface="Montserrat" panose="00000500000000000000" pitchFamily="2" charset="-18"/>
-              </a:rPr>
-              <a:t>sit</a:t>
-            </a:r>
-            <a:r>
-              <a:rPr lang="hu-HU" sz="1200" dirty="0">
-                <a:latin typeface="Montserrat" panose="00000500000000000000" pitchFamily="2" charset="-18"/>
-              </a:rPr>
-              <a:t> </a:t>
-            </a:r>
-            <a:r>
-              <a:rPr lang="hu-HU" sz="1200" dirty="0" err="1">
-                <a:latin typeface="Montserrat" panose="00000500000000000000" pitchFamily="2" charset="-18"/>
-              </a:rPr>
-              <a:t>amet</a:t>
-            </a:r>
-            <a:r>
-              <a:rPr lang="hu-HU" sz="1200" dirty="0">
-                <a:latin typeface="Montserrat" panose="00000500000000000000" pitchFamily="2" charset="-18"/>
-              </a:rPr>
-              <a:t> mi </a:t>
-            </a:r>
-            <a:r>
-              <a:rPr lang="hu-HU" sz="1200" dirty="0" err="1">
-                <a:latin typeface="Montserrat" panose="00000500000000000000" pitchFamily="2" charset="-18"/>
-              </a:rPr>
-              <a:t>aliquam</a:t>
-            </a:r>
-            <a:r>
-              <a:rPr lang="hu-HU" sz="1200" dirty="0">
-                <a:latin typeface="Montserrat" panose="00000500000000000000" pitchFamily="2" charset="-18"/>
-              </a:rPr>
-              <a:t>, in </a:t>
-            </a:r>
-            <a:r>
-              <a:rPr lang="hu-HU" sz="1200" dirty="0" err="1">
-                <a:latin typeface="Montserrat" panose="00000500000000000000" pitchFamily="2" charset="-18"/>
-              </a:rPr>
-              <a:t>gravida</a:t>
-            </a:r>
-            <a:r>
-              <a:rPr lang="hu-HU" sz="1200" dirty="0">
-                <a:latin typeface="Montserrat" panose="00000500000000000000" pitchFamily="2" charset="-18"/>
-              </a:rPr>
-              <a:t> </a:t>
-            </a:r>
-            <a:r>
-              <a:rPr lang="hu-HU" sz="1200" dirty="0" err="1">
-                <a:latin typeface="Montserrat" panose="00000500000000000000" pitchFamily="2" charset="-18"/>
-              </a:rPr>
-              <a:t>ipsum</a:t>
-            </a:r>
-            <a:r>
-              <a:rPr lang="hu-HU" sz="1200" dirty="0">
-                <a:latin typeface="Montserrat" panose="00000500000000000000" pitchFamily="2" charset="-18"/>
-              </a:rPr>
-              <a:t> </a:t>
-            </a:r>
-            <a:r>
-              <a:rPr lang="hu-HU" sz="1200" dirty="0" err="1">
-                <a:latin typeface="Montserrat" panose="00000500000000000000" pitchFamily="2" charset="-18"/>
-              </a:rPr>
-              <a:t>consequat</a:t>
-            </a:r>
-            <a:r>
-              <a:rPr lang="hu-HU" sz="1200" dirty="0">
-                <a:latin typeface="Montserrat" panose="00000500000000000000" pitchFamily="2" charset="-18"/>
-              </a:rPr>
-              <a:t>. </a:t>
-            </a:r>
-            <a:r>
-              <a:rPr lang="hu-HU" sz="1200" dirty="0" err="1">
-                <a:latin typeface="Montserrat" panose="00000500000000000000" pitchFamily="2" charset="-18"/>
-              </a:rPr>
-              <a:t>Morbi</a:t>
-            </a:r>
-            <a:r>
-              <a:rPr lang="hu-HU" sz="1200" dirty="0">
-                <a:latin typeface="Montserrat" panose="00000500000000000000" pitchFamily="2" charset="-18"/>
-              </a:rPr>
-              <a:t> </a:t>
-            </a:r>
-            <a:r>
-              <a:rPr lang="hu-HU" sz="1200" dirty="0" err="1">
-                <a:latin typeface="Montserrat" panose="00000500000000000000" pitchFamily="2" charset="-18"/>
-              </a:rPr>
-              <a:t>sodales</a:t>
-            </a:r>
-            <a:r>
-              <a:rPr lang="hu-HU" sz="1200" dirty="0">
-                <a:latin typeface="Montserrat" panose="00000500000000000000" pitchFamily="2" charset="-18"/>
-              </a:rPr>
-              <a:t> </a:t>
-            </a:r>
-            <a:r>
-              <a:rPr lang="hu-HU" sz="1200" dirty="0" err="1">
-                <a:latin typeface="Montserrat" panose="00000500000000000000" pitchFamily="2" charset="-18"/>
-              </a:rPr>
-              <a:t>luctus</a:t>
-            </a:r>
-            <a:r>
-              <a:rPr lang="hu-HU" sz="1200" dirty="0">
-                <a:latin typeface="Montserrat" panose="00000500000000000000" pitchFamily="2" charset="-18"/>
-              </a:rPr>
-              <a:t> </a:t>
-            </a:r>
-            <a:r>
-              <a:rPr lang="hu-HU" sz="1200" dirty="0" err="1">
-                <a:latin typeface="Montserrat" panose="00000500000000000000" pitchFamily="2" charset="-18"/>
-              </a:rPr>
-              <a:t>ligula</a:t>
-            </a:r>
-            <a:r>
-              <a:rPr lang="hu-HU" sz="1200" dirty="0">
-                <a:latin typeface="Montserrat" panose="00000500000000000000" pitchFamily="2" charset="-18"/>
-              </a:rPr>
-              <a:t> non </a:t>
-            </a:r>
-            <a:r>
-              <a:rPr lang="hu-HU" sz="1200" dirty="0" err="1">
-                <a:latin typeface="Montserrat" panose="00000500000000000000" pitchFamily="2" charset="-18"/>
-              </a:rPr>
-              <a:t>bibendum</a:t>
-            </a:r>
-            <a:r>
-              <a:rPr lang="hu-HU" sz="1200" dirty="0">
-                <a:latin typeface="Montserrat" panose="00000500000000000000" pitchFamily="2" charset="-18"/>
-              </a:rPr>
-              <a:t>. </a:t>
-            </a:r>
-            <a:r>
-              <a:rPr lang="hu-HU" sz="1200" dirty="0" err="1">
-                <a:latin typeface="Montserrat" panose="00000500000000000000" pitchFamily="2" charset="-18"/>
-              </a:rPr>
-              <a:t>Curabitur</a:t>
-            </a:r>
-            <a:r>
-              <a:rPr lang="hu-HU" sz="1200" dirty="0">
-                <a:latin typeface="Montserrat" panose="00000500000000000000" pitchFamily="2" charset="-18"/>
-              </a:rPr>
-              <a:t> </a:t>
-            </a:r>
-            <a:r>
-              <a:rPr lang="hu-HU" sz="1200" dirty="0" err="1">
-                <a:latin typeface="Montserrat" panose="00000500000000000000" pitchFamily="2" charset="-18"/>
-              </a:rPr>
-              <a:t>laoreet</a:t>
-            </a:r>
-            <a:r>
-              <a:rPr lang="hu-HU" sz="1200" dirty="0">
-                <a:latin typeface="Montserrat" panose="00000500000000000000" pitchFamily="2" charset="-18"/>
-              </a:rPr>
-              <a:t> </a:t>
-            </a:r>
-            <a:r>
-              <a:rPr lang="hu-HU" sz="1200" dirty="0" err="1">
-                <a:latin typeface="Montserrat" panose="00000500000000000000" pitchFamily="2" charset="-18"/>
-              </a:rPr>
-              <a:t>placerat</a:t>
-            </a:r>
-            <a:r>
-              <a:rPr lang="hu-HU" sz="1200" dirty="0">
-                <a:latin typeface="Montserrat" panose="00000500000000000000" pitchFamily="2" charset="-18"/>
-              </a:rPr>
-              <a:t> </a:t>
-            </a:r>
-            <a:r>
-              <a:rPr lang="hu-HU" sz="1200" dirty="0" err="1">
-                <a:latin typeface="Montserrat" panose="00000500000000000000" pitchFamily="2" charset="-18"/>
-              </a:rPr>
-              <a:t>augue</a:t>
-            </a:r>
-            <a:r>
-              <a:rPr lang="hu-HU" sz="1200" dirty="0">
-                <a:latin typeface="Montserrat" panose="00000500000000000000" pitchFamily="2" charset="-18"/>
-              </a:rPr>
-              <a:t>, a </a:t>
-            </a:r>
-            <a:r>
-              <a:rPr lang="hu-HU" sz="1200" dirty="0" err="1">
-                <a:latin typeface="Montserrat" panose="00000500000000000000" pitchFamily="2" charset="-18"/>
-              </a:rPr>
-              <a:t>feugiat</a:t>
-            </a:r>
-            <a:r>
-              <a:rPr lang="hu-HU" sz="1200" dirty="0">
-                <a:latin typeface="Montserrat" panose="00000500000000000000" pitchFamily="2" charset="-18"/>
-              </a:rPr>
-              <a:t> </a:t>
-            </a:r>
-            <a:r>
-              <a:rPr lang="hu-HU" sz="1200" dirty="0" err="1">
-                <a:latin typeface="Montserrat" panose="00000500000000000000" pitchFamily="2" charset="-18"/>
-              </a:rPr>
-              <a:t>ipsum</a:t>
-            </a:r>
-            <a:r>
-              <a:rPr lang="hu-HU" sz="1200" dirty="0">
-                <a:latin typeface="Montserrat" panose="00000500000000000000" pitchFamily="2" charset="-18"/>
-              </a:rPr>
-              <a:t> </a:t>
-            </a:r>
-            <a:r>
-              <a:rPr lang="hu-HU" sz="1200" dirty="0" err="1">
-                <a:latin typeface="Montserrat" panose="00000500000000000000" pitchFamily="2" charset="-18"/>
-              </a:rPr>
-              <a:t>consequat</a:t>
-            </a:r>
-            <a:r>
-              <a:rPr lang="hu-HU" sz="1200" dirty="0">
-                <a:latin typeface="Montserrat" panose="00000500000000000000" pitchFamily="2" charset="-18"/>
-              </a:rPr>
-              <a:t> </a:t>
-            </a:r>
-            <a:r>
-              <a:rPr lang="hu-HU" sz="1200" dirty="0" err="1">
-                <a:latin typeface="Montserrat" panose="00000500000000000000" pitchFamily="2" charset="-18"/>
-              </a:rPr>
-              <a:t>pulvinar</a:t>
-            </a:r>
-            <a:r>
-              <a:rPr lang="hu-HU" sz="1200" dirty="0">
-                <a:latin typeface="Montserrat" panose="00000500000000000000" pitchFamily="2" charset="-18"/>
-              </a:rPr>
-              <a:t>. </a:t>
-            </a:r>
-            <a:r>
-              <a:rPr lang="hu-HU" sz="1200" dirty="0" err="1">
-                <a:latin typeface="Montserrat" panose="00000500000000000000" pitchFamily="2" charset="-18"/>
-              </a:rPr>
-              <a:t>Etiam</a:t>
-            </a:r>
-            <a:r>
-              <a:rPr lang="hu-HU" sz="1200" dirty="0">
-                <a:latin typeface="Montserrat" panose="00000500000000000000" pitchFamily="2" charset="-18"/>
-              </a:rPr>
-              <a:t> </a:t>
-            </a:r>
-            <a:r>
-              <a:rPr lang="hu-HU" sz="1200" dirty="0" err="1">
-                <a:latin typeface="Montserrat" panose="00000500000000000000" pitchFamily="2" charset="-18"/>
-              </a:rPr>
-              <a:t>efficitur</a:t>
-            </a:r>
-            <a:r>
-              <a:rPr lang="hu-HU" sz="1200" dirty="0">
-                <a:latin typeface="Montserrat" panose="00000500000000000000" pitchFamily="2" charset="-18"/>
-              </a:rPr>
-              <a:t> </a:t>
-            </a:r>
-            <a:r>
-              <a:rPr lang="hu-HU" sz="1200" dirty="0" err="1">
-                <a:latin typeface="Montserrat" panose="00000500000000000000" pitchFamily="2" charset="-18"/>
-              </a:rPr>
-              <a:t>nunc</a:t>
-            </a:r>
-            <a:r>
-              <a:rPr lang="hu-HU" sz="1200" dirty="0">
-                <a:latin typeface="Montserrat" panose="00000500000000000000" pitchFamily="2" charset="-18"/>
-              </a:rPr>
-              <a:t> vel </a:t>
-            </a:r>
-            <a:r>
-              <a:rPr lang="hu-HU" sz="1200" dirty="0" err="1">
-                <a:latin typeface="Montserrat" panose="00000500000000000000" pitchFamily="2" charset="-18"/>
-              </a:rPr>
-              <a:t>dui</a:t>
-            </a:r>
-            <a:r>
-              <a:rPr lang="hu-HU" sz="1200" dirty="0">
-                <a:latin typeface="Montserrat" panose="00000500000000000000" pitchFamily="2" charset="-18"/>
-              </a:rPr>
-              <a:t> </a:t>
-            </a:r>
-            <a:r>
-              <a:rPr lang="hu-HU" sz="1200" dirty="0" err="1">
-                <a:latin typeface="Montserrat" panose="00000500000000000000" pitchFamily="2" charset="-18"/>
-              </a:rPr>
-              <a:t>porttitor</a:t>
-            </a:r>
-            <a:r>
-              <a:rPr lang="hu-HU" sz="1200" dirty="0">
-                <a:latin typeface="Montserrat" panose="00000500000000000000" pitchFamily="2" charset="-18"/>
-              </a:rPr>
-              <a:t>, </a:t>
-            </a:r>
-            <a:r>
-              <a:rPr lang="hu-HU" sz="1200" dirty="0" err="1">
-                <a:latin typeface="Montserrat" panose="00000500000000000000" pitchFamily="2" charset="-18"/>
-              </a:rPr>
-              <a:t>ac</a:t>
-            </a:r>
-            <a:r>
-              <a:rPr lang="hu-HU" sz="1200" dirty="0">
-                <a:latin typeface="Montserrat" panose="00000500000000000000" pitchFamily="2" charset="-18"/>
-              </a:rPr>
-              <a:t> </a:t>
-            </a:r>
-            <a:r>
-              <a:rPr lang="hu-HU" sz="1200" dirty="0" err="1">
-                <a:latin typeface="Montserrat" panose="00000500000000000000" pitchFamily="2" charset="-18"/>
-              </a:rPr>
-              <a:t>lacinia</a:t>
-            </a:r>
-            <a:r>
-              <a:rPr lang="hu-HU" sz="1200" dirty="0">
-                <a:latin typeface="Montserrat" panose="00000500000000000000" pitchFamily="2" charset="-18"/>
-              </a:rPr>
-              <a:t> </a:t>
-            </a:r>
-            <a:r>
-              <a:rPr lang="hu-HU" sz="1200" dirty="0" err="1">
-                <a:latin typeface="Montserrat" panose="00000500000000000000" pitchFamily="2" charset="-18"/>
-              </a:rPr>
-              <a:t>velit</a:t>
-            </a:r>
-            <a:r>
-              <a:rPr lang="hu-HU" sz="1200" dirty="0">
-                <a:latin typeface="Montserrat" panose="00000500000000000000" pitchFamily="2" charset="-18"/>
-              </a:rPr>
-              <a:t> </a:t>
-            </a:r>
-            <a:r>
-              <a:rPr lang="hu-HU" sz="1200" dirty="0" err="1">
-                <a:latin typeface="Montserrat" panose="00000500000000000000" pitchFamily="2" charset="-18"/>
-              </a:rPr>
-              <a:t>volutpat</a:t>
-            </a:r>
-            <a:r>
-              <a:rPr lang="hu-HU" sz="1200" dirty="0">
-                <a:latin typeface="Montserrat" panose="00000500000000000000" pitchFamily="2" charset="-18"/>
-              </a:rPr>
-              <a:t>. Nullam </a:t>
-            </a:r>
-            <a:r>
-              <a:rPr lang="hu-HU" sz="1200" dirty="0" err="1">
-                <a:latin typeface="Montserrat" panose="00000500000000000000" pitchFamily="2" charset="-18"/>
-              </a:rPr>
-              <a:t>sit</a:t>
-            </a:r>
-            <a:r>
-              <a:rPr lang="hu-HU" sz="1200" dirty="0">
-                <a:latin typeface="Montserrat" panose="00000500000000000000" pitchFamily="2" charset="-18"/>
-              </a:rPr>
-              <a:t> </a:t>
-            </a:r>
-            <a:r>
-              <a:rPr lang="hu-HU" sz="1200" dirty="0" err="1">
-                <a:latin typeface="Montserrat" panose="00000500000000000000" pitchFamily="2" charset="-18"/>
-              </a:rPr>
-              <a:t>amet</a:t>
-            </a:r>
-            <a:r>
-              <a:rPr lang="hu-HU" sz="1200" dirty="0">
-                <a:latin typeface="Montserrat" panose="00000500000000000000" pitchFamily="2" charset="-18"/>
-              </a:rPr>
-              <a:t> </a:t>
-            </a:r>
-            <a:r>
-              <a:rPr lang="hu-HU" sz="1200" dirty="0" err="1">
-                <a:latin typeface="Montserrat" panose="00000500000000000000" pitchFamily="2" charset="-18"/>
-              </a:rPr>
-              <a:t>iaculis</a:t>
-            </a:r>
-            <a:r>
-              <a:rPr lang="hu-HU" sz="1200" dirty="0">
-                <a:latin typeface="Montserrat" panose="00000500000000000000" pitchFamily="2" charset="-18"/>
-              </a:rPr>
-              <a:t> </a:t>
-            </a:r>
-            <a:r>
-              <a:rPr lang="hu-HU" sz="1200" dirty="0" err="1">
-                <a:latin typeface="Montserrat" panose="00000500000000000000" pitchFamily="2" charset="-18"/>
-              </a:rPr>
-              <a:t>nunc</a:t>
-            </a:r>
-            <a:r>
-              <a:rPr lang="hu-HU" sz="1200" dirty="0">
-                <a:latin typeface="Montserrat" panose="00000500000000000000" pitchFamily="2" charset="-18"/>
-              </a:rPr>
-              <a:t>. </a:t>
-            </a:r>
-            <a:r>
-              <a:rPr lang="hu-HU" sz="1200" dirty="0" err="1">
-                <a:latin typeface="Montserrat" panose="00000500000000000000" pitchFamily="2" charset="-18"/>
-              </a:rPr>
-              <a:t>Aenean</a:t>
-            </a:r>
-            <a:r>
-              <a:rPr lang="hu-HU" sz="1200" dirty="0">
-                <a:latin typeface="Montserrat" panose="00000500000000000000" pitchFamily="2" charset="-18"/>
-              </a:rPr>
-              <a:t> vitae </a:t>
-            </a:r>
-            <a:r>
-              <a:rPr lang="hu-HU" sz="1200" dirty="0" err="1">
-                <a:latin typeface="Montserrat" panose="00000500000000000000" pitchFamily="2" charset="-18"/>
-              </a:rPr>
-              <a:t>lorem</a:t>
-            </a:r>
-            <a:r>
-              <a:rPr lang="hu-HU" sz="1200" dirty="0">
-                <a:latin typeface="Montserrat" panose="00000500000000000000" pitchFamily="2" charset="-18"/>
-              </a:rPr>
-              <a:t> </a:t>
-            </a:r>
-            <a:r>
-              <a:rPr lang="hu-HU" sz="1200" dirty="0" err="1">
-                <a:latin typeface="Montserrat" panose="00000500000000000000" pitchFamily="2" charset="-18"/>
-              </a:rPr>
-              <a:t>pellentesque</a:t>
-            </a:r>
-            <a:r>
-              <a:rPr lang="hu-HU" sz="1200" dirty="0">
-                <a:latin typeface="Montserrat" panose="00000500000000000000" pitchFamily="2" charset="-18"/>
-              </a:rPr>
-              <a:t>, </a:t>
-            </a:r>
-            <a:r>
-              <a:rPr lang="hu-HU" sz="1200" dirty="0" err="1">
-                <a:latin typeface="Montserrat" panose="00000500000000000000" pitchFamily="2" charset="-18"/>
-              </a:rPr>
-              <a:t>egestas</a:t>
-            </a:r>
-            <a:r>
-              <a:rPr lang="hu-HU" sz="1200" dirty="0">
-                <a:latin typeface="Montserrat" panose="00000500000000000000" pitchFamily="2" charset="-18"/>
-              </a:rPr>
-              <a:t> mi </a:t>
-            </a:r>
-            <a:r>
-              <a:rPr lang="hu-HU" sz="1200" dirty="0" err="1">
-                <a:latin typeface="Montserrat" panose="00000500000000000000" pitchFamily="2" charset="-18"/>
-              </a:rPr>
-              <a:t>at</a:t>
-            </a:r>
-            <a:r>
-              <a:rPr lang="hu-HU" sz="1200" dirty="0">
-                <a:latin typeface="Montserrat" panose="00000500000000000000" pitchFamily="2" charset="-18"/>
-              </a:rPr>
-              <a:t>, </a:t>
-            </a:r>
-            <a:r>
-              <a:rPr lang="hu-HU" sz="1200" dirty="0" err="1">
-                <a:latin typeface="Montserrat" panose="00000500000000000000" pitchFamily="2" charset="-18"/>
-              </a:rPr>
-              <a:t>egestas</a:t>
-            </a:r>
-            <a:r>
-              <a:rPr lang="hu-HU" sz="1200" dirty="0">
-                <a:latin typeface="Montserrat" panose="00000500000000000000" pitchFamily="2" charset="-18"/>
-              </a:rPr>
-              <a:t> </a:t>
-            </a:r>
-            <a:r>
-              <a:rPr lang="hu-HU" sz="1200" dirty="0" err="1">
-                <a:latin typeface="Montserrat" panose="00000500000000000000" pitchFamily="2" charset="-18"/>
-              </a:rPr>
-              <a:t>augue</a:t>
-            </a:r>
-            <a:r>
-              <a:rPr lang="hu-HU" sz="1200" dirty="0">
-                <a:latin typeface="Montserrat" panose="00000500000000000000" pitchFamily="2" charset="-18"/>
-              </a:rPr>
-              <a:t>.</a:t>
-            </a:r>
-          </a:p>
-          <a:p>
-            <a:pPr marL="0" indent="0" algn="just">
-              <a:buNone/>
-            </a:pPr>
+              <a:t> in the first half of the twentieth century. In 2018 Montserrat Font became the official font for documentation, presentations and publicity for the Government of Mexico and since 2021 has been Puerto Rico’s official typeface for body text and its agency’s logos.</a:t>
+            </a:r>
             <a:endParaRPr lang="hu-HU" sz="1200" dirty="0">
               <a:solidFill>
                 <a:srgbClr val="00FFFF"/>
               </a:solidFill>
-              <a:latin typeface="Montserrat" panose="00000500000000000000" pitchFamily="2" charset="-18"/>
+              <a:latin typeface="Monsterrrat"/>
             </a:endParaRPr>
           </a:p>
           <a:p>
@@ -5708,7 +4629,7 @@
                 </a:solidFill>
                 <a:latin typeface="Montserrat" panose="00000500000000000000" pitchFamily="2" charset="-18"/>
               </a:rPr>
-              <a:t>https://www.hivatkozasminta.hu</a:t>
+              <a:t>https://fontandswatch.com.au/resources/montserrat-font/</a:t>
             </a:r>
           </a:p>
         </p:txBody>
@@ -8495,7 +7416,7 @@
                                     </p:set>
                                     <p:anim calcmode="lin" valueType="num">
                                       <p:cBhvr additive="base">
-                                        <p:cTn id="7" dur="750" fill="hold"/>
+                                        <p:cTn id="7" dur="500" fill="hold"/>
                                         <p:tgtEl>
                                           <p:spTgt spid="95"/>
                                         </p:tgtEl>
@@ -8518,7 +7439,7 @@
                                     </p:anim>
                                     <p:anim calcmode="lin" valueType="num">
                                       <p:cBhvr additive="base">
-                                        <p:cTn id="8" dur="750" fill="hold"/>
+                                        <p:cTn id="8" dur="500" fill="hold"/>
                                         <p:tgtEl>
                                           <p:spTgt spid="95"/>
                                         </p:tgtEl>
@@ -8568,7 +7489,7 @@
                                     </p:set>
                                     <p:anim calcmode="lin" valueType="num">
                                       <p:cBhvr additive="base">
-                                        <p:cTn id="11" dur="750" fill="hold"/>
+                                        <p:cTn id="11" dur="500" fill="hold"/>
                                         <p:tgtEl>
                                           <p:spTgt spid="96"/>
                                         </p:tgtEl>
@@ -8591,7 +7512,7 @@
                                     </p:anim>
                                     <p:anim calcmode="lin" valueType="num">
                                       <p:cBhvr additive="base">
-                                        <p:cTn id="12" dur="750" fill="hold"/>
+                                        <p:cTn id="12" dur="500" fill="hold"/>
                                         <p:tgtEl>
                                           <p:spTgt spid="96"/>
                                         </p:tgtEl>
@@ -8803,7 +7724,7 @@
                                     </p:set>
                                     <p:anim calcmode="lin" valueType="num">
                                       <p:cBhvr additive="base">
-                                        <p:cTn id="25" dur="750" fill="hold"/>
+                                        <p:cTn id="25" dur="500" fill="hold"/>
                                         <p:tgtEl>
                                           <p:spTgt spid="99"/>
                                         </p:tgtEl>
@@ -8826,7 +7747,7 @@
                                     </p:anim>
                                     <p:anim calcmode="lin" valueType="num">
                                       <p:cBhvr additive="base">
-                                        <p:cTn id="26" dur="750" fill="hold"/>
+                                        <p:cTn id="26" dur="500" fill="hold"/>
                                         <p:tgtEl>
                                           <p:spTgt spid="99"/>
                                         </p:tgtEl>
@@ -8876,7 +7797,7 @@
                                     </p:set>
                                     <p:anim calcmode="lin" valueType="num">
                                       <p:cBhvr additive="base">
-                                        <p:cTn id="29" dur="750" fill="hold"/>
+                                        <p:cTn id="29" dur="500" fill="hold"/>
                                         <p:tgtEl>
                                           <p:spTgt spid="93"/>
                                         </p:tgtEl>
@@ -8899,7 +7820,7 @@
                                     </p:anim>
                                     <p:anim calcmode="lin" valueType="num">
                                       <p:cBhvr additive="base">
-                                        <p:cTn id="30" dur="750" fill="hold"/>
+                                        <p:cTn id="30" dur="500" fill="hold"/>
                                         <p:tgtEl>
                                           <p:spTgt spid="93"/>
                                         </p:tgtEl>
@@ -8984,7 +7905,7 @@
                                     </p:set>
                                     <p:anim calcmode="lin" valueType="num">
                                       <p:cBhvr additive="base">
-                                        <p:cTn id="36" dur="750" fill="hold"/>
+                                        <p:cTn id="36" dur="500" fill="hold"/>
                                         <p:tgtEl>
                                           <p:spTgt spid="92"/>
                                         </p:tgtEl>
@@ -9007,7 +7928,7 @@
                                     </p:anim>
                                     <p:anim calcmode="lin" valueType="num">
                                       <p:cBhvr additive="base">
-                                        <p:cTn id="37" dur="750" fill="hold"/>
+                                        <p:cTn id="37" dur="500" fill="hold"/>
                                         <p:tgtEl>
                                           <p:spTgt spid="92"/>
                                         </p:tgtEl>
@@ -9057,7 +7978,7 @@
                                     </p:set>
                                     <p:anim calcmode="lin" valueType="num">
                                       <p:cBhvr additive="base">
-                                        <p:cTn id="40" dur="750" fill="hold"/>
+                                        <p:cTn id="40" dur="500" fill="hold"/>
                                         <p:tgtEl>
                                           <p:spTgt spid="91"/>
                                         </p:tgtEl>
@@ -9080,7 +8001,7 @@
                                     </p:anim>
                                     <p:anim calcmode="lin" valueType="num">
                                       <p:cBhvr additive="base">
-                                        <p:cTn id="41" dur="750" fill="hold"/>
+                                        <p:cTn id="41" dur="500" fill="hold"/>
                                         <p:tgtEl>
                                           <p:spTgt spid="91"/>
                                         </p:tgtEl>
@@ -9110,7 +8031,7 @@
                         <p:par>
                           <p:cTn id="42" fill="hold">
                             <p:stCondLst>
-                              <p:cond delay="2400"/>
+                              <p:cond delay="2150"/>
                             </p:stCondLst>
                             <p:childTnLst>
                               <p:par>
@@ -9139,7 +8060,7 @@
                                     </p:set>
                                     <p:anim calcmode="lin" valueType="num">
                                       <p:cBhvr additive="base">
-                                        <p:cTn id="45" dur="750" fill="hold"/>
+                                        <p:cTn id="45" dur="500" fill="hold"/>
                                         <p:tgtEl>
                                           <p:spTgt spid="89"/>
                                         </p:tgtEl>
@@ -9162,7 +8083,7 @@
                                     </p:anim>
                                     <p:anim calcmode="lin" valueType="num">
                                       <p:cBhvr additive="base">
-                                        <p:cTn id="46" dur="750" fill="hold"/>
+                                        <p:cTn id="46" dur="500" fill="hold"/>
                                         <p:tgtEl>
                                           <p:spTgt spid="89"/>
                                         </p:tgtEl>
@@ -9247,7 +8168,7 @@
                                     </p:set>
                                     <p:anim calcmode="lin" valueType="num">
                                       <p:cBhvr additive="base">
-                                        <p:cTn id="52" dur="750" fill="hold"/>
+                                        <p:cTn id="52" dur="500" fill="hold"/>
                                         <p:tgtEl>
                                           <p:spTgt spid="28"/>
                                         </p:tgtEl>
@@ -9270,7 +8191,7 @@
                                     </p:anim>
                                     <p:anim calcmode="lin" valueType="num">
                                       <p:cBhvr additive="base">
-                                        <p:cTn id="53" dur="750" fill="hold"/>
+                                        <p:cTn id="53" dur="500" fill="hold"/>
                                         <p:tgtEl>
                                           <p:spTgt spid="28"/>
                                         </p:tgtEl>
@@ -9320,7 +8241,7 @@
                                     </p:set>
                                     <p:anim calcmode="lin" valueType="num">
                                       <p:cBhvr additive="base">
-                                        <p:cTn id="56" dur="750" fill="hold"/>
+                                        <p:cTn id="56" dur="500" fill="hold"/>
                                         <p:tgtEl>
                                           <p:spTgt spid="27"/>
                                         </p:tgtEl>
@@ -9343,7 +8264,7 @@
                                     </p:anim>
                                     <p:anim calcmode="lin" valueType="num">
                                       <p:cBhvr additive="base">
-                                        <p:cTn id="57" dur="750" fill="hold"/>
+                                        <p:cTn id="57" dur="500" fill="hold"/>
                                         <p:tgtEl>
                                           <p:spTgt spid="27"/>
                                         </p:tgtEl>
@@ -9373,7 +8294,7 @@
                         <p:par>
                           <p:cTn id="58" fill="hold">
                             <p:stCondLst>
-                              <p:cond delay="3800"/>
+                              <p:cond delay="3300"/>
                             </p:stCondLst>
                             <p:childTnLst>
                               <p:par>
@@ -9402,7 +8323,7 @@
                                     </p:set>
                                     <p:anim calcmode="lin" valueType="num">
                                       <p:cBhvr additive="base">
-                                        <p:cTn id="61" dur="750" fill="hold"/>
+                                        <p:cTn id="61" dur="500" fill="hold"/>
                                         <p:tgtEl>
                                           <p:spTgt spid="81"/>
                                         </p:tgtEl>
@@ -9425,7 +8346,7 @@
                                     </p:anim>
                                     <p:anim calcmode="lin" valueType="num">
                                       <p:cBhvr additive="base">
-                                        <p:cTn id="62" dur="750" fill="hold"/>
+                                        <p:cTn id="62" dur="500" fill="hold"/>
                                         <p:tgtEl>
                                           <p:spTgt spid="81"/>
                                         </p:tgtEl>
@@ -9510,7 +8431,7 @@
                                     </p:set>
                                     <p:anim calcmode="lin" valueType="num">
                                       <p:cBhvr additive="base">
-                                        <p:cTn id="68" dur="750" fill="hold"/>
+                                        <p:cTn id="68" dur="500" fill="hold"/>
                                         <p:tgtEl>
                                           <p:spTgt spid="40"/>
                                         </p:tgtEl>
@@ -9533,7 +8454,7 @@
                                     </p:anim>
                                     <p:anim calcmode="lin" valueType="num">
                                       <p:cBhvr additive="base">
-                                        <p:cTn id="69" dur="750" fill="hold"/>
+                                        <p:cTn id="69" dur="500" fill="hold"/>
                                         <p:tgtEl>
                                           <p:spTgt spid="40"/>
                                         </p:tgtEl>
@@ -9583,7 +8504,7 @@
                                     </p:set>
                                     <p:anim calcmode="lin" valueType="num">
                                       <p:cBhvr additive="base">
-                                        <p:cTn id="72" dur="750" fill="hold"/>
+                                        <p:cTn id="72" dur="500" fill="hold"/>
                                         <p:tgtEl>
                                           <p:spTgt spid="39"/>
                                         </p:tgtEl>
@@ -9606,7 +8527,7 @@
                                     </p:anim>
                                     <p:anim calcmode="lin" valueType="num">
                                       <p:cBhvr additive="base">
-                                        <p:cTn id="73" dur="750" fill="hold"/>
+                                        <p:cTn id="73" dur="500" fill="hold"/>
                                         <p:tgtEl>
                                           <p:spTgt spid="39"/>
                                         </p:tgtEl>
@@ -9636,7 +8557,7 @@
                         <p:par>
                           <p:cTn id="74" fill="hold">
                             <p:stCondLst>
-                              <p:cond delay="5200"/>
+                              <p:cond delay="4450"/>
                             </p:stCondLst>
                             <p:childTnLst>
                               <p:par>
@@ -9665,7 +8586,7 @@
                                     </p:set>
                                     <p:anim calcmode="lin" valueType="num">
                                       <p:cBhvr additive="base">
-                                        <p:cTn id="77" dur="750" fill="hold"/>
+                                        <p:cTn id="77" dur="500" fill="hold"/>
                                         <p:tgtEl>
                                           <p:spTgt spid="85"/>
                                         </p:tgtEl>
@@ -9688,7 +8609,7 @@
                                     </p:anim>
                                     <p:anim calcmode="lin" valueType="num">
                                       <p:cBhvr additive="base">
-                                        <p:cTn id="78" dur="750" fill="hold"/>
+                                        <p:cTn id="78" dur="500" fill="hold"/>
                                         <p:tgtEl>
                                           <p:spTgt spid="85"/>
                                         </p:tgtEl>
@@ -9773,7 +8694,7 @@
                                     </p:set>
                                     <p:anim calcmode="lin" valueType="num">
                                       <p:cBhvr additive="base">
-                                        <p:cTn id="84" dur="750" fill="hold"/>
+                                        <p:cTn id="84" dur="500" fill="hold"/>
                                         <p:tgtEl>
                                           <p:spTgt spid="43"/>
                                         </p:tgtEl>
@@ -9796,7 +8717,7 @@
                                     </p:anim>
                                     <p:anim calcmode="lin" valueType="num">
                                       <p:cBhvr additive="base">
-                                        <p:cTn id="85" dur="750" fill="hold"/>
+                                        <p:cTn id="85" dur="500" fill="hold"/>
                                         <p:tgtEl>
                                           <p:spTgt spid="43"/>
                                         </p:tgtEl>
@@ -9846,7 +8767,7 @@
                                     </p:set>
                                     <p:anim calcmode="lin" valueType="num">
                                       <p:cBhvr additive="base">
-                                        <p:cTn id="88" dur="750" fill="hold"/>
+                                        <p:cTn id="88" dur="500" fill="hold"/>
                                         <p:tgtEl>
                                           <p:spTgt spid="42"/>
                                         </p:tgtEl>
@@ -9869,7 +8790,7 @@
                                     </p:anim>
                                     <p:anim calcmode="lin" valueType="num">
                                       <p:cBhvr additive="base">
-                                        <p:cTn id="89" dur="750" fill="hold"/>
+                                        <p:cTn id="89" dur="500" fill="hold"/>
                                         <p:tgtEl>
                                           <p:spTgt spid="42"/>
                                         </p:tgtEl>
@@ -10002,10 +8923,10 @@
       </p:sp>
       <p:pic>
         <p:nvPicPr>
-          <p:cNvPr id="7" name="Kép 6">
-            <a:extLst>
-              <a:ext uri="{FF2B5EF4-FFF2-40B4-BE49-F238E27FC236}">
-                <a16:creationId xmlns:a16="http://schemas.microsoft.com/office/drawing/2014/main" id="{F4C608AC-6F66-3610-3B61-0811CC976258}"/>
+          <p:cNvPr id="4" name="Kép 3" descr="A képen képernyőkép, sor, Diagram, szöveg látható&#10;&#10;Előfordulhat, hogy az AI által létrehozott tartalom helytelen.">
+            <a:extLst>
+              <a:ext uri="{FF2B5EF4-FFF2-40B4-BE49-F238E27FC236}">
+                <a16:creationId xmlns:a16="http://schemas.microsoft.com/office/drawing/2014/main" id="{D915E45D-55EC-C631-24A3-FF4754CA5887}"/>
               </a:ext>
             </a:extLst>
           </p:cNvPr>
@@ -10015,15 +8936,21 @@
           <p:nvPr/>
         </p:nvPicPr>
         <p:blipFill>
-          <a:blip r:embed="rId2"/>
+          <a:blip r:embed="rId2">
+            <a:extLst>
+              <a:ext uri="{28A0092B-C50C-407E-A947-70E740481C1C}">
+                <a14:useLocalDpi xmlns:a14="http://schemas.microsoft.com/office/drawing/2010/main" val="0"/>
+              </a:ext>
+            </a:extLst>
+          </a:blip>
           <a:stretch>
             <a:fillRect/>
           </a:stretch>
         </p:blipFill>
         <p:spPr>
           <a:xfrm>
-            <a:off x="284408" y="2818561"/>
-            <a:ext cx="11623183" cy="2586038"/>
+            <a:off x="0" y="2743571"/>
+            <a:ext cx="12192000" cy="3416403"/>
           </a:xfrm>
           <a:prstGeom prst="rect">
             <a:avLst/>
@@ -10243,7 +9170,7 @@
         </p:nvSpPr>
         <p:spPr>
           <a:xfrm>
-            <a:off x="5996856" y="1551905"/>
+            <a:off x="5996855" y="1410237"/>
             <a:ext cx="5306095" cy="5306095"/>
           </a:xfrm>
           <a:prstGeom prst="ellipse">
@@ -10346,7 +9273,7 @@
         </p:blipFill>
         <p:spPr>
           <a:xfrm>
-            <a:off x="5220903" y="775952"/>
+            <a:off x="5220902" y="634284"/>
             <a:ext cx="6858000" cy="6858000"/>
           </a:xfrm>
           <a:prstGeom prst="rect">
@@ -12087,6 +11014,184 @@
             <a:endParaRPr lang="hu-HU" b="1" dirty="0">
               <a:latin typeface="Montserrat" panose="00000500000000000000" pitchFamily="2" charset="-18"/>
             </a:endParaRPr>
+          </a:p>
+        </p:txBody>
+      </p:sp>
+      <p:sp>
+        <p:nvSpPr>
+          <p:cNvPr id="3" name="Jobb oldali kapcsos zárójel 2">
+            <a:extLst>
+              <a:ext uri="{FF2B5EF4-FFF2-40B4-BE49-F238E27FC236}">
+                <a16:creationId xmlns:a16="http://schemas.microsoft.com/office/drawing/2014/main" id="{AC372FEC-86BA-927D-A122-F39935F003B5}"/>
+              </a:ext>
+            </a:extLst>
+          </p:cNvPr>
+          <p:cNvSpPr/>
+          <p:nvPr/>
+        </p:nvSpPr>
+        <p:spPr>
+          <a:xfrm rot="5400000">
+            <a:off x="2781352" y="3628546"/>
+            <a:ext cx="618864" cy="3117754"/>
+          </a:xfrm>
+          <a:prstGeom prst="rightBrace">
+            <a:avLst/>
+          </a:prstGeom>
+          <a:solidFill>
+            <a:schemeClr val="bg1"/>
+          </a:solidFill>
+          <a:ln>
+            <a:solidFill>
+              <a:schemeClr val="tx1"/>
+            </a:solidFill>
+          </a:ln>
+        </p:spPr>
+        <p:style>
+          <a:lnRef idx="1">
+            <a:schemeClr val="accent1"/>
+          </a:lnRef>
+          <a:fillRef idx="0">
+            <a:schemeClr val="accent1"/>
+          </a:fillRef>
+          <a:effectRef idx="0">
+            <a:schemeClr val="accent1"/>
+          </a:effectRef>
+          <a:fontRef idx="minor">
+            <a:schemeClr val="tx1"/>
+          </a:fontRef>
+        </p:style>
+        <p:txBody>
+          <a:bodyPr rtlCol="0" anchor="ctr"/>
+          <a:lstStyle/>
+          <a:p>
+            <a:pPr algn="ctr"/>
+            <a:endParaRPr lang="hu-HU" dirty="0"/>
+          </a:p>
+        </p:txBody>
+      </p:sp>
+      <p:sp>
+        <p:nvSpPr>
+          <p:cNvPr id="19" name="Szövegdoboz 18">
+            <a:extLst>
+              <a:ext uri="{FF2B5EF4-FFF2-40B4-BE49-F238E27FC236}">
+                <a16:creationId xmlns:a16="http://schemas.microsoft.com/office/drawing/2014/main" id="{9670664B-5467-1E6B-40E2-2966D641B22A}"/>
+              </a:ext>
+            </a:extLst>
+          </p:cNvPr>
+          <p:cNvSpPr txBox="1"/>
+          <p:nvPr/>
+        </p:nvSpPr>
+        <p:spPr>
+          <a:xfrm>
+            <a:off x="2366347" y="5827690"/>
+            <a:ext cx="1448873" cy="369332"/>
+          </a:xfrm>
+          <a:prstGeom prst="rect">
+            <a:avLst/>
+          </a:prstGeom>
+          <a:noFill/>
+        </p:spPr>
+        <p:txBody>
+          <a:bodyPr wrap="square" rtlCol="0">
+            <a:spAutoFit/>
+          </a:bodyPr>
+          <a:lstStyle/>
+          <a:p>
+            <a:r>
+              <a:rPr lang="hu-HU" b="1" dirty="0">
+                <a:latin typeface="Monsterrat"/>
+              </a:rPr>
+              <a:t>Háttérszínek</a:t>
+            </a:r>
+          </a:p>
+        </p:txBody>
+      </p:sp>
+      <p:sp>
+        <p:nvSpPr>
+          <p:cNvPr id="20" name="Jobb oldali kapcsos zárójel 19">
+            <a:extLst>
+              <a:ext uri="{FF2B5EF4-FFF2-40B4-BE49-F238E27FC236}">
+                <a16:creationId xmlns:a16="http://schemas.microsoft.com/office/drawing/2014/main" id="{9072AD06-BD28-E012-D9C5-AD628759C6AF}"/>
+              </a:ext>
+            </a:extLst>
+          </p:cNvPr>
+          <p:cNvSpPr/>
+          <p:nvPr/>
+        </p:nvSpPr>
+        <p:spPr>
+          <a:xfrm rot="5400000">
+            <a:off x="7744544" y="2365191"/>
+            <a:ext cx="618864" cy="5644463"/>
+          </a:xfrm>
+          <a:prstGeom prst="rightBrace">
+            <a:avLst/>
+          </a:prstGeom>
+          <a:solidFill>
+            <a:schemeClr val="bg1"/>
+          </a:solidFill>
+          <a:ln>
+            <a:solidFill>
+              <a:schemeClr val="tx1"/>
+            </a:solidFill>
+          </a:ln>
+        </p:spPr>
+        <p:style>
+          <a:lnRef idx="1">
+            <a:schemeClr val="accent1"/>
+          </a:lnRef>
+          <a:fillRef idx="0">
+            <a:schemeClr val="accent1"/>
+          </a:fillRef>
+          <a:effectRef idx="0">
+            <a:schemeClr val="accent1"/>
+          </a:effectRef>
+          <a:fontRef idx="minor">
+            <a:schemeClr val="tx1"/>
+          </a:fontRef>
+        </p:style>
+        <p:txBody>
+          <a:bodyPr rtlCol="0" anchor="ctr"/>
+          <a:lstStyle/>
+          <a:p>
+            <a:pPr algn="ctr"/>
+            <a:endParaRPr lang="hu-HU" dirty="0"/>
+          </a:p>
+        </p:txBody>
+      </p:sp>
+      <p:sp>
+        <p:nvSpPr>
+          <p:cNvPr id="21" name="Szövegdoboz 20">
+            <a:extLst>
+              <a:ext uri="{FF2B5EF4-FFF2-40B4-BE49-F238E27FC236}">
+                <a16:creationId xmlns:a16="http://schemas.microsoft.com/office/drawing/2014/main" id="{5DBAC063-BB45-228E-7AA7-555ADBC70352}"/>
+              </a:ext>
+            </a:extLst>
+          </p:cNvPr>
+          <p:cNvSpPr txBox="1"/>
+          <p:nvPr/>
+        </p:nvSpPr>
+        <p:spPr>
+          <a:xfrm>
+            <a:off x="7575608" y="5808372"/>
+            <a:ext cx="1047741" cy="369332"/>
+          </a:xfrm>
+          <a:prstGeom prst="rect">
+            <a:avLst/>
+          </a:prstGeom>
+          <a:noFill/>
+        </p:spPr>
+        <p:txBody>
+          <a:bodyPr wrap="square" rtlCol="0">
+            <a:spAutoFit/>
+          </a:bodyPr>
+          <a:lstStyle/>
+          <a:p>
+            <a:r>
+              <a:rPr lang="hu-HU" b="1" dirty="0">
+                <a:latin typeface="Monsterrat"/>
+              </a:rPr>
+              <a:t>Fő színek</a:t>
+            </a:r>
           </a:p>
         </p:txBody>
       </p:sp>
